--- a/semdial-2025/poster.pptx
+++ b/semdial-2025/poster.pptx
@@ -1,26 +1,67 @@
 
 <file path=ppt/presentation.xml><?xml version="1.0" encoding="utf-8"?>
-<p:presentation xmlns:a="http://schemas.openxmlformats.org/drawingml/2006/main" xmlns:r="http://schemas.openxmlformats.org/officeDocument/2006/relationships" xmlns:p="http://schemas.openxmlformats.org/presentationml/2006/main" xmlns:m="http://schemas.openxmlformats.org/officeDocument/2006/math" xmlns:w="http://schemas.openxmlformats.org/wordprocessingml/2006/main">
+<p:presentation xmlns:a="http://schemas.openxmlformats.org/drawingml/2006/main" xmlns:r="http://schemas.openxmlformats.org/officeDocument/2006/relationships" xmlns:p="http://schemas.openxmlformats.org/presentationml/2006/main">
   <p:sldMasterIdLst>
     <p:sldMasterId id="2147483648" r:id="rId1"/>
   </p:sldMasterIdLst>
   <p:notesMasterIdLst>
-    <p:notesMasterId r:id="rId5"/>
+    <p:notesMasterId r:id="rId3"/>
   </p:notesMasterIdLst>
   <p:sldIdLst>
-    <p:sldId id="256" r:id="rId4"/>
+    <p:sldId id="256" r:id="rId2"/>
   </p:sldIdLst>
-  <p:sldSz cx="30274092" cy="42801303" type="custom"/>
+  <p:sldSz cx="30273625" cy="42800588"/>
   <p:notesSz cx="6858000" cy="9144000"/>
   <p:defaultTextStyle>
     <a:defPPr/>
   </p:defaultTextStyle>
+  <p:extLst>
+    <p:ext uri="{EFAFB233-063F-42B5-8137-9DF3F51BA10A}">
+      <p15:sldGuideLst xmlns:p15="http://schemas.microsoft.com/office/powerpoint/2012/main">
+        <p15:guide id="1" pos="9535">
+          <p15:clr>
+            <a:srgbClr val="A4A3A4"/>
+          </p15:clr>
+        </p15:guide>
+        <p15:guide id="2" orient="horz" pos="13480">
+          <p15:clr>
+            <a:srgbClr val="A4A3A4"/>
+          </p15:clr>
+        </p15:guide>
+        <p15:guide id="3" pos="6626">
+          <p15:clr>
+            <a:srgbClr val="A4A3A4"/>
+          </p15:clr>
+        </p15:guide>
+        <p15:guide id="4" pos="12434">
+          <p15:clr>
+            <a:srgbClr val="A4A3A4"/>
+          </p15:clr>
+        </p15:guide>
+        <p15:guide id="5" pos="794">
+          <p15:clr>
+            <a:srgbClr val="A4A3A4"/>
+          </p15:clr>
+        </p15:guide>
+        <p15:guide id="6" pos="18290">
+          <p15:clr>
+            <a:srgbClr val="A4A3A4"/>
+          </p15:clr>
+        </p15:guide>
+      </p15:sldGuideLst>
+    </p:ext>
+  </p:extLst>
 </p:presentation>
 </file>
 
 <file path=ppt/notesMasters/notesMaster1.xml><?xml version="1.0" encoding="utf-8"?>
 <p:notesMaster xmlns:a="http://schemas.openxmlformats.org/drawingml/2006/main" xmlns:r="http://schemas.openxmlformats.org/officeDocument/2006/relationships" xmlns:p="http://schemas.openxmlformats.org/presentationml/2006/main">
-  <p:cSld name="">
+  <p:cSld>
+    <p:bg>
+      <p:bgRef idx="1001">
+        <a:schemeClr val="bg1"/>
+      </p:bgRef>
+    </p:bg>
     <p:spTree>
       <p:nvGrpSpPr>
         <p:cNvPr id="1" name=""/>
@@ -43,8 +84,8 @@
 </file>
 
 <file path=ppt/notesSlides/notesSlide1.xml><?xml version="1.0" encoding="utf-8"?>
-<p:notes xmlns:a="http://schemas.openxmlformats.org/drawingml/2006/main" xmlns:r="http://schemas.openxmlformats.org/officeDocument/2006/relationships" xmlns:p="http://schemas.openxmlformats.org/presentationml/2006/main" xmlns:m="http://schemas.openxmlformats.org/officeDocument/2006/math" xmlns:w="http://schemas.openxmlformats.org/wordprocessingml/2006/main">
-  <p:cSld name="">
+<p:notes xmlns:a="http://schemas.openxmlformats.org/drawingml/2006/main" xmlns:r="http://schemas.openxmlformats.org/officeDocument/2006/relationships" xmlns:p="http://schemas.openxmlformats.org/presentationml/2006/main">
+  <p:cSld>
     <p:spTree>
       <p:nvGrpSpPr>
         <p:cNvPr id="1" name=""/>
@@ -61,8 +102,10 @@
       </p:grpSpPr>
       <p:sp>
         <p:nvSpPr>
-          <p:cNvPr id="1494624700" name=""/>
-          <p:cNvSpPr txBox="1"/>
+          <p:cNvPr id="1494624700" name="Notizenplatzhalter 1494624699"/>
+          <p:cNvSpPr txBox="1">
+            <a:spLocks noGrp="1"/>
+          </p:cNvSpPr>
           <p:nvPr>
             <p:ph type="body" idx="4294967295"/>
           </p:nvPr>
@@ -85,6 +128,7 @@
           <a:bodyPr anchor="t">
             <a:spAutoFit/>
           </a:bodyPr>
+          <a:lstStyle/>
           <a:p>
             <a:pPr>
               <a:defRPr/>
@@ -102,7 +146,7 @@
 </file>
 
 <file path=ppt/slideLayouts/slideLayout1.xml><?xml version="1.0" encoding="utf-8"?>
-<p:sldLayout xmlns:a="http://schemas.openxmlformats.org/drawingml/2006/main" xmlns:r="http://schemas.openxmlformats.org/officeDocument/2006/relationships" xmlns:p="http://schemas.openxmlformats.org/presentationml/2006/main" xmlns:m="http://schemas.openxmlformats.org/officeDocument/2006/math" xmlns:w="http://schemas.openxmlformats.org/wordprocessingml/2006/main" matchingName="" preserve="0" showMasterPhAnim="0" showMasterSp="1" userDrawn="1">
+<p:sldLayout xmlns:a="http://schemas.openxmlformats.org/drawingml/2006/main" xmlns:r="http://schemas.openxmlformats.org/officeDocument/2006/relationships" xmlns:p="http://schemas.openxmlformats.org/presentationml/2006/main" showMasterPhAnim="0" userDrawn="1">
   <p:cSld name="Standard">
     <p:spTree>
       <p:nvGrpSpPr>
@@ -121,7 +165,9 @@
       <p:sp>
         <p:nvSpPr>
           <p:cNvPr id="154882059" name="place_holder"/>
-          <p:cNvSpPr txBox="1"/>
+          <p:cNvSpPr txBox="1">
+            <a:spLocks noGrp="1"/>
+          </p:cNvSpPr>
           <p:nvPr>
             <p:ph type="title" idx="4294967295"/>
           </p:nvPr>
@@ -134,6 +180,7 @@
         </p:spPr>
         <p:txBody>
           <a:bodyPr/>
+          <a:lstStyle/>
           <a:p>
             <a:pPr>
               <a:defRPr/>
@@ -145,7 +192,9 @@
       <p:sp>
         <p:nvSpPr>
           <p:cNvPr id="643444921" name="place_holder"/>
-          <p:cNvSpPr txBox="1"/>
+          <p:cNvSpPr txBox="1">
+            <a:spLocks noGrp="1"/>
+          </p:cNvSpPr>
           <p:nvPr>
             <p:ph type="body" idx="4294967295"/>
           </p:nvPr>
@@ -158,6 +207,7 @@
         </p:spPr>
         <p:txBody>
           <a:bodyPr/>
+          <a:lstStyle/>
           <a:p>
             <a:pPr>
               <a:defRPr/>
@@ -168,8 +218,10 @@
       </p:sp>
       <p:sp>
         <p:nvSpPr>
-          <p:cNvPr id="1944763692" name=""/>
-          <p:cNvSpPr txBox="1"/>
+          <p:cNvPr id="1944763692" name="Datumsplatzhalter 1944763691"/>
+          <p:cNvSpPr txBox="1">
+            <a:spLocks noGrp="1"/>
+          </p:cNvSpPr>
           <p:nvPr>
             <p:ph type="dt" sz="half" idx="1"/>
           </p:nvPr>
@@ -188,8 +240,8 @@
               <a:defRPr/>
             </a:pPr>
             <a:fld id="{1D1B89AE-8D35-4BB5-B492-6D9BE4F23A39}" type="datetime1">
-              <a:rPr/>
-              <a:t>01.01.2000</a:t>
+              <a:rPr lang="de-DE"/>
+              <a:t>27.08.25</a:t>
             </a:fld>
             <a:endParaRPr sz="2000"/>
           </a:p>
@@ -197,8 +249,10 @@
       </p:sp>
       <p:sp>
         <p:nvSpPr>
-          <p:cNvPr id="61828394" name=""/>
-          <p:cNvSpPr txBox="1"/>
+          <p:cNvPr id="61828394" name="Fußzeilenplatzhalter 61828393"/>
+          <p:cNvSpPr txBox="1">
+            <a:spLocks noGrp="1"/>
+          </p:cNvSpPr>
           <p:nvPr>
             <p:ph type="ftr" sz="quarter" idx="2"/>
           </p:nvPr>
@@ -222,8 +276,10 @@
       </p:sp>
       <p:sp>
         <p:nvSpPr>
-          <p:cNvPr id="2008872834" name=""/>
-          <p:cNvSpPr txBox="1"/>
+          <p:cNvPr id="2008872834" name="Foliennummernplatzhalter 2008872833"/>
+          <p:cNvSpPr txBox="1">
+            <a:spLocks noGrp="1"/>
+          </p:cNvSpPr>
           <p:nvPr>
             <p:ph type="sldNum" sz="quarter" idx="3"/>
           </p:nvPr>
@@ -243,7 +299,7 @@
             </a:pPr>
             <a:fld id="{5CC2A059-B141-45A7-B910-B096D6D06820}" type="slidenum">
               <a:rPr/>
-              <a:t>&lt;Foliennummer&gt;</a:t>
+              <a:t>‹Nr.›</a:t>
             </a:fld>
             <a:endParaRPr/>
           </a:p>
@@ -258,11 +314,12 @@
 </file>
 
 <file path=ppt/slideMasters/slideMaster1.xml><?xml version="1.0" encoding="utf-8"?>
-<p:sldMaster xmlns:a="http://schemas.openxmlformats.org/drawingml/2006/main" xmlns:r="http://schemas.openxmlformats.org/officeDocument/2006/relationships" xmlns:p="http://schemas.openxmlformats.org/presentationml/2006/main" xmlns:m="http://schemas.openxmlformats.org/officeDocument/2006/math" xmlns:w="http://schemas.openxmlformats.org/wordprocessingml/2006/main" preserve="0">
-  <p:cSld name="">
+<p:sldMaster xmlns:a="http://schemas.openxmlformats.org/drawingml/2006/main" xmlns:r="http://schemas.openxmlformats.org/officeDocument/2006/relationships" xmlns:p="http://schemas.openxmlformats.org/presentationml/2006/main">
+  <p:cSld>
     <p:bg>
-      <p:bgPr shadeToTitle="0">
+      <p:bgPr>
         <a:noFill/>
+        <a:effectLst/>
       </p:bgPr>
     </p:bg>
     <p:spTree>
@@ -281,8 +338,10 @@
       </p:grpSpPr>
       <p:sp>
         <p:nvSpPr>
-          <p:cNvPr id="204293294" name=""/>
-          <p:cNvSpPr txBox="1"/>
+          <p:cNvPr id="204293294" name="Titelplatzhalter 204293293"/>
+          <p:cNvSpPr txBox="1">
+            <a:spLocks noGrp="1"/>
+          </p:cNvSpPr>
           <p:nvPr>
             <p:ph type="title" idx="4294967295"/>
           </p:nvPr>
@@ -303,6 +362,7 @@
         </p:spPr>
         <p:txBody>
           <a:bodyPr anchor="ctr"/>
+          <a:lstStyle/>
           <a:p>
             <a:pPr>
               <a:defRPr/>
@@ -313,8 +373,10 @@
       </p:sp>
       <p:sp>
         <p:nvSpPr>
-          <p:cNvPr id="1726383724" name=""/>
-          <p:cNvSpPr txBox="1"/>
+          <p:cNvPr id="1726383724" name="Textplatzhalter 1726383723"/>
+          <p:cNvSpPr txBox="1">
+            <a:spLocks noGrp="1"/>
+          </p:cNvSpPr>
           <p:nvPr>
             <p:ph type="body" idx="4294967295"/>
           </p:nvPr>
@@ -337,6 +399,7 @@
           <a:bodyPr>
             <a:normAutofit/>
           </a:bodyPr>
+          <a:lstStyle/>
           <a:p>
             <a:pPr>
               <a:defRPr/>
@@ -347,8 +410,10 @@
       </p:sp>
       <p:sp>
         <p:nvSpPr>
-          <p:cNvPr id="677014168" name=""/>
-          <p:cNvSpPr txBox="1"/>
+          <p:cNvPr id="677014168" name="Datumsplatzhalter 677014167"/>
+          <p:cNvSpPr txBox="1">
+            <a:spLocks noGrp="1"/>
+          </p:cNvSpPr>
           <p:nvPr>
             <p:ph type="dt" sz="half" idx="1"/>
           </p:nvPr>
@@ -375,8 +440,8 @@
               <a:defRPr/>
             </a:pPr>
             <a:fld id="{1D1B89AE-8D35-4BB5-B492-6D9BE4F23A39}" type="datetime1">
-              <a:rPr/>
-              <a:t>01.01.2000</a:t>
+              <a:rPr lang="de-DE"/>
+              <a:t>27.08.25</a:t>
             </a:fld>
             <a:endParaRPr sz="22950"/>
           </a:p>
@@ -384,8 +449,10 @@
       </p:sp>
       <p:sp>
         <p:nvSpPr>
-          <p:cNvPr id="735553257" name=""/>
-          <p:cNvSpPr txBox="1"/>
+          <p:cNvPr id="735553257" name="Fußzeilenplatzhalter 735553256"/>
+          <p:cNvSpPr txBox="1">
+            <a:spLocks noGrp="1"/>
+          </p:cNvSpPr>
           <p:nvPr>
             <p:ph type="ftr" sz="quarter" idx="2"/>
           </p:nvPr>
@@ -417,8 +484,10 @@
       </p:sp>
       <p:sp>
         <p:nvSpPr>
-          <p:cNvPr id="1389738030" name=""/>
-          <p:cNvSpPr txBox="1"/>
+          <p:cNvPr id="1389738030" name="Foliennummernplatzhalter 1389738029"/>
+          <p:cNvSpPr txBox="1">
+            <a:spLocks noGrp="1"/>
+          </p:cNvSpPr>
           <p:nvPr>
             <p:ph type="sldNum" sz="quarter" idx="3"/>
           </p:nvPr>
@@ -446,7 +515,7 @@
             </a:pPr>
             <a:fld id="{5CC2A059-B141-45A7-B910-B096D6D06820}" type="slidenum">
               <a:rPr/>
-              <a:t>&lt;Foliennummer&gt;</a:t>
+              <a:t>‹Nr.›</a:t>
             </a:fld>
             <a:endParaRPr/>
           </a:p>
@@ -458,7 +527,7 @@
   <p:sldLayoutIdLst>
     <p:sldLayoutId id="2147483649" r:id="rId1"/>
   </p:sldLayoutIdLst>
-  <p:hf dt="1" ftr="1" hdr="1" sldNum="1"/>
+  <p:hf/>
   <p:txStyles>
     <p:titleStyle/>
     <p:bodyStyle/>
@@ -468,7 +537,7 @@
 </file>
 
 <file path=ppt/slides/slide1.xml><?xml version="1.0" encoding="utf-8"?>
-<p:sld xmlns:a="http://schemas.openxmlformats.org/drawingml/2006/main" xmlns:r="http://schemas.openxmlformats.org/officeDocument/2006/relationships" xmlns:p="http://schemas.openxmlformats.org/presentationml/2006/main" xmlns:m="http://schemas.openxmlformats.org/officeDocument/2006/math" xmlns:w="http://schemas.openxmlformats.org/wordprocessingml/2006/main" xmlns:mc="http://schemas.openxmlformats.org/markup-compatibility/2006" showMasterPhAnim="0" showMasterSp="1" show="1">
+<p:sld xmlns:a="http://schemas.openxmlformats.org/drawingml/2006/main" xmlns:r="http://schemas.openxmlformats.org/officeDocument/2006/relationships" xmlns:p="http://schemas.openxmlformats.org/presentationml/2006/main" showMasterPhAnim="0">
   <p:cSld name="page1">
     <p:spTree>
       <p:nvGrpSpPr>
@@ -486,7 +555,7 @@
       </p:grpSpPr>
       <p:sp>
         <p:nvSpPr>
-          <p:cNvPr id="537594130" name=""/>
+          <p:cNvPr id="537594130" name="Textfeld 537594129"/>
           <p:cNvSpPr txBox="1"/>
           <p:nvPr/>
         </p:nvSpPr>
@@ -515,41 +584,41 @@
               <a:defRPr/>
             </a:pPr>
             <a:r>
-              <a:rPr lang="en-GB" sz="5400" b="1" strike="noStrike">
+              <a:rPr lang="en-US" sz="5400" b="1" strike="noStrike" noProof="0" dirty="0">
                 <a:latin typeface="Liberation Serif"/>
               </a:rPr>
               <a:t>Dominik Künkele</a:t>
             </a:r>
             <a:r>
-              <a:rPr lang="de-DE" sz="5400" b="1" strike="noStrike" baseline="30000">
+              <a:rPr lang="en-US" sz="5400" b="1" strike="noStrike" baseline="30000" noProof="0" dirty="0">
                 <a:latin typeface="Liberation Serif"/>
               </a:rPr>
               <a:t>1</a:t>
             </a:r>
             <a:r>
-              <a:rPr lang="en-GB" sz="5400" strike="noStrike">
+              <a:rPr lang="en-US" sz="5400" strike="noStrike" noProof="0" dirty="0">
                 <a:latin typeface="Liberation Serif"/>
               </a:rPr>
               <a:t> and </a:t>
             </a:r>
             <a:r>
-              <a:rPr lang="en-GB" sz="5400" b="1" strike="noStrike">
+              <a:rPr lang="en-US" sz="5400" b="1" strike="noStrike" noProof="0" dirty="0">
                 <a:latin typeface="Liberation Serif"/>
               </a:rPr>
               <a:t>Simon Dobnik</a:t>
             </a:r>
             <a:r>
-              <a:rPr lang="de-DE" sz="5400" b="1" baseline="30000"/>
+              <a:rPr lang="en-US" sz="5400" b="1" baseline="30000" noProof="0" dirty="0"/>
               <a:t>1,2</a:t>
             </a:r>
-            <a:endParaRPr sz="5400" baseline="30000"/>
+            <a:endParaRPr lang="en-US" sz="5400" baseline="30000" noProof="0" dirty="0"/>
           </a:p>
           <a:p>
             <a:pPr algn="ctr">
               <a:defRPr/>
             </a:pPr>
             <a:r>
-              <a:rPr lang="de-DE" sz="4400" b="0" i="0" u="none" strike="noStrike" cap="none" spc="0" baseline="30000">
+              <a:rPr lang="en-US" sz="4400" b="0" i="0" u="none" strike="noStrike" cap="none" spc="0" baseline="30000" noProof="0" dirty="0">
                 <a:solidFill>
                   <a:srgbClr val="000000"/>
                 </a:solidFill>
@@ -560,7 +629,7 @@
               <a:t>1</a:t>
             </a:r>
             <a:r>
-              <a:rPr lang="en-GB" sz="4400" b="0" i="0" u="none" strike="noStrike" cap="none" spc="0">
+              <a:rPr lang="en-US" sz="4400" b="0" i="0" u="none" strike="noStrike" cap="none" spc="0" noProof="0" dirty="0">
                 <a:solidFill>
                   <a:srgbClr val="000000"/>
                 </a:solidFill>
@@ -570,7 +639,7 @@
               </a:rPr>
               <a:t>Department of Philosophy, Linguistics and Theory of Science</a:t>
             </a:r>
-            <a:endParaRPr lang="en-GB" sz="4400" b="0" i="0" u="none" strike="noStrike" cap="none" spc="0">
+            <a:endParaRPr lang="en-US" sz="4400" b="0" i="0" u="none" strike="noStrike" cap="none" spc="0" noProof="0" dirty="0">
               <a:solidFill>
                 <a:srgbClr val="000000"/>
               </a:solidFill>
@@ -583,7 +652,7 @@
               <a:defRPr/>
             </a:pPr>
             <a:r>
-              <a:rPr lang="en-GB" sz="4400" b="0" i="0" u="none" strike="noStrike" cap="none" spc="0">
+              <a:rPr lang="en-US" sz="4400" b="0" i="0" u="none" strike="noStrike" cap="none" spc="0" noProof="0" dirty="0">
                 <a:solidFill>
                   <a:srgbClr val="000000"/>
                 </a:solidFill>
@@ -594,7 +663,7 @@
               <a:t>  </a:t>
             </a:r>
             <a:r>
-              <a:rPr lang="de-DE" sz="4400" b="0" i="0" u="none" strike="noStrike" cap="none" spc="0" baseline="30000">
+              <a:rPr lang="en-US" sz="4400" b="0" i="0" u="none" strike="noStrike" cap="none" spc="0" baseline="30000" noProof="0" dirty="0">
                 <a:solidFill>
                   <a:srgbClr val="000000"/>
                 </a:solidFill>
@@ -605,7 +674,7 @@
               <a:t>2</a:t>
             </a:r>
             <a:r>
-              <a:rPr lang="en-GB" sz="4400" b="0" i="0" u="none" strike="noStrike" cap="none" spc="0">
+              <a:rPr lang="en-US" sz="4400" b="0" i="0" u="none" strike="noStrike" cap="none" spc="0" noProof="0" dirty="0">
                 <a:solidFill>
                   <a:srgbClr val="000000"/>
                 </a:solidFill>
@@ -615,7 +684,7 @@
               </a:rPr>
               <a:t>Centre for Linguistic Theory and Studies in Probability (CLASP)</a:t>
             </a:r>
-            <a:endParaRPr lang="en-GB" sz="4400" b="0" i="0" u="none" strike="noStrike" cap="none" spc="0">
+            <a:endParaRPr lang="en-US" sz="4400" b="0" i="0" u="none" strike="noStrike" cap="none" spc="0" noProof="0" dirty="0">
               <a:solidFill>
                 <a:srgbClr val="000000"/>
               </a:solidFill>
@@ -631,12 +700,12 @@
               <a:defRPr/>
             </a:pPr>
             <a:r>
-              <a:rPr lang="en-GB" sz="4400" strike="noStrike">
+              <a:rPr lang="en-US" sz="4400" strike="noStrike" noProof="0" dirty="0">
                 <a:latin typeface="Liberation Serif"/>
               </a:rPr>
               <a:t>University of Gothenburg, Sweden</a:t>
             </a:r>
-            <a:endParaRPr sz="4400"/>
+            <a:endParaRPr lang="en-US" sz="4400" noProof="0" dirty="0"/>
           </a:p>
           <a:p>
             <a:pPr algn="ctr">
@@ -646,59 +715,30 @@
               <a:defRPr/>
             </a:pPr>
             <a:r>
-              <a:rPr lang="de-DE" sz="4000" u="sng" strike="noStrike">
+              <a:rPr lang="en-US" sz="4000" noProof="0" dirty="0" err="1">
                 <a:latin typeface="Liberation Mono"/>
-                <a:hlinkClick r:id="rId3" tooltip=""/>
-              </a:rPr>
-              <a:t>contact@</a:t>
-            </a:r>
-            <a:r>
-              <a:rPr lang="de-DE" sz="4000" u="sng" strike="noStrike">
+              </a:rPr>
+              <a:t>contact@dominik-kuenkele.de</a:t>
+            </a:r>
+            <a:r>
+              <a:rPr lang="en-US" sz="4000" noProof="0" dirty="0">
                 <a:latin typeface="Liberation Mono"/>
-                <a:hlinkClick r:id="rId3" tooltip=""/>
-              </a:rPr>
-              <a:t>dominik</a:t>
-            </a:r>
-            <a:r>
-              <a:rPr lang="de-DE" sz="4000" u="sng" strike="noStrike">
+              </a:rPr>
+              <a:t> </a:t>
+            </a:r>
+            <a:r>
+              <a:rPr lang="en-US" sz="4000" strike="noStrike" noProof="0" dirty="0" err="1">
                 <a:latin typeface="Liberation Mono"/>
-                <a:hlinkClick r:id="rId3" tooltip=""/>
-              </a:rPr>
-              <a:t>-</a:t>
-            </a:r>
-            <a:r>
-              <a:rPr lang="de-DE" sz="4000" u="sng" strike="noStrike">
-                <a:latin typeface="Liberation Mono"/>
-                <a:hlinkClick r:id="rId3" tooltip=""/>
-              </a:rPr>
-              <a:t>kuenkele</a:t>
-            </a:r>
-            <a:r>
-              <a:rPr lang="de-DE" sz="4000" u="sng" strike="noStrike">
-                <a:latin typeface="Liberation Mono"/>
-                <a:hlinkClick r:id="rId3" tooltip=""/>
-              </a:rPr>
-              <a:t>.de</a:t>
-            </a:r>
-            <a:r>
-              <a:rPr lang="de-DE" sz="4000" strike="noStrike">
-                <a:latin typeface="Liberation Mono"/>
-              </a:rPr>
-              <a:t> </a:t>
-            </a:r>
-            <a:r>
-              <a:rPr lang="en-GB" sz="4000" strike="noStrike">
-                <a:latin typeface="Liberation Mono"/>
               </a:rPr>
               <a:t>simon.dobnik@gu.se</a:t>
             </a:r>
-            <a:endParaRPr sz="4000"/>
+            <a:endParaRPr lang="en-US" sz="4000" noProof="0" dirty="0"/>
           </a:p>
         </p:txBody>
       </p:sp>
       <p:sp>
         <p:nvSpPr>
-          <p:cNvPr id="1657876060" name=""/>
+          <p:cNvPr id="1657876060" name="Textfeld 1657876059"/>
           <p:cNvSpPr txBox="1"/>
           <p:nvPr/>
         </p:nvSpPr>
@@ -724,7 +764,7 @@
               <a:defRPr/>
             </a:pPr>
             <a:r>
-              <a:rPr lang="en-GB" sz="7200" b="1" i="0" u="none" strike="noStrike" cap="none" spc="0">
+              <a:rPr lang="en-US" sz="7200" b="1" i="0" u="none" strike="noStrike" cap="none" spc="0" noProof="0" dirty="0">
                 <a:solidFill>
                   <a:srgbClr val="000000"/>
                 </a:solidFill>
@@ -734,7 +774,7 @@
               </a:rPr>
               <a:t>Learning to Refer: How Scene Complexity Affects</a:t>
             </a:r>
-            <a:endParaRPr lang="en-GB" sz="7200" b="1" strike="noStrike">
+            <a:endParaRPr lang="en-US" sz="7200" b="1" strike="noStrike" noProof="0" dirty="0">
               <a:latin typeface="Liberation Serif"/>
             </a:endParaRPr>
           </a:p>
@@ -743,7 +783,7 @@
               <a:defRPr/>
             </a:pPr>
             <a:r>
-              <a:rPr lang="en-GB" sz="7200" b="1" i="0" u="none" strike="noStrike" cap="none" spc="0">
+              <a:rPr lang="en-US" sz="7200" b="1" i="0" u="none" strike="noStrike" cap="none" spc="0" noProof="0" dirty="0">
                 <a:solidFill>
                   <a:srgbClr val="000000"/>
                 </a:solidFill>
@@ -753,20 +793,20 @@
               </a:rPr>
               <a:t>Emergent Communication in Neural Agents</a:t>
             </a:r>
-            <a:endParaRPr sz="7200"/>
+            <a:endParaRPr lang="en-US" sz="7200" noProof="0" dirty="0"/>
           </a:p>
         </p:txBody>
       </p:sp>
       <p:sp>
         <p:nvSpPr>
-          <p:cNvPr id="1849313519" name=""/>
+          <p:cNvPr id="1849313519" name="Rechteck 1849313518"/>
           <p:cNvSpPr/>
           <p:nvPr/>
         </p:nvSpPr>
         <p:spPr bwMode="auto">
-          <a:xfrm flipH="0" flipV="0">
-            <a:off x="1432391" y="19017644"/>
-            <a:ext cx="27397830" cy="21617654"/>
+          <a:xfrm>
+            <a:off x="1432391" y="18544887"/>
+            <a:ext cx="27397830" cy="22090411"/>
           </a:xfrm>
           <a:prstGeom prst="rect">
             <a:avLst/>
@@ -781,23 +821,24 @@
         </p:spPr>
         <p:txBody>
           <a:bodyPr lIns="89993" tIns="44996" rIns="89993" bIns="44996" anchor="ctr"/>
+          <a:lstStyle/>
           <a:p>
             <a:pPr>
               <a:defRPr/>
             </a:pPr>
-            <a:endParaRPr/>
+            <a:endParaRPr lang="en-US" noProof="0" dirty="0"/>
           </a:p>
         </p:txBody>
       </p:sp>
       <p:sp>
         <p:nvSpPr>
-          <p:cNvPr id="1122315060" name=""/>
+          <p:cNvPr id="1122315060" name="Textfeld 1122315059"/>
           <p:cNvSpPr txBox="1"/>
           <p:nvPr/>
         </p:nvSpPr>
         <p:spPr bwMode="auto">
-          <a:xfrm flipH="0" flipV="0">
-            <a:off x="1836732" y="18526390"/>
+          <a:xfrm>
+            <a:off x="1671316" y="18087926"/>
             <a:ext cx="4374286" cy="913313"/>
           </a:xfrm>
           <a:prstGeom prst="rect">
@@ -821,32 +862,32 @@
               <a:defRPr/>
             </a:pPr>
             <a:r>
-              <a:rPr lang="de-DE" sz="5400" b="1" strike="noStrike" cap="small">
+              <a:rPr lang="en-US" sz="5400" b="1" strike="noStrike" cap="small" noProof="0" dirty="0">
                 <a:latin typeface="Liberation Serif"/>
               </a:rPr>
               <a:t>Experiments</a:t>
             </a:r>
-            <a:endParaRPr sz="5400"/>
+            <a:endParaRPr lang="en-US" sz="5400" noProof="0" dirty="0"/>
           </a:p>
         </p:txBody>
       </p:sp>
       <p:pic>
         <p:nvPicPr>
-          <p:cNvPr id="1375978890" name=""/>
+          <p:cNvPr id="1375978890" name="Grafik 1375978889"/>
           <p:cNvPicPr/>
           <p:nvPr/>
         </p:nvPicPr>
         <p:blipFill>
-          <a:blip r:embed="rId4">
-            <a:alphaModFix amt="100000"/>
-            <a:lum bright="0" contrast="0"/>
+          <a:blip r:embed="rId3">
+            <a:alphaModFix/>
+            <a:lum/>
           </a:blip>
           <a:stretch/>
         </p:blipFill>
         <p:spPr bwMode="auto">
-          <a:xfrm flipH="0" flipV="0">
-            <a:off x="12809399" y="20294599"/>
-            <a:ext cx="7692300" cy="5159305"/>
+          <a:xfrm>
+            <a:off x="12845112" y="19840590"/>
+            <a:ext cx="7692300" cy="5183639"/>
           </a:xfrm>
           <a:prstGeom prst="rect">
             <a:avLst/>
@@ -859,13 +900,13 @@
       </p:pic>
       <p:sp>
         <p:nvSpPr>
-          <p:cNvPr id="1148621843" name=""/>
+          <p:cNvPr id="1148621843" name="Textfeld 1148621842"/>
           <p:cNvSpPr txBox="1"/>
           <p:nvPr/>
         </p:nvSpPr>
         <p:spPr bwMode="auto">
-          <a:xfrm rot="0" flipH="0" flipV="0">
-            <a:off x="6117321" y="19305087"/>
+          <a:xfrm>
+            <a:off x="6413606" y="18880197"/>
             <a:ext cx="4193159" cy="913313"/>
           </a:xfrm>
           <a:prstGeom prst="rect">
@@ -887,36 +928,30 @@
               <a:defRPr/>
             </a:pPr>
             <a:r>
-              <a:rPr sz="5400" b="1" strike="noStrike">
+              <a:rPr lang="en-US" sz="5400" b="1" strike="noStrike" noProof="0" dirty="0">
                 <a:latin typeface="Liberation Serif"/>
               </a:rPr>
-              <a:t>Dale-</a:t>
-            </a:r>
-            <a:r>
-              <a:rPr lang="de-DE" sz="5400" b="1" strike="noStrike">
-                <a:latin typeface="Liberation Serif"/>
-              </a:rPr>
-              <a:t>2</a:t>
-            </a:r>
-            <a:endParaRPr sz="5400"/>
+              <a:t>Dale-2</a:t>
+            </a:r>
+            <a:endParaRPr lang="en-US" sz="5400" noProof="0" dirty="0"/>
           </a:p>
         </p:txBody>
       </p:sp>
       <p:pic>
         <p:nvPicPr>
-          <p:cNvPr id="1554823868" name=""/>
+          <p:cNvPr id="1554823868" name="Grafik 1554823867"/>
           <p:cNvPicPr/>
           <p:nvPr/>
         </p:nvPicPr>
         <p:blipFill>
-          <a:blip r:embed="rId5">
-            <a:alphaModFix amt="100000"/>
-            <a:lum bright="0" contrast="0"/>
+          <a:blip r:embed="rId4">
+            <a:alphaModFix/>
+            <a:lum/>
           </a:blip>
           <a:stretch/>
         </p:blipFill>
         <p:spPr bwMode="auto">
-          <a:xfrm flipH="0" flipV="0">
+          <a:xfrm>
             <a:off x="26186910" y="18358"/>
             <a:ext cx="3049727" cy="3534977"/>
           </a:xfrm>
@@ -931,14 +966,14 @@
       </p:pic>
       <p:sp>
         <p:nvSpPr>
-          <p:cNvPr id="1508962151" name=""/>
+          <p:cNvPr id="1508962151" name="Textfeld 1508962150"/>
           <p:cNvSpPr txBox="1"/>
           <p:nvPr/>
         </p:nvSpPr>
         <p:spPr bwMode="auto">
-          <a:xfrm flipH="0" flipV="0">
-            <a:off x="1676399" y="7817718"/>
-            <a:ext cx="8291099" cy="9843953"/>
+          <a:xfrm>
+            <a:off x="1671316" y="9070314"/>
+            <a:ext cx="8291099" cy="8708615"/>
           </a:xfrm>
           <a:prstGeom prst="rect">
             <a:avLst/>
@@ -955,63 +990,26 @@
           </a:bodyPr>
           <a:lstStyle/>
           <a:p>
-            <a:pPr marL="526195" indent="-526195">
-              <a:buFont typeface="Arial"/>
-              <a:buChar char="•"/>
+            <a:pPr>
               <a:defRPr/>
             </a:pPr>
-            <a:endParaRPr lang="en-GB" sz="4000" b="0" i="0" u="none" strike="noStrike" cap="none" spc="0">
-              <a:solidFill>
-                <a:srgbClr val="000000"/>
-              </a:solidFill>
-              <a:latin typeface="Liberation Sans"/>
-              <a:cs typeface="Liberation Sans"/>
-            </a:endParaRPr>
-          </a:p>
-          <a:p>
-            <a:pPr marL="526195" indent="-526195">
-              <a:buFont typeface="Arial"/>
-              <a:buChar char="•"/>
-              <a:defRPr/>
-            </a:pPr>
-            <a:endParaRPr lang="en-GB" sz="4000" b="0" i="0" u="none" strike="noStrike" cap="none" spc="0">
-              <a:solidFill>
-                <a:srgbClr val="000000"/>
-              </a:solidFill>
-              <a:latin typeface="Liberation Sans"/>
-              <a:ea typeface="Liberation Sans"/>
-              <a:cs typeface="Liberation Sans"/>
-            </a:endParaRPr>
+            <a:r>
+              <a:rPr lang="en-US" sz="4000" b="0" i="1" u="none" strike="noStrike" cap="none" spc="0" noProof="0" dirty="0">
+                <a:solidFill>
+                  <a:srgbClr val="000000"/>
+                </a:solidFill>
+                <a:latin typeface="Liberation Sans"/>
+                <a:ea typeface="Liberation Sans"/>
+                <a:cs typeface="Liberation Sans"/>
+              </a:rPr>
+              <a:t>A picture can say thousand words...</a:t>
+            </a:r>
           </a:p>
           <a:p>
             <a:pPr>
               <a:defRPr/>
             </a:pPr>
-            <a:r>
-              <a:rPr lang="de-DE" sz="4000" b="0" i="1" u="none" strike="noStrike" cap="none" spc="0">
-                <a:solidFill>
-                  <a:srgbClr val="000000"/>
-                </a:solidFill>
-                <a:latin typeface="Liberation Sans"/>
-                <a:ea typeface="Liberation Sans"/>
-                <a:cs typeface="Liberation Sans"/>
-              </a:rPr>
-              <a:t>A picture can say thousand words...</a:t>
-            </a:r>
-            <a:endParaRPr lang="de-DE" sz="4000" b="0" i="1" u="none" strike="noStrike" cap="none" spc="0">
-              <a:solidFill>
-                <a:srgbClr val="000000"/>
-              </a:solidFill>
-              <a:latin typeface="Liberation Sans"/>
-              <a:ea typeface="Liberation Sans"/>
-              <a:cs typeface="Liberation Sans"/>
-            </a:endParaRPr>
-          </a:p>
-          <a:p>
-            <a:pPr>
-              <a:defRPr/>
-            </a:pPr>
-            <a:endParaRPr sz="4000" b="0" i="1" u="none" strike="noStrike" cap="none" spc="0">
+            <a:endParaRPr lang="en-US" sz="4000" b="0" i="1" u="none" strike="noStrike" cap="none" spc="0" noProof="0" dirty="0">
               <a:solidFill>
                 <a:srgbClr val="000000"/>
               </a:solidFill>
@@ -1027,7 +1025,7 @@
               <a:defRPr/>
             </a:pPr>
             <a:r>
-              <a:rPr lang="en-GB" sz="4000" b="0" i="0" u="none" strike="noStrike" cap="none" spc="0">
+              <a:rPr lang="en-US" sz="4000" b="0" i="0" u="none" strike="noStrike" cap="none" spc="0" noProof="0" dirty="0">
                 <a:solidFill>
                   <a:srgbClr val="000000"/>
                 </a:solidFill>
@@ -1038,7 +1036,7 @@
               <a:t>Study </a:t>
             </a:r>
             <a:r>
-              <a:rPr lang="en-GB" sz="4000" b="1" i="0" u="none" strike="noStrike" cap="none" spc="0">
+              <a:rPr lang="en-US" sz="4000" b="1" i="0" u="none" strike="noStrike" cap="none" spc="0" noProof="0" dirty="0">
                 <a:solidFill>
                   <a:srgbClr val="000000"/>
                 </a:solidFill>
@@ -1046,10 +1044,10 @@
                 <a:ea typeface="Liberation Sans"/>
                 <a:cs typeface="Liberation Sans"/>
               </a:rPr>
-              <a:t>emergence of discrete linguis</a:t>
-            </a:r>
-            <a:r>
-              <a:rPr lang="en-GB" sz="4000" b="1" i="0" u="none" strike="noStrike" cap="none" spc="0">
+              <a:t>emergence of discrete linguistic symbols</a:t>
+            </a:r>
+            <a:r>
+              <a:rPr lang="en-US" sz="4000" b="0" i="0" u="none" strike="noStrike" cap="none" spc="0" noProof="0" dirty="0">
                 <a:solidFill>
                   <a:srgbClr val="000000"/>
                 </a:solidFill>
@@ -1057,10 +1055,10 @@
                 <a:ea typeface="Liberation Sans"/>
                 <a:cs typeface="Liberation Sans"/>
               </a:rPr>
-              <a:t>tic symbols</a:t>
-            </a:r>
-            <a:r>
-              <a:rPr lang="en-GB" sz="4000" b="0" i="0" u="none" strike="noStrike" cap="none" spc="0">
+              <a:t> and </a:t>
+            </a:r>
+            <a:r>
+              <a:rPr lang="en-US" sz="4000" b="1" i="0" u="none" strike="noStrike" cap="none" spc="0" noProof="0" dirty="0">
                 <a:solidFill>
                   <a:srgbClr val="000000"/>
                 </a:solidFill>
@@ -1068,10 +1066,10 @@
                 <a:ea typeface="Liberation Sans"/>
                 <a:cs typeface="Liberation Sans"/>
               </a:rPr>
-              <a:t> and </a:t>
-            </a:r>
-            <a:r>
-              <a:rPr lang="en-GB" sz="4000" b="1" i="0" u="none" strike="noStrike" cap="none" spc="0">
+              <a:t>languages </a:t>
+            </a:r>
+            <a:r>
+              <a:rPr lang="en-US" sz="4000" b="0" i="0" u="none" strike="noStrike" cap="none" spc="0" noProof="0" dirty="0">
                 <a:solidFill>
                   <a:srgbClr val="000000"/>
                 </a:solidFill>
@@ -1079,10 +1077,10 @@
                 <a:ea typeface="Liberation Sans"/>
                 <a:cs typeface="Liberation Sans"/>
               </a:rPr>
-              <a:t>languages </a:t>
-            </a:r>
-            <a:r>
-              <a:rPr lang="en-GB" sz="4000" b="0" i="0" u="none" strike="noStrike" cap="none" spc="0">
+              <a:t>from continuous sensory input in </a:t>
+            </a:r>
+            <a:r>
+              <a:rPr lang="en-US" sz="4000" b="1" i="0" u="none" strike="noStrike" cap="none" spc="0" noProof="0" dirty="0">
                 <a:solidFill>
                   <a:srgbClr val="000000"/>
                 </a:solidFill>
@@ -1090,10 +1088,14 @@
                 <a:ea typeface="Liberation Sans"/>
                 <a:cs typeface="Liberation Sans"/>
               </a:rPr>
-              <a:t>from con</a:t>
-            </a:r>
-            <a:r>
-              <a:rPr lang="en-GB" sz="4000" b="0" i="0" u="none" strike="noStrike" cap="none" spc="0">
+              <a:t>interactive</a:t>
+            </a:r>
+            <a:r>
+              <a:rPr lang="en-US" b="1" noProof="0" dirty="0"/>
+              <a:t> </a:t>
+            </a:r>
+            <a:r>
+              <a:rPr lang="en-US" sz="4000" b="1" i="0" u="none" strike="noStrike" cap="none" spc="0" noProof="0" dirty="0">
                 <a:solidFill>
                   <a:srgbClr val="000000"/>
                 </a:solidFill>
@@ -1101,53 +1103,8 @@
                 <a:ea typeface="Liberation Sans"/>
                 <a:cs typeface="Liberation Sans"/>
               </a:rPr>
-              <a:t>tinuous sensory input in </a:t>
-            </a:r>
-            <a:r>
-              <a:rPr lang="en-GB" sz="4000" b="1" i="0" u="none" strike="noStrike" cap="none" spc="0">
-                <a:solidFill>
-                  <a:srgbClr val="000000"/>
-                </a:solidFill>
-                <a:latin typeface="Liberation Sans"/>
-                <a:ea typeface="Liberation Sans"/>
-                <a:cs typeface="Liberation Sans"/>
-              </a:rPr>
-              <a:t>interactive</a:t>
-            </a:r>
-            <a:r>
-              <a:rPr lang="de-DE" b="1"/>
-              <a:t> </a:t>
-            </a:r>
-            <a:r>
-              <a:rPr lang="en-GB" sz="4000" b="1" i="0" u="none" strike="noStrike" cap="none" spc="0">
-                <a:solidFill>
-                  <a:srgbClr val="000000"/>
-                </a:solidFill>
-                <a:latin typeface="Liberation Sans"/>
-                <a:ea typeface="Liberation Sans"/>
-                <a:cs typeface="Liberation Sans"/>
-              </a:rPr>
-              <a:t>communicatio</a:t>
-            </a:r>
-            <a:r>
-              <a:rPr lang="de-DE" sz="4000" b="1" i="0" u="none" strike="noStrike" cap="none" spc="0">
-                <a:solidFill>
-                  <a:srgbClr val="000000"/>
-                </a:solidFill>
-                <a:latin typeface="Liberation Sans"/>
-                <a:ea typeface="Liberation Sans"/>
-                <a:cs typeface="Liberation Sans"/>
-              </a:rPr>
-              <a:t>n</a:t>
-            </a:r>
-            <a:endParaRPr sz="4000" b="1" i="0" u="none" strike="noStrike" cap="none" spc="0">
-              <a:solidFill>
-                <a:srgbClr val="000000"/>
-              </a:solidFill>
-              <a:latin typeface="Liberation Sans"/>
-              <a:ea typeface="Liberation Sans"/>
-              <a:cs typeface="Liberation Sans"/>
-            </a:endParaRPr>
+              <a:t>communication</a:t>
+            </a:r>
           </a:p>
           <a:p>
             <a:pPr marL="526195" indent="-526195">
@@ -1156,7 +1113,7 @@
               <a:defRPr/>
             </a:pPr>
             <a:r>
-              <a:rPr lang="en-GB" sz="4000" b="0" i="0" u="none" strike="noStrike" cap="none" spc="0">
+              <a:rPr lang="en-US" sz="4000" b="0" i="0" u="none" strike="noStrike" cap="none" spc="0" noProof="0" dirty="0">
                 <a:solidFill>
                   <a:srgbClr val="000000"/>
                 </a:solidFill>
@@ -1167,7 +1124,7 @@
               <a:t>Study </a:t>
             </a:r>
             <a:r>
-              <a:rPr lang="en-GB" sz="4000" b="1" i="0" u="none" strike="noStrike" cap="none" spc="0">
+              <a:rPr lang="en-US" sz="4000" b="1" i="0" u="none" strike="noStrike" cap="none" spc="0" noProof="0" dirty="0">
                 <a:solidFill>
                   <a:srgbClr val="000000"/>
                 </a:solidFill>
@@ -1178,7 +1135,7 @@
               <a:t>constraints </a:t>
             </a:r>
             <a:r>
-              <a:rPr lang="en-GB" sz="4000" b="0" i="0" u="none" strike="noStrike" cap="none" spc="0">
+              <a:rPr lang="en-US" sz="4000" b="0" i="0" u="none" strike="noStrike" cap="none" spc="0" noProof="0" dirty="0">
                 <a:solidFill>
                   <a:srgbClr val="000000"/>
                 </a:solidFill>
@@ -1186,27 +1143,8 @@
                 <a:ea typeface="Liberation Sans"/>
                 <a:cs typeface="Liberation Sans"/>
               </a:rPr>
-              <a:t>on symbol ground</a:t>
-            </a:r>
-            <a:r>
-              <a:rPr lang="en-GB" sz="4000" b="0" i="0" u="none" strike="noStrike" cap="none" spc="0">
-                <a:solidFill>
-                  <a:srgbClr val="000000"/>
-                </a:solidFill>
-                <a:latin typeface="Liberation Sans"/>
-                <a:ea typeface="Liberation Sans"/>
-                <a:cs typeface="Liberation Sans"/>
-              </a:rPr>
-              <a:t>ing in interacting neural agents</a:t>
-            </a:r>
-            <a:endParaRPr lang="en-GB" sz="4000" b="0" i="0" u="none" strike="noStrike" cap="none" spc="0">
-              <a:solidFill>
-                <a:srgbClr val="000000"/>
-              </a:solidFill>
-              <a:latin typeface="Liberation Sans"/>
-              <a:ea typeface="Liberation Sans"/>
-              <a:cs typeface="Liberation Sans"/>
-            </a:endParaRPr>
+              <a:t>on symbol grounding in interacting neural agents</a:t>
+            </a:r>
           </a:p>
           <a:p>
             <a:pPr marL="526195" indent="-526195">
@@ -1215,7 +1153,7 @@
               <a:defRPr/>
             </a:pPr>
             <a:r>
-              <a:rPr lang="en-GB" sz="4000" b="0" i="0" u="none" strike="noStrike" cap="none" spc="0">
+              <a:rPr lang="en-US" sz="4000" b="0" i="0" u="none" strike="noStrike" cap="none" spc="0" noProof="0" dirty="0">
                 <a:solidFill>
                   <a:srgbClr val="000000"/>
                 </a:solidFill>
@@ -1226,7 +1164,7 @@
               <a:t>Investigate the</a:t>
             </a:r>
             <a:r>
-              <a:rPr lang="en-GB" sz="4000" b="1" i="0" u="none" strike="noStrike" cap="none" spc="0">
+              <a:rPr lang="en-US" sz="4000" b="1" i="0" u="none" strike="noStrike" cap="none" spc="0" noProof="0" dirty="0">
                 <a:solidFill>
                   <a:srgbClr val="000000"/>
                 </a:solidFill>
@@ -1234,10 +1172,10 @@
                 <a:ea typeface="Liberation Sans"/>
                 <a:cs typeface="Liberation Sans"/>
               </a:rPr>
-              <a:t> role of scene complex</a:t>
-            </a:r>
-            <a:r>
-              <a:rPr lang="en-GB" sz="4000" b="1" i="0" u="none" strike="noStrike" cap="none" spc="0">
+              <a:t> role of scene complexity</a:t>
+            </a:r>
+            <a:r>
+              <a:rPr lang="en-US" sz="4000" b="0" i="0" u="none" strike="noStrike" cap="none" spc="0" noProof="0" dirty="0">
                 <a:solidFill>
                   <a:srgbClr val="000000"/>
                 </a:solidFill>
@@ -1245,10 +1183,10 @@
                 <a:ea typeface="Liberation Sans"/>
                 <a:cs typeface="Liberation Sans"/>
               </a:rPr>
-              <a:t>ity</a:t>
-            </a:r>
-            <a:r>
-              <a:rPr lang="en-GB" sz="4000" b="0" i="0" u="none" strike="noStrike" cap="none" spc="0">
+              <a:t>, </a:t>
+            </a:r>
+            <a:r>
+              <a:rPr lang="en-US" sz="4000" b="1" i="0" u="none" strike="noStrike" cap="none" spc="0" noProof="0" dirty="0">
                 <a:solidFill>
                   <a:srgbClr val="000000"/>
                 </a:solidFill>
@@ -1256,10 +1194,10 @@
                 <a:ea typeface="Liberation Sans"/>
                 <a:cs typeface="Liberation Sans"/>
               </a:rPr>
-              <a:t>, </a:t>
-            </a:r>
-            <a:r>
-              <a:rPr lang="en-GB" sz="4000" b="1" i="0" u="none" strike="noStrike" cap="none" spc="0">
+              <a:t>discriminating features present</a:t>
+            </a:r>
+            <a:r>
+              <a:rPr lang="en-US" sz="4000" b="0" i="0" u="none" strike="noStrike" cap="none" spc="0" noProof="0" dirty="0">
                 <a:solidFill>
                   <a:srgbClr val="000000"/>
                 </a:solidFill>
@@ -1267,10 +1205,14 @@
                 <a:ea typeface="Liberation Sans"/>
                 <a:cs typeface="Liberation Sans"/>
               </a:rPr>
-              <a:t>discriminating features present</a:t>
-            </a:r>
-            <a:r>
-              <a:rPr lang="en-GB" sz="4000" b="0" i="0" u="none" strike="noStrike" cap="none" spc="0">
+              <a:t>,</a:t>
+            </a:r>
+            <a:r>
+              <a:rPr lang="en-US" noProof="0" dirty="0"/>
+              <a:t> </a:t>
+            </a:r>
+            <a:r>
+              <a:rPr lang="en-US" sz="4000" b="0" i="0" u="none" strike="noStrike" cap="none" spc="0" noProof="0" dirty="0">
                 <a:solidFill>
                   <a:srgbClr val="000000"/>
                 </a:solidFill>
@@ -1278,14 +1220,10 @@
                 <a:ea typeface="Liberation Sans"/>
                 <a:cs typeface="Liberation Sans"/>
               </a:rPr>
-              <a:t>,</a:t>
-            </a:r>
-            <a:r>
-              <a:rPr lang="de-DE"/>
-              <a:t> </a:t>
-            </a:r>
-            <a:r>
-              <a:rPr lang="en-GB" sz="4000" b="0" i="0" u="none" strike="noStrike" cap="none" spc="0">
+              <a:t>and </a:t>
+            </a:r>
+            <a:r>
+              <a:rPr lang="en-US" sz="4000" b="1" i="0" u="none" strike="noStrike" cap="none" spc="0" noProof="0" dirty="0">
                 <a:solidFill>
                   <a:srgbClr val="000000"/>
                 </a:solidFill>
@@ -1293,10 +1231,10 @@
                 <a:ea typeface="Liberation Sans"/>
                 <a:cs typeface="Liberation Sans"/>
               </a:rPr>
-              <a:t>and </a:t>
-            </a:r>
-            <a:r>
-              <a:rPr lang="en-GB" sz="4000" b="1" i="0" u="none" strike="noStrike" cap="none" spc="0">
+              <a:t>message space</a:t>
+            </a:r>
+            <a:r>
+              <a:rPr lang="en-US" sz="4000" b="0" i="0" u="none" strike="noStrike" cap="none" spc="0" noProof="0" dirty="0">
                 <a:solidFill>
                   <a:srgbClr val="000000"/>
                 </a:solidFill>
@@ -1304,58 +1242,28 @@
                 <a:ea typeface="Liberation Sans"/>
                 <a:cs typeface="Liberation Sans"/>
               </a:rPr>
-              <a:t>message space</a:t>
-            </a:r>
-            <a:r>
-              <a:rPr lang="en-GB" sz="4000" b="0" i="0" u="none" strike="noStrike" cap="none" spc="0">
-                <a:solidFill>
-                  <a:srgbClr val="000000"/>
-                </a:solidFill>
-                <a:latin typeface="Liberation Sans"/>
-                <a:ea typeface="Liberation Sans"/>
-                <a:cs typeface="Liberation Sans"/>
-              </a:rPr>
-              <a:t> on emergent lan</a:t>
-            </a:r>
-            <a:r>
-              <a:rPr lang="en-GB" sz="4000" b="0" i="0" u="none" strike="noStrike" cap="none" spc="0">
-                <a:solidFill>
-                  <a:srgbClr val="000000"/>
-                </a:solidFill>
-                <a:latin typeface="Liberation Sans"/>
-                <a:ea typeface="Liberation Sans"/>
-                <a:cs typeface="Liberation Sans"/>
-              </a:rPr>
-              <a:t>guages</a:t>
-            </a:r>
-            <a:endParaRPr lang="en-GB" sz="4000" b="0" i="0" u="none" strike="noStrike" cap="none" spc="0">
-              <a:solidFill>
-                <a:srgbClr val="000000"/>
-              </a:solidFill>
-              <a:latin typeface="Liberation Sans"/>
-              <a:ea typeface="Liberation Sans"/>
-              <a:cs typeface="Liberation Sans"/>
-            </a:endParaRPr>
+              <a:t> on emergent languages</a:t>
+            </a:r>
           </a:p>
         </p:txBody>
       </p:sp>
       <p:pic>
         <p:nvPicPr>
-          <p:cNvPr id="316695439" name=""/>
+          <p:cNvPr id="316695439" name="Grafik 316695438"/>
           <p:cNvPicPr/>
           <p:nvPr/>
         </p:nvPicPr>
         <p:blipFill>
-          <a:blip r:embed="rId6">
-            <a:alphaModFix amt="100000"/>
-            <a:lum bright="0" contrast="0"/>
+          <a:blip r:embed="rId5">
+            <a:alphaModFix/>
+            <a:lum/>
           </a:blip>
           <a:stretch/>
         </p:blipFill>
         <p:spPr bwMode="auto">
-          <a:xfrm flipH="0" flipV="0">
-            <a:off x="4506129" y="20294599"/>
-            <a:ext cx="7727870" cy="5181599"/>
+          <a:xfrm>
+            <a:off x="4681821" y="19840590"/>
+            <a:ext cx="7692300" cy="5186827"/>
           </a:xfrm>
           <a:prstGeom prst="rect">
             <a:avLst/>
@@ -1368,26 +1276,26 @@
       </p:pic>
       <p:grpSp>
         <p:nvGrpSpPr>
-          <p:cNvPr id="21684335" name=""/>
+          <p:cNvPr id="21684335" name="Gruppieren 21684334"/>
           <p:cNvGrpSpPr/>
           <p:nvPr/>
         </p:nvGrpSpPr>
         <p:grpSpPr bwMode="auto">
-          <a:xfrm flipH="0" flipV="0">
+          <a:xfrm>
             <a:off x="10690691" y="8150201"/>
-            <a:ext cx="8892707" cy="9776693"/>
+            <a:ext cx="8892707" cy="9776692"/>
             <a:chOff x="0" y="0"/>
-            <a:chExt cx="8892707" cy="9776693"/>
+            <a:chExt cx="8892707" cy="9776692"/>
           </a:xfrm>
         </p:grpSpPr>
         <p:sp>
           <p:nvSpPr>
-            <p:cNvPr id="1765351502" name=""/>
+            <p:cNvPr id="1765351502" name="Rechteck 1765351501"/>
             <p:cNvSpPr/>
             <p:nvPr/>
           </p:nvSpPr>
           <p:spPr bwMode="auto">
-            <a:xfrm flipH="0" flipV="0">
+            <a:xfrm>
               <a:off x="0" y="533444"/>
               <a:ext cx="8892707" cy="9243248"/>
             </a:xfrm>
@@ -1404,24 +1312,25 @@
           </p:spPr>
           <p:txBody>
             <a:bodyPr lIns="89992" tIns="44995" rIns="89992" bIns="44995" anchor="ctr"/>
+            <a:lstStyle/>
             <a:p>
               <a:pPr>
                 <a:defRPr/>
               </a:pPr>
-              <a:endParaRPr/>
+              <a:endParaRPr lang="en-US" noProof="0" dirty="0"/>
             </a:p>
           </p:txBody>
         </p:sp>
         <p:sp>
           <p:nvSpPr>
-            <p:cNvPr id="1606445936" name=""/>
+            <p:cNvPr id="1606445936" name="Textfeld 1606445935"/>
             <p:cNvSpPr txBox="1"/>
             <p:nvPr/>
           </p:nvSpPr>
           <p:spPr bwMode="auto">
-            <a:xfrm flipH="0" flipV="0">
+            <a:xfrm>
               <a:off x="172693" y="0"/>
-              <a:ext cx="4949193" cy="913311"/>
+              <a:ext cx="2076532" cy="921866"/>
             </a:xfrm>
             <a:prstGeom prst="rect">
               <a:avLst/>
@@ -1435,7 +1344,7 @@
             <a:effectLst/>
           </p:spPr>
           <p:txBody>
-            <a:bodyPr lIns="89992" tIns="44995" rIns="89992" bIns="44995">
+            <a:bodyPr wrap="square" lIns="89992" tIns="44995" rIns="89992" bIns="44995">
               <a:spAutoFit/>
             </a:bodyPr>
             <a:lstStyle/>
@@ -1444,24 +1353,24 @@
                 <a:defRPr/>
               </a:pPr>
               <a:r>
-                <a:rPr lang="de-DE" sz="5400" b="1" strike="noStrike" cap="small">
+                <a:rPr lang="en-US" sz="5400" b="1" strike="noStrike" cap="small" noProof="0" dirty="0">
                   <a:latin typeface="Liberation Serif"/>
                 </a:rPr>
-                <a:t>Architecture</a:t>
+                <a:t>Setup</a:t>
               </a:r>
-              <a:endParaRPr sz="5400"/>
+              <a:endParaRPr lang="en-US" sz="5400" noProof="0" dirty="0"/>
             </a:p>
           </p:txBody>
         </p:sp>
       </p:grpSp>
       <p:grpSp>
         <p:nvGrpSpPr>
-          <p:cNvPr id="184360477" name=""/>
+          <p:cNvPr id="184360477" name="Gruppieren 184360476"/>
           <p:cNvGrpSpPr/>
           <p:nvPr/>
         </p:nvGrpSpPr>
         <p:grpSpPr bwMode="auto">
-          <a:xfrm flipH="0" flipV="0">
+          <a:xfrm>
             <a:off x="1432391" y="8168047"/>
             <a:ext cx="8892707" cy="9776691"/>
             <a:chOff x="0" y="0"/>
@@ -1470,12 +1379,12 @@
         </p:grpSpPr>
         <p:sp>
           <p:nvSpPr>
-            <p:cNvPr id="101002424" name=""/>
+            <p:cNvPr id="101002424" name="Rechteck 101002423"/>
             <p:cNvSpPr/>
             <p:nvPr/>
           </p:nvSpPr>
           <p:spPr bwMode="auto">
-            <a:xfrm flipH="0" flipV="0">
+            <a:xfrm>
               <a:off x="0" y="533443"/>
               <a:ext cx="8892707" cy="9243248"/>
             </a:xfrm>
@@ -1492,24 +1401,25 @@
           </p:spPr>
           <p:txBody>
             <a:bodyPr lIns="89992" tIns="44995" rIns="89992" bIns="44995" anchor="ctr"/>
+            <a:lstStyle/>
             <a:p>
               <a:pPr>
                 <a:defRPr/>
               </a:pPr>
-              <a:endParaRPr/>
+              <a:endParaRPr lang="en-US" noProof="0" dirty="0"/>
             </a:p>
           </p:txBody>
         </p:sp>
         <p:sp>
           <p:nvSpPr>
-            <p:cNvPr id="1269192990" name=""/>
+            <p:cNvPr id="1269192990" name="Textfeld 1269192989"/>
             <p:cNvSpPr txBox="1"/>
             <p:nvPr/>
           </p:nvSpPr>
           <p:spPr bwMode="auto">
-            <a:xfrm flipH="0" flipV="0">
+            <a:xfrm>
               <a:off x="172692" y="0"/>
-              <a:ext cx="1901194" cy="913311"/>
+              <a:ext cx="1722417" cy="913311"/>
             </a:xfrm>
             <a:prstGeom prst="rect">
               <a:avLst/>
@@ -1523,7 +1433,7 @@
             <a:effectLst/>
           </p:spPr>
           <p:txBody>
-            <a:bodyPr lIns="89992" tIns="44995" rIns="89992" bIns="44995">
+            <a:bodyPr wrap="square" lIns="89992" tIns="44995" rIns="89992" bIns="44995">
               <a:spAutoFit/>
             </a:bodyPr>
             <a:lstStyle/>
@@ -1532,30 +1442,24 @@
                 <a:defRPr/>
               </a:pPr>
               <a:r>
-                <a:rPr lang="en-GB" sz="5400" b="1" strike="noStrike" cap="small">
+                <a:rPr lang="en-US" sz="5400" b="1" strike="noStrike" cap="small" noProof="0" dirty="0">
                   <a:latin typeface="Liberation Serif"/>
                 </a:rPr>
-                <a:t>A</a:t>
+                <a:t>Aims</a:t>
               </a:r>
-              <a:r>
-                <a:rPr lang="de-DE" sz="5400" b="1" strike="noStrike" cap="small">
-                  <a:latin typeface="Liberation Serif"/>
-                </a:rPr>
-                <a:t>ims</a:t>
-              </a:r>
-              <a:endParaRPr sz="5400"/>
+              <a:endParaRPr lang="en-US" sz="5400" noProof="0" dirty="0"/>
             </a:p>
           </p:txBody>
         </p:sp>
       </p:grpSp>
       <p:grpSp>
         <p:nvGrpSpPr>
-          <p:cNvPr id="1597280520" name=""/>
+          <p:cNvPr id="1597280520" name="Gruppieren 1597280519"/>
           <p:cNvGrpSpPr/>
           <p:nvPr/>
         </p:nvGrpSpPr>
         <p:grpSpPr bwMode="auto">
-          <a:xfrm flipH="0" flipV="0">
+          <a:xfrm>
             <a:off x="19937514" y="8168407"/>
             <a:ext cx="8892707" cy="9776691"/>
             <a:chOff x="0" y="0"/>
@@ -1564,12 +1468,12 @@
         </p:grpSpPr>
         <p:sp>
           <p:nvSpPr>
-            <p:cNvPr id="1649300553" name=""/>
+            <p:cNvPr id="1649300553" name="Rechteck 1649300552"/>
             <p:cNvSpPr/>
             <p:nvPr/>
           </p:nvSpPr>
           <p:spPr bwMode="auto">
-            <a:xfrm flipH="0" flipV="0">
+            <a:xfrm>
               <a:off x="0" y="533443"/>
               <a:ext cx="8892707" cy="9243248"/>
             </a:xfrm>
@@ -1586,22 +1490,23 @@
           </p:spPr>
           <p:txBody>
             <a:bodyPr lIns="89992" tIns="44995" rIns="89992" bIns="44995" anchor="ctr"/>
+            <a:lstStyle/>
             <a:p>
               <a:pPr>
                 <a:defRPr/>
               </a:pPr>
-              <a:endParaRPr/>
+              <a:endParaRPr lang="en-US" noProof="0" dirty="0"/>
             </a:p>
           </p:txBody>
         </p:sp>
         <p:sp>
           <p:nvSpPr>
-            <p:cNvPr id="576284473" name=""/>
+            <p:cNvPr id="576284473" name="Textfeld 576284472"/>
             <p:cNvSpPr txBox="1"/>
             <p:nvPr/>
           </p:nvSpPr>
           <p:spPr bwMode="auto">
-            <a:xfrm flipH="0" flipV="0">
+            <a:xfrm>
               <a:off x="172692" y="0"/>
               <a:ext cx="4008171" cy="913311"/>
             </a:xfrm>
@@ -1626,31 +1531,31 @@
                 <a:defRPr/>
               </a:pPr>
               <a:r>
-                <a:rPr lang="de-DE" sz="5400" b="1" strike="noStrike" cap="small">
+                <a:rPr lang="en-US" sz="5400" b="1" strike="noStrike" cap="small" noProof="0" dirty="0">
                   <a:latin typeface="Liberation Serif"/>
                 </a:rPr>
                 <a:t>Conclusion</a:t>
               </a:r>
-              <a:endParaRPr sz="5400"/>
+              <a:endParaRPr lang="en-US" sz="5400" noProof="0" dirty="0"/>
             </a:p>
           </p:txBody>
         </p:sp>
       </p:grpSp>
       <p:pic>
         <p:nvPicPr>
-          <p:cNvPr id="1531159627" name=""/>
+          <p:cNvPr id="1531159627" name="Grafik 1531159626"/>
           <p:cNvPicPr>
             <a:picLocks noChangeAspect="1"/>
           </p:cNvPicPr>
           <p:nvPr/>
         </p:nvPicPr>
         <p:blipFill>
-          <a:blip r:embed="rId7"/>
+          <a:blip r:embed="rId6"/>
           <a:stretch/>
         </p:blipFill>
         <p:spPr bwMode="auto">
-          <a:xfrm flipH="0" flipV="0">
-            <a:off x="10841272" y="10502481"/>
+          <a:xfrm>
+            <a:off x="10840818" y="9512011"/>
             <a:ext cx="8580975" cy="5910147"/>
           </a:xfrm>
           <a:prstGeom prst="rect">
@@ -1660,12 +1565,12 @@
       </p:pic>
       <p:sp>
         <p:nvSpPr>
-          <p:cNvPr id="410206753" name=""/>
+          <p:cNvPr id="410206753" name="Textfeld 410206752"/>
           <p:cNvSpPr txBox="1"/>
           <p:nvPr/>
         </p:nvSpPr>
         <p:spPr bwMode="auto">
-          <a:xfrm flipH="0" flipV="0">
+          <a:xfrm>
             <a:off x="20197884" y="9209228"/>
             <a:ext cx="8286419" cy="8049838"/>
           </a:xfrm>
@@ -1690,7 +1595,7 @@
               <a:defRPr/>
             </a:pPr>
             <a:r>
-              <a:rPr lang="en-GB" sz="4000" b="1" i="0" u="none" strike="noStrike" cap="none" spc="0">
+              <a:rPr lang="en-US" sz="4000" b="1" i="0" u="none" strike="noStrike" cap="none" spc="0" noProof="0" dirty="0">
                 <a:solidFill>
                   <a:srgbClr val="000000"/>
                 </a:solidFill>
@@ -1701,7 +1606,7 @@
               <a:t>Medium vocabularies</a:t>
             </a:r>
             <a:r>
-              <a:rPr lang="en-GB" sz="4000" b="0" i="0" u="none" strike="noStrike" cap="none" spc="0">
+              <a:rPr lang="en-US" sz="4000" b="0" i="0" u="none" strike="noStrike" cap="none" spc="0" noProof="0" dirty="0">
                 <a:solidFill>
                   <a:srgbClr val="000000"/>
                 </a:solidFill>
@@ -1709,49 +1614,8 @@
                 <a:ea typeface="Liberation Sans"/>
                 <a:cs typeface="Liberation Sans"/>
               </a:rPr>
-              <a:t> (|V| ∈ {10, 16})</a:t>
-            </a:r>
-            <a:r>
-              <a:rPr lang="de-DE" sz="4000" b="0" i="0" u="none" strike="noStrike" cap="none" spc="0">
-                <a:solidFill>
-                  <a:srgbClr val="000000"/>
-                </a:solidFill>
-                <a:latin typeface="Liberation Sans"/>
-                <a:ea typeface="Liberation Sans"/>
-                <a:cs typeface="Liberation Sans"/>
-              </a:rPr>
-              <a:t> </a:t>
-            </a:r>
-            <a:r>
-              <a:rPr lang="de-DE" sz="4000" b="0" i="0" u="none" strike="noStrike" cap="none" spc="0">
-                <a:solidFill>
-                  <a:srgbClr val="000000"/>
-                </a:solidFill>
-                <a:latin typeface="Liberation Sans"/>
-                <a:ea typeface="Liberation Sans"/>
-                <a:cs typeface="Liberation Sans"/>
-              </a:rPr>
-              <a:t>and message lengths (n ∈ {2, 4}) per</a:t>
-            </a:r>
-            <a:r>
-              <a:rPr lang="de-DE" sz="4000" b="0" i="0" u="none" strike="noStrike" cap="none" spc="0">
-                <a:solidFill>
-                  <a:srgbClr val="000000"/>
-                </a:solidFill>
-                <a:latin typeface="Liberation Sans"/>
-                <a:ea typeface="Liberation Sans"/>
-                <a:cs typeface="Liberation Sans"/>
-              </a:rPr>
-              <a:t>form best</a:t>
-            </a:r>
-            <a:endParaRPr lang="de-DE" sz="4000" b="0" i="0" u="none" strike="noStrike" cap="none" spc="0">
-              <a:solidFill>
-                <a:srgbClr val="000000"/>
-              </a:solidFill>
-              <a:latin typeface="Liberation Sans"/>
-              <a:ea typeface="Liberation Sans"/>
-              <a:cs typeface="Liberation Sans"/>
-            </a:endParaRPr>
+              <a:t> (|V| ∈ {10, 16}) and message lengths (n ∈ {2, 4}) perform best</a:t>
+            </a:r>
           </a:p>
           <a:p>
             <a:pPr marL="526195" indent="-526195">
@@ -1760,7 +1624,7 @@
               <a:defRPr/>
             </a:pPr>
             <a:r>
-              <a:rPr lang="en-GB" sz="4000" b="0" i="0" u="none" strike="noStrike" cap="none" spc="0">
+              <a:rPr lang="en-US" sz="4000" b="0" i="0" u="none" strike="noStrike" cap="none" spc="0" noProof="0" dirty="0">
                 <a:solidFill>
                   <a:srgbClr val="000000"/>
                 </a:solidFill>
@@ -1768,10 +1632,10 @@
                 <a:ea typeface="Liberation Sans"/>
                 <a:cs typeface="Liberation Sans"/>
               </a:rPr>
-              <a:t>Scene complexity (number of distrac</a:t>
-            </a:r>
-            <a:r>
-              <a:rPr lang="en-GB" sz="4000" b="0" i="0" u="none" strike="noStrike" cap="none" spc="0">
+              <a:t>Scene complexity (</a:t>
+            </a:r>
+            <a:r>
+              <a:rPr lang="en-US" sz="4000" b="1" i="0" u="none" strike="noStrike" cap="none" spc="0" noProof="0" dirty="0">
                 <a:solidFill>
                   <a:srgbClr val="000000"/>
                 </a:solidFill>
@@ -1779,20 +1643,10 @@
                 <a:ea typeface="Liberation Sans"/>
                 <a:cs typeface="Liberation Sans"/>
               </a:rPr>
-              <a:t>tors, number of features) dramatically</a:t>
-            </a:r>
-            <a:r>
-              <a:rPr lang="de-DE" sz="4000" b="0" i="0" u="none" strike="noStrike" cap="none" spc="0">
-                <a:solidFill>
-                  <a:srgbClr val="000000"/>
-                </a:solidFill>
-                <a:latin typeface="Liberation Sans"/>
-                <a:cs typeface="Liberation Sans"/>
-              </a:rPr>
-              <a:t> </a:t>
-            </a:r>
-            <a:r>
-              <a:rPr lang="en-GB" sz="4000" b="0" i="0" u="none" strike="noStrike" cap="none" spc="0">
+              <a:t>number of distractors, number of features</a:t>
+            </a:r>
+            <a:r>
+              <a:rPr lang="en-US" sz="4000" b="0" i="0" u="none" strike="noStrike" cap="none" spc="0" noProof="0" dirty="0">
                 <a:solidFill>
                   <a:srgbClr val="000000"/>
                 </a:solidFill>
@@ -1800,10 +1654,20 @@
                 <a:ea typeface="Liberation Sans"/>
                 <a:cs typeface="Liberation Sans"/>
               </a:rPr>
-              <a:t>impacts</a:t>
-            </a:r>
-            <a:r>
-              <a:rPr lang="de-DE" sz="4000" b="0" i="0" u="none" strike="noStrike" cap="none" spc="0">
+              <a:t>) dramatically</a:t>
+            </a:r>
+            <a:r>
+              <a:rPr lang="en-US" sz="4000" b="0" i="0" u="none" strike="noStrike" cap="none" spc="0" noProof="0" dirty="0">
+                <a:solidFill>
+                  <a:srgbClr val="000000"/>
+                </a:solidFill>
+                <a:latin typeface="Liberation Sans"/>
+                <a:cs typeface="Liberation Sans"/>
+              </a:rPr>
+              <a:t> </a:t>
+            </a:r>
+            <a:r>
+              <a:rPr lang="en-US" sz="4000" b="0" i="0" u="none" strike="noStrike" cap="none" spc="0" noProof="0" dirty="0">
                 <a:solidFill>
                   <a:srgbClr val="000000"/>
                 </a:solidFill>
@@ -1811,20 +1675,9 @@
                 <a:ea typeface="Liberation Sans"/>
                 <a:cs typeface="Liberation Sans"/>
               </a:rPr>
-              <a:t> c</a:t>
-            </a:r>
-            <a:r>
-              <a:rPr lang="en-GB" sz="4000" b="0" i="0" u="none" strike="noStrike" cap="none" spc="0">
-                <a:solidFill>
-                  <a:srgbClr val="000000"/>
-                </a:solidFill>
-                <a:latin typeface="Liberation Sans"/>
-                <a:ea typeface="Liberation Sans"/>
-                <a:cs typeface="Liberation Sans"/>
-              </a:rPr>
-              <a:t>ommunication success</a:t>
-            </a:r>
-            <a:endParaRPr/>
+              <a:t>impacts communication success</a:t>
+            </a:r>
+            <a:endParaRPr lang="en-US" noProof="0" dirty="0"/>
           </a:p>
           <a:p>
             <a:pPr marL="526195" indent="-526195">
@@ -1833,7 +1686,7 @@
               <a:defRPr/>
             </a:pPr>
             <a:r>
-              <a:rPr lang="en-GB" sz="4000" b="1" i="0" u="none" strike="noStrike" cap="none" spc="0">
+              <a:rPr lang="en-US" sz="4000" b="1" i="0" u="none" strike="noStrike" cap="none" spc="0" noProof="0" dirty="0">
                 <a:solidFill>
                   <a:srgbClr val="000000"/>
                 </a:solidFill>
@@ -1844,7 +1697,7 @@
               <a:t>Shape</a:t>
             </a:r>
             <a:r>
-              <a:rPr lang="en-GB" sz="4000" b="0" i="0" u="none" strike="noStrike" cap="none" spc="0">
+              <a:rPr lang="en-US" sz="4000" b="0" i="0" u="none" strike="noStrike" cap="none" spc="0" noProof="0" dirty="0">
                 <a:solidFill>
                   <a:srgbClr val="000000"/>
                 </a:solidFill>
@@ -1855,7 +1708,7 @@
               <a:t> attributes </a:t>
             </a:r>
             <a:r>
-              <a:rPr lang="en-GB" sz="4000" b="1" i="0" u="none" strike="noStrike" cap="none" spc="0">
+              <a:rPr lang="en-US" sz="4000" b="1" i="0" u="none" strike="noStrike" cap="none" spc="0" noProof="0" dirty="0">
                 <a:solidFill>
                   <a:srgbClr val="000000"/>
                 </a:solidFill>
@@ -1866,7 +1719,7 @@
               <a:t>easiest </a:t>
             </a:r>
             <a:r>
-              <a:rPr lang="en-GB" sz="4000" b="0" i="0" u="none" strike="noStrike" cap="none" spc="0">
+              <a:rPr lang="en-US" sz="4000" b="0" i="0" u="none" strike="noStrike" cap="none" spc="0" noProof="0" dirty="0">
                 <a:solidFill>
                   <a:srgbClr val="000000"/>
                 </a:solidFill>
@@ -1877,7 +1730,7 @@
               <a:t>to learn, </a:t>
             </a:r>
             <a:r>
-              <a:rPr lang="en-GB" sz="4000" b="1" i="0" u="none" strike="noStrike" cap="none" spc="0">
+              <a:rPr lang="en-US" sz="4000" b="1" i="0" u="none" strike="noStrike" cap="none" spc="0" noProof="0" dirty="0">
                 <a:solidFill>
                   <a:srgbClr val="000000"/>
                 </a:solidFill>
@@ -1888,7 +1741,7 @@
               <a:t>size</a:t>
             </a:r>
             <a:r>
-              <a:rPr lang="de-DE" sz="4000" b="1" i="0" u="none" strike="noStrike" cap="none" spc="0">
+              <a:rPr lang="en-US" sz="4000" b="1" i="0" u="none" strike="noStrike" cap="none" spc="0" noProof="0" dirty="0">
                 <a:solidFill>
                   <a:srgbClr val="000000"/>
                 </a:solidFill>
@@ -1898,7 +1751,7 @@
               <a:t> </a:t>
             </a:r>
             <a:r>
-              <a:rPr lang="en-GB" sz="4000" b="0" i="0" u="none" strike="noStrike" cap="none" spc="0">
+              <a:rPr lang="en-US" sz="4000" b="0" i="0" u="none" strike="noStrike" cap="none" spc="0" noProof="0" dirty="0">
                 <a:solidFill>
                   <a:srgbClr val="000000"/>
                 </a:solidFill>
@@ -1909,7 +1762,7 @@
               <a:t>attributes </a:t>
             </a:r>
             <a:r>
-              <a:rPr lang="en-GB" sz="4000" b="1" i="0" u="none" strike="noStrike" cap="none" spc="0">
+              <a:rPr lang="en-US" sz="4000" b="1" i="0" u="none" strike="noStrike" cap="none" spc="0" noProof="0" dirty="0">
                 <a:solidFill>
                   <a:srgbClr val="000000"/>
                 </a:solidFill>
@@ -1919,14 +1772,6 @@
               </a:rPr>
               <a:t>most challenging</a:t>
             </a:r>
-            <a:endParaRPr sz="4000" b="1" i="0" u="none" strike="noStrike" cap="none" spc="0">
-              <a:solidFill>
-                <a:srgbClr val="000000"/>
-              </a:solidFill>
-              <a:latin typeface="Liberation Sans"/>
-              <a:ea typeface="Liberation Sans"/>
-              <a:cs typeface="Liberation Sans"/>
-            </a:endParaRPr>
           </a:p>
           <a:p>
             <a:pPr marL="526195" indent="-526195">
@@ -1935,7 +1780,7 @@
               <a:defRPr/>
             </a:pPr>
             <a:r>
-              <a:rPr lang="en-GB" sz="4000" b="0" i="0" u="none" strike="noStrike" cap="none" spc="0">
+              <a:rPr lang="en-US" sz="4000" b="0" i="0" u="none" strike="noStrike" cap="none" spc="0" noProof="0" dirty="0">
                 <a:solidFill>
                   <a:srgbClr val="000000"/>
                 </a:solidFill>
@@ -1943,10 +1788,20 @@
                 <a:ea typeface="Liberation Sans"/>
                 <a:cs typeface="Liberation Sans"/>
               </a:rPr>
-              <a:t>Future: Analyze linguistic </a:t>
-            </a:r>
-            <a:r>
-              <a:rPr lang="de-DE" sz="4000" b="0" i="0" u="none" strike="noStrike" cap="none" spc="0">
+              <a:t>Future: Analyze linguistic properties of</a:t>
+            </a:r>
+            <a:r>
+              <a:rPr lang="en-US" sz="4000" b="0" i="0" u="none" strike="noStrike" cap="none" spc="0" noProof="0" dirty="0">
+                <a:solidFill>
+                  <a:srgbClr val="000000"/>
+                </a:solidFill>
+                <a:latin typeface="Liberation Sans"/>
+                <a:cs typeface="Liberation Sans"/>
+              </a:rPr>
+              <a:t> </a:t>
+            </a:r>
+            <a:r>
+              <a:rPr lang="en-US" sz="4000" b="0" i="0" u="none" strike="noStrike" cap="none" spc="0" noProof="0" dirty="0">
                 <a:solidFill>
                   <a:srgbClr val="000000"/>
                 </a:solidFill>
@@ -1954,41 +1809,9 @@
                 <a:ea typeface="Liberation Sans"/>
                 <a:cs typeface="Liberation Sans"/>
               </a:rPr>
-              <a:t>p</a:t>
-            </a:r>
-            <a:r>
-              <a:rPr lang="en-GB" sz="4000" b="0" i="0" u="none" strike="noStrike" cap="none" spc="0">
-                <a:solidFill>
-                  <a:srgbClr val="000000"/>
-                </a:solidFill>
-                <a:latin typeface="Liberation Sans"/>
-                <a:ea typeface="Liberation Sans"/>
-                <a:cs typeface="Liberation Sans"/>
-              </a:rPr>
-              <a:t>roperties of</a:t>
-            </a:r>
-            <a:r>
-              <a:rPr lang="de-DE" sz="4000" b="0" i="0" u="none" strike="noStrike" cap="none" spc="0">
-                <a:solidFill>
-                  <a:srgbClr val="000000"/>
-                </a:solidFill>
-                <a:latin typeface="Liberation Sans"/>
-                <a:cs typeface="Liberation Sans"/>
-              </a:rPr>
-              <a:t> </a:t>
-            </a:r>
-            <a:r>
-              <a:rPr lang="en-GB" sz="4000" b="0" i="0" u="none" strike="noStrike" cap="none" spc="0">
-                <a:solidFill>
-                  <a:srgbClr val="000000"/>
-                </a:solidFill>
-                <a:latin typeface="Liberation Sans"/>
-                <a:ea typeface="Liberation Sans"/>
-                <a:cs typeface="Liberation Sans"/>
-              </a:rPr>
               <a:t>emergent languages</a:t>
             </a:r>
-            <a:endParaRPr lang="en-GB" sz="4000" b="0" i="0" u="none" strike="noStrike" cap="none" spc="0">
+            <a:endParaRPr lang="en-US" sz="4000" b="0" i="0" u="none" strike="noStrike" cap="none" spc="0" noProof="0" dirty="0">
               <a:solidFill>
                 <a:srgbClr val="000000"/>
               </a:solidFill>
@@ -2000,20 +1823,20 @@
       </p:sp>
       <p:pic>
         <p:nvPicPr>
-          <p:cNvPr id="715971263" name=""/>
+          <p:cNvPr id="715971263" name="Grafik 715971262"/>
           <p:cNvPicPr>
             <a:picLocks noChangeAspect="1"/>
           </p:cNvPicPr>
           <p:nvPr/>
         </p:nvPicPr>
         <p:blipFill>
-          <a:blip r:embed="rId8"/>
+          <a:blip r:embed="rId7"/>
           <a:stretch/>
         </p:blipFill>
         <p:spPr bwMode="auto">
-          <a:xfrm flipH="0" flipV="0">
-            <a:off x="20997799" y="20358450"/>
-            <a:ext cx="7676623" cy="5117748"/>
+          <a:xfrm>
+            <a:off x="20982123" y="19837403"/>
+            <a:ext cx="7692300" cy="5186826"/>
           </a:xfrm>
           <a:prstGeom prst="rect">
             <a:avLst/>
@@ -2022,12 +1845,12 @@
       </p:pic>
       <p:sp>
         <p:nvSpPr>
-          <p:cNvPr id="1953644601" name=""/>
+          <p:cNvPr id="1953644601" name="Textfeld 1953644600"/>
           <p:cNvSpPr txBox="1"/>
           <p:nvPr/>
         </p:nvSpPr>
         <p:spPr bwMode="auto">
-          <a:xfrm rot="0" flipH="0" flipV="0">
+          <a:xfrm>
             <a:off x="1337400" y="41206799"/>
             <a:ext cx="12421319" cy="518519"/>
           </a:xfrm>
@@ -2037,34 +1860,34 @@
           <a:noFill/>
         </p:spPr>
         <p:txBody>
-          <a:bodyPr vertOverflow="overflow" horzOverflow="overflow" vert="horz" wrap="square" lIns="91440" tIns="45720" rIns="91440" bIns="45720" numCol="1" spcCol="0" rtlCol="0" fromWordArt="0" anchor="t" anchorCtr="0" forceAA="0" upright="0" compatLnSpc="0">
+          <a:bodyPr vertOverflow="overflow" horzOverflow="overflow" vert="horz" wrap="square" lIns="91440" tIns="45720" rIns="91440" bIns="45720" numCol="1" spcCol="0" rtlCol="0" fromWordArt="0" anchor="t" anchorCtr="0" forceAA="0" compatLnSpc="0">
             <a:spAutoFit/>
           </a:bodyPr>
+          <a:lstStyle/>
           <a:p>
             <a:pPr>
               <a:defRPr/>
             </a:pPr>
             <a:r>
-              <a:rPr lang="de-DE" sz="2800"/>
+              <a:rPr lang="en-US" sz="2800" noProof="0" dirty="0"/>
               <a:t>16th International Conference on Computational Semantics (IWCS 2025)</a:t>
             </a:r>
-            <a:endParaRPr sz="2800"/>
           </a:p>
         </p:txBody>
       </p:sp>
       <p:pic>
         <p:nvPicPr>
-          <p:cNvPr id="207079131" name=""/>
+          <p:cNvPr id="207079131" name="Grafik 207079130"/>
           <p:cNvPicPr>
             <a:picLocks noChangeAspect="1"/>
           </p:cNvPicPr>
           <p:nvPr/>
         </p:nvPicPr>
         <p:blipFill>
-          <a:blip r:embed="rId9">
+          <a:blip r:embed="rId8">
             <a:extLst>
               <a:ext uri="{96DAC541-7B7A-43D3-8B79-37D633B846F1}">
-                <asvg:svgBlip xmlns:asvg="http://schemas.microsoft.com/office/drawing/2016/SVG/main" r:embed="rId10"/>
+                <asvg:svgBlip xmlns:asvg="http://schemas.microsoft.com/office/drawing/2016/SVG/main" r:embed="rId9"/>
               </a:ext>
             </a:extLst>
           </a:blip>
@@ -2082,13 +1905,13 @@
       </p:pic>
       <p:sp>
         <p:nvSpPr>
-          <p:cNvPr id="1464513698" name=""/>
+          <p:cNvPr id="1464513698" name="Textfeld 1464513697"/>
           <p:cNvSpPr txBox="1"/>
           <p:nvPr/>
         </p:nvSpPr>
         <p:spPr bwMode="auto">
-          <a:xfrm rot="0" flipH="0" flipV="0">
-            <a:off x="14460396" y="19305087"/>
+          <a:xfrm>
+            <a:off x="14587760" y="18880199"/>
             <a:ext cx="4196399" cy="913311"/>
           </a:xfrm>
           <a:prstGeom prst="rect">
@@ -2110,30 +1933,24 @@
               <a:defRPr/>
             </a:pPr>
             <a:r>
-              <a:rPr sz="5400" b="1" strike="noStrike">
+              <a:rPr lang="en-US" sz="5400" b="1" strike="noStrike" noProof="0" dirty="0">
                 <a:latin typeface="Liberation Serif"/>
               </a:rPr>
-              <a:t>Dale</a:t>
-            </a:r>
-            <a:r>
-              <a:rPr lang="de-DE" sz="5400" b="1" strike="noStrike">
-                <a:latin typeface="Liberation Serif"/>
-              </a:rPr>
-              <a:t>-5</a:t>
-            </a:r>
-            <a:endParaRPr sz="5400"/>
+              <a:t>Dale-5</a:t>
+            </a:r>
+            <a:endParaRPr lang="en-US" sz="5400" noProof="0" dirty="0"/>
           </a:p>
         </p:txBody>
       </p:sp>
       <p:sp>
         <p:nvSpPr>
-          <p:cNvPr id="42616494" name=""/>
+          <p:cNvPr id="42616494" name="Textfeld 42616493"/>
           <p:cNvSpPr txBox="1"/>
           <p:nvPr/>
         </p:nvSpPr>
         <p:spPr bwMode="auto">
-          <a:xfrm rot="0" flipH="0" flipV="0">
-            <a:off x="22605420" y="19305087"/>
+          <a:xfrm>
+            <a:off x="22574252" y="18884565"/>
             <a:ext cx="4461381" cy="913311"/>
           </a:xfrm>
           <a:prstGeom prst="rect">
@@ -2155,18 +1972,40 @@
               <a:defRPr/>
             </a:pPr>
             <a:r>
-              <a:rPr lang="de-DE" sz="5400" b="1" strike="noStrike">
+              <a:rPr lang="en-US" sz="5400" b="1" strike="noStrike" noProof="0" dirty="0">
                 <a:latin typeface="Liberation Serif"/>
               </a:rPr>
               <a:t>CLEVR Color</a:t>
             </a:r>
-            <a:endParaRPr sz="5400"/>
+            <a:endParaRPr lang="en-US" sz="5400" noProof="0" dirty="0"/>
           </a:p>
         </p:txBody>
       </p:sp>
       <p:pic>
         <p:nvPicPr>
-          <p:cNvPr id="182970423" name=""/>
+          <p:cNvPr id="182970423" name="Grafik 182970422"/>
+          <p:cNvPicPr>
+            <a:picLocks noChangeAspect="1"/>
+          </p:cNvPicPr>
+          <p:nvPr/>
+        </p:nvPicPr>
+        <p:blipFill>
+          <a:blip r:embed="rId10"/>
+          <a:stretch/>
+        </p:blipFill>
+        <p:spPr bwMode="auto">
+          <a:xfrm>
+            <a:off x="20708641" y="34144462"/>
+            <a:ext cx="8037683" cy="6262236"/>
+          </a:xfrm>
+          <a:prstGeom prst="rect">
+            <a:avLst/>
+          </a:prstGeom>
+        </p:spPr>
+      </p:pic>
+      <p:pic>
+        <p:nvPicPr>
+          <p:cNvPr id="1399311798" name="Grafik 1399311797"/>
           <p:cNvPicPr>
             <a:picLocks noChangeAspect="1"/>
           </p:cNvPicPr>
@@ -2177,9 +2016,9 @@
           <a:stretch/>
         </p:blipFill>
         <p:spPr bwMode="auto">
-          <a:xfrm flipH="0" flipV="0">
-            <a:off x="20997799" y="34316792"/>
-            <a:ext cx="7886206" cy="6144219"/>
+          <a:xfrm>
+            <a:off x="4426165" y="34142504"/>
+            <a:ext cx="8040197" cy="6264194"/>
           </a:xfrm>
           <a:prstGeom prst="rect">
             <a:avLst/>
@@ -2188,7 +2027,7 @@
       </p:pic>
       <p:pic>
         <p:nvPicPr>
-          <p:cNvPr id="1399311798" name=""/>
+          <p:cNvPr id="1109880375" name="Grafik 1109880374"/>
           <p:cNvPicPr>
             <a:picLocks noChangeAspect="1"/>
           </p:cNvPicPr>
@@ -2199,31 +2038,9 @@
           <a:stretch/>
         </p:blipFill>
         <p:spPr bwMode="auto">
-          <a:xfrm flipH="0" flipV="0">
-            <a:off x="4426165" y="34142504"/>
-            <a:ext cx="8040197" cy="6264194"/>
-          </a:xfrm>
-          <a:prstGeom prst="rect">
-            <a:avLst/>
-          </a:prstGeom>
-        </p:spPr>
-      </p:pic>
-      <p:pic>
-        <p:nvPicPr>
-          <p:cNvPr id="1109880375" name=""/>
-          <p:cNvPicPr>
-            <a:picLocks noChangeAspect="1"/>
-          </p:cNvPicPr>
-          <p:nvPr/>
-        </p:nvPicPr>
-        <p:blipFill>
-          <a:blip r:embed="rId13"/>
-          <a:stretch/>
-        </p:blipFill>
-        <p:spPr bwMode="auto">
-          <a:xfrm flipH="0" flipV="0">
-            <a:off x="12771656" y="34392992"/>
-            <a:ext cx="7886206" cy="6144219"/>
+          <a:xfrm>
+            <a:off x="12642790" y="34143718"/>
+            <a:ext cx="8038638" cy="6262980"/>
           </a:xfrm>
           <a:prstGeom prst="rect">
             <a:avLst/>
@@ -2232,11 +2049,17 @@
       </p:pic>
       <p:graphicFrame>
         <p:nvGraphicFramePr>
-          <p:cNvPr id="1863437106" name=""/>
+          <p:cNvPr id="1863437106" name="Tabelle 1863437105"/>
           <p:cNvGraphicFramePr>
-            <a:graphicFrameLocks xmlns:a="http://schemas.openxmlformats.org/drawingml/2006/main"/>
+            <a:graphicFrameLocks/>
           </p:cNvGraphicFramePr>
-          <p:nvPr/>
+          <p:nvPr>
+            <p:extLst>
+              <p:ext uri="{D42A27DB-BD31-4B8C-83A1-F6EECF244321}">
+                <p14:modId xmlns:p14="http://schemas.microsoft.com/office/powerpoint/2010/main" val="3638884200"/>
+              </p:ext>
+            </p:extLst>
+          </p:nvPr>
         </p:nvGraphicFramePr>
         <p:xfrm>
           <a:off x="1560304" y="26500199"/>
@@ -2245,169 +2068,267 @@
         <a:graphic>
           <a:graphicData uri="http://schemas.openxmlformats.org/drawingml/2006/table">
             <a:tbl>
-              <a:tblPr firstRow="0" firstCol="0" lastRow="0" lastCol="0" bandRow="0" bandCol="0">
+              <a:tblPr>
                 <a:tableStyleId>{7E9639D4-E3E2-4D34-9284-5A2195B3D0D7}</a:tableStyleId>
               </a:tblPr>
               <a:tblGrid>
-                <a:gridCol w="2340000"/>
-                <a:gridCol w="8460000"/>
-                <a:gridCol w="8280000"/>
-                <a:gridCol w="7843999"/>
+                <a:gridCol w="2919324">
+                  <a:extLst>
+                    <a:ext uri="{9D8B030D-6E8A-4147-A177-3AD203B41FA5}">
+                      <a16:colId xmlns:a16="http://schemas.microsoft.com/office/drawing/2014/main" val="20000"/>
+                    </a:ext>
+                  </a:extLst>
+                </a:gridCol>
+                <a:gridCol w="8136904">
+                  <a:extLst>
+                    <a:ext uri="{9D8B030D-6E8A-4147-A177-3AD203B41FA5}">
+                      <a16:colId xmlns:a16="http://schemas.microsoft.com/office/drawing/2014/main" val="20001"/>
+                    </a:ext>
+                  </a:extLst>
+                </a:gridCol>
+                <a:gridCol w="8136904">
+                  <a:extLst>
+                    <a:ext uri="{9D8B030D-6E8A-4147-A177-3AD203B41FA5}">
+                      <a16:colId xmlns:a16="http://schemas.microsoft.com/office/drawing/2014/main" val="20002"/>
+                    </a:ext>
+                  </a:extLst>
+                </a:gridCol>
+                <a:gridCol w="7730867">
+                  <a:extLst>
+                    <a:ext uri="{9D8B030D-6E8A-4147-A177-3AD203B41FA5}">
+                      <a16:colId xmlns:a16="http://schemas.microsoft.com/office/drawing/2014/main" val="20003"/>
+                    </a:ext>
+                  </a:extLst>
+                </a:gridCol>
               </a:tblGrid>
               <a:tr h="1259119">
                 <a:tc>
                   <a:txBody>
                     <a:bodyPr/>
+                    <a:lstStyle/>
                     <a:p>
                       <a:pPr algn="r">
                         <a:defRPr/>
                       </a:pPr>
                       <a:r>
-                        <a:rPr lang="de-DE" sz="3600" b="1"/>
-                        <a:t>Overall accuracy</a:t>
+                        <a:rPr lang="de-DE" sz="3600" b="1" dirty="0" err="1"/>
+                        <a:t>Strict</a:t>
                       </a:r>
-                      <a:endParaRPr sz="3600" b="1"/>
+                      <a:r>
+                        <a:rPr lang="de-DE" sz="3600" b="1" dirty="0"/>
+                        <a:t> </a:t>
+                      </a:r>
+                      <a:r>
+                        <a:rPr lang="de-DE" sz="3600" b="1" dirty="0" err="1"/>
+                        <a:t>string</a:t>
+                      </a:r>
+                      <a:r>
+                        <a:rPr lang="de-DE" sz="3600" b="1" dirty="0"/>
+                        <a:t> </a:t>
+                      </a:r>
+                      <a:r>
+                        <a:rPr lang="de-DE" sz="3600" b="1" dirty="0" err="1"/>
+                        <a:t>accuracy</a:t>
+                      </a:r>
+                      <a:endParaRPr sz="3600" b="1" dirty="0"/>
                     </a:p>
                   </a:txBody>
                   <a:tcPr anchor="ctr">
                     <a:lnL w="6349" algn="ctr">
-                      <a:solidFill>
-                        <a:srgbClr val="000000"/>
-                      </a:solidFill>
+                      <a:noFill/>
                     </a:lnL>
                     <a:lnR w="6349" algn="ctr">
-                      <a:solidFill>
-                        <a:srgbClr val="000000"/>
-                      </a:solidFill>
+                      <a:noFill/>
                     </a:lnR>
                     <a:lnT w="6349" algn="ctr">
-                      <a:solidFill>
-                        <a:srgbClr val="000000"/>
-                      </a:solidFill>
+                      <a:noFill/>
                     </a:lnT>
-                    <a:lnB w="12699" algn="ctr">
-                      <a:solidFill>
-                        <a:srgbClr val="000000"/>
-                      </a:solidFill>
+                    <a:lnB w="57150" cap="flat" cmpd="sng" algn="ctr">
+                      <a:solidFill>
+                        <a:schemeClr val="tx1"/>
+                      </a:solidFill>
+                      <a:prstDash val="solid"/>
+                      <a:round/>
+                      <a:headEnd type="none" w="med" len="med"/>
+                      <a:tailEnd type="none" w="med" len="med"/>
                     </a:lnB>
+                    <a:lnTlToBr w="12700" cmpd="sng">
+                      <a:noFill/>
+                      <a:prstDash val="solid"/>
+                    </a:lnTlToBr>
+                    <a:lnBlToTr w="12700" cmpd="sng">
+                      <a:noFill/>
+                      <a:prstDash val="solid"/>
+                    </a:lnBlToTr>
                   </a:tcPr>
                 </a:tc>
                 <a:tc>
                   <a:txBody>
                     <a:bodyPr/>
+                    <a:lstStyle/>
                     <a:p>
                       <a:pPr algn="ctr">
                         <a:defRPr/>
                       </a:pPr>
                       <a:r>
-                        <a:rPr lang="de-DE" sz="3600"/>
+                        <a:rPr lang="de-DE" sz="3600" dirty="0"/>
                         <a:t>99%</a:t>
                       </a:r>
-                      <a:endParaRPr sz="3600"/>
+                      <a:endParaRPr sz="3600" dirty="0"/>
                     </a:p>
                   </a:txBody>
                   <a:tcPr anchor="ctr">
                     <a:lnL w="6349" algn="ctr">
-                      <a:solidFill>
-                        <a:srgbClr val="000000"/>
-                      </a:solidFill>
+                      <a:noFill/>
                     </a:lnL>
-                    <a:lnR w="6349" algn="ctr">
-                      <a:solidFill>
-                        <a:srgbClr val="000000"/>
-                      </a:solidFill>
+                    <a:lnR w="12700" cap="flat" cmpd="sng" algn="ctr">
+                      <a:solidFill>
+                        <a:schemeClr val="tx1"/>
+                      </a:solidFill>
+                      <a:prstDash val="solid"/>
+                      <a:round/>
+                      <a:headEnd type="none" w="med" len="med"/>
+                      <a:tailEnd type="none" w="med" len="med"/>
                     </a:lnR>
                     <a:lnT w="6349" algn="ctr">
-                      <a:solidFill>
-                        <a:srgbClr val="000000"/>
-                      </a:solidFill>
+                      <a:noFill/>
                     </a:lnT>
-                    <a:lnB w="12699" algn="ctr">
-                      <a:solidFill>
-                        <a:srgbClr val="000000"/>
-                      </a:solidFill>
+                    <a:lnB w="57150" cap="flat" cmpd="sng" algn="ctr">
+                      <a:solidFill>
+                        <a:schemeClr val="tx1"/>
+                      </a:solidFill>
+                      <a:prstDash val="solid"/>
+                      <a:round/>
+                      <a:headEnd type="none" w="med" len="med"/>
+                      <a:tailEnd type="none" w="med" len="med"/>
                     </a:lnB>
+                    <a:lnTlToBr w="12700" cmpd="sng">
+                      <a:noFill/>
+                      <a:prstDash val="solid"/>
+                    </a:lnTlToBr>
+                    <a:lnBlToTr w="12700" cmpd="sng">
+                      <a:noFill/>
+                      <a:prstDash val="solid"/>
+                    </a:lnBlToTr>
                   </a:tcPr>
                 </a:tc>
                 <a:tc>
                   <a:txBody>
                     <a:bodyPr/>
+                    <a:lstStyle/>
                     <a:p>
                       <a:pPr algn="ctr">
                         <a:defRPr/>
                       </a:pPr>
                       <a:r>
-                        <a:rPr lang="de-DE" sz="3600"/>
+                        <a:rPr lang="de-DE" sz="3600" dirty="0"/>
                         <a:t>69%</a:t>
                       </a:r>
-                      <a:endParaRPr sz="3600"/>
+                      <a:endParaRPr sz="3600" dirty="0"/>
                     </a:p>
                   </a:txBody>
                   <a:tcPr anchor="ctr">
-                    <a:lnL w="6349" algn="ctr">
-                      <a:solidFill>
-                        <a:srgbClr val="000000"/>
-                      </a:solidFill>
+                    <a:lnL w="12700" cap="flat" cmpd="sng" algn="ctr">
+                      <a:solidFill>
+                        <a:schemeClr val="tx1"/>
+                      </a:solidFill>
+                      <a:prstDash val="solid"/>
+                      <a:round/>
+                      <a:headEnd type="none" w="med" len="med"/>
+                      <a:tailEnd type="none" w="med" len="med"/>
                     </a:lnL>
-                    <a:lnR w="6349" algn="ctr">
-                      <a:solidFill>
-                        <a:srgbClr val="000000"/>
-                      </a:solidFill>
+                    <a:lnR w="12700" cap="flat" cmpd="sng" algn="ctr">
+                      <a:solidFill>
+                        <a:schemeClr val="tx1"/>
+                      </a:solidFill>
+                      <a:prstDash val="solid"/>
+                      <a:round/>
+                      <a:headEnd type="none" w="med" len="med"/>
+                      <a:tailEnd type="none" w="med" len="med"/>
                     </a:lnR>
                     <a:lnT w="6349" algn="ctr">
-                      <a:solidFill>
-                        <a:srgbClr val="000000"/>
-                      </a:solidFill>
+                      <a:noFill/>
                     </a:lnT>
-                    <a:lnB w="12699" algn="ctr">
-                      <a:solidFill>
-                        <a:srgbClr val="000000"/>
-                      </a:solidFill>
+                    <a:lnB w="57150" cap="flat" cmpd="sng" algn="ctr">
+                      <a:solidFill>
+                        <a:schemeClr val="tx1"/>
+                      </a:solidFill>
+                      <a:prstDash val="solid"/>
+                      <a:round/>
+                      <a:headEnd type="none" w="med" len="med"/>
+                      <a:tailEnd type="none" w="med" len="med"/>
                     </a:lnB>
+                    <a:lnTlToBr w="12700" cmpd="sng">
+                      <a:noFill/>
+                      <a:prstDash val="solid"/>
+                    </a:lnTlToBr>
+                    <a:lnBlToTr w="12700" cmpd="sng">
+                      <a:noFill/>
+                      <a:prstDash val="solid"/>
+                    </a:lnBlToTr>
                   </a:tcPr>
                 </a:tc>
                 <a:tc>
                   <a:txBody>
                     <a:bodyPr/>
+                    <a:lstStyle/>
                     <a:p>
                       <a:pPr algn="ctr">
                         <a:defRPr/>
                       </a:pPr>
                       <a:r>
-                        <a:rPr lang="de-DE" sz="3600"/>
+                        <a:rPr lang="de-DE" sz="3600" dirty="0"/>
                         <a:t>93%</a:t>
                       </a:r>
-                      <a:endParaRPr sz="3600"/>
+                      <a:endParaRPr sz="3600" dirty="0"/>
                     </a:p>
                   </a:txBody>
                   <a:tcPr anchor="ctr">
-                    <a:lnL w="6349" algn="ctr">
-                      <a:solidFill>
-                        <a:srgbClr val="000000"/>
-                      </a:solidFill>
+                    <a:lnL w="12700" cap="flat" cmpd="sng" algn="ctr">
+                      <a:solidFill>
+                        <a:schemeClr val="tx1"/>
+                      </a:solidFill>
+                      <a:prstDash val="solid"/>
+                      <a:round/>
+                      <a:headEnd type="none" w="med" len="med"/>
+                      <a:tailEnd type="none" w="med" len="med"/>
                     </a:lnL>
                     <a:lnR w="6349" algn="ctr">
-                      <a:solidFill>
-                        <a:srgbClr val="000000"/>
-                      </a:solidFill>
+                      <a:noFill/>
                     </a:lnR>
                     <a:lnT w="6349" algn="ctr">
-                      <a:solidFill>
-                        <a:srgbClr val="000000"/>
-                      </a:solidFill>
+                      <a:noFill/>
                     </a:lnT>
-                    <a:lnB w="12699" algn="ctr">
-                      <a:solidFill>
-                        <a:srgbClr val="000000"/>
-                      </a:solidFill>
+                    <a:lnB w="57150" cap="flat" cmpd="sng" algn="ctr">
+                      <a:solidFill>
+                        <a:schemeClr val="tx1"/>
+                      </a:solidFill>
+                      <a:prstDash val="solid"/>
+                      <a:round/>
+                      <a:headEnd type="none" w="med" len="med"/>
+                      <a:tailEnd type="none" w="med" len="med"/>
                     </a:lnB>
+                    <a:lnTlToBr w="12700" cmpd="sng">
+                      <a:noFill/>
+                      <a:prstDash val="solid"/>
+                    </a:lnTlToBr>
+                    <a:lnBlToTr w="12700" cmpd="sng">
+                      <a:noFill/>
+                      <a:prstDash val="solid"/>
+                    </a:lnBlToTr>
                   </a:tcPr>
                 </a:tc>
+                <a:extLst>
+                  <a:ext uri="{0D108BD9-81ED-4DB2-BD59-A6C34878D82A}">
+                    <a16:rowId xmlns:a16="http://schemas.microsoft.com/office/drawing/2014/main" val="10000"/>
+                  </a:ext>
+                </a:extLst>
               </a:tr>
               <a:tr h="1377373">
                 <a:tc>
                   <a:txBody>
                     <a:bodyPr/>
+                    <a:lstStyle/>
                     <a:p>
                       <a:pPr algn="r">
                         <a:defRPr/>
@@ -2421,143 +2342,224 @@
                   </a:txBody>
                   <a:tcPr anchor="ctr">
                     <a:lnL w="6349" algn="ctr">
-                      <a:solidFill>
-                        <a:srgbClr val="000000"/>
-                      </a:solidFill>
+                      <a:noFill/>
                     </a:lnL>
                     <a:lnR w="6349" algn="ctr">
-                      <a:solidFill>
-                        <a:srgbClr val="000000"/>
-                      </a:solidFill>
+                      <a:noFill/>
                     </a:lnR>
-                    <a:lnT w="12699" algn="ctr">
-                      <a:solidFill>
-                        <a:srgbClr val="000000"/>
-                      </a:solidFill>
+                    <a:lnT w="57150" cap="flat" cmpd="sng" algn="ctr">
+                      <a:solidFill>
+                        <a:schemeClr val="tx1"/>
+                      </a:solidFill>
+                      <a:prstDash val="solid"/>
+                      <a:round/>
+                      <a:headEnd type="none" w="med" len="med"/>
+                      <a:tailEnd type="none" w="med" len="med"/>
                     </a:lnT>
-                    <a:lnB w="12699" algn="ctr">
-                      <a:solidFill>
-                        <a:srgbClr val="000000"/>
-                      </a:solidFill>
+                    <a:lnB w="12700" cap="flat" cmpd="sng" algn="ctr">
+                      <a:solidFill>
+                        <a:schemeClr val="tx1"/>
+                      </a:solidFill>
+                      <a:prstDash val="solid"/>
+                      <a:round/>
+                      <a:headEnd type="none" w="med" len="med"/>
+                      <a:tailEnd type="none" w="med" len="med"/>
                     </a:lnB>
+                    <a:lnTlToBr w="12700" cmpd="sng">
+                      <a:noFill/>
+                      <a:prstDash val="solid"/>
+                    </a:lnTlToBr>
+                    <a:lnBlToTr w="12700" cmpd="sng">
+                      <a:noFill/>
+                      <a:prstDash val="solid"/>
+                    </a:lnBlToTr>
                   </a:tcPr>
                 </a:tc>
                 <a:tc>
                   <a:txBody>
                     <a:bodyPr/>
+                    <a:lstStyle/>
                     <a:p>
                       <a:pPr algn="ctr">
                         <a:defRPr/>
                       </a:pPr>
                       <a:r>
-                        <a:rPr lang="de-DE" sz="3600"/>
+                        <a:rPr lang="de-DE" sz="3600" dirty="0"/>
                         <a:t>98,57%</a:t>
                       </a:r>
-                      <a:endParaRPr sz="3600"/>
+                      <a:endParaRPr sz="3600" dirty="0"/>
                     </a:p>
                   </a:txBody>
                   <a:tcPr anchor="ctr">
                     <a:lnL w="6349" algn="ctr">
-                      <a:solidFill>
-                        <a:srgbClr val="000000"/>
-                      </a:solidFill>
+                      <a:noFill/>
                     </a:lnL>
-                    <a:lnR w="6349" algn="ctr">
-                      <a:solidFill>
-                        <a:srgbClr val="000000"/>
-                      </a:solidFill>
+                    <a:lnR w="12700" cap="flat" cmpd="sng" algn="ctr">
+                      <a:solidFill>
+                        <a:schemeClr val="tx1"/>
+                      </a:solidFill>
+                      <a:prstDash val="solid"/>
+                      <a:round/>
+                      <a:headEnd type="none" w="med" len="med"/>
+                      <a:tailEnd type="none" w="med" len="med"/>
                     </a:lnR>
-                    <a:lnT w="12699" algn="ctr">
-                      <a:solidFill>
-                        <a:srgbClr val="000000"/>
-                      </a:solidFill>
+                    <a:lnT w="57150" cap="flat" cmpd="sng" algn="ctr">
+                      <a:solidFill>
+                        <a:schemeClr val="tx1"/>
+                      </a:solidFill>
+                      <a:prstDash val="solid"/>
+                      <a:round/>
+                      <a:headEnd type="none" w="med" len="med"/>
+                      <a:tailEnd type="none" w="med" len="med"/>
                     </a:lnT>
-                    <a:lnB w="12699" algn="ctr">
-                      <a:solidFill>
-                        <a:srgbClr val="000000"/>
-                      </a:solidFill>
+                    <a:lnB w="12700" cap="flat" cmpd="sng" algn="ctr">
+                      <a:solidFill>
+                        <a:schemeClr val="tx1"/>
+                      </a:solidFill>
+                      <a:prstDash val="solid"/>
+                      <a:round/>
+                      <a:headEnd type="none" w="med" len="med"/>
+                      <a:tailEnd type="none" w="med" len="med"/>
                     </a:lnB>
+                    <a:lnTlToBr w="12700" cmpd="sng">
+                      <a:noFill/>
+                      <a:prstDash val="solid"/>
+                    </a:lnTlToBr>
+                    <a:lnBlToTr w="12700" cmpd="sng">
+                      <a:noFill/>
+                      <a:prstDash val="solid"/>
+                    </a:lnBlToTr>
                   </a:tcPr>
                 </a:tc>
                 <a:tc>
                   <a:txBody>
                     <a:bodyPr/>
+                    <a:lstStyle/>
                     <a:p>
                       <a:pPr algn="ctr">
                         <a:defRPr/>
                       </a:pPr>
                       <a:r>
-                        <a:rPr lang="de-DE" sz="3600"/>
+                        <a:rPr lang="de-DE" sz="3600" dirty="0"/>
                         <a:t>89,53%</a:t>
                       </a:r>
-                      <a:endParaRPr sz="3600"/>
+                      <a:endParaRPr sz="3600" dirty="0"/>
                     </a:p>
                   </a:txBody>
                   <a:tcPr anchor="ctr">
-                    <a:lnL w="6349" algn="ctr">
-                      <a:solidFill>
-                        <a:srgbClr val="000000"/>
-                      </a:solidFill>
+                    <a:lnL w="12700" cap="flat" cmpd="sng" algn="ctr">
+                      <a:solidFill>
+                        <a:schemeClr val="tx1"/>
+                      </a:solidFill>
+                      <a:prstDash val="solid"/>
+                      <a:round/>
+                      <a:headEnd type="none" w="med" len="med"/>
+                      <a:tailEnd type="none" w="med" len="med"/>
                     </a:lnL>
-                    <a:lnR w="6349" algn="ctr">
-                      <a:solidFill>
-                        <a:srgbClr val="000000"/>
-                      </a:solidFill>
+                    <a:lnR w="12700" cap="flat" cmpd="sng" algn="ctr">
+                      <a:solidFill>
+                        <a:schemeClr val="tx1"/>
+                      </a:solidFill>
+                      <a:prstDash val="solid"/>
+                      <a:round/>
+                      <a:headEnd type="none" w="med" len="med"/>
+                      <a:tailEnd type="none" w="med" len="med"/>
                     </a:lnR>
-                    <a:lnT w="12699" algn="ctr">
-                      <a:solidFill>
-                        <a:srgbClr val="000000"/>
-                      </a:solidFill>
+                    <a:lnT w="57150" cap="flat" cmpd="sng" algn="ctr">
+                      <a:solidFill>
+                        <a:schemeClr val="tx1"/>
+                      </a:solidFill>
+                      <a:prstDash val="solid"/>
+                      <a:round/>
+                      <a:headEnd type="none" w="med" len="med"/>
+                      <a:tailEnd type="none" w="med" len="med"/>
                     </a:lnT>
-                    <a:lnB w="12699" algn="ctr">
-                      <a:solidFill>
-                        <a:srgbClr val="000000"/>
-                      </a:solidFill>
+                    <a:lnB w="12700" cap="flat" cmpd="sng" algn="ctr">
+                      <a:solidFill>
+                        <a:schemeClr val="tx1"/>
+                      </a:solidFill>
+                      <a:prstDash val="solid"/>
+                      <a:round/>
+                      <a:headEnd type="none" w="med" len="med"/>
+                      <a:tailEnd type="none" w="med" len="med"/>
                     </a:lnB>
+                    <a:lnTlToBr w="12700" cmpd="sng">
+                      <a:noFill/>
+                      <a:prstDash val="solid"/>
+                    </a:lnTlToBr>
+                    <a:lnBlToTr w="12700" cmpd="sng">
+                      <a:noFill/>
+                      <a:prstDash val="solid"/>
+                    </a:lnBlToTr>
                   </a:tcPr>
                 </a:tc>
                 <a:tc>
                   <a:txBody>
                     <a:bodyPr/>
+                    <a:lstStyle/>
                     <a:p>
                       <a:pPr algn="ctr">
                         <a:defRPr/>
                       </a:pPr>
                       <a:r>
-                        <a:rPr lang="de-DE" sz="3600"/>
+                        <a:rPr lang="de-DE" sz="3600" dirty="0"/>
                         <a:t>95,17%</a:t>
                       </a:r>
-                      <a:endParaRPr sz="3600"/>
+                      <a:endParaRPr sz="3600" dirty="0"/>
                     </a:p>
                   </a:txBody>
                   <a:tcPr anchor="ctr">
-                    <a:lnL w="6349" algn="ctr">
-                      <a:solidFill>
-                        <a:srgbClr val="000000"/>
-                      </a:solidFill>
+                    <a:lnL w="12700" cap="flat" cmpd="sng" algn="ctr">
+                      <a:solidFill>
+                        <a:schemeClr val="tx1"/>
+                      </a:solidFill>
+                      <a:prstDash val="solid"/>
+                      <a:round/>
+                      <a:headEnd type="none" w="med" len="med"/>
+                      <a:tailEnd type="none" w="med" len="med"/>
                     </a:lnL>
                     <a:lnR w="6349" algn="ctr">
-                      <a:solidFill>
-                        <a:srgbClr val="000000"/>
-                      </a:solidFill>
+                      <a:noFill/>
                     </a:lnR>
-                    <a:lnT w="12699" algn="ctr">
-                      <a:solidFill>
-                        <a:srgbClr val="000000"/>
-                      </a:solidFill>
+                    <a:lnT w="57150" cap="flat" cmpd="sng" algn="ctr">
+                      <a:solidFill>
+                        <a:schemeClr val="tx1"/>
+                      </a:solidFill>
+                      <a:prstDash val="solid"/>
+                      <a:round/>
+                      <a:headEnd type="none" w="med" len="med"/>
+                      <a:tailEnd type="none" w="med" len="med"/>
                     </a:lnT>
-                    <a:lnB w="12699" algn="ctr">
-                      <a:solidFill>
-                        <a:srgbClr val="000000"/>
-                      </a:solidFill>
+                    <a:lnB w="12700" cap="flat" cmpd="sng" algn="ctr">
+                      <a:solidFill>
+                        <a:schemeClr val="tx1"/>
+                      </a:solidFill>
+                      <a:prstDash val="solid"/>
+                      <a:round/>
+                      <a:headEnd type="none" w="med" len="med"/>
+                      <a:tailEnd type="none" w="med" len="med"/>
                     </a:lnB>
+                    <a:lnTlToBr w="12700" cmpd="sng">
+                      <a:noFill/>
+                      <a:prstDash val="solid"/>
+                    </a:lnTlToBr>
+                    <a:lnBlToTr w="12700" cmpd="sng">
+                      <a:noFill/>
+                      <a:prstDash val="solid"/>
+                    </a:lnBlToTr>
                   </a:tcPr>
                 </a:tc>
+                <a:extLst>
+                  <a:ext uri="{0D108BD9-81ED-4DB2-BD59-A6C34878D82A}">
+                    <a16:rowId xmlns:a16="http://schemas.microsoft.com/office/drawing/2014/main" val="10001"/>
+                  </a:ext>
+                </a:extLst>
               </a:tr>
               <a:tr h="1292869">
                 <a:tc>
                   <a:txBody>
                     <a:bodyPr/>
+                    <a:lstStyle/>
                     <a:p>
                       <a:pPr algn="r">
                         <a:defRPr/>
@@ -2571,30 +2573,43 @@
                   </a:txBody>
                   <a:tcPr anchor="ctr">
                     <a:lnL w="6349" algn="ctr">
-                      <a:solidFill>
-                        <a:srgbClr val="000000"/>
-                      </a:solidFill>
+                      <a:noFill/>
                     </a:lnL>
                     <a:lnR w="6349" algn="ctr">
-                      <a:solidFill>
-                        <a:srgbClr val="000000"/>
-                      </a:solidFill>
+                      <a:noFill/>
                     </a:lnR>
-                    <a:lnT w="12699" algn="ctr">
-                      <a:solidFill>
-                        <a:srgbClr val="000000"/>
-                      </a:solidFill>
+                    <a:lnT w="12700" cap="flat" cmpd="sng" algn="ctr">
+                      <a:solidFill>
+                        <a:schemeClr val="tx1"/>
+                      </a:solidFill>
+                      <a:prstDash val="solid"/>
+                      <a:round/>
+                      <a:headEnd type="none" w="med" len="med"/>
+                      <a:tailEnd type="none" w="med" len="med"/>
                     </a:lnT>
-                    <a:lnB w="12699" algn="ctr">
-                      <a:solidFill>
-                        <a:srgbClr val="000000"/>
-                      </a:solidFill>
+                    <a:lnB w="12700" cap="flat" cmpd="sng" algn="ctr">
+                      <a:solidFill>
+                        <a:schemeClr val="tx1"/>
+                      </a:solidFill>
+                      <a:prstDash val="solid"/>
+                      <a:round/>
+                      <a:headEnd type="none" w="med" len="med"/>
+                      <a:tailEnd type="none" w="med" len="med"/>
                     </a:lnB>
+                    <a:lnTlToBr w="12700" cmpd="sng">
+                      <a:noFill/>
+                      <a:prstDash val="solid"/>
+                    </a:lnTlToBr>
+                    <a:lnBlToTr w="12700" cmpd="sng">
+                      <a:noFill/>
+                      <a:prstDash val="solid"/>
+                    </a:lnBlToTr>
                   </a:tcPr>
                 </a:tc>
                 <a:tc>
                   <a:txBody>
                     <a:bodyPr/>
+                    <a:lstStyle/>
                     <a:p>
                       <a:pPr algn="ctr">
                         <a:defRPr/>
@@ -2608,67 +2623,111 @@
                   </a:txBody>
                   <a:tcPr anchor="ctr">
                     <a:lnL w="6349" algn="ctr">
-                      <a:solidFill>
-                        <a:srgbClr val="000000"/>
-                      </a:solidFill>
+                      <a:noFill/>
                     </a:lnL>
-                    <a:lnR w="6349" algn="ctr">
-                      <a:solidFill>
-                        <a:srgbClr val="000000"/>
-                      </a:solidFill>
+                    <a:lnR w="12700" cap="flat" cmpd="sng" algn="ctr">
+                      <a:solidFill>
+                        <a:schemeClr val="tx1"/>
+                      </a:solidFill>
+                      <a:prstDash val="solid"/>
+                      <a:round/>
+                      <a:headEnd type="none" w="med" len="med"/>
+                      <a:tailEnd type="none" w="med" len="med"/>
                     </a:lnR>
-                    <a:lnT w="12699" algn="ctr">
-                      <a:solidFill>
-                        <a:srgbClr val="000000"/>
-                      </a:solidFill>
+                    <a:lnT w="12700" cap="flat" cmpd="sng" algn="ctr">
+                      <a:solidFill>
+                        <a:schemeClr val="tx1"/>
+                      </a:solidFill>
+                      <a:prstDash val="solid"/>
+                      <a:round/>
+                      <a:headEnd type="none" w="med" len="med"/>
+                      <a:tailEnd type="none" w="med" len="med"/>
                     </a:lnT>
-                    <a:lnB w="12699" algn="ctr">
-                      <a:solidFill>
-                        <a:srgbClr val="000000"/>
-                      </a:solidFill>
+                    <a:lnB w="12700" cap="flat" cmpd="sng" algn="ctr">
+                      <a:solidFill>
+                        <a:schemeClr val="tx1"/>
+                      </a:solidFill>
+                      <a:prstDash val="solid"/>
+                      <a:round/>
+                      <a:headEnd type="none" w="med" len="med"/>
+                      <a:tailEnd type="none" w="med" len="med"/>
                     </a:lnB>
+                    <a:lnTlToBr w="12700" cmpd="sng">
+                      <a:noFill/>
+                      <a:prstDash val="solid"/>
+                    </a:lnTlToBr>
+                    <a:lnBlToTr w="12700" cmpd="sng">
+                      <a:noFill/>
+                      <a:prstDash val="solid"/>
+                    </a:lnBlToTr>
                   </a:tcPr>
                 </a:tc>
                 <a:tc>
                   <a:txBody>
                     <a:bodyPr/>
+                    <a:lstStyle/>
                     <a:p>
                       <a:pPr algn="ctr">
                         <a:defRPr/>
                       </a:pPr>
                       <a:r>
-                        <a:rPr lang="de-DE" sz="3600"/>
+                        <a:rPr lang="de-DE" sz="3600" dirty="0"/>
                         <a:t>98,30%</a:t>
                       </a:r>
-                      <a:endParaRPr sz="3600"/>
+                      <a:endParaRPr sz="3600" dirty="0"/>
                     </a:p>
                   </a:txBody>
                   <a:tcPr anchor="ctr">
-                    <a:lnL w="6349" algn="ctr">
-                      <a:solidFill>
-                        <a:srgbClr val="000000"/>
-                      </a:solidFill>
+                    <a:lnL w="12700" cap="flat" cmpd="sng" algn="ctr">
+                      <a:solidFill>
+                        <a:schemeClr val="tx1"/>
+                      </a:solidFill>
+                      <a:prstDash val="solid"/>
+                      <a:round/>
+                      <a:headEnd type="none" w="med" len="med"/>
+                      <a:tailEnd type="none" w="med" len="med"/>
                     </a:lnL>
-                    <a:lnR w="6349" algn="ctr">
-                      <a:solidFill>
-                        <a:srgbClr val="000000"/>
-                      </a:solidFill>
+                    <a:lnR w="12700" cap="flat" cmpd="sng" algn="ctr">
+                      <a:solidFill>
+                        <a:schemeClr val="tx1"/>
+                      </a:solidFill>
+                      <a:prstDash val="solid"/>
+                      <a:round/>
+                      <a:headEnd type="none" w="med" len="med"/>
+                      <a:tailEnd type="none" w="med" len="med"/>
                     </a:lnR>
-                    <a:lnT w="12699" algn="ctr">
-                      <a:solidFill>
-                        <a:srgbClr val="000000"/>
-                      </a:solidFill>
+                    <a:lnT w="12700" cap="flat" cmpd="sng" algn="ctr">
+                      <a:solidFill>
+                        <a:schemeClr val="tx1"/>
+                      </a:solidFill>
+                      <a:prstDash val="solid"/>
+                      <a:round/>
+                      <a:headEnd type="none" w="med" len="med"/>
+                      <a:tailEnd type="none" w="med" len="med"/>
                     </a:lnT>
-                    <a:lnB w="12699" algn="ctr">
-                      <a:solidFill>
-                        <a:srgbClr val="000000"/>
-                      </a:solidFill>
+                    <a:lnB w="12700" cap="flat" cmpd="sng" algn="ctr">
+                      <a:solidFill>
+                        <a:schemeClr val="tx1"/>
+                      </a:solidFill>
+                      <a:prstDash val="solid"/>
+                      <a:round/>
+                      <a:headEnd type="none" w="med" len="med"/>
+                      <a:tailEnd type="none" w="med" len="med"/>
                     </a:lnB>
+                    <a:lnTlToBr w="12700" cmpd="sng">
+                      <a:noFill/>
+                      <a:prstDash val="solid"/>
+                    </a:lnTlToBr>
+                    <a:lnBlToTr w="12700" cmpd="sng">
+                      <a:noFill/>
+                      <a:prstDash val="solid"/>
+                    </a:lnBlToTr>
                   </a:tcPr>
                 </a:tc>
                 <a:tc>
                   <a:txBody>
                     <a:bodyPr/>
+                    <a:lstStyle/>
                     <a:p>
                       <a:pPr algn="ctr">
                         <a:defRPr/>
@@ -2681,33 +2740,57 @@
                     </a:p>
                   </a:txBody>
                   <a:tcPr anchor="ctr">
-                    <a:lnL w="6349" algn="ctr">
-                      <a:solidFill>
-                        <a:srgbClr val="000000"/>
-                      </a:solidFill>
+                    <a:lnL w="12700" cap="flat" cmpd="sng" algn="ctr">
+                      <a:solidFill>
+                        <a:schemeClr val="tx1"/>
+                      </a:solidFill>
+                      <a:prstDash val="solid"/>
+                      <a:round/>
+                      <a:headEnd type="none" w="med" len="med"/>
+                      <a:tailEnd type="none" w="med" len="med"/>
                     </a:lnL>
                     <a:lnR w="6349" algn="ctr">
-                      <a:solidFill>
-                        <a:srgbClr val="000000"/>
-                      </a:solidFill>
+                      <a:noFill/>
                     </a:lnR>
-                    <a:lnT w="12699" algn="ctr">
-                      <a:solidFill>
-                        <a:srgbClr val="000000"/>
-                      </a:solidFill>
+                    <a:lnT w="12700" cap="flat" cmpd="sng" algn="ctr">
+                      <a:solidFill>
+                        <a:schemeClr val="tx1"/>
+                      </a:solidFill>
+                      <a:prstDash val="solid"/>
+                      <a:round/>
+                      <a:headEnd type="none" w="med" len="med"/>
+                      <a:tailEnd type="none" w="med" len="med"/>
                     </a:lnT>
-                    <a:lnB w="12699" algn="ctr">
-                      <a:solidFill>
-                        <a:srgbClr val="000000"/>
-                      </a:solidFill>
+                    <a:lnB w="12700" cap="flat" cmpd="sng" algn="ctr">
+                      <a:solidFill>
+                        <a:schemeClr val="tx1"/>
+                      </a:solidFill>
+                      <a:prstDash val="solid"/>
+                      <a:round/>
+                      <a:headEnd type="none" w="med" len="med"/>
+                      <a:tailEnd type="none" w="med" len="med"/>
                     </a:lnB>
+                    <a:lnTlToBr w="12700" cmpd="sng">
+                      <a:noFill/>
+                      <a:prstDash val="solid"/>
+                    </a:lnTlToBr>
+                    <a:lnBlToTr w="12700" cmpd="sng">
+                      <a:noFill/>
+                      <a:prstDash val="solid"/>
+                    </a:lnBlToTr>
                   </a:tcPr>
                 </a:tc>
+                <a:extLst>
+                  <a:ext uri="{0D108BD9-81ED-4DB2-BD59-A6C34878D82A}">
+                    <a16:rowId xmlns:a16="http://schemas.microsoft.com/office/drawing/2014/main" val="10002"/>
+                  </a:ext>
+                </a:extLst>
               </a:tr>
               <a:tr h="1292869">
                 <a:tc>
                   <a:txBody>
                     <a:bodyPr/>
+                    <a:lstStyle/>
                     <a:p>
                       <a:pPr algn="r">
                         <a:defRPr/>
@@ -2721,30 +2804,43 @@
                   </a:txBody>
                   <a:tcPr anchor="ctr">
                     <a:lnL w="6349" algn="ctr">
-                      <a:solidFill>
-                        <a:srgbClr val="000000"/>
-                      </a:solidFill>
+                      <a:noFill/>
                     </a:lnL>
                     <a:lnR w="6349" algn="ctr">
-                      <a:solidFill>
-                        <a:srgbClr val="000000"/>
-                      </a:solidFill>
+                      <a:noFill/>
                     </a:lnR>
-                    <a:lnT w="12699" algn="ctr">
-                      <a:solidFill>
-                        <a:srgbClr val="000000"/>
-                      </a:solidFill>
+                    <a:lnT w="12700" cap="flat" cmpd="sng" algn="ctr">
+                      <a:solidFill>
+                        <a:schemeClr val="tx1"/>
+                      </a:solidFill>
+                      <a:prstDash val="solid"/>
+                      <a:round/>
+                      <a:headEnd type="none" w="med" len="med"/>
+                      <a:tailEnd type="none" w="med" len="med"/>
                     </a:lnT>
-                    <a:lnB w="12699" algn="ctr">
-                      <a:solidFill>
-                        <a:srgbClr val="000000"/>
-                      </a:solidFill>
+                    <a:lnB w="12700" cap="flat" cmpd="sng" algn="ctr">
+                      <a:solidFill>
+                        <a:schemeClr val="tx1"/>
+                      </a:solidFill>
+                      <a:prstDash val="solid"/>
+                      <a:round/>
+                      <a:headEnd type="none" w="med" len="med"/>
+                      <a:tailEnd type="none" w="med" len="med"/>
                     </a:lnB>
+                    <a:lnTlToBr w="12700" cmpd="sng">
+                      <a:noFill/>
+                      <a:prstDash val="solid"/>
+                    </a:lnTlToBr>
+                    <a:lnBlToTr w="12700" cmpd="sng">
+                      <a:noFill/>
+                      <a:prstDash val="solid"/>
+                    </a:lnBlToTr>
                   </a:tcPr>
                 </a:tc>
                 <a:tc>
                   <a:txBody>
                     <a:bodyPr/>
+                    <a:lstStyle/>
                     <a:p>
                       <a:pPr algn="ctr">
                         <a:defRPr/>
@@ -2758,106 +2854,174 @@
                   </a:txBody>
                   <a:tcPr anchor="ctr">
                     <a:lnL w="6349" algn="ctr">
-                      <a:solidFill>
-                        <a:srgbClr val="000000"/>
-                      </a:solidFill>
+                      <a:noFill/>
                     </a:lnL>
-                    <a:lnR w="6349" algn="ctr">
-                      <a:solidFill>
-                        <a:srgbClr val="000000"/>
-                      </a:solidFill>
+                    <a:lnR w="12700" cap="flat" cmpd="sng" algn="ctr">
+                      <a:solidFill>
+                        <a:schemeClr val="tx1"/>
+                      </a:solidFill>
+                      <a:prstDash val="solid"/>
+                      <a:round/>
+                      <a:headEnd type="none" w="med" len="med"/>
+                      <a:tailEnd type="none" w="med" len="med"/>
                     </a:lnR>
-                    <a:lnT w="12699" algn="ctr">
-                      <a:solidFill>
-                        <a:srgbClr val="000000"/>
-                      </a:solidFill>
+                    <a:lnT w="12700" cap="flat" cmpd="sng" algn="ctr">
+                      <a:solidFill>
+                        <a:schemeClr val="tx1"/>
+                      </a:solidFill>
+                      <a:prstDash val="solid"/>
+                      <a:round/>
+                      <a:headEnd type="none" w="med" len="med"/>
+                      <a:tailEnd type="none" w="med" len="med"/>
                     </a:lnT>
-                    <a:lnB w="12699" algn="ctr">
-                      <a:solidFill>
-                        <a:srgbClr val="000000"/>
-                      </a:solidFill>
+                    <a:lnB w="12700" cap="flat" cmpd="sng" algn="ctr">
+                      <a:solidFill>
+                        <a:schemeClr val="tx1"/>
+                      </a:solidFill>
+                      <a:prstDash val="solid"/>
+                      <a:round/>
+                      <a:headEnd type="none" w="med" len="med"/>
+                      <a:tailEnd type="none" w="med" len="med"/>
                     </a:lnB>
+                    <a:lnTlToBr w="12700" cmpd="sng">
+                      <a:noFill/>
+                      <a:prstDash val="solid"/>
+                    </a:lnTlToBr>
+                    <a:lnBlToTr w="12700" cmpd="sng">
+                      <a:noFill/>
+                      <a:prstDash val="solid"/>
+                    </a:lnBlToTr>
                   </a:tcPr>
                 </a:tc>
                 <a:tc>
                   <a:txBody>
                     <a:bodyPr/>
+                    <a:lstStyle/>
                     <a:p>
                       <a:pPr algn="ctr">
                         <a:defRPr/>
                       </a:pPr>
                       <a:r>
-                        <a:rPr lang="de-DE" sz="3600"/>
+                        <a:rPr lang="de-DE" sz="3600" dirty="0"/>
                         <a:t>92,44%</a:t>
                       </a:r>
-                      <a:endParaRPr sz="3600"/>
+                      <a:endParaRPr sz="3600" dirty="0"/>
                     </a:p>
                   </a:txBody>
                   <a:tcPr anchor="ctr">
-                    <a:lnL w="6349" algn="ctr">
-                      <a:solidFill>
-                        <a:srgbClr val="000000"/>
-                      </a:solidFill>
+                    <a:lnL w="12700" cap="flat" cmpd="sng" algn="ctr">
+                      <a:solidFill>
+                        <a:schemeClr val="tx1"/>
+                      </a:solidFill>
+                      <a:prstDash val="solid"/>
+                      <a:round/>
+                      <a:headEnd type="none" w="med" len="med"/>
+                      <a:tailEnd type="none" w="med" len="med"/>
                     </a:lnL>
-                    <a:lnR w="6349" algn="ctr">
-                      <a:solidFill>
-                        <a:srgbClr val="000000"/>
-                      </a:solidFill>
+                    <a:lnR w="12700" cap="flat" cmpd="sng" algn="ctr">
+                      <a:solidFill>
+                        <a:schemeClr val="tx1"/>
+                      </a:solidFill>
+                      <a:prstDash val="solid"/>
+                      <a:round/>
+                      <a:headEnd type="none" w="med" len="med"/>
+                      <a:tailEnd type="none" w="med" len="med"/>
                     </a:lnR>
-                    <a:lnT w="12699" algn="ctr">
-                      <a:solidFill>
-                        <a:srgbClr val="000000"/>
-                      </a:solidFill>
+                    <a:lnT w="12700" cap="flat" cmpd="sng" algn="ctr">
+                      <a:solidFill>
+                        <a:schemeClr val="tx1"/>
+                      </a:solidFill>
+                      <a:prstDash val="solid"/>
+                      <a:round/>
+                      <a:headEnd type="none" w="med" len="med"/>
+                      <a:tailEnd type="none" w="med" len="med"/>
                     </a:lnT>
-                    <a:lnB w="12699" algn="ctr">
-                      <a:solidFill>
-                        <a:srgbClr val="000000"/>
-                      </a:solidFill>
+                    <a:lnB w="12700" cap="flat" cmpd="sng" algn="ctr">
+                      <a:solidFill>
+                        <a:schemeClr val="tx1"/>
+                      </a:solidFill>
+                      <a:prstDash val="solid"/>
+                      <a:round/>
+                      <a:headEnd type="none" w="med" len="med"/>
+                      <a:tailEnd type="none" w="med" len="med"/>
                     </a:lnB>
+                    <a:lnTlToBr w="12700" cmpd="sng">
+                      <a:noFill/>
+                      <a:prstDash val="solid"/>
+                    </a:lnTlToBr>
+                    <a:lnBlToTr w="12700" cmpd="sng">
+                      <a:noFill/>
+                      <a:prstDash val="solid"/>
+                    </a:lnBlToTr>
                   </a:tcPr>
                 </a:tc>
                 <a:tc>
                   <a:txBody>
                     <a:bodyPr/>
+                    <a:lstStyle/>
                     <a:p>
                       <a:pPr algn="ctr">
                         <a:defRPr/>
                       </a:pPr>
                       <a:r>
-                        <a:rPr lang="de-DE" sz="3600"/>
+                        <a:rPr lang="de-DE" sz="3600" dirty="0"/>
                         <a:t>92,76%</a:t>
                       </a:r>
-                      <a:endParaRPr sz="3600"/>
+                      <a:endParaRPr sz="3600" dirty="0"/>
                     </a:p>
                   </a:txBody>
                   <a:tcPr anchor="ctr">
-                    <a:lnL w="6349" algn="ctr">
-                      <a:solidFill>
-                        <a:srgbClr val="000000"/>
-                      </a:solidFill>
+                    <a:lnL w="12700" cap="flat" cmpd="sng" algn="ctr">
+                      <a:solidFill>
+                        <a:schemeClr val="tx1"/>
+                      </a:solidFill>
+                      <a:prstDash val="solid"/>
+                      <a:round/>
+                      <a:headEnd type="none" w="med" len="med"/>
+                      <a:tailEnd type="none" w="med" len="med"/>
                     </a:lnL>
                     <a:lnR w="6349" algn="ctr">
-                      <a:solidFill>
-                        <a:srgbClr val="000000"/>
-                      </a:solidFill>
+                      <a:noFill/>
                     </a:lnR>
-                    <a:lnT w="12699" algn="ctr">
-                      <a:solidFill>
-                        <a:srgbClr val="000000"/>
-                      </a:solidFill>
+                    <a:lnT w="12700" cap="flat" cmpd="sng" algn="ctr">
+                      <a:solidFill>
+                        <a:schemeClr val="tx1"/>
+                      </a:solidFill>
+                      <a:prstDash val="solid"/>
+                      <a:round/>
+                      <a:headEnd type="none" w="med" len="med"/>
+                      <a:tailEnd type="none" w="med" len="med"/>
                     </a:lnT>
-                    <a:lnB w="12699" algn="ctr">
-                      <a:solidFill>
-                        <a:srgbClr val="000000"/>
-                      </a:solidFill>
+                    <a:lnB w="12700" cap="flat" cmpd="sng" algn="ctr">
+                      <a:solidFill>
+                        <a:schemeClr val="tx1"/>
+                      </a:solidFill>
+                      <a:prstDash val="solid"/>
+                      <a:round/>
+                      <a:headEnd type="none" w="med" len="med"/>
+                      <a:tailEnd type="none" w="med" len="med"/>
                     </a:lnB>
+                    <a:lnTlToBr w="12700" cmpd="sng">
+                      <a:noFill/>
+                      <a:prstDash val="solid"/>
+                    </a:lnTlToBr>
+                    <a:lnBlToTr w="12700" cmpd="sng">
+                      <a:noFill/>
+                      <a:prstDash val="solid"/>
+                    </a:lnBlToTr>
                   </a:tcPr>
                 </a:tc>
+                <a:extLst>
+                  <a:ext uri="{0D108BD9-81ED-4DB2-BD59-A6C34878D82A}">
+                    <a16:rowId xmlns:a16="http://schemas.microsoft.com/office/drawing/2014/main" val="10003"/>
+                  </a:ext>
+                </a:extLst>
               </a:tr>
               <a:tr h="1292869">
                 <a:tc>
                   <a:txBody>
                     <a:bodyPr/>
+                    <a:lstStyle/>
                     <a:p>
                       <a:pPr algn="r">
                         <a:defRPr/>
@@ -2871,30 +3035,37 @@
                   </a:txBody>
                   <a:tcPr anchor="ctr">
                     <a:lnL w="6349" algn="ctr">
-                      <a:solidFill>
-                        <a:srgbClr val="000000"/>
-                      </a:solidFill>
+                      <a:noFill/>
                     </a:lnL>
                     <a:lnR w="6349" algn="ctr">
-                      <a:solidFill>
-                        <a:srgbClr val="000000"/>
-                      </a:solidFill>
+                      <a:noFill/>
                     </a:lnR>
-                    <a:lnT w="12699" algn="ctr">
-                      <a:solidFill>
-                        <a:srgbClr val="000000"/>
-                      </a:solidFill>
+                    <a:lnT w="12700" cap="flat" cmpd="sng" algn="ctr">
+                      <a:solidFill>
+                        <a:schemeClr val="tx1"/>
+                      </a:solidFill>
+                      <a:prstDash val="solid"/>
+                      <a:round/>
+                      <a:headEnd type="none" w="med" len="med"/>
+                      <a:tailEnd type="none" w="med" len="med"/>
                     </a:lnT>
                     <a:lnB w="6349" algn="ctr">
-                      <a:solidFill>
-                        <a:srgbClr val="000000"/>
-                      </a:solidFill>
+                      <a:noFill/>
                     </a:lnB>
+                    <a:lnTlToBr w="12700" cmpd="sng">
+                      <a:noFill/>
+                      <a:prstDash val="solid"/>
+                    </a:lnTlToBr>
+                    <a:lnBlToTr w="12700" cmpd="sng">
+                      <a:noFill/>
+                      <a:prstDash val="solid"/>
+                    </a:lnBlToTr>
                   </a:tcPr>
                 </a:tc>
                 <a:tc>
                   <a:txBody>
                     <a:bodyPr/>
+                    <a:lstStyle/>
                     <a:p>
                       <a:pPr algn="ctr">
                         <a:defRPr/>
@@ -2908,30 +3079,43 @@
                   </a:txBody>
                   <a:tcPr anchor="ctr">
                     <a:lnL w="6349" algn="ctr">
-                      <a:solidFill>
-                        <a:srgbClr val="000000"/>
-                      </a:solidFill>
+                      <a:noFill/>
                     </a:lnL>
-                    <a:lnR w="6349" algn="ctr">
-                      <a:solidFill>
-                        <a:srgbClr val="000000"/>
-                      </a:solidFill>
+                    <a:lnR w="12700" cap="flat" cmpd="sng" algn="ctr">
+                      <a:solidFill>
+                        <a:schemeClr val="tx1"/>
+                      </a:solidFill>
+                      <a:prstDash val="solid"/>
+                      <a:round/>
+                      <a:headEnd type="none" w="med" len="med"/>
+                      <a:tailEnd type="none" w="med" len="med"/>
                     </a:lnR>
-                    <a:lnT w="12699" algn="ctr">
-                      <a:solidFill>
-                        <a:srgbClr val="000000"/>
-                      </a:solidFill>
+                    <a:lnT w="12700" cap="flat" cmpd="sng" algn="ctr">
+                      <a:solidFill>
+                        <a:schemeClr val="tx1"/>
+                      </a:solidFill>
+                      <a:prstDash val="solid"/>
+                      <a:round/>
+                      <a:headEnd type="none" w="med" len="med"/>
+                      <a:tailEnd type="none" w="med" len="med"/>
                     </a:lnT>
                     <a:lnB w="6349" algn="ctr">
-                      <a:solidFill>
-                        <a:srgbClr val="000000"/>
-                      </a:solidFill>
+                      <a:noFill/>
                     </a:lnB>
+                    <a:lnTlToBr w="12700" cmpd="sng">
+                      <a:noFill/>
+                      <a:prstDash val="solid"/>
+                    </a:lnTlToBr>
+                    <a:lnBlToTr w="12700" cmpd="sng">
+                      <a:noFill/>
+                      <a:prstDash val="solid"/>
+                    </a:lnBlToTr>
                   </a:tcPr>
                 </a:tc>
                 <a:tc>
                   <a:txBody>
                     <a:bodyPr/>
+                    <a:lstStyle/>
                     <a:p>
                       <a:pPr algn="ctr">
                         <a:defRPr/>
@@ -2944,65 +3128,109 @@
                     </a:p>
                   </a:txBody>
                   <a:tcPr anchor="ctr">
-                    <a:lnL w="6349" algn="ctr">
-                      <a:solidFill>
-                        <a:srgbClr val="000000"/>
-                      </a:solidFill>
+                    <a:lnL w="12700" cap="flat" cmpd="sng" algn="ctr">
+                      <a:solidFill>
+                        <a:schemeClr val="tx1"/>
+                      </a:solidFill>
+                      <a:prstDash val="solid"/>
+                      <a:round/>
+                      <a:headEnd type="none" w="med" len="med"/>
+                      <a:tailEnd type="none" w="med" len="med"/>
                     </a:lnL>
-                    <a:lnR w="6349" algn="ctr">
-                      <a:solidFill>
-                        <a:srgbClr val="000000"/>
-                      </a:solidFill>
+                    <a:lnR w="12700" cap="flat" cmpd="sng" algn="ctr">
+                      <a:solidFill>
+                        <a:schemeClr val="tx1"/>
+                      </a:solidFill>
+                      <a:prstDash val="solid"/>
+                      <a:round/>
+                      <a:headEnd type="none" w="med" len="med"/>
+                      <a:tailEnd type="none" w="med" len="med"/>
                     </a:lnR>
-                    <a:lnT w="12699" algn="ctr">
-                      <a:solidFill>
-                        <a:srgbClr val="000000"/>
-                      </a:solidFill>
+                    <a:lnT w="12700" cap="flat" cmpd="sng" algn="ctr">
+                      <a:solidFill>
+                        <a:schemeClr val="tx1"/>
+                      </a:solidFill>
+                      <a:prstDash val="solid"/>
+                      <a:round/>
+                      <a:headEnd type="none" w="med" len="med"/>
+                      <a:tailEnd type="none" w="med" len="med"/>
                     </a:lnT>
                     <a:lnB w="6349" algn="ctr">
-                      <a:solidFill>
-                        <a:srgbClr val="000000"/>
-                      </a:solidFill>
+                      <a:noFill/>
                     </a:lnB>
+                    <a:lnTlToBr w="12700" cmpd="sng">
+                      <a:noFill/>
+                      <a:prstDash val="solid"/>
+                    </a:lnTlToBr>
+                    <a:lnBlToTr w="12700" cmpd="sng">
+                      <a:noFill/>
+                      <a:prstDash val="solid"/>
+                    </a:lnBlToTr>
                   </a:tcPr>
                 </a:tc>
                 <a:tc>
                   <a:txBody>
                     <a:bodyPr/>
+                    <a:lstStyle/>
                     <a:p>
                       <a:pPr algn="ctr">
                         <a:defRPr/>
                       </a:pPr>
                       <a:r>
-                        <a:rPr lang="de-DE" sz="3600"/>
-                        <a:t>N/A (not used)</a:t>
+                        <a:rPr lang="de-DE" sz="3600" dirty="0"/>
+                        <a:t>N/A (not </a:t>
                       </a:r>
-                      <a:endParaRPr sz="3600"/>
+                      <a:r>
+                        <a:rPr lang="de-DE" sz="3600" dirty="0" err="1"/>
+                        <a:t>used</a:t>
+                      </a:r>
+                      <a:r>
+                        <a:rPr lang="de-DE" sz="3600" dirty="0"/>
+                        <a:t>)</a:t>
+                      </a:r>
+                      <a:endParaRPr sz="3600" dirty="0"/>
                     </a:p>
                   </a:txBody>
                   <a:tcPr anchor="ctr">
-                    <a:lnL w="6349" algn="ctr">
-                      <a:solidFill>
-                        <a:srgbClr val="000000"/>
-                      </a:solidFill>
+                    <a:lnL w="12700" cap="flat" cmpd="sng" algn="ctr">
+                      <a:solidFill>
+                        <a:schemeClr val="tx1"/>
+                      </a:solidFill>
+                      <a:prstDash val="solid"/>
+                      <a:round/>
+                      <a:headEnd type="none" w="med" len="med"/>
+                      <a:tailEnd type="none" w="med" len="med"/>
                     </a:lnL>
                     <a:lnR w="6349" algn="ctr">
-                      <a:solidFill>
-                        <a:srgbClr val="000000"/>
-                      </a:solidFill>
+                      <a:noFill/>
                     </a:lnR>
-                    <a:lnT w="12699" algn="ctr">
-                      <a:solidFill>
-                        <a:srgbClr val="000000"/>
-                      </a:solidFill>
+                    <a:lnT w="12700" cap="flat" cmpd="sng" algn="ctr">
+                      <a:solidFill>
+                        <a:schemeClr val="tx1"/>
+                      </a:solidFill>
+                      <a:prstDash val="solid"/>
+                      <a:round/>
+                      <a:headEnd type="none" w="med" len="med"/>
+                      <a:tailEnd type="none" w="med" len="med"/>
                     </a:lnT>
                     <a:lnB w="6349" algn="ctr">
-                      <a:solidFill>
-                        <a:srgbClr val="000000"/>
-                      </a:solidFill>
+                      <a:noFill/>
                     </a:lnB>
+                    <a:lnTlToBr w="12700" cmpd="sng">
+                      <a:noFill/>
+                      <a:prstDash val="solid"/>
+                    </a:lnTlToBr>
+                    <a:lnBlToTr w="12700" cmpd="sng">
+                      <a:noFill/>
+                      <a:prstDash val="solid"/>
+                    </a:lnBlToTr>
                   </a:tcPr>
                 </a:tc>
+                <a:extLst>
+                  <a:ext uri="{0D108BD9-81ED-4DB2-BD59-A6C34878D82A}">
+                    <a16:rowId xmlns:a16="http://schemas.microsoft.com/office/drawing/2014/main" val="10004"/>
+                  </a:ext>
+                </a:extLst>
               </a:tr>
             </a:tbl>
           </a:graphicData>
@@ -3010,13 +3238,13 @@
       </p:graphicFrame>
       <p:sp>
         <p:nvSpPr>
-          <p:cNvPr id="712748204" name=""/>
+          <p:cNvPr id="712748204" name="Textfeld 712748203"/>
           <p:cNvSpPr txBox="1"/>
           <p:nvPr/>
         </p:nvSpPr>
         <p:spPr bwMode="auto">
-          <a:xfrm flipH="0" flipV="0">
-            <a:off x="1931734" y="33229192"/>
+          <a:xfrm>
+            <a:off x="1671316" y="33232399"/>
             <a:ext cx="12029005" cy="913311"/>
           </a:xfrm>
           <a:prstGeom prst="rect">
@@ -3040,24 +3268,24 @@
               <a:defRPr/>
             </a:pPr>
             <a:r>
-              <a:rPr lang="de-DE" sz="5400" b="1" strike="noStrike" cap="small">
+              <a:rPr lang="en-US" sz="5400" b="1" strike="noStrike" cap="small" noProof="0" dirty="0">
                 <a:latin typeface="Liberation Serif"/>
               </a:rPr>
               <a:t>Sender and Receiver in Interaction</a:t>
             </a:r>
-            <a:endParaRPr sz="5400"/>
+            <a:endParaRPr lang="en-US" sz="5400" noProof="0" dirty="0"/>
           </a:p>
         </p:txBody>
       </p:sp>
       <p:sp>
         <p:nvSpPr>
-          <p:cNvPr id="1306445905" name=""/>
+          <p:cNvPr id="1306445905" name="Textfeld 1306445904"/>
           <p:cNvSpPr txBox="1"/>
           <p:nvPr/>
         </p:nvSpPr>
         <p:spPr bwMode="auto">
-          <a:xfrm flipH="0" flipV="0">
-            <a:off x="1895073" y="25841590"/>
+          <a:xfrm>
+            <a:off x="1671316" y="25358407"/>
             <a:ext cx="12017124" cy="913311"/>
           </a:xfrm>
           <a:prstGeom prst="rect">
@@ -3081,12 +3309,79 @@
               <a:defRPr/>
             </a:pPr>
             <a:r>
-              <a:rPr lang="de-DE" sz="5400" b="1" strike="noStrike" cap="small">
+              <a:rPr lang="en-US" sz="5400" b="1" strike="noStrike" cap="small" noProof="0" dirty="0">
                 <a:latin typeface="Liberation Serif"/>
               </a:rPr>
-              <a:t>Sender in supervised generation</a:t>
-            </a:r>
-            <a:endParaRPr sz="5400"/>
+              <a:t>Sender in Supervised Generation</a:t>
+            </a:r>
+            <a:endParaRPr lang="en-US" sz="5400" noProof="0" dirty="0"/>
+          </a:p>
+        </p:txBody>
+      </p:sp>
+      <p:sp>
+        <p:nvSpPr>
+          <p:cNvPr id="2" name="Textfeld 1">
+            <a:extLst>
+              <a:ext uri="{FF2B5EF4-FFF2-40B4-BE49-F238E27FC236}">
+                <a16:creationId xmlns:a16="http://schemas.microsoft.com/office/drawing/2014/main" id="{857742EE-FC12-C551-05B9-13415C0555FD}"/>
+              </a:ext>
+            </a:extLst>
+          </p:cNvPr>
+          <p:cNvSpPr txBox="1"/>
+          <p:nvPr/>
+        </p:nvSpPr>
+        <p:spPr>
+          <a:xfrm>
+            <a:off x="11025859" y="15639990"/>
+            <a:ext cx="8395934" cy="1937530"/>
+          </a:xfrm>
+          <a:prstGeom prst="rect">
+            <a:avLst/>
+          </a:prstGeom>
+          <a:noFill/>
+          <a:ln>
+            <a:noFill/>
+          </a:ln>
+          <a:effectLst/>
+        </p:spPr>
+        <p:txBody>
+          <a:bodyPr wrap="square" lIns="89993" tIns="44996" rIns="89993" bIns="44996" anchor="ctr">
+            <a:spAutoFit/>
+          </a:bodyPr>
+          <a:lstStyle>
+            <a:defPPr/>
+            <a:lvl1pPr>
+              <a:defRPr sz="4000" b="0" i="1" u="none" strike="noStrike" cap="none" spc="0">
+                <a:solidFill>
+                  <a:srgbClr val="000000"/>
+                </a:solidFill>
+                <a:latin typeface="Liberation Sans"/>
+                <a:ea typeface="Liberation Sans"/>
+                <a:cs typeface="Liberation Sans"/>
+              </a:defRPr>
+            </a:lvl1pPr>
+          </a:lstStyle>
+          <a:p>
+            <a:pPr marL="571500" indent="-571500">
+              <a:buFont typeface="Arial" panose="020B0604020202020204" pitchFamily="34" charset="0"/>
+              <a:buChar char="•"/>
+            </a:pPr>
+            <a:r>
+              <a:rPr lang="en-US" i="0" noProof="0" dirty="0"/>
+              <a:t>Receiver </a:t>
+            </a:r>
+            <a:r>
+              <a:rPr lang="en-US" b="1" i="0" noProof="0" dirty="0"/>
+              <a:t>attends to region </a:t>
+            </a:r>
+            <a:r>
+              <a:rPr lang="en-US" i="0" noProof="0" dirty="0"/>
+              <a:t>in visual scene </a:t>
+            </a:r>
+            <a:r>
+              <a:rPr lang="en-US" b="1" i="0" noProof="0" dirty="0"/>
+              <a:t>based on the sender‘s message</a:t>
+            </a:r>
           </a:p>
         </p:txBody>
       </p:sp>
@@ -3095,19 +3390,11 @@
   <p:clrMapOvr>
     <a:masterClrMapping/>
   </p:clrMapOvr>
-  <mc:AlternateContent xmlns:mc="http://schemas.openxmlformats.org/markup-compatibility/2006">
-    <mc:Choice xmlns:p159="http://schemas.microsoft.com/office/powerpoint/2015/09/main" xmlns:p14="http://schemas.microsoft.com/office/powerpoint/2010/main" Requires="p159">
-      <p:transition p14:dur="2000" advClick="1"/>
-    </mc:Choice>
-    <mc:Fallback>
-      <p:transition advClick="1"/>
-    </mc:Fallback>
-  </mc:AlternateContent>
 </p:sld>
 </file>
 
 <file path=ppt/theme/theme1.xml><?xml version="1.0" encoding="utf-8"?>
-<a:theme xmlns:a="http://schemas.openxmlformats.org/drawingml/2006/main" xmlns:r="http://schemas.openxmlformats.org/officeDocument/2006/relationships" xmlns:p="http://schemas.openxmlformats.org/presentationml/2006/main" name="Standard">
+<a:theme xmlns:a="http://schemas.openxmlformats.org/drawingml/2006/main" name="Standard">
   <a:themeElements>
     <a:clrScheme name="Standard">
       <a:dk1>
@@ -3307,11 +3594,12 @@
     </a:fmtScheme>
   </a:themeElements>
   <a:objectDefaults/>
+  <a:extraClrSchemeLst/>
 </a:theme>
 </file>
 
 <file path=ppt/theme/theme2.xml><?xml version="1.0" encoding="utf-8"?>
-<a:theme xmlns:a="http://schemas.openxmlformats.org/drawingml/2006/main" xmlns:r="http://schemas.openxmlformats.org/officeDocument/2006/relationships" xmlns:p="http://schemas.openxmlformats.org/presentationml/2006/main" name="User Theme: 2">
+<a:theme xmlns:a="http://schemas.openxmlformats.org/drawingml/2006/main" name="User Theme: 2">
   <a:themeElements>
     <a:clrScheme name="User Theme: 2">
       <a:dk1>
@@ -3511,5 +3799,6 @@
     </a:fmtScheme>
   </a:themeElements>
   <a:objectDefaults/>
+  <a:extraClrSchemeLst/>
 </a:theme>
 </file>
--- a/semdial-2025/poster.pptx
+++ b/semdial-2025/poster.pptx
@@ -812,7 +812,7 @@
             <a:avLst/>
           </a:prstGeom>
           <a:noFill/>
-          <a:ln w="0">
+          <a:ln w="12700">
             <a:solidFill>
               <a:srgbClr val="000000"/>
             </a:solidFill>
@@ -1303,7 +1303,7 @@
               <a:avLst/>
             </a:prstGeom>
             <a:noFill/>
-            <a:ln w="0">
+            <a:ln w="12700">
               <a:solidFill>
                 <a:srgbClr val="000000"/>
               </a:solidFill>
@@ -1392,7 +1392,7 @@
               <a:avLst/>
             </a:prstGeom>
             <a:noFill/>
-            <a:ln w="0">
+            <a:ln w="12700">
               <a:solidFill>
                 <a:srgbClr val="000000"/>
               </a:solidFill>
@@ -1481,7 +1481,7 @@
               <a:avLst/>
             </a:prstGeom>
             <a:noFill/>
-            <a:ln w="0">
+            <a:ln w="12700">
               <a:solidFill>
                 <a:srgbClr val="000000"/>
               </a:solidFill>

--- a/semdial-2025/poster.pptx
+++ b/semdial-2025/poster.pptx
@@ -241,7 +241,7 @@
             </a:pPr>
             <a:fld id="{1D1B89AE-8D35-4BB5-B492-6D9BE4F23A39}" type="datetime1">
               <a:rPr lang="de-DE"/>
-              <a:t>27.08.25</a:t>
+              <a:t>28.08.25</a:t>
             </a:fld>
             <a:endParaRPr sz="2000"/>
           </a:p>
@@ -441,7 +441,7 @@
             </a:pPr>
             <a:fld id="{1D1B89AE-8D35-4BB5-B492-6D9BE4F23A39}" type="datetime1">
               <a:rPr lang="de-DE"/>
-              <a:t>27.08.25</a:t>
+              <a:t>28.08.25</a:t>
             </a:fld>
             <a:endParaRPr sz="22950"/>
           </a:p>
@@ -871,33 +871,6 @@
           </a:p>
         </p:txBody>
       </p:sp>
-      <p:pic>
-        <p:nvPicPr>
-          <p:cNvPr id="1375978890" name="Grafik 1375978889"/>
-          <p:cNvPicPr/>
-          <p:nvPr/>
-        </p:nvPicPr>
-        <p:blipFill>
-          <a:blip r:embed="rId3">
-            <a:alphaModFix/>
-            <a:lum/>
-          </a:blip>
-          <a:stretch/>
-        </p:blipFill>
-        <p:spPr bwMode="auto">
-          <a:xfrm>
-            <a:off x="12845112" y="19840590"/>
-            <a:ext cx="7692300" cy="5183639"/>
-          </a:xfrm>
-          <a:prstGeom prst="rect">
-            <a:avLst/>
-          </a:prstGeom>
-          <a:ln>
-            <a:noFill/>
-          </a:ln>
-          <a:effectLst/>
-        </p:spPr>
-      </p:pic>
       <p:sp>
         <p:nvSpPr>
           <p:cNvPr id="1148621843" name="Textfeld 1148621842"/>
@@ -944,7 +917,7 @@
           <p:nvPr/>
         </p:nvPicPr>
         <p:blipFill>
-          <a:blip r:embed="rId4">
+          <a:blip r:embed="rId3">
             <a:alphaModFix/>
             <a:lum/>
           </a:blip>
@@ -1247,33 +1220,6 @@
           </a:p>
         </p:txBody>
       </p:sp>
-      <p:pic>
-        <p:nvPicPr>
-          <p:cNvPr id="316695439" name="Grafik 316695438"/>
-          <p:cNvPicPr/>
-          <p:nvPr/>
-        </p:nvPicPr>
-        <p:blipFill>
-          <a:blip r:embed="rId5">
-            <a:alphaModFix/>
-            <a:lum/>
-          </a:blip>
-          <a:stretch/>
-        </p:blipFill>
-        <p:spPr bwMode="auto">
-          <a:xfrm>
-            <a:off x="4681821" y="19840590"/>
-            <a:ext cx="7692300" cy="5186827"/>
-          </a:xfrm>
-          <a:prstGeom prst="rect">
-            <a:avLst/>
-          </a:prstGeom>
-          <a:ln>
-            <a:noFill/>
-          </a:ln>
-          <a:effectLst/>
-        </p:spPr>
-      </p:pic>
       <p:grpSp>
         <p:nvGrpSpPr>
           <p:cNvPr id="21684335" name="Gruppieren 21684334"/>
@@ -1550,7 +1496,7 @@
           <p:nvPr/>
         </p:nvPicPr>
         <p:blipFill>
-          <a:blip r:embed="rId6"/>
+          <a:blip r:embed="rId4"/>
           <a:stretch/>
         </p:blipFill>
         <p:spPr bwMode="auto">
@@ -1821,28 +1767,6 @@
           </a:p>
         </p:txBody>
       </p:sp>
-      <p:pic>
-        <p:nvPicPr>
-          <p:cNvPr id="715971263" name="Grafik 715971262"/>
-          <p:cNvPicPr>
-            <a:picLocks noChangeAspect="1"/>
-          </p:cNvPicPr>
-          <p:nvPr/>
-        </p:nvPicPr>
-        <p:blipFill>
-          <a:blip r:embed="rId7"/>
-          <a:stretch/>
-        </p:blipFill>
-        <p:spPr bwMode="auto">
-          <a:xfrm>
-            <a:off x="20982123" y="19837403"/>
-            <a:ext cx="7692300" cy="5186826"/>
-          </a:xfrm>
-          <a:prstGeom prst="rect">
-            <a:avLst/>
-          </a:prstGeom>
-        </p:spPr>
-      </p:pic>
       <p:sp>
         <p:nvSpPr>
           <p:cNvPr id="1953644601" name="Textfeld 1953644600"/>
@@ -1884,10 +1808,10 @@
           <p:nvPr/>
         </p:nvPicPr>
         <p:blipFill>
-          <a:blip r:embed="rId8">
+          <a:blip r:embed="rId5">
             <a:extLst>
               <a:ext uri="{96DAC541-7B7A-43D3-8B79-37D633B846F1}">
-                <asvg:svgBlip xmlns:asvg="http://schemas.microsoft.com/office/drawing/2016/SVG/main" r:embed="rId9"/>
+                <asvg:svgBlip xmlns:asvg="http://schemas.microsoft.com/office/drawing/2016/SVG/main" r:embed="rId6"/>
               </a:ext>
             </a:extLst>
           </a:blip>
@@ -1990,7 +1914,7 @@
           <p:nvPr/>
         </p:nvPicPr>
         <p:blipFill>
-          <a:blip r:embed="rId10"/>
+          <a:blip r:embed="rId7"/>
           <a:stretch/>
         </p:blipFill>
         <p:spPr bwMode="auto">
@@ -2012,7 +1936,7 @@
           <p:nvPr/>
         </p:nvPicPr>
         <p:blipFill>
-          <a:blip r:embed="rId11"/>
+          <a:blip r:embed="rId8"/>
           <a:stretch/>
         </p:blipFill>
         <p:spPr bwMode="auto">
@@ -2034,7 +1958,7 @@
           <p:nvPr/>
         </p:nvPicPr>
         <p:blipFill>
-          <a:blip r:embed="rId12"/>
+          <a:blip r:embed="rId9"/>
           <a:stretch/>
         </p:blipFill>
         <p:spPr bwMode="auto">
@@ -2056,13 +1980,13 @@
           <p:nvPr>
             <p:extLst>
               <p:ext uri="{D42A27DB-BD31-4B8C-83A1-F6EECF244321}">
-                <p14:modId xmlns:p14="http://schemas.microsoft.com/office/powerpoint/2010/main" val="3638884200"/>
+                <p14:modId xmlns:p14="http://schemas.microsoft.com/office/powerpoint/2010/main" val="1626041262"/>
               </p:ext>
             </p:extLst>
           </p:nvPr>
         </p:nvGraphicFramePr>
         <p:xfrm>
-          <a:off x="1560304" y="26500199"/>
+          <a:off x="1560304" y="26514471"/>
           <a:ext cx="26923999" cy="6515099"/>
         </p:xfrm>
         <a:graphic>
@@ -3121,10 +3045,10 @@
                         <a:defRPr/>
                       </a:pPr>
                       <a:r>
-                        <a:rPr lang="de-DE" sz="3600"/>
+                        <a:rPr lang="de-DE" sz="3600" dirty="0"/>
                         <a:t>69,43%</a:t>
                       </a:r>
-                      <a:endParaRPr sz="3600"/>
+                      <a:endParaRPr sz="3600" dirty="0"/>
                     </a:p>
                   </a:txBody>
                   <a:tcPr anchor="ctr">
@@ -3385,6 +3309,99 @@
           </a:p>
         </p:txBody>
       </p:sp>
+      <p:pic>
+        <p:nvPicPr>
+          <p:cNvPr id="5" name="Grafik 4">
+            <a:extLst>
+              <a:ext uri="{FF2B5EF4-FFF2-40B4-BE49-F238E27FC236}">
+                <a16:creationId xmlns:a16="http://schemas.microsoft.com/office/drawing/2014/main" id="{4B2A79BE-22C2-1010-68C1-65BD5E869113}"/>
+              </a:ext>
+            </a:extLst>
+          </p:cNvPr>
+          <p:cNvPicPr>
+            <a:picLocks noChangeAspect="1"/>
+          </p:cNvPicPr>
+          <p:nvPr/>
+        </p:nvPicPr>
+        <p:blipFill rotWithShape="1">
+          <a:blip r:embed="rId10"/>
+          <a:srcRect l="70084" t="9033" b="2255"/>
+          <a:stretch>
+            <a:fillRect/>
+          </a:stretch>
+        </p:blipFill>
+        <p:spPr>
+          <a:xfrm>
+            <a:off x="20958791" y="19892162"/>
+            <a:ext cx="7692301" cy="4964516"/>
+          </a:xfrm>
+          <a:prstGeom prst="rect">
+            <a:avLst/>
+          </a:prstGeom>
+        </p:spPr>
+      </p:pic>
+      <p:pic>
+        <p:nvPicPr>
+          <p:cNvPr id="6" name="Grafik 5">
+            <a:extLst>
+              <a:ext uri="{FF2B5EF4-FFF2-40B4-BE49-F238E27FC236}">
+                <a16:creationId xmlns:a16="http://schemas.microsoft.com/office/drawing/2014/main" id="{ED4BA39F-3847-E17D-70EA-8AE51C3BE22A}"/>
+              </a:ext>
+            </a:extLst>
+          </p:cNvPr>
+          <p:cNvPicPr>
+            <a:picLocks noChangeAspect="1"/>
+          </p:cNvPicPr>
+          <p:nvPr/>
+        </p:nvPicPr>
+        <p:blipFill>
+          <a:blip r:embed="rId11"/>
+          <a:srcRect l="35375" t="9466" r="35359" b="2660"/>
+          <a:stretch>
+            <a:fillRect/>
+          </a:stretch>
+        </p:blipFill>
+        <p:spPr>
+          <a:xfrm>
+            <a:off x="4600113" y="19898878"/>
+            <a:ext cx="7692300" cy="5029808"/>
+          </a:xfrm>
+          <a:prstGeom prst="rect">
+            <a:avLst/>
+          </a:prstGeom>
+        </p:spPr>
+      </p:pic>
+      <p:pic>
+        <p:nvPicPr>
+          <p:cNvPr id="7" name="Grafik 6">
+            <a:extLst>
+              <a:ext uri="{FF2B5EF4-FFF2-40B4-BE49-F238E27FC236}">
+                <a16:creationId xmlns:a16="http://schemas.microsoft.com/office/drawing/2014/main" id="{4F587104-E8F4-4D8F-ECB5-A4D7566C9910}"/>
+              </a:ext>
+            </a:extLst>
+          </p:cNvPr>
+          <p:cNvPicPr>
+            <a:picLocks noChangeAspect="1"/>
+          </p:cNvPicPr>
+          <p:nvPr/>
+        </p:nvPicPr>
+        <p:blipFill>
+          <a:blip r:embed="rId12"/>
+          <a:srcRect l="70888" t="8364" b="2546"/>
+          <a:stretch>
+            <a:fillRect/>
+          </a:stretch>
+        </p:blipFill>
+        <p:spPr>
+          <a:xfrm>
+            <a:off x="12985435" y="19901847"/>
+            <a:ext cx="7551977" cy="5029808"/>
+          </a:xfrm>
+          <a:prstGeom prst="rect">
+            <a:avLst/>
+          </a:prstGeom>
+        </p:spPr>
+      </p:pic>
     </p:spTree>
   </p:cSld>
   <p:clrMapOvr>

--- a/semdial-2025/poster.pptx
+++ b/semdial-2025/poster.pptx
@@ -299,7 +299,7 @@
             </a:pPr>
             <a:fld id="{5CC2A059-B141-45A7-B910-B096D6D06820}" type="slidenum">
               <a:rPr/>
-              <a:t>‹Nr.›</a:t>
+              <a:t>‹#›</a:t>
             </a:fld>
             <a:endParaRPr/>
           </a:p>
@@ -515,7 +515,7 @@
             </a:pPr>
             <a:fld id="{5CC2A059-B141-45A7-B910-B096D6D06820}" type="slidenum">
               <a:rPr/>
-              <a:t>‹Nr.›</a:t>
+              <a:t>‹#›</a:t>
             </a:fld>
             <a:endParaRPr/>
           </a:p>
@@ -806,7 +806,7 @@
         <p:spPr bwMode="auto">
           <a:xfrm>
             <a:off x="1432391" y="18544887"/>
-            <a:ext cx="27397830" cy="22090411"/>
+            <a:ext cx="27397830" cy="22294694"/>
           </a:xfrm>
           <a:prstGeom prst="rect">
             <a:avLst/>
@@ -826,7 +826,7 @@
             <a:pPr>
               <a:defRPr/>
             </a:pPr>
-            <a:endParaRPr lang="en-US" noProof="0" dirty="0"/>
+            <a:endParaRPr lang="en-US" noProof="0"/>
           </a:p>
         </p:txBody>
       </p:sp>
@@ -945,8 +945,8 @@
         </p:nvSpPr>
         <p:spPr bwMode="auto">
           <a:xfrm>
-            <a:off x="1671316" y="9070314"/>
-            <a:ext cx="8291099" cy="8708615"/>
+            <a:off x="1671316" y="9685867"/>
+            <a:ext cx="8291099" cy="7477508"/>
           </a:xfrm>
           <a:prstGeom prst="rect">
             <a:avLst/>
@@ -975,7 +975,29 @@
                 <a:ea typeface="Liberation Sans"/>
                 <a:cs typeface="Liberation Sans"/>
               </a:rPr>
-              <a:t>A picture can say thousand words...</a:t>
+              <a:t>A picture </a:t>
+            </a:r>
+            <a:r>
+              <a:rPr lang="en-US" sz="4000" i="1" dirty="0">
+                <a:solidFill>
+                  <a:srgbClr val="000000"/>
+                </a:solidFill>
+                <a:latin typeface="Liberation Sans"/>
+                <a:ea typeface="Liberation Sans"/>
+                <a:cs typeface="Liberation Sans"/>
+              </a:rPr>
+              <a:t>is worth a</a:t>
+            </a:r>
+            <a:r>
+              <a:rPr lang="en-US" sz="4000" b="0" i="1" u="none" strike="noStrike" cap="none" spc="0" noProof="0" dirty="0">
+                <a:solidFill>
+                  <a:srgbClr val="000000"/>
+                </a:solidFill>
+                <a:latin typeface="Liberation Sans"/>
+                <a:ea typeface="Liberation Sans"/>
+                <a:cs typeface="Liberation Sans"/>
+              </a:rPr>
+              <a:t> thousand words...</a:t>
             </a:r>
           </a:p>
           <a:p>
@@ -1134,7 +1156,7 @@
                 <a:ea typeface="Liberation Sans"/>
                 <a:cs typeface="Liberation Sans"/>
               </a:rPr>
-              <a:t>Investigate the</a:t>
+              <a:t>Investigate the effects of </a:t>
             </a:r>
             <a:r>
               <a:rPr lang="en-US" sz="4000" b="1" i="0" u="none" strike="noStrike" cap="none" spc="0" noProof="0" dirty="0">
@@ -1145,7 +1167,51 @@
                 <a:ea typeface="Liberation Sans"/>
                 <a:cs typeface="Liberation Sans"/>
               </a:rPr>
-              <a:t> role of scene complexity</a:t>
+              <a:t>structured </a:t>
+            </a:r>
+            <a:r>
+              <a:rPr lang="en-US" sz="4000" b="1" dirty="0">
+                <a:solidFill>
+                  <a:srgbClr val="000000"/>
+                </a:solidFill>
+                <a:latin typeface="Liberation Sans"/>
+                <a:ea typeface="Liberation Sans"/>
+                <a:cs typeface="Liberation Sans"/>
+              </a:rPr>
+              <a:t>biases</a:t>
+            </a:r>
+            <a:r>
+              <a:rPr lang="en-US" sz="4000" b="1" i="0" u="none" strike="noStrike" cap="none" spc="0" noProof="0" dirty="0">
+                <a:solidFill>
+                  <a:srgbClr val="000000"/>
+                </a:solidFill>
+                <a:latin typeface="Liberation Sans"/>
+                <a:ea typeface="Liberation Sans"/>
+                <a:cs typeface="Liberation Sans"/>
+              </a:rPr>
+              <a:t> </a:t>
+            </a:r>
+            <a:r>
+              <a:rPr lang="en-US" sz="4000" i="0" u="none" strike="noStrike" cap="none" spc="0" noProof="0" dirty="0">
+                <a:solidFill>
+                  <a:srgbClr val="000000"/>
+                </a:solidFill>
+                <a:latin typeface="Liberation Sans"/>
+                <a:ea typeface="Liberation Sans"/>
+                <a:cs typeface="Liberation Sans"/>
+              </a:rPr>
+              <a:t>of</a:t>
+            </a:r>
+            <a:r>
+              <a:rPr lang="en-US" sz="4000" b="1" i="0" u="none" strike="noStrike" cap="none" spc="0" noProof="0" dirty="0">
+                <a:solidFill>
+                  <a:srgbClr val="000000"/>
+                </a:solidFill>
+                <a:latin typeface="Liberation Sans"/>
+                <a:ea typeface="Liberation Sans"/>
+                <a:cs typeface="Liberation Sans"/>
+              </a:rPr>
+              <a:t> scene complexity</a:t>
             </a:r>
             <a:r>
               <a:rPr lang="en-US" sz="4000" b="0" i="0" u="none" strike="noStrike" cap="none" spc="0" noProof="0" dirty="0">
@@ -1167,7 +1233,18 @@
                 <a:ea typeface="Liberation Sans"/>
                 <a:cs typeface="Liberation Sans"/>
               </a:rPr>
-              <a:t>discriminating features present</a:t>
+              <a:t>discriminating features </a:t>
+            </a:r>
+            <a:r>
+              <a:rPr lang="en-US" sz="4000" i="0" u="none" strike="noStrike" cap="none" spc="0" noProof="0" dirty="0">
+                <a:solidFill>
+                  <a:srgbClr val="000000"/>
+                </a:solidFill>
+                <a:latin typeface="Liberation Sans"/>
+                <a:ea typeface="Liberation Sans"/>
+                <a:cs typeface="Liberation Sans"/>
+              </a:rPr>
+              <a:t>present</a:t>
             </a:r>
             <a:r>
               <a:rPr lang="en-US" sz="4000" b="0" i="0" u="none" strike="noStrike" cap="none" spc="0" noProof="0" dirty="0">
@@ -1263,7 +1340,7 @@
               <a:pPr>
                 <a:defRPr/>
               </a:pPr>
-              <a:endParaRPr lang="en-US" noProof="0" dirty="0"/>
+              <a:endParaRPr lang="en-US" noProof="0"/>
             </a:p>
           </p:txBody>
         </p:sp>
@@ -1299,12 +1376,12 @@
                 <a:defRPr/>
               </a:pPr>
               <a:r>
-                <a:rPr lang="en-US" sz="5400" b="1" strike="noStrike" cap="small" noProof="0" dirty="0">
+                <a:rPr lang="en-US" sz="5400" b="1" strike="noStrike" cap="small" noProof="0">
                   <a:latin typeface="Liberation Serif"/>
                 </a:rPr>
                 <a:t>Setup</a:t>
               </a:r>
-              <a:endParaRPr lang="en-US" sz="5400" noProof="0" dirty="0"/>
+              <a:endParaRPr lang="en-US" sz="5400" noProof="0"/>
             </a:p>
           </p:txBody>
         </p:sp>
@@ -1352,7 +1429,7 @@
               <a:pPr>
                 <a:defRPr/>
               </a:pPr>
-              <a:endParaRPr lang="en-US" noProof="0" dirty="0"/>
+              <a:endParaRPr lang="en-US" noProof="0"/>
             </a:p>
           </p:txBody>
         </p:sp>
@@ -1441,7 +1518,7 @@
               <a:pPr>
                 <a:defRPr/>
               </a:pPr>
-              <a:endParaRPr lang="en-US" noProof="0" dirty="0"/>
+              <a:endParaRPr lang="en-US" noProof="0"/>
             </a:p>
           </p:txBody>
         </p:sp>
@@ -1454,7 +1531,7 @@
           <p:spPr bwMode="auto">
             <a:xfrm>
               <a:off x="172692" y="0"/>
-              <a:ext cx="4008171" cy="913311"/>
+              <a:ext cx="3019494" cy="921866"/>
             </a:xfrm>
             <a:prstGeom prst="rect">
               <a:avLst/>
@@ -1468,7 +1545,7 @@
             <a:effectLst/>
           </p:spPr>
           <p:txBody>
-            <a:bodyPr lIns="89992" tIns="44995" rIns="89992" bIns="44995">
+            <a:bodyPr wrap="square" lIns="89992" tIns="44995" rIns="89992" bIns="44995">
               <a:spAutoFit/>
             </a:bodyPr>
             <a:lstStyle/>
@@ -1477,12 +1554,12 @@
                 <a:defRPr/>
               </a:pPr>
               <a:r>
-                <a:rPr lang="en-US" sz="5400" b="1" strike="noStrike" cap="small" noProof="0" dirty="0">
+                <a:rPr lang="en-US" sz="5400" b="1" cap="small" noProof="0">
                   <a:latin typeface="Liberation Serif"/>
                 </a:rPr>
-                <a:t>Conclusion</a:t>
+                <a:t>Findings</a:t>
               </a:r>
-              <a:endParaRPr lang="en-US" sz="5400" noProof="0" dirty="0"/>
+              <a:endParaRPr lang="en-US" sz="5400" noProof="0"/>
             </a:p>
           </p:txBody>
         </p:sp>
@@ -1517,8 +1594,8 @@
         </p:nvSpPr>
         <p:spPr bwMode="auto">
           <a:xfrm>
-            <a:off x="20197884" y="9209228"/>
-            <a:ext cx="8286419" cy="8049838"/>
+            <a:off x="20197884" y="8879842"/>
+            <a:ext cx="8286419" cy="8708613"/>
           </a:xfrm>
           <a:prstGeom prst="rect">
             <a:avLst/>
@@ -1570,6 +1647,54 @@
               <a:defRPr/>
             </a:pPr>
             <a:r>
+              <a:rPr lang="en-US" sz="4000" dirty="0">
+                <a:solidFill>
+                  <a:srgbClr val="000000"/>
+                </a:solidFill>
+                <a:latin typeface="Liberation Sans"/>
+                <a:ea typeface="Liberation Sans"/>
+                <a:cs typeface="Liberation Sans"/>
+              </a:rPr>
+              <a:t>Emergent vocabularies </a:t>
+            </a:r>
+            <a:r>
+              <a:rPr lang="en-US" sz="4000" b="1" dirty="0">
+                <a:solidFill>
+                  <a:srgbClr val="000000"/>
+                </a:solidFill>
+                <a:latin typeface="Liberation Sans"/>
+                <a:ea typeface="Liberation Sans"/>
+                <a:cs typeface="Liberation Sans"/>
+              </a:rPr>
+              <a:t>align with the structured contextual biases</a:t>
+            </a:r>
+            <a:r>
+              <a:rPr lang="en-US" sz="4000" dirty="0">
+                <a:solidFill>
+                  <a:srgbClr val="000000"/>
+                </a:solidFill>
+                <a:latin typeface="Liberation Sans"/>
+                <a:ea typeface="Liberation Sans"/>
+                <a:cs typeface="Liberation Sans"/>
+              </a:rPr>
+              <a:t> introduced</a:t>
+            </a:r>
+            <a:endParaRPr lang="en-US" sz="4000" b="0" i="0" u="none" strike="noStrike" cap="none" spc="0" noProof="0" dirty="0">
+              <a:solidFill>
+                <a:srgbClr val="000000"/>
+              </a:solidFill>
+              <a:latin typeface="Liberation Sans"/>
+              <a:ea typeface="Liberation Sans"/>
+              <a:cs typeface="Liberation Sans"/>
+            </a:endParaRPr>
+          </a:p>
+          <a:p>
+            <a:pPr marL="526195" indent="-526195">
+              <a:buFont typeface="Arial"/>
+              <a:buChar char="•"/>
+              <a:defRPr/>
+            </a:pPr>
+            <a:r>
               <a:rPr lang="en-US" sz="4000" b="0" i="0" u="none" strike="noStrike" cap="none" spc="0" noProof="0" dirty="0">
                 <a:solidFill>
                   <a:srgbClr val="000000"/>
@@ -1600,7 +1725,18 @@
                 <a:ea typeface="Liberation Sans"/>
                 <a:cs typeface="Liberation Sans"/>
               </a:rPr>
-              <a:t>) dramatically</a:t>
+              <a:t>) </a:t>
+            </a:r>
+            <a:r>
+              <a:rPr lang="en-US" sz="4000" dirty="0">
+                <a:solidFill>
+                  <a:srgbClr val="000000"/>
+                </a:solidFill>
+                <a:latin typeface="Liberation Sans"/>
+                <a:ea typeface="Liberation Sans"/>
+                <a:cs typeface="Liberation Sans"/>
+              </a:rPr>
+              <a:t>strongly</a:t>
             </a:r>
             <a:r>
               <a:rPr lang="en-US" sz="4000" b="0" i="0" u="none" strike="noStrike" cap="none" spc="0" noProof="0" dirty="0">
@@ -1726,6 +1862,17 @@
               <a:defRPr/>
             </a:pPr>
             <a:r>
+              <a:rPr lang="en-US" sz="4000" b="1" i="0" u="none" strike="noStrike" cap="none" spc="0" noProof="0" dirty="0">
+                <a:solidFill>
+                  <a:srgbClr val="000000"/>
+                </a:solidFill>
+                <a:latin typeface="Liberation Sans"/>
+                <a:ea typeface="Liberation Sans"/>
+                <a:cs typeface="Liberation Sans"/>
+              </a:rPr>
+              <a:t>Future:</a:t>
+            </a:r>
+            <a:r>
               <a:rPr lang="en-US" sz="4000" b="0" i="0" u="none" strike="noStrike" cap="none" spc="0" noProof="0" dirty="0">
                 <a:solidFill>
                   <a:srgbClr val="000000"/>
@@ -1734,28 +1881,7 @@
                 <a:ea typeface="Liberation Sans"/>
                 <a:cs typeface="Liberation Sans"/>
               </a:rPr>
-              <a:t>Future: Analyze linguistic properties of</a:t>
-            </a:r>
-            <a:r>
-              <a:rPr lang="en-US" sz="4000" b="0" i="0" u="none" strike="noStrike" cap="none" spc="0" noProof="0" dirty="0">
-                <a:solidFill>
-                  <a:srgbClr val="000000"/>
-                </a:solidFill>
-                <a:latin typeface="Liberation Sans"/>
-                <a:cs typeface="Liberation Sans"/>
-              </a:rPr>
-              <a:t> </a:t>
-            </a:r>
-            <a:r>
-              <a:rPr lang="en-US" sz="4000" b="0" i="0" u="none" strike="noStrike" cap="none" spc="0" noProof="0" dirty="0">
-                <a:solidFill>
-                  <a:srgbClr val="000000"/>
-                </a:solidFill>
-                <a:latin typeface="Liberation Sans"/>
-                <a:ea typeface="Liberation Sans"/>
-                <a:cs typeface="Liberation Sans"/>
-              </a:rPr>
-              <a:t>emergent languages</a:t>
+              <a:t> Compare emergent vocabularies and languages with (different) natural languages</a:t>
             </a:r>
             <a:endParaRPr lang="en-US" sz="4000" b="0" i="0" u="none" strike="noStrike" cap="none" spc="0" noProof="0" dirty="0">
               <a:solidFill>
@@ -1793,7 +1919,9 @@
               <a:defRPr/>
             </a:pPr>
             <a:r>
-              <a:rPr lang="en-US" sz="2800" noProof="0" dirty="0"/>
+              <a:rPr lang="en-US" sz="2800" noProof="0" dirty="0">
+                <a:latin typeface="Liberation Sans Narrow" panose="020B0606020202030204" pitchFamily="34" charset="0"/>
+              </a:rPr>
               <a:t>16th International Conference on Computational Semantics (IWCS 2025)</a:t>
             </a:r>
           </a:p>
@@ -1819,7 +1947,7 @@
         </p:blipFill>
         <p:spPr bwMode="auto">
           <a:xfrm>
-            <a:off x="25184099" y="40919400"/>
+            <a:off x="25401221" y="41246206"/>
             <a:ext cx="3429000" cy="1000125"/>
           </a:xfrm>
           <a:prstGeom prst="rect">
@@ -1919,7 +2047,7 @@
         </p:blipFill>
         <p:spPr bwMode="auto">
           <a:xfrm>
-            <a:off x="20708641" y="34144462"/>
+            <a:off x="20711764" y="34385736"/>
             <a:ext cx="8037683" cy="6262236"/>
           </a:xfrm>
           <a:prstGeom prst="rect">
@@ -1941,7 +2069,7 @@
         </p:blipFill>
         <p:spPr bwMode="auto">
           <a:xfrm>
-            <a:off x="4426165" y="34142504"/>
+            <a:off x="4429288" y="34383778"/>
             <a:ext cx="8040197" cy="6264194"/>
           </a:xfrm>
           <a:prstGeom prst="rect">
@@ -1963,7 +2091,7 @@
         </p:blipFill>
         <p:spPr bwMode="auto">
           <a:xfrm>
-            <a:off x="12642790" y="34143718"/>
+            <a:off x="12645913" y="34384992"/>
             <a:ext cx="8038638" cy="6262980"/>
           </a:xfrm>
           <a:prstGeom prst="rect">
@@ -1980,7 +2108,7 @@
           <p:nvPr>
             <p:extLst>
               <p:ext uri="{D42A27DB-BD31-4B8C-83A1-F6EECF244321}">
-                <p14:modId xmlns:p14="http://schemas.microsoft.com/office/powerpoint/2010/main" val="1626041262"/>
+                <p14:modId xmlns:p14="http://schemas.microsoft.com/office/powerpoint/2010/main" val="1445686652"/>
               </p:ext>
             </p:extLst>
           </p:nvPr>
@@ -2035,29 +2163,41 @@
                         <a:defRPr/>
                       </a:pPr>
                       <a:r>
-                        <a:rPr lang="de-DE" sz="3600" b="1" dirty="0" err="1"/>
+                        <a:rPr lang="de-DE" sz="3600" b="1" dirty="0" err="1">
+                          <a:latin typeface="Liberation Sans Narrow" panose="020B0606020202030204" pitchFamily="34" charset="0"/>
+                        </a:rPr>
                         <a:t>Strict</a:t>
                       </a:r>
                       <a:r>
-                        <a:rPr lang="de-DE" sz="3600" b="1" dirty="0"/>
+                        <a:rPr lang="de-DE" sz="3600" b="1" dirty="0">
+                          <a:latin typeface="Liberation Sans Narrow" panose="020B0606020202030204" pitchFamily="34" charset="0"/>
+                        </a:rPr>
                         <a:t> </a:t>
                       </a:r>
                       <a:r>
-                        <a:rPr lang="de-DE" sz="3600" b="1" dirty="0" err="1"/>
+                        <a:rPr lang="de-DE" sz="3600" b="1" dirty="0" err="1">
+                          <a:latin typeface="Liberation Sans Narrow" panose="020B0606020202030204" pitchFamily="34" charset="0"/>
+                        </a:rPr>
                         <a:t>string</a:t>
                       </a:r>
                       <a:r>
-                        <a:rPr lang="de-DE" sz="3600" b="1" dirty="0"/>
+                        <a:rPr lang="de-DE" sz="3600" b="1" dirty="0">
+                          <a:latin typeface="Liberation Sans Narrow" panose="020B0606020202030204" pitchFamily="34" charset="0"/>
+                        </a:rPr>
                         <a:t> </a:t>
                       </a:r>
                       <a:r>
-                        <a:rPr lang="de-DE" sz="3600" b="1" dirty="0" err="1"/>
+                        <a:rPr lang="de-DE" sz="3600" b="1" dirty="0" err="1">
+                          <a:latin typeface="Liberation Sans Narrow" panose="020B0606020202030204" pitchFamily="34" charset="0"/>
+                        </a:rPr>
                         <a:t>accuracy</a:t>
                       </a:r>
-                      <a:endParaRPr sz="3600" b="1" dirty="0"/>
+                      <a:endParaRPr sz="3600" b="1" dirty="0">
+                        <a:latin typeface="Liberation Sans Narrow" panose="020B0606020202030204" pitchFamily="34" charset="0"/>
+                      </a:endParaRPr>
                     </a:p>
                   </a:txBody>
-                  <a:tcPr anchor="ctr">
+                  <a:tcPr marL="90000" anchor="ctr">
                     <a:lnL w="6349" algn="ctr">
                       <a:noFill/>
                     </a:lnL>
@@ -2095,13 +2235,17 @@
                         <a:defRPr/>
                       </a:pPr>
                       <a:r>
-                        <a:rPr lang="de-DE" sz="3600" dirty="0"/>
+                        <a:rPr lang="de-DE" sz="3600" dirty="0">
+                          <a:latin typeface="Liberation Sans Narrow" panose="020B0606020202030204" pitchFamily="34" charset="0"/>
+                        </a:rPr>
                         <a:t>99%</a:t>
                       </a:r>
-                      <a:endParaRPr sz="3600" dirty="0"/>
+                      <a:endParaRPr sz="3600" dirty="0">
+                        <a:latin typeface="Liberation Sans Narrow" panose="020B0606020202030204" pitchFamily="34" charset="0"/>
+                      </a:endParaRPr>
                     </a:p>
                   </a:txBody>
-                  <a:tcPr anchor="ctr">
+                  <a:tcPr marL="90000" anchor="ctr">
                     <a:lnL w="6349" algn="ctr">
                       <a:noFill/>
                     </a:lnL>
@@ -2145,13 +2289,17 @@
                         <a:defRPr/>
                       </a:pPr>
                       <a:r>
-                        <a:rPr lang="de-DE" sz="3600" dirty="0"/>
+                        <a:rPr lang="de-DE" sz="3600" dirty="0">
+                          <a:latin typeface="Liberation Sans Narrow" panose="020B0606020202030204" pitchFamily="34" charset="0"/>
+                        </a:rPr>
                         <a:t>69%</a:t>
                       </a:r>
-                      <a:endParaRPr sz="3600" dirty="0"/>
+                      <a:endParaRPr sz="3600" dirty="0">
+                        <a:latin typeface="Liberation Sans Narrow" panose="020B0606020202030204" pitchFamily="34" charset="0"/>
+                      </a:endParaRPr>
                     </a:p>
                   </a:txBody>
-                  <a:tcPr anchor="ctr">
+                  <a:tcPr marL="90000" anchor="ctr">
                     <a:lnL w="12700" cap="flat" cmpd="sng" algn="ctr">
                       <a:solidFill>
                         <a:schemeClr val="tx1"/>
@@ -2201,13 +2349,17 @@
                         <a:defRPr/>
                       </a:pPr>
                       <a:r>
-                        <a:rPr lang="de-DE" sz="3600" dirty="0"/>
+                        <a:rPr lang="de-DE" sz="3600" dirty="0">
+                          <a:latin typeface="Liberation Sans Narrow" panose="020B0606020202030204" pitchFamily="34" charset="0"/>
+                        </a:rPr>
                         <a:t>93%</a:t>
                       </a:r>
-                      <a:endParaRPr sz="3600" dirty="0"/>
+                      <a:endParaRPr sz="3600" dirty="0">
+                        <a:latin typeface="Liberation Sans Narrow" panose="020B0606020202030204" pitchFamily="34" charset="0"/>
+                      </a:endParaRPr>
                     </a:p>
                   </a:txBody>
-                  <a:tcPr anchor="ctr">
+                  <a:tcPr marL="90000" anchor="ctr">
                     <a:lnL w="12700" cap="flat" cmpd="sng" algn="ctr">
                       <a:solidFill>
                         <a:schemeClr val="tx1"/>
@@ -2258,13 +2410,17 @@
                         <a:defRPr/>
                       </a:pPr>
                       <a:r>
-                        <a:rPr lang="de-DE" sz="3600" b="1"/>
+                        <a:rPr lang="de-DE" sz="3600" b="1" dirty="0">
+                          <a:latin typeface="Liberation Sans Narrow" panose="020B0606020202030204" pitchFamily="34" charset="0"/>
+                        </a:rPr>
                         <a:t>F1 score</a:t>
                       </a:r>
-                      <a:endParaRPr sz="3600" b="1"/>
+                      <a:endParaRPr sz="3600" b="1" dirty="0">
+                        <a:latin typeface="Liberation Sans Narrow" panose="020B0606020202030204" pitchFamily="34" charset="0"/>
+                      </a:endParaRPr>
                     </a:p>
                   </a:txBody>
-                  <a:tcPr anchor="ctr">
+                  <a:tcPr marL="90000" anchor="ctr">
                     <a:lnL w="6349" algn="ctr">
                       <a:noFill/>
                     </a:lnL>
@@ -2308,13 +2464,17 @@
                         <a:defRPr/>
                       </a:pPr>
                       <a:r>
-                        <a:rPr lang="de-DE" sz="3600" dirty="0"/>
+                        <a:rPr lang="de-DE" sz="3600" dirty="0">
+                          <a:latin typeface="Liberation Sans Narrow" panose="020B0606020202030204" pitchFamily="34" charset="0"/>
+                        </a:rPr>
                         <a:t>98,57%</a:t>
                       </a:r>
-                      <a:endParaRPr sz="3600" dirty="0"/>
+                      <a:endParaRPr sz="3600" dirty="0">
+                        <a:latin typeface="Liberation Sans Narrow" panose="020B0606020202030204" pitchFamily="34" charset="0"/>
+                      </a:endParaRPr>
                     </a:p>
                   </a:txBody>
-                  <a:tcPr anchor="ctr">
+                  <a:tcPr marL="90000" anchor="ctr">
                     <a:lnL w="6349" algn="ctr">
                       <a:noFill/>
                     </a:lnL>
@@ -2364,13 +2524,17 @@
                         <a:defRPr/>
                       </a:pPr>
                       <a:r>
-                        <a:rPr lang="de-DE" sz="3600" dirty="0"/>
+                        <a:rPr lang="de-DE" sz="3600" dirty="0">
+                          <a:latin typeface="Liberation Sans Narrow" panose="020B0606020202030204" pitchFamily="34" charset="0"/>
+                        </a:rPr>
                         <a:t>89,53%</a:t>
                       </a:r>
-                      <a:endParaRPr sz="3600" dirty="0"/>
+                      <a:endParaRPr sz="3600" dirty="0">
+                        <a:latin typeface="Liberation Sans Narrow" panose="020B0606020202030204" pitchFamily="34" charset="0"/>
+                      </a:endParaRPr>
                     </a:p>
                   </a:txBody>
-                  <a:tcPr anchor="ctr">
+                  <a:tcPr marL="90000" anchor="ctr">
                     <a:lnL w="12700" cap="flat" cmpd="sng" algn="ctr">
                       <a:solidFill>
                         <a:schemeClr val="tx1"/>
@@ -2426,13 +2590,17 @@
                         <a:defRPr/>
                       </a:pPr>
                       <a:r>
-                        <a:rPr lang="de-DE" sz="3600" dirty="0"/>
+                        <a:rPr lang="de-DE" sz="3600" dirty="0">
+                          <a:latin typeface="Liberation Sans Narrow" panose="020B0606020202030204" pitchFamily="34" charset="0"/>
+                        </a:rPr>
                         <a:t>95,17%</a:t>
                       </a:r>
-                      <a:endParaRPr sz="3600" dirty="0"/>
+                      <a:endParaRPr sz="3600" dirty="0">
+                        <a:latin typeface="Liberation Sans Narrow" panose="020B0606020202030204" pitchFamily="34" charset="0"/>
+                      </a:endParaRPr>
                     </a:p>
                   </a:txBody>
-                  <a:tcPr anchor="ctr">
+                  <a:tcPr marL="90000" anchor="ctr">
                     <a:lnL w="12700" cap="flat" cmpd="sng" algn="ctr">
                       <a:solidFill>
                         <a:schemeClr val="tx1"/>
@@ -2489,13 +2657,40 @@
                         <a:defRPr/>
                       </a:pPr>
                       <a:r>
-                        <a:rPr lang="de-DE" sz="3600" b="1"/>
-                        <a:t>Shape Precision</a:t>
+                        <a:rPr lang="de-DE" sz="3600" b="1" dirty="0">
+                          <a:latin typeface="Liberation Sans Narrow" panose="020B0606020202030204" pitchFamily="34" charset="0"/>
+                        </a:rPr>
+                        <a:t>Shape </a:t>
                       </a:r>
-                      <a:endParaRPr sz="3600" b="1"/>
+                    </a:p>
+                    <a:p>
+                      <a:pPr algn="r">
+                        <a:defRPr/>
+                      </a:pPr>
+                      <a:r>
+                        <a:rPr lang="de-DE" sz="3600" b="1" dirty="0" err="1">
+                          <a:latin typeface="Liberation Sans Narrow" panose="020B0606020202030204" pitchFamily="34" charset="0"/>
+                        </a:rPr>
+                        <a:t>Prec</a:t>
+                      </a:r>
+                      <a:r>
+                        <a:rPr lang="de-DE" sz="3600" b="1" dirty="0">
+                          <a:latin typeface="Liberation Sans Narrow" panose="020B0606020202030204" pitchFamily="34" charset="0"/>
+                        </a:rPr>
+                        <a:t> / </a:t>
+                      </a:r>
+                      <a:r>
+                        <a:rPr lang="de-DE" sz="3600" b="1" dirty="0" err="1">
+                          <a:latin typeface="Liberation Sans Narrow" panose="020B0606020202030204" pitchFamily="34" charset="0"/>
+                        </a:rPr>
+                        <a:t>Rec</a:t>
+                      </a:r>
+                      <a:endParaRPr sz="3600" b="1" dirty="0">
+                        <a:latin typeface="Liberation Sans Narrow" panose="020B0606020202030204" pitchFamily="34" charset="0"/>
+                      </a:endParaRPr>
                     </a:p>
                   </a:txBody>
-                  <a:tcPr anchor="ctr">
+                  <a:tcPr marL="90000" anchor="ctr">
                     <a:lnL w="6349" algn="ctr">
                       <a:noFill/>
                     </a:lnL>
@@ -2539,13 +2734,17 @@
                         <a:defRPr/>
                       </a:pPr>
                       <a:r>
-                        <a:rPr lang="de-DE" sz="3600"/>
-                        <a:t>99,75%</a:t>
+                        <a:rPr lang="de-DE" sz="3600" dirty="0">
+                          <a:latin typeface="Liberation Sans Narrow" panose="020B0606020202030204" pitchFamily="34" charset="0"/>
+                        </a:rPr>
+                        <a:t>99,75% / 99,74% </a:t>
                       </a:r>
-                      <a:endParaRPr sz="3600"/>
+                      <a:endParaRPr sz="3600" dirty="0">
+                        <a:latin typeface="Liberation Sans Narrow" panose="020B0606020202030204" pitchFamily="34" charset="0"/>
+                      </a:endParaRPr>
                     </a:p>
                   </a:txBody>
-                  <a:tcPr anchor="ctr">
+                  <a:tcPr marL="90000" anchor="ctr">
                     <a:lnL w="6349" algn="ctr">
                       <a:noFill/>
                     </a:lnL>
@@ -2595,13 +2794,17 @@
                         <a:defRPr/>
                       </a:pPr>
                       <a:r>
-                        <a:rPr lang="de-DE" sz="3600" dirty="0"/>
-                        <a:t>98,30%</a:t>
+                        <a:rPr lang="de-DE" sz="3600" dirty="0">
+                          <a:latin typeface="Liberation Sans Narrow" panose="020B0606020202030204" pitchFamily="34" charset="0"/>
+                        </a:rPr>
+                        <a:t>98,30% / 98,3%</a:t>
                       </a:r>
-                      <a:endParaRPr sz="3600" dirty="0"/>
+                      <a:endParaRPr sz="3600" dirty="0">
+                        <a:latin typeface="Liberation Sans Narrow" panose="020B0606020202030204" pitchFamily="34" charset="0"/>
+                      </a:endParaRPr>
                     </a:p>
                   </a:txBody>
-                  <a:tcPr anchor="ctr">
+                  <a:tcPr marL="90000" anchor="ctr">
                     <a:lnL w="12700" cap="flat" cmpd="sng" algn="ctr">
                       <a:solidFill>
                         <a:schemeClr val="tx1"/>
@@ -2657,13 +2860,17 @@
                         <a:defRPr/>
                       </a:pPr>
                       <a:r>
-                        <a:rPr lang="de-DE" sz="3600"/>
-                        <a:t>100%</a:t>
+                        <a:rPr lang="de-DE" sz="3600" dirty="0">
+                          <a:latin typeface="Liberation Sans Narrow" panose="020B0606020202030204" pitchFamily="34" charset="0"/>
+                        </a:rPr>
+                        <a:t>100% / 100%</a:t>
                       </a:r>
-                      <a:endParaRPr sz="3600"/>
+                      <a:endParaRPr sz="3600" dirty="0">
+                        <a:latin typeface="Liberation Sans Narrow" panose="020B0606020202030204" pitchFamily="34" charset="0"/>
+                      </a:endParaRPr>
                     </a:p>
                   </a:txBody>
-                  <a:tcPr anchor="ctr">
+                  <a:tcPr marL="90000" anchor="ctr">
                     <a:lnL w="12700" cap="flat" cmpd="sng" algn="ctr">
                       <a:solidFill>
                         <a:schemeClr val="tx1"/>
@@ -2720,13 +2927,40 @@
                         <a:defRPr/>
                       </a:pPr>
                       <a:r>
-                        <a:rPr lang="de-DE" sz="3600" b="1"/>
-                        <a:t>Color Precision</a:t>
+                        <a:rPr lang="de-DE" sz="3600" b="1" dirty="0">
+                          <a:latin typeface="Liberation Sans Narrow" panose="020B0606020202030204" pitchFamily="34" charset="0"/>
+                        </a:rPr>
+                        <a:t>Color</a:t>
                       </a:r>
-                      <a:endParaRPr sz="3600" b="1"/>
+                    </a:p>
+                    <a:p>
+                      <a:pPr algn="r">
+                        <a:defRPr/>
+                      </a:pPr>
+                      <a:r>
+                        <a:rPr lang="de-DE" sz="3600" b="1" dirty="0" err="1">
+                          <a:latin typeface="Liberation Sans Narrow" panose="020B0606020202030204" pitchFamily="34" charset="0"/>
+                        </a:rPr>
+                        <a:t>Prec</a:t>
+                      </a:r>
+                      <a:r>
+                        <a:rPr lang="de-DE" sz="3600" b="1" dirty="0">
+                          <a:latin typeface="Liberation Sans Narrow" panose="020B0606020202030204" pitchFamily="34" charset="0"/>
+                        </a:rPr>
+                        <a:t> / </a:t>
+                      </a:r>
+                      <a:r>
+                        <a:rPr lang="de-DE" sz="3600" b="1" dirty="0" err="1">
+                          <a:latin typeface="Liberation Sans Narrow" panose="020B0606020202030204" pitchFamily="34" charset="0"/>
+                        </a:rPr>
+                        <a:t>Rec</a:t>
+                      </a:r>
+                      <a:endParaRPr sz="3600" b="1" dirty="0">
+                        <a:latin typeface="Liberation Sans Narrow" panose="020B0606020202030204" pitchFamily="34" charset="0"/>
+                      </a:endParaRPr>
                     </a:p>
                   </a:txBody>
-                  <a:tcPr anchor="ctr">
+                  <a:tcPr marL="90000" anchor="ctr">
                     <a:lnL w="6349" algn="ctr">
                       <a:noFill/>
                     </a:lnL>
@@ -2770,13 +3004,17 @@
                         <a:defRPr/>
                       </a:pPr>
                       <a:r>
-                        <a:rPr lang="de-DE" sz="3600"/>
-                        <a:t>98,09%</a:t>
+                        <a:rPr lang="de-DE" sz="3600" dirty="0">
+                          <a:latin typeface="Liberation Sans Narrow" panose="020B0606020202030204" pitchFamily="34" charset="0"/>
+                        </a:rPr>
+                        <a:t>98,09% / 98,53%</a:t>
                       </a:r>
-                      <a:endParaRPr sz="3600"/>
+                      <a:endParaRPr sz="3600" dirty="0">
+                        <a:latin typeface="Liberation Sans Narrow" panose="020B0606020202030204" pitchFamily="34" charset="0"/>
+                      </a:endParaRPr>
                     </a:p>
                   </a:txBody>
-                  <a:tcPr anchor="ctr">
+                  <a:tcPr marL="90000" anchor="ctr">
                     <a:lnL w="6349" algn="ctr">
                       <a:noFill/>
                     </a:lnL>
@@ -2826,13 +3064,17 @@
                         <a:defRPr/>
                       </a:pPr>
                       <a:r>
-                        <a:rPr lang="de-DE" sz="3600" dirty="0"/>
-                        <a:t>92,44%</a:t>
+                        <a:rPr lang="de-DE" sz="3600" dirty="0">
+                          <a:latin typeface="Liberation Sans Narrow" panose="020B0606020202030204" pitchFamily="34" charset="0"/>
+                        </a:rPr>
+                        <a:t>92,44% / 92,95%</a:t>
                       </a:r>
-                      <a:endParaRPr sz="3600" dirty="0"/>
+                      <a:endParaRPr sz="3600" dirty="0">
+                        <a:latin typeface="Liberation Sans Narrow" panose="020B0606020202030204" pitchFamily="34" charset="0"/>
+                      </a:endParaRPr>
                     </a:p>
                   </a:txBody>
-                  <a:tcPr anchor="ctr">
+                  <a:tcPr marL="90000" anchor="ctr">
                     <a:lnL w="12700" cap="flat" cmpd="sng" algn="ctr">
                       <a:solidFill>
                         <a:schemeClr val="tx1"/>
@@ -2888,13 +3130,17 @@
                         <a:defRPr/>
                       </a:pPr>
                       <a:r>
-                        <a:rPr lang="de-DE" sz="3600" dirty="0"/>
-                        <a:t>92,76%</a:t>
+                        <a:rPr lang="de-DE" sz="3600" dirty="0">
+                          <a:latin typeface="Liberation Sans Narrow" panose="020B0606020202030204" pitchFamily="34" charset="0"/>
+                        </a:rPr>
+                        <a:t>92,76% / 92,76%</a:t>
                       </a:r>
-                      <a:endParaRPr sz="3600" dirty="0"/>
+                      <a:endParaRPr sz="3600" dirty="0">
+                        <a:latin typeface="Liberation Sans Narrow" panose="020B0606020202030204" pitchFamily="34" charset="0"/>
+                      </a:endParaRPr>
                     </a:p>
                   </a:txBody>
-                  <a:tcPr anchor="ctr">
+                  <a:tcPr marL="90000" anchor="ctr">
                     <a:lnL w="12700" cap="flat" cmpd="sng" algn="ctr">
                       <a:solidFill>
                         <a:schemeClr val="tx1"/>
@@ -2951,13 +3197,40 @@
                         <a:defRPr/>
                       </a:pPr>
                       <a:r>
-                        <a:rPr lang="de-DE" sz="3600" b="1"/>
-                        <a:t>Size Precision</a:t>
+                        <a:rPr lang="de-DE" sz="3600" b="1" dirty="0">
+                          <a:latin typeface="Liberation Sans Narrow" panose="020B0606020202030204" pitchFamily="34" charset="0"/>
+                        </a:rPr>
+                        <a:t>Size </a:t>
                       </a:r>
-                      <a:endParaRPr sz="3600" b="1"/>
+                    </a:p>
+                    <a:p>
+                      <a:pPr algn="r">
+                        <a:defRPr/>
+                      </a:pPr>
+                      <a:r>
+                        <a:rPr lang="de-DE" sz="3600" b="1" dirty="0" err="1">
+                          <a:latin typeface="Liberation Sans Narrow" panose="020B0606020202030204" pitchFamily="34" charset="0"/>
+                        </a:rPr>
+                        <a:t>Prec</a:t>
+                      </a:r>
+                      <a:r>
+                        <a:rPr lang="de-DE" sz="3600" b="1" dirty="0">
+                          <a:latin typeface="Liberation Sans Narrow" panose="020B0606020202030204" pitchFamily="34" charset="0"/>
+                        </a:rPr>
+                        <a:t> / </a:t>
+                      </a:r>
+                      <a:r>
+                        <a:rPr lang="de-DE" sz="3600" b="1" dirty="0" err="1">
+                          <a:latin typeface="Liberation Sans Narrow" panose="020B0606020202030204" pitchFamily="34" charset="0"/>
+                        </a:rPr>
+                        <a:t>Rec</a:t>
+                      </a:r>
+                      <a:endParaRPr sz="3600" b="1" dirty="0">
+                        <a:latin typeface="Liberation Sans Narrow" panose="020B0606020202030204" pitchFamily="34" charset="0"/>
+                      </a:endParaRPr>
                     </a:p>
                   </a:txBody>
-                  <a:tcPr anchor="ctr">
+                  <a:tcPr marL="90000" anchor="ctr">
                     <a:lnL w="6349" algn="ctr">
                       <a:noFill/>
                     </a:lnL>
@@ -2995,13 +3268,17 @@
                         <a:defRPr/>
                       </a:pPr>
                       <a:r>
-                        <a:rPr lang="de-DE" sz="3600"/>
-                        <a:t>98,73%</a:t>
+                        <a:rPr lang="de-DE" sz="3600" dirty="0">
+                          <a:latin typeface="Liberation Sans Narrow" panose="020B0606020202030204" pitchFamily="34" charset="0"/>
+                        </a:rPr>
+                        <a:t>98,73% / 95,9%</a:t>
                       </a:r>
-                      <a:endParaRPr sz="3600"/>
+                      <a:endParaRPr sz="3600" dirty="0">
+                        <a:latin typeface="Liberation Sans Narrow" panose="020B0606020202030204" pitchFamily="34" charset="0"/>
+                      </a:endParaRPr>
                     </a:p>
                   </a:txBody>
-                  <a:tcPr anchor="ctr">
+                  <a:tcPr marL="90000" anchor="ctr">
                     <a:lnL w="6349" algn="ctr">
                       <a:noFill/>
                     </a:lnL>
@@ -3045,13 +3322,17 @@
                         <a:defRPr/>
                       </a:pPr>
                       <a:r>
-                        <a:rPr lang="de-DE" sz="3600" dirty="0"/>
-                        <a:t>69,43%</a:t>
+                        <a:rPr lang="de-DE" sz="3600" dirty="0">
+                          <a:latin typeface="Liberation Sans Narrow" panose="020B0606020202030204" pitchFamily="34" charset="0"/>
+                        </a:rPr>
+                        <a:t>69,43% / 64,13%</a:t>
                       </a:r>
-                      <a:endParaRPr sz="3600" dirty="0"/>
+                      <a:endParaRPr sz="3600" dirty="0">
+                        <a:latin typeface="Liberation Sans Narrow" panose="020B0606020202030204" pitchFamily="34" charset="0"/>
+                      </a:endParaRPr>
                     </a:p>
                   </a:txBody>
-                  <a:tcPr anchor="ctr">
+                  <a:tcPr marL="90000" anchor="ctr">
                     <a:lnL w="12700" cap="flat" cmpd="sng" algn="ctr">
                       <a:solidFill>
                         <a:schemeClr val="tx1"/>
@@ -3101,21 +3382,17 @@
                         <a:defRPr/>
                       </a:pPr>
                       <a:r>
-                        <a:rPr lang="de-DE" sz="3600" dirty="0"/>
-                        <a:t>N/A (not </a:t>
+                        <a:rPr lang="de-DE" sz="3600" dirty="0">
+                          <a:latin typeface="Liberation Sans Narrow" panose="020B0606020202030204" pitchFamily="34" charset="0"/>
+                        </a:rPr>
+                        <a:t>N/A</a:t>
                       </a:r>
-                      <a:r>
-                        <a:rPr lang="de-DE" sz="3600" dirty="0" err="1"/>
-                        <a:t>used</a:t>
-                      </a:r>
-                      <a:r>
-                        <a:rPr lang="de-DE" sz="3600" dirty="0"/>
-                        <a:t>)</a:t>
-                      </a:r>
-                      <a:endParaRPr sz="3600" dirty="0"/>
+                      <a:endParaRPr sz="3600" dirty="0">
+                        <a:latin typeface="Liberation Sans Narrow" panose="020B0606020202030204" pitchFamily="34" charset="0"/>
+                      </a:endParaRPr>
                     </a:p>
                   </a:txBody>
-                  <a:tcPr anchor="ctr">
+                  <a:tcPr marL="90000" anchor="ctr">
                     <a:lnL w="12700" cap="flat" cmpd="sng" algn="ctr">
                       <a:solidFill>
                         <a:schemeClr val="tx1"/>
@@ -3168,8 +3445,8 @@
         </p:nvSpPr>
         <p:spPr bwMode="auto">
           <a:xfrm>
-            <a:off x="1671316" y="33232399"/>
-            <a:ext cx="12029005" cy="913311"/>
+            <a:off x="1671316" y="33461912"/>
+            <a:ext cx="16345816" cy="921866"/>
           </a:xfrm>
           <a:prstGeom prst="rect">
             <a:avLst/>
@@ -3183,7 +3460,7 @@
           <a:effectLst/>
         </p:spPr>
         <p:txBody>
-          <a:bodyPr lIns="89992" tIns="44995" rIns="89992" bIns="44995">
+          <a:bodyPr wrap="square" lIns="89992" tIns="44995" rIns="89992" bIns="44995">
             <a:spAutoFit/>
           </a:bodyPr>
           <a:lstStyle/>
@@ -3195,7 +3472,7 @@
               <a:rPr lang="en-US" sz="5400" b="1" strike="noStrike" cap="small" noProof="0" dirty="0">
                 <a:latin typeface="Liberation Serif"/>
               </a:rPr>
-              <a:t>Sender and Receiver in Interaction</a:t>
+              <a:t>Sender and Receiver in Emergent Interaction</a:t>
             </a:r>
             <a:endParaRPr lang="en-US" sz="5400" noProof="0" dirty="0"/>
           </a:p>
@@ -3209,8 +3486,8 @@
         </p:nvSpPr>
         <p:spPr bwMode="auto">
           <a:xfrm>
-            <a:off x="1671316" y="25358407"/>
-            <a:ext cx="12017124" cy="913311"/>
+            <a:off x="1671316" y="25664613"/>
+            <a:ext cx="13177464" cy="921866"/>
           </a:xfrm>
           <a:prstGeom prst="rect">
             <a:avLst/>
@@ -3224,7 +3501,7 @@
           <a:effectLst/>
         </p:spPr>
         <p:txBody>
-          <a:bodyPr lIns="89992" tIns="44995" rIns="89992" bIns="44995">
+          <a:bodyPr wrap="square" lIns="89992" tIns="44995" rIns="89992" bIns="44995">
             <a:spAutoFit/>
           </a:bodyPr>
           <a:lstStyle/>
@@ -3236,7 +3513,7 @@
               <a:rPr lang="en-US" sz="5400" b="1" strike="noStrike" cap="small" noProof="0" dirty="0">
                 <a:latin typeface="Liberation Serif"/>
               </a:rPr>
-              <a:t>Sender in Supervised Generation</a:t>
+              <a:t>Sender in Supervised Generation (GRE)</a:t>
             </a:r>
             <a:endParaRPr lang="en-US" sz="5400" noProof="0" dirty="0"/>
           </a:p>
@@ -3402,6 +3679,49 @@
           </a:prstGeom>
         </p:spPr>
       </p:pic>
+      <p:sp>
+        <p:nvSpPr>
+          <p:cNvPr id="3" name="TextBox 2">
+            <a:extLst>
+              <a:ext uri="{FF2B5EF4-FFF2-40B4-BE49-F238E27FC236}">
+                <a16:creationId xmlns:a16="http://schemas.microsoft.com/office/drawing/2014/main" id="{ECB82B72-54F0-54AD-7EEC-8C92576EF4DE}"/>
+              </a:ext>
+            </a:extLst>
+          </p:cNvPr>
+          <p:cNvSpPr txBox="1"/>
+          <p:nvPr/>
+        </p:nvSpPr>
+        <p:spPr>
+          <a:xfrm>
+            <a:off x="12985435" y="41206799"/>
+            <a:ext cx="8022150" cy="954107"/>
+          </a:xfrm>
+          <a:prstGeom prst="rect">
+            <a:avLst/>
+          </a:prstGeom>
+          <a:noFill/>
+        </p:spPr>
+        <p:txBody>
+          <a:bodyPr wrap="square" rtlCol="0">
+            <a:spAutoFit/>
+          </a:bodyPr>
+          <a:lstStyle/>
+          <a:p>
+            <a:r>
+              <a:rPr lang="en-SE" sz="2800" dirty="0">
+                <a:latin typeface="Liberation Sans Narrow" panose="020B0606020202030204" pitchFamily="34" charset="0"/>
+              </a:rPr>
+              <a:t>Supported by the Swedish Research Council Project Grant (VR 2023-01552) </a:t>
+            </a:r>
+            <a:r>
+              <a:rPr lang="en-SE" sz="2800" b="1" dirty="0">
+                <a:latin typeface="Liberation Sans Narrow" panose="020B0606020202030204" pitchFamily="34" charset="0"/>
+              </a:rPr>
+              <a:t>Beyond Pixels and Words</a:t>
+            </a:r>
+          </a:p>
+        </p:txBody>
+      </p:sp>
     </p:spTree>
   </p:cSld>
   <p:clrMapOvr>

--- a/semdial-2025/poster.pptx
+++ b/semdial-2025/poster.pptx
@@ -299,7 +299,7 @@
             </a:pPr>
             <a:fld id="{5CC2A059-B141-45A7-B910-B096D6D06820}" type="slidenum">
               <a:rPr/>
-              <a:t>‹#›</a:t>
+              <a:t>‹Nr.›</a:t>
             </a:fld>
             <a:endParaRPr/>
           </a:p>
@@ -515,7 +515,7 @@
             </a:pPr>
             <a:fld id="{5CC2A059-B141-45A7-B910-B096D6D06820}" type="slidenum">
               <a:rPr/>
-              <a:t>‹#›</a:t>
+              <a:t>‹Nr.›</a:t>
             </a:fld>
             <a:endParaRPr/>
           </a:p>
@@ -724,7 +724,7 @@
               <a:rPr lang="en-US" sz="4000" noProof="0" dirty="0">
                 <a:latin typeface="Liberation Mono"/>
               </a:rPr>
-              <a:t> </a:t>
+              <a:t>  </a:t>
             </a:r>
             <a:r>
               <a:rPr lang="en-US" sz="4000" strike="noStrike" noProof="0" dirty="0" err="1">
@@ -945,8 +945,8 @@
         </p:nvSpPr>
         <p:spPr bwMode="auto">
           <a:xfrm>
-            <a:off x="1671316" y="9685867"/>
-            <a:ext cx="8291099" cy="7477508"/>
+            <a:off x="1671316" y="9778199"/>
+            <a:ext cx="8653782" cy="7292842"/>
           </a:xfrm>
           <a:prstGeom prst="rect">
             <a:avLst/>
@@ -958,7 +958,7 @@
           <a:effectLst/>
         </p:spPr>
         <p:txBody>
-          <a:bodyPr lIns="89993" tIns="44996" rIns="89993" bIns="44996" anchor="ctr">
+          <a:bodyPr wrap="square" lIns="89993" tIns="44996" rIns="89993" bIns="44996" anchor="ctr">
             <a:spAutoFit/>
           </a:bodyPr>
           <a:lstStyle/>
@@ -967,7 +967,7 @@
               <a:defRPr/>
             </a:pPr>
             <a:r>
-              <a:rPr lang="en-US" sz="4000" b="0" i="1" u="none" strike="noStrike" cap="none" spc="0" noProof="0" dirty="0">
+              <a:rPr lang="en-US" sz="3600" b="0" i="1" u="none" strike="noStrike" cap="none" spc="0" noProof="0" dirty="0">
                 <a:solidFill>
                   <a:srgbClr val="000000"/>
                 </a:solidFill>
@@ -978,7 +978,7 @@
               <a:t>A picture </a:t>
             </a:r>
             <a:r>
-              <a:rPr lang="en-US" sz="4000" i="1" dirty="0">
+              <a:rPr lang="en-US" sz="3600" i="1" dirty="0">
                 <a:solidFill>
                   <a:srgbClr val="000000"/>
                 </a:solidFill>
@@ -989,7 +989,7 @@
               <a:t>is worth a</a:t>
             </a:r>
             <a:r>
-              <a:rPr lang="en-US" sz="4000" b="0" i="1" u="none" strike="noStrike" cap="none" spc="0" noProof="0" dirty="0">
+              <a:rPr lang="en-US" sz="3600" b="0" i="1" u="none" strike="noStrike" cap="none" spc="0" noProof="0" dirty="0">
                 <a:solidFill>
                   <a:srgbClr val="000000"/>
                 </a:solidFill>
@@ -1004,7 +1004,7 @@
             <a:pPr>
               <a:defRPr/>
             </a:pPr>
-            <a:endParaRPr lang="en-US" sz="4000" b="0" i="1" u="none" strike="noStrike" cap="none" spc="0" noProof="0" dirty="0">
+            <a:endParaRPr lang="en-US" sz="3600" b="0" i="1" u="none" strike="noStrike" cap="none" spc="0" noProof="0" dirty="0">
               <a:solidFill>
                 <a:srgbClr val="000000"/>
               </a:solidFill>
@@ -1020,7 +1020,7 @@
               <a:defRPr/>
             </a:pPr>
             <a:r>
-              <a:rPr lang="en-US" sz="4000" b="0" i="0" u="none" strike="noStrike" cap="none" spc="0" noProof="0" dirty="0">
+              <a:rPr lang="en-US" sz="3600" b="0" i="0" u="none" strike="noStrike" cap="none" spc="0" noProof="0" dirty="0">
                 <a:solidFill>
                   <a:srgbClr val="000000"/>
                 </a:solidFill>
@@ -1031,7 +1031,7 @@
               <a:t>Study </a:t>
             </a:r>
             <a:r>
-              <a:rPr lang="en-US" sz="4000" b="1" i="0" u="none" strike="noStrike" cap="none" spc="0" noProof="0" dirty="0">
+              <a:rPr lang="en-US" sz="3600" b="1" i="0" u="none" strike="noStrike" cap="none" spc="0" noProof="0" dirty="0">
                 <a:solidFill>
                   <a:srgbClr val="000000"/>
                 </a:solidFill>
@@ -1042,7 +1042,7 @@
               <a:t>emergence of discrete linguistic symbols</a:t>
             </a:r>
             <a:r>
-              <a:rPr lang="en-US" sz="4000" b="0" i="0" u="none" strike="noStrike" cap="none" spc="0" noProof="0" dirty="0">
+              <a:rPr lang="en-US" sz="3600" b="0" i="0" u="none" strike="noStrike" cap="none" spc="0" noProof="0" dirty="0">
                 <a:solidFill>
                   <a:srgbClr val="000000"/>
                 </a:solidFill>
@@ -1053,7 +1053,7 @@
               <a:t> and </a:t>
             </a:r>
             <a:r>
-              <a:rPr lang="en-US" sz="4000" b="1" i="0" u="none" strike="noStrike" cap="none" spc="0" noProof="0" dirty="0">
+              <a:rPr lang="en-US" sz="3600" b="1" i="0" u="none" strike="noStrike" cap="none" spc="0" noProof="0" dirty="0">
                 <a:solidFill>
                   <a:srgbClr val="000000"/>
                 </a:solidFill>
@@ -1064,7 +1064,7 @@
               <a:t>languages </a:t>
             </a:r>
             <a:r>
-              <a:rPr lang="en-US" sz="4000" b="0" i="0" u="none" strike="noStrike" cap="none" spc="0" noProof="0" dirty="0">
+              <a:rPr lang="en-US" sz="3600" b="0" i="0" u="none" strike="noStrike" cap="none" spc="0" noProof="0" dirty="0">
                 <a:solidFill>
                   <a:srgbClr val="000000"/>
                 </a:solidFill>
@@ -1075,7 +1075,7 @@
               <a:t>from continuous sensory input in </a:t>
             </a:r>
             <a:r>
-              <a:rPr lang="en-US" sz="4000" b="1" i="0" u="none" strike="noStrike" cap="none" spc="0" noProof="0" dirty="0">
+              <a:rPr lang="en-US" sz="3600" b="1" i="0" u="none" strike="noStrike" cap="none" spc="0" noProof="0" dirty="0">
                 <a:solidFill>
                   <a:srgbClr val="000000"/>
                 </a:solidFill>
@@ -1086,11 +1086,11 @@
               <a:t>interactive</a:t>
             </a:r>
             <a:r>
-              <a:rPr lang="en-US" b="1" noProof="0" dirty="0"/>
+              <a:rPr lang="en-US" sz="1600" b="1" noProof="0" dirty="0"/>
               <a:t> </a:t>
             </a:r>
             <a:r>
-              <a:rPr lang="en-US" sz="4000" b="1" i="0" u="none" strike="noStrike" cap="none" spc="0" noProof="0" dirty="0">
+              <a:rPr lang="en-US" sz="3600" b="1" i="0" u="none" strike="noStrike" cap="none" spc="0" noProof="0" dirty="0">
                 <a:solidFill>
                   <a:srgbClr val="000000"/>
                 </a:solidFill>
@@ -1108,7 +1108,7 @@
               <a:defRPr/>
             </a:pPr>
             <a:r>
-              <a:rPr lang="en-US" sz="4000" b="0" i="0" u="none" strike="noStrike" cap="none" spc="0" noProof="0" dirty="0">
+              <a:rPr lang="en-US" sz="3600" b="0" i="0" u="none" strike="noStrike" cap="none" spc="0" noProof="0" dirty="0">
                 <a:solidFill>
                   <a:srgbClr val="000000"/>
                 </a:solidFill>
@@ -1119,7 +1119,7 @@
               <a:t>Study </a:t>
             </a:r>
             <a:r>
-              <a:rPr lang="en-US" sz="4000" b="1" i="0" u="none" strike="noStrike" cap="none" spc="0" noProof="0" dirty="0">
+              <a:rPr lang="en-US" sz="3600" b="1" i="0" u="none" strike="noStrike" cap="none" spc="0" noProof="0" dirty="0">
                 <a:solidFill>
                   <a:srgbClr val="000000"/>
                 </a:solidFill>
@@ -1130,7 +1130,7 @@
               <a:t>constraints </a:t>
             </a:r>
             <a:r>
-              <a:rPr lang="en-US" sz="4000" b="0" i="0" u="none" strike="noStrike" cap="none" spc="0" noProof="0" dirty="0">
+              <a:rPr lang="en-US" sz="3600" b="0" i="0" u="none" strike="noStrike" cap="none" spc="0" noProof="0" dirty="0">
                 <a:solidFill>
                   <a:srgbClr val="000000"/>
                 </a:solidFill>
@@ -1148,7 +1148,7 @@
               <a:defRPr/>
             </a:pPr>
             <a:r>
-              <a:rPr lang="en-US" sz="4000" b="0" i="0" u="none" strike="noStrike" cap="none" spc="0" noProof="0" dirty="0">
+              <a:rPr lang="en-US" sz="3600" b="0" i="0" u="none" strike="noStrike" cap="none" spc="0" noProof="0" dirty="0">
                 <a:solidFill>
                   <a:srgbClr val="000000"/>
                 </a:solidFill>
@@ -1159,7 +1159,7 @@
               <a:t>Investigate the effects of </a:t>
             </a:r>
             <a:r>
-              <a:rPr lang="en-US" sz="4000" b="1" i="0" u="none" strike="noStrike" cap="none" spc="0" noProof="0" dirty="0">
+              <a:rPr lang="en-US" sz="3600" b="1" i="0" u="none" strike="noStrike" cap="none" spc="0" noProof="0" dirty="0">
                 <a:solidFill>
                   <a:srgbClr val="000000"/>
                 </a:solidFill>
@@ -1170,7 +1170,7 @@
               <a:t>structured </a:t>
             </a:r>
             <a:r>
-              <a:rPr lang="en-US" sz="4000" b="1" dirty="0">
+              <a:rPr lang="en-US" sz="3600" b="1" dirty="0">
                 <a:solidFill>
                   <a:srgbClr val="000000"/>
                 </a:solidFill>
@@ -1181,7 +1181,7 @@
               <a:t>biases</a:t>
             </a:r>
             <a:r>
-              <a:rPr lang="en-US" sz="4000" b="1" i="0" u="none" strike="noStrike" cap="none" spc="0" noProof="0" dirty="0">
+              <a:rPr lang="en-US" sz="3600" b="1" i="0" u="none" strike="noStrike" cap="none" spc="0" noProof="0" dirty="0">
                 <a:solidFill>
                   <a:srgbClr val="000000"/>
                 </a:solidFill>
@@ -1192,7 +1192,7 @@
               <a:t> </a:t>
             </a:r>
             <a:r>
-              <a:rPr lang="en-US" sz="4000" i="0" u="none" strike="noStrike" cap="none" spc="0" noProof="0" dirty="0">
+              <a:rPr lang="en-US" sz="3600" i="0" u="none" strike="noStrike" cap="none" spc="0" noProof="0" dirty="0">
                 <a:solidFill>
                   <a:srgbClr val="000000"/>
                 </a:solidFill>
@@ -1203,7 +1203,7 @@
               <a:t>of</a:t>
             </a:r>
             <a:r>
-              <a:rPr lang="en-US" sz="4000" b="1" i="0" u="none" strike="noStrike" cap="none" spc="0" noProof="0" dirty="0">
+              <a:rPr lang="en-US" sz="3600" b="1" i="0" u="none" strike="noStrike" cap="none" spc="0" noProof="0" dirty="0">
                 <a:solidFill>
                   <a:srgbClr val="000000"/>
                 </a:solidFill>
@@ -1214,7 +1214,7 @@
               <a:t> scene complexity</a:t>
             </a:r>
             <a:r>
-              <a:rPr lang="en-US" sz="4000" b="0" i="0" u="none" strike="noStrike" cap="none" spc="0" noProof="0" dirty="0">
+              <a:rPr lang="en-US" sz="3600" b="0" i="0" u="none" strike="noStrike" cap="none" spc="0" noProof="0" dirty="0">
                 <a:solidFill>
                   <a:srgbClr val="000000"/>
                 </a:solidFill>
@@ -1225,7 +1225,7 @@
               <a:t>, </a:t>
             </a:r>
             <a:r>
-              <a:rPr lang="en-US" sz="4000" b="1" i="0" u="none" strike="noStrike" cap="none" spc="0" noProof="0" dirty="0">
+              <a:rPr lang="en-US" sz="3600" b="1" i="0" u="none" strike="noStrike" cap="none" spc="0" noProof="0" dirty="0">
                 <a:solidFill>
                   <a:srgbClr val="000000"/>
                 </a:solidFill>
@@ -1236,7 +1236,7 @@
               <a:t>discriminating features </a:t>
             </a:r>
             <a:r>
-              <a:rPr lang="en-US" sz="4000" i="0" u="none" strike="noStrike" cap="none" spc="0" noProof="0" dirty="0">
+              <a:rPr lang="en-US" sz="3600" i="0" u="none" strike="noStrike" cap="none" spc="0" noProof="0" dirty="0">
                 <a:solidFill>
                   <a:srgbClr val="000000"/>
                 </a:solidFill>
@@ -1247,7 +1247,7 @@
               <a:t>present</a:t>
             </a:r>
             <a:r>
-              <a:rPr lang="en-US" sz="4000" b="0" i="0" u="none" strike="noStrike" cap="none" spc="0" noProof="0" dirty="0">
+              <a:rPr lang="en-US" sz="3600" b="0" i="0" u="none" strike="noStrike" cap="none" spc="0" noProof="0" dirty="0">
                 <a:solidFill>
                   <a:srgbClr val="000000"/>
                 </a:solidFill>
@@ -1258,11 +1258,11 @@
               <a:t>,</a:t>
             </a:r>
             <a:r>
-              <a:rPr lang="en-US" noProof="0" dirty="0"/>
+              <a:rPr lang="en-US" sz="1600" noProof="0" dirty="0"/>
               <a:t> </a:t>
             </a:r>
             <a:r>
-              <a:rPr lang="en-US" sz="4000" b="0" i="0" u="none" strike="noStrike" cap="none" spc="0" noProof="0" dirty="0">
+              <a:rPr lang="en-US" sz="3600" b="0" i="0" u="none" strike="noStrike" cap="none" spc="0" noProof="0" dirty="0">
                 <a:solidFill>
                   <a:srgbClr val="000000"/>
                 </a:solidFill>
@@ -1273,7 +1273,7 @@
               <a:t>and </a:t>
             </a:r>
             <a:r>
-              <a:rPr lang="en-US" sz="4000" b="1" i="0" u="none" strike="noStrike" cap="none" spc="0" noProof="0" dirty="0">
+              <a:rPr lang="en-US" sz="3600" b="1" i="0" u="none" strike="noStrike" cap="none" spc="0" noProof="0" dirty="0">
                 <a:solidFill>
                   <a:srgbClr val="000000"/>
                 </a:solidFill>
@@ -1284,7 +1284,7 @@
               <a:t>message space</a:t>
             </a:r>
             <a:r>
-              <a:rPr lang="en-US" sz="4000" b="0" i="0" u="none" strike="noStrike" cap="none" spc="0" noProof="0" dirty="0">
+              <a:rPr lang="en-US" sz="3600" b="0" i="0" u="none" strike="noStrike" cap="none" spc="0" noProof="0" dirty="0">
                 <a:solidFill>
                   <a:srgbClr val="000000"/>
                 </a:solidFill>
@@ -1594,8 +1594,8 @@
         </p:nvSpPr>
         <p:spPr bwMode="auto">
           <a:xfrm>
-            <a:off x="20197884" y="8879842"/>
-            <a:ext cx="8286419" cy="8708613"/>
+            <a:off x="20197884" y="9033731"/>
+            <a:ext cx="8551563" cy="8400836"/>
           </a:xfrm>
           <a:prstGeom prst="rect">
             <a:avLst/>
@@ -1607,7 +1607,7 @@
           <a:effectLst/>
         </p:spPr>
         <p:txBody>
-          <a:bodyPr lIns="89992" tIns="44995" rIns="89992" bIns="44995" anchor="ctr">
+          <a:bodyPr wrap="square" lIns="89992" tIns="44995" rIns="89992" bIns="44995" anchor="ctr">
             <a:spAutoFit/>
           </a:bodyPr>
           <a:lstStyle/>
@@ -1618,7 +1618,7 @@
               <a:defRPr/>
             </a:pPr>
             <a:r>
-              <a:rPr lang="en-US" sz="4000" b="1" i="0" u="none" strike="noStrike" cap="none" spc="0" noProof="0" dirty="0">
+              <a:rPr lang="en-US" sz="3600" b="1" i="0" u="none" strike="noStrike" cap="none" spc="0" noProof="0" dirty="0">
                 <a:solidFill>
                   <a:srgbClr val="000000"/>
                 </a:solidFill>
@@ -1629,7 +1629,7 @@
               <a:t>Medium vocabularies</a:t>
             </a:r>
             <a:r>
-              <a:rPr lang="en-US" sz="4000" b="0" i="0" u="none" strike="noStrike" cap="none" spc="0" noProof="0" dirty="0">
+              <a:rPr lang="en-US" sz="3600" b="0" i="0" u="none" strike="noStrike" cap="none" spc="0" noProof="0" dirty="0">
                 <a:solidFill>
                   <a:srgbClr val="000000"/>
                 </a:solidFill>
@@ -1647,7 +1647,7 @@
               <a:defRPr/>
             </a:pPr>
             <a:r>
-              <a:rPr lang="en-US" sz="4000" dirty="0">
+              <a:rPr lang="en-US" sz="3600" dirty="0">
                 <a:solidFill>
                   <a:srgbClr val="000000"/>
                 </a:solidFill>
@@ -1658,7 +1658,7 @@
               <a:t>Emergent vocabularies </a:t>
             </a:r>
             <a:r>
-              <a:rPr lang="en-US" sz="4000" b="1" dirty="0">
+              <a:rPr lang="en-US" sz="3600" b="1" dirty="0">
                 <a:solidFill>
                   <a:srgbClr val="000000"/>
                 </a:solidFill>
@@ -1669,7 +1669,7 @@
               <a:t>align with the structured contextual biases</a:t>
             </a:r>
             <a:r>
-              <a:rPr lang="en-US" sz="4000" dirty="0">
+              <a:rPr lang="en-US" sz="3600" dirty="0">
                 <a:solidFill>
                   <a:srgbClr val="000000"/>
                 </a:solidFill>
@@ -1679,7 +1679,7 @@
               </a:rPr>
               <a:t> introduced</a:t>
             </a:r>
-            <a:endParaRPr lang="en-US" sz="4000" b="0" i="0" u="none" strike="noStrike" cap="none" spc="0" noProof="0" dirty="0">
+            <a:endParaRPr lang="en-US" sz="3600" b="0" i="0" u="none" strike="noStrike" cap="none" spc="0" noProof="0" dirty="0">
               <a:solidFill>
                 <a:srgbClr val="000000"/>
               </a:solidFill>
@@ -1695,7 +1695,7 @@
               <a:defRPr/>
             </a:pPr>
             <a:r>
-              <a:rPr lang="en-US" sz="4000" b="0" i="0" u="none" strike="noStrike" cap="none" spc="0" noProof="0" dirty="0">
+              <a:rPr lang="en-US" sz="3600" b="0" i="0" u="none" strike="noStrike" cap="none" spc="0" noProof="0" dirty="0">
                 <a:solidFill>
                   <a:srgbClr val="000000"/>
                 </a:solidFill>
@@ -1706,7 +1706,7 @@
               <a:t>Scene complexity (</a:t>
             </a:r>
             <a:r>
-              <a:rPr lang="en-US" sz="4000" b="1" i="0" u="none" strike="noStrike" cap="none" spc="0" noProof="0" dirty="0">
+              <a:rPr lang="en-US" sz="3600" b="1" i="0" u="none" strike="noStrike" cap="none" spc="0" noProof="0" dirty="0">
                 <a:solidFill>
                   <a:srgbClr val="000000"/>
                 </a:solidFill>
@@ -1717,7 +1717,7 @@
               <a:t>number of distractors, number of features</a:t>
             </a:r>
             <a:r>
-              <a:rPr lang="en-US" sz="4000" b="0" i="0" u="none" strike="noStrike" cap="none" spc="0" noProof="0" dirty="0">
+              <a:rPr lang="en-US" sz="3600" b="0" i="0" u="none" strike="noStrike" cap="none" spc="0" noProof="0" dirty="0">
                 <a:solidFill>
                   <a:srgbClr val="000000"/>
                 </a:solidFill>
@@ -1728,7 +1728,7 @@
               <a:t>) </a:t>
             </a:r>
             <a:r>
-              <a:rPr lang="en-US" sz="4000" dirty="0">
+              <a:rPr lang="en-US" sz="3600" dirty="0">
                 <a:solidFill>
                   <a:srgbClr val="000000"/>
                 </a:solidFill>
@@ -1739,7 +1739,7 @@
               <a:t>strongly</a:t>
             </a:r>
             <a:r>
-              <a:rPr lang="en-US" sz="4000" b="0" i="0" u="none" strike="noStrike" cap="none" spc="0" noProof="0" dirty="0">
+              <a:rPr lang="en-US" sz="3600" b="0" i="0" u="none" strike="noStrike" cap="none" spc="0" noProof="0" dirty="0">
                 <a:solidFill>
                   <a:srgbClr val="000000"/>
                 </a:solidFill>
@@ -1749,7 +1749,7 @@
               <a:t> </a:t>
             </a:r>
             <a:r>
-              <a:rPr lang="en-US" sz="4000" b="0" i="0" u="none" strike="noStrike" cap="none" spc="0" noProof="0" dirty="0">
+              <a:rPr lang="en-US" sz="3600" b="0" i="0" u="none" strike="noStrike" cap="none" spc="0" noProof="0" dirty="0">
                 <a:solidFill>
                   <a:srgbClr val="000000"/>
                 </a:solidFill>
@@ -1759,7 +1759,7 @@
               </a:rPr>
               <a:t>impacts communication success</a:t>
             </a:r>
-            <a:endParaRPr lang="en-US" noProof="0" dirty="0"/>
+            <a:endParaRPr lang="en-US" sz="1600" noProof="0" dirty="0"/>
           </a:p>
           <a:p>
             <a:pPr marL="526195" indent="-526195">
@@ -1768,7 +1768,7 @@
               <a:defRPr/>
             </a:pPr>
             <a:r>
-              <a:rPr lang="en-US" sz="4000" b="1" i="0" u="none" strike="noStrike" cap="none" spc="0" noProof="0" dirty="0">
+              <a:rPr lang="en-US" sz="3600" b="1" i="0" u="none" strike="noStrike" cap="none" spc="0" noProof="0" dirty="0">
                 <a:solidFill>
                   <a:srgbClr val="000000"/>
                 </a:solidFill>
@@ -1779,7 +1779,7 @@
               <a:t>Shape</a:t>
             </a:r>
             <a:r>
-              <a:rPr lang="en-US" sz="4000" b="0" i="0" u="none" strike="noStrike" cap="none" spc="0" noProof="0" dirty="0">
+              <a:rPr lang="en-US" sz="3600" b="0" i="0" u="none" strike="noStrike" cap="none" spc="0" noProof="0" dirty="0">
                 <a:solidFill>
                   <a:srgbClr val="000000"/>
                 </a:solidFill>
@@ -1790,7 +1790,7 @@
               <a:t> attributes </a:t>
             </a:r>
             <a:r>
-              <a:rPr lang="en-US" sz="4000" b="1" i="0" u="none" strike="noStrike" cap="none" spc="0" noProof="0" dirty="0">
+              <a:rPr lang="en-US" sz="3600" b="1" i="0" u="none" strike="noStrike" cap="none" spc="0" noProof="0" dirty="0">
                 <a:solidFill>
                   <a:srgbClr val="000000"/>
                 </a:solidFill>
@@ -1801,7 +1801,7 @@
               <a:t>easiest </a:t>
             </a:r>
             <a:r>
-              <a:rPr lang="en-US" sz="4000" b="0" i="0" u="none" strike="noStrike" cap="none" spc="0" noProof="0" dirty="0">
+              <a:rPr lang="en-US" sz="3600" b="0" i="0" u="none" strike="noStrike" cap="none" spc="0" noProof="0" dirty="0">
                 <a:solidFill>
                   <a:srgbClr val="000000"/>
                 </a:solidFill>
@@ -1812,7 +1812,7 @@
               <a:t>to learn, </a:t>
             </a:r>
             <a:r>
-              <a:rPr lang="en-US" sz="4000" b="1" i="0" u="none" strike="noStrike" cap="none" spc="0" noProof="0" dirty="0">
+              <a:rPr lang="en-US" sz="3600" b="1" i="0" u="none" strike="noStrike" cap="none" spc="0" noProof="0" dirty="0">
                 <a:solidFill>
                   <a:srgbClr val="000000"/>
                 </a:solidFill>
@@ -1823,7 +1823,7 @@
               <a:t>size</a:t>
             </a:r>
             <a:r>
-              <a:rPr lang="en-US" sz="4000" b="1" i="0" u="none" strike="noStrike" cap="none" spc="0" noProof="0" dirty="0">
+              <a:rPr lang="en-US" sz="3600" b="1" i="0" u="none" strike="noStrike" cap="none" spc="0" noProof="0" dirty="0">
                 <a:solidFill>
                   <a:srgbClr val="000000"/>
                 </a:solidFill>
@@ -1833,7 +1833,7 @@
               <a:t> </a:t>
             </a:r>
             <a:r>
-              <a:rPr lang="en-US" sz="4000" b="0" i="0" u="none" strike="noStrike" cap="none" spc="0" noProof="0" dirty="0">
+              <a:rPr lang="en-US" sz="3600" b="0" i="0" u="none" strike="noStrike" cap="none" spc="0" noProof="0" dirty="0">
                 <a:solidFill>
                   <a:srgbClr val="000000"/>
                 </a:solidFill>
@@ -1844,7 +1844,7 @@
               <a:t>attributes </a:t>
             </a:r>
             <a:r>
-              <a:rPr lang="en-US" sz="4000" b="1" i="0" u="none" strike="noStrike" cap="none" spc="0" noProof="0" dirty="0">
+              <a:rPr lang="en-US" sz="3600" b="1" i="0" u="none" strike="noStrike" cap="none" spc="0" noProof="0" dirty="0">
                 <a:solidFill>
                   <a:srgbClr val="000000"/>
                 </a:solidFill>
@@ -1862,7 +1862,7 @@
               <a:defRPr/>
             </a:pPr>
             <a:r>
-              <a:rPr lang="en-US" sz="4000" b="1" i="0" u="none" strike="noStrike" cap="none" spc="0" noProof="0" dirty="0">
+              <a:rPr lang="en-US" sz="3600" b="1" i="0" u="none" strike="noStrike" cap="none" spc="0" noProof="0" dirty="0">
                 <a:solidFill>
                   <a:srgbClr val="000000"/>
                 </a:solidFill>
@@ -1873,7 +1873,7 @@
               <a:t>Future:</a:t>
             </a:r>
             <a:r>
-              <a:rPr lang="en-US" sz="4000" b="0" i="0" u="none" strike="noStrike" cap="none" spc="0" noProof="0" dirty="0">
+              <a:rPr lang="en-US" sz="3600" b="0" i="0" u="none" strike="noStrike" cap="none" spc="0" noProof="0" dirty="0">
                 <a:solidFill>
                   <a:srgbClr val="000000"/>
                 </a:solidFill>
@@ -1883,7 +1883,7 @@
               </a:rPr>
               <a:t> Compare emergent vocabularies and languages with (different) natural languages</a:t>
             </a:r>
-            <a:endParaRPr lang="en-US" sz="4000" b="0" i="0" u="none" strike="noStrike" cap="none" spc="0" noProof="0" dirty="0">
+            <a:endParaRPr lang="en-US" sz="3600" b="0" i="0" u="none" strike="noStrike" cap="none" spc="0" noProof="0" dirty="0">
               <a:solidFill>
                 <a:srgbClr val="000000"/>
               </a:solidFill>
@@ -3533,8 +3533,8 @@
         </p:nvSpPr>
         <p:spPr>
           <a:xfrm>
-            <a:off x="11025859" y="15639990"/>
-            <a:ext cx="8395934" cy="1937530"/>
+            <a:off x="11025859" y="15732323"/>
+            <a:ext cx="8395934" cy="1752864"/>
           </a:xfrm>
           <a:prstGeom prst="rect">
             <a:avLst/>
@@ -3568,19 +3568,19 @@
               <a:buChar char="•"/>
             </a:pPr>
             <a:r>
-              <a:rPr lang="en-US" i="0" noProof="0" dirty="0"/>
+              <a:rPr lang="en-US" sz="3600" i="0" noProof="0" dirty="0"/>
               <a:t>Receiver </a:t>
             </a:r>
             <a:r>
-              <a:rPr lang="en-US" b="1" i="0" noProof="0" dirty="0"/>
+              <a:rPr lang="en-US" sz="3600" b="1" i="0" noProof="0" dirty="0"/>
               <a:t>attends to region </a:t>
             </a:r>
             <a:r>
-              <a:rPr lang="en-US" i="0" noProof="0" dirty="0"/>
+              <a:rPr lang="en-US" sz="3600" i="0" noProof="0" dirty="0"/>
               <a:t>in visual scene </a:t>
             </a:r>
             <a:r>
-              <a:rPr lang="en-US" b="1" i="0" noProof="0" dirty="0"/>
+              <a:rPr lang="en-US" sz="3600" b="1" i="0" noProof="0" dirty="0"/>
               <a:t>based on the sender‘s message</a:t>
             </a:r>
           </a:p>
@@ -3693,8 +3693,8 @@
         </p:nvSpPr>
         <p:spPr>
           <a:xfrm>
-            <a:off x="12985435" y="41206799"/>
-            <a:ext cx="8022150" cy="954107"/>
+            <a:off x="14288090" y="41206799"/>
+            <a:ext cx="8992138" cy="954107"/>
           </a:xfrm>
           <a:prstGeom prst="rect">
             <a:avLst/>

--- a/semdial-2025/poster.pptx
+++ b/semdial-2025/poster.pptx
@@ -1,62 +1,26 @@
 
 <file path=ppt/presentation.xml><?xml version="1.0" encoding="utf-8"?>
-<p:presentation xmlns:a="http://schemas.openxmlformats.org/drawingml/2006/main" xmlns:r="http://schemas.openxmlformats.org/officeDocument/2006/relationships" xmlns:p="http://schemas.openxmlformats.org/presentationml/2006/main">
+<p:presentation xmlns:a="http://schemas.openxmlformats.org/drawingml/2006/main" xmlns:r="http://schemas.openxmlformats.org/officeDocument/2006/relationships" xmlns:p="http://schemas.openxmlformats.org/presentationml/2006/main" xmlns:m="http://schemas.openxmlformats.org/officeDocument/2006/math" xmlns:w="http://schemas.openxmlformats.org/wordprocessingml/2006/main">
   <p:sldMasterIdLst>
     <p:sldMasterId id="2147483648" r:id="rId1"/>
   </p:sldMasterIdLst>
   <p:notesMasterIdLst>
-    <p:notesMasterId r:id="rId3"/>
+    <p:notesMasterId r:id="rId5"/>
   </p:notesMasterIdLst>
   <p:sldIdLst>
-    <p:sldId id="256" r:id="rId2"/>
+    <p:sldId id="256" r:id="rId4"/>
   </p:sldIdLst>
   <p:sldSz cx="30273625" cy="42800588"/>
   <p:notesSz cx="6858000" cy="9144000"/>
   <p:defaultTextStyle>
     <a:defPPr/>
   </p:defaultTextStyle>
-  <p:extLst>
-    <p:ext uri="{EFAFB233-063F-42B5-8137-9DF3F51BA10A}">
-      <p15:sldGuideLst xmlns:p15="http://schemas.microsoft.com/office/powerpoint/2012/main">
-        <p15:guide id="1" pos="9535">
-          <p15:clr>
-            <a:srgbClr val="A4A3A4"/>
-          </p15:clr>
-        </p15:guide>
-        <p15:guide id="2" orient="horz" pos="13480">
-          <p15:clr>
-            <a:srgbClr val="A4A3A4"/>
-          </p15:clr>
-        </p15:guide>
-        <p15:guide id="3" pos="6626">
-          <p15:clr>
-            <a:srgbClr val="A4A3A4"/>
-          </p15:clr>
-        </p15:guide>
-        <p15:guide id="4" pos="12434">
-          <p15:clr>
-            <a:srgbClr val="A4A3A4"/>
-          </p15:clr>
-        </p15:guide>
-        <p15:guide id="5" pos="794">
-          <p15:clr>
-            <a:srgbClr val="A4A3A4"/>
-          </p15:clr>
-        </p15:guide>
-        <p15:guide id="6" pos="18290">
-          <p15:clr>
-            <a:srgbClr val="A4A3A4"/>
-          </p15:clr>
-        </p15:guide>
-      </p15:sldGuideLst>
-    </p:ext>
-  </p:extLst>
 </p:presentation>
 </file>
 
 <file path=ppt/notesMasters/notesMaster1.xml><?xml version="1.0" encoding="utf-8"?>
 <p:notesMaster xmlns:a="http://schemas.openxmlformats.org/drawingml/2006/main" xmlns:r="http://schemas.openxmlformats.org/officeDocument/2006/relationships" xmlns:p="http://schemas.openxmlformats.org/presentationml/2006/main">
-  <p:cSld>
+  <p:cSld name="">
     <p:bg>
       <p:bgRef idx="1001">
         <a:schemeClr val="bg1"/>
@@ -84,8 +48,8 @@
 </file>
 
 <file path=ppt/notesSlides/notesSlide1.xml><?xml version="1.0" encoding="utf-8"?>
-<p:notes xmlns:a="http://schemas.openxmlformats.org/drawingml/2006/main" xmlns:r="http://schemas.openxmlformats.org/officeDocument/2006/relationships" xmlns:p="http://schemas.openxmlformats.org/presentationml/2006/main">
-  <p:cSld>
+<p:notes xmlns:a="http://schemas.openxmlformats.org/drawingml/2006/main" xmlns:r="http://schemas.openxmlformats.org/officeDocument/2006/relationships" xmlns:p="http://schemas.openxmlformats.org/presentationml/2006/main" xmlns:m="http://schemas.openxmlformats.org/officeDocument/2006/math" xmlns:w="http://schemas.openxmlformats.org/wordprocessingml/2006/main">
+  <p:cSld name="">
     <p:spTree>
       <p:nvGrpSpPr>
         <p:cNvPr id="1" name=""/>
@@ -102,7 +66,7 @@
       </p:grpSpPr>
       <p:sp>
         <p:nvSpPr>
-          <p:cNvPr id="1494624700" name="Notizenplatzhalter 1494624699"/>
+          <p:cNvPr id="1101221484" name="Notizenplatzhalter 1494624699"/>
           <p:cNvSpPr txBox="1">
             <a:spLocks noGrp="1"/>
           </p:cNvSpPr>
@@ -146,7 +110,7 @@
 </file>
 
 <file path=ppt/slideLayouts/slideLayout1.xml><?xml version="1.0" encoding="utf-8"?>
-<p:sldLayout xmlns:a="http://schemas.openxmlformats.org/drawingml/2006/main" xmlns:r="http://schemas.openxmlformats.org/officeDocument/2006/relationships" xmlns:p="http://schemas.openxmlformats.org/presentationml/2006/main" showMasterPhAnim="0" userDrawn="1">
+<p:sldLayout xmlns:a="http://schemas.openxmlformats.org/drawingml/2006/main" xmlns:r="http://schemas.openxmlformats.org/officeDocument/2006/relationships" xmlns:p="http://schemas.openxmlformats.org/presentationml/2006/main" xmlns:m="http://schemas.openxmlformats.org/officeDocument/2006/math" xmlns:w="http://schemas.openxmlformats.org/wordprocessingml/2006/main" matchingName="" preserve="0" showMasterPhAnim="0" showMasterSp="1" userDrawn="1">
   <p:cSld name="Standard">
     <p:spTree>
       <p:nvGrpSpPr>
@@ -164,7 +128,7 @@
       </p:grpSpPr>
       <p:sp>
         <p:nvSpPr>
-          <p:cNvPr id="154882059" name="place_holder"/>
+          <p:cNvPr id="972291446" name="place_holder"/>
           <p:cNvSpPr txBox="1">
             <a:spLocks noGrp="1"/>
           </p:cNvSpPr>
@@ -191,7 +155,7 @@
       </p:sp>
       <p:sp>
         <p:nvSpPr>
-          <p:cNvPr id="643444921" name="place_holder"/>
+          <p:cNvPr id="412277061" name="place_holder"/>
           <p:cNvSpPr txBox="1">
             <a:spLocks noGrp="1"/>
           </p:cNvSpPr>
@@ -218,7 +182,7 @@
       </p:sp>
       <p:sp>
         <p:nvSpPr>
-          <p:cNvPr id="1944763692" name="Datumsplatzhalter 1944763691"/>
+          <p:cNvPr id="423181540" name="Datumsplatzhalter 1944763691"/>
           <p:cNvSpPr txBox="1">
             <a:spLocks noGrp="1"/>
           </p:cNvSpPr>
@@ -249,7 +213,7 @@
       </p:sp>
       <p:sp>
         <p:nvSpPr>
-          <p:cNvPr id="61828394" name="Fußzeilenplatzhalter 61828393"/>
+          <p:cNvPr id="58494476" name="Fußzeilenplatzhalter 61828393"/>
           <p:cNvSpPr txBox="1">
             <a:spLocks noGrp="1"/>
           </p:cNvSpPr>
@@ -276,7 +240,7 @@
       </p:sp>
       <p:sp>
         <p:nvSpPr>
-          <p:cNvPr id="2008872834" name="Foliennummernplatzhalter 2008872833"/>
+          <p:cNvPr id="1061143130" name="Foliennummernplatzhalter 2008872833"/>
           <p:cNvSpPr txBox="1">
             <a:spLocks noGrp="1"/>
           </p:cNvSpPr>
@@ -314,12 +278,11 @@
 </file>
 
 <file path=ppt/slideMasters/slideMaster1.xml><?xml version="1.0" encoding="utf-8"?>
-<p:sldMaster xmlns:a="http://schemas.openxmlformats.org/drawingml/2006/main" xmlns:r="http://schemas.openxmlformats.org/officeDocument/2006/relationships" xmlns:p="http://schemas.openxmlformats.org/presentationml/2006/main">
-  <p:cSld>
+<p:sldMaster xmlns:a="http://schemas.openxmlformats.org/drawingml/2006/main" xmlns:r="http://schemas.openxmlformats.org/officeDocument/2006/relationships" xmlns:p="http://schemas.openxmlformats.org/presentationml/2006/main" xmlns:m="http://schemas.openxmlformats.org/officeDocument/2006/math" xmlns:w="http://schemas.openxmlformats.org/wordprocessingml/2006/main" preserve="0">
+  <p:cSld name="">
     <p:bg>
-      <p:bgPr>
+      <p:bgPr shadeToTitle="0">
         <a:noFill/>
-        <a:effectLst/>
       </p:bgPr>
     </p:bg>
     <p:spTree>
@@ -338,7 +301,7 @@
       </p:grpSpPr>
       <p:sp>
         <p:nvSpPr>
-          <p:cNvPr id="204293294" name="Titelplatzhalter 204293293"/>
+          <p:cNvPr id="639471514" name="Titelplatzhalter 204293293"/>
           <p:cNvSpPr txBox="1">
             <a:spLocks noGrp="1"/>
           </p:cNvSpPr>
@@ -373,7 +336,7 @@
       </p:sp>
       <p:sp>
         <p:nvSpPr>
-          <p:cNvPr id="1726383724" name="Textplatzhalter 1726383723"/>
+          <p:cNvPr id="2048017077" name="Textplatzhalter 1726383723"/>
           <p:cNvSpPr txBox="1">
             <a:spLocks noGrp="1"/>
           </p:cNvSpPr>
@@ -410,7 +373,7 @@
       </p:sp>
       <p:sp>
         <p:nvSpPr>
-          <p:cNvPr id="677014168" name="Datumsplatzhalter 677014167"/>
+          <p:cNvPr id="471003405" name="Datumsplatzhalter 677014167"/>
           <p:cNvSpPr txBox="1">
             <a:spLocks noGrp="1"/>
           </p:cNvSpPr>
@@ -449,7 +412,7 @@
       </p:sp>
       <p:sp>
         <p:nvSpPr>
-          <p:cNvPr id="735553257" name="Fußzeilenplatzhalter 735553256"/>
+          <p:cNvPr id="1739837818" name="Fußzeilenplatzhalter 735553256"/>
           <p:cNvSpPr txBox="1">
             <a:spLocks noGrp="1"/>
           </p:cNvSpPr>
@@ -484,7 +447,7 @@
       </p:sp>
       <p:sp>
         <p:nvSpPr>
-          <p:cNvPr id="1389738030" name="Foliennummernplatzhalter 1389738029"/>
+          <p:cNvPr id="537141375" name="Foliennummernplatzhalter 1389738029"/>
           <p:cNvSpPr txBox="1">
             <a:spLocks noGrp="1"/>
           </p:cNvSpPr>
@@ -527,7 +490,7 @@
   <p:sldLayoutIdLst>
     <p:sldLayoutId id="2147483649" r:id="rId1"/>
   </p:sldLayoutIdLst>
-  <p:hf/>
+  <p:hf dt="1" ftr="1" hdr="1" sldNum="1"/>
   <p:txStyles>
     <p:titleStyle/>
     <p:bodyStyle/>
@@ -537,7 +500,7 @@
 </file>
 
 <file path=ppt/slides/slide1.xml><?xml version="1.0" encoding="utf-8"?>
-<p:sld xmlns:a="http://schemas.openxmlformats.org/drawingml/2006/main" xmlns:r="http://schemas.openxmlformats.org/officeDocument/2006/relationships" xmlns:p="http://schemas.openxmlformats.org/presentationml/2006/main" showMasterPhAnim="0">
+<p:sld xmlns:a="http://schemas.openxmlformats.org/drawingml/2006/main" xmlns:r="http://schemas.openxmlformats.org/officeDocument/2006/relationships" xmlns:p="http://schemas.openxmlformats.org/presentationml/2006/main" xmlns:m="http://schemas.openxmlformats.org/officeDocument/2006/math" xmlns:w="http://schemas.openxmlformats.org/wordprocessingml/2006/main" xmlns:mc="http://schemas.openxmlformats.org/markup-compatibility/2006" showMasterPhAnim="0" showMasterSp="1" show="1">
   <p:cSld name="page1">
     <p:spTree>
       <p:nvGrpSpPr>
@@ -555,7 +518,7 @@
       </p:grpSpPr>
       <p:sp>
         <p:nvSpPr>
-          <p:cNvPr id="537594130" name="Textfeld 537594129"/>
+          <p:cNvPr id="2028071765" name="Textfeld 537594129"/>
           <p:cNvSpPr txBox="1"/>
           <p:nvPr/>
         </p:nvSpPr>
@@ -584,41 +547,41 @@
               <a:defRPr/>
             </a:pPr>
             <a:r>
-              <a:rPr lang="en-US" sz="5400" b="1" strike="noStrike" noProof="0" dirty="0">
+              <a:rPr lang="en-US" sz="5400" b="1" strike="noStrike">
                 <a:latin typeface="Liberation Serif"/>
               </a:rPr>
               <a:t>Dominik Künkele</a:t>
             </a:r>
             <a:r>
-              <a:rPr lang="en-US" sz="5400" b="1" strike="noStrike" baseline="30000" noProof="0" dirty="0">
+              <a:rPr lang="en-US" sz="5400" b="1" strike="noStrike" baseline="30000">
                 <a:latin typeface="Liberation Serif"/>
               </a:rPr>
               <a:t>1</a:t>
             </a:r>
             <a:r>
-              <a:rPr lang="en-US" sz="5400" strike="noStrike" noProof="0" dirty="0">
+              <a:rPr lang="en-US" sz="5400" strike="noStrike">
                 <a:latin typeface="Liberation Serif"/>
               </a:rPr>
               <a:t> and </a:t>
             </a:r>
             <a:r>
-              <a:rPr lang="en-US" sz="5400" b="1" strike="noStrike" noProof="0" dirty="0">
+              <a:rPr lang="en-US" sz="5400" b="1" strike="noStrike">
                 <a:latin typeface="Liberation Serif"/>
               </a:rPr>
               <a:t>Simon Dobnik</a:t>
             </a:r>
             <a:r>
-              <a:rPr lang="en-US" sz="5400" b="1" baseline="30000" noProof="0" dirty="0"/>
+              <a:rPr lang="en-US" sz="5400" b="1" baseline="30000"/>
               <a:t>1,2</a:t>
             </a:r>
-            <a:endParaRPr lang="en-US" sz="5400" baseline="30000" noProof="0" dirty="0"/>
+            <a:endParaRPr lang="en-US" sz="5400" baseline="30000"/>
           </a:p>
           <a:p>
             <a:pPr algn="ctr">
               <a:defRPr/>
             </a:pPr>
             <a:r>
-              <a:rPr lang="en-US" sz="4400" b="0" i="0" u="none" strike="noStrike" cap="none" spc="0" baseline="30000" noProof="0" dirty="0">
+              <a:rPr lang="en-US" sz="4400" b="0" i="0" u="none" strike="noStrike" cap="none" spc="0" baseline="30000">
                 <a:solidFill>
                   <a:srgbClr val="000000"/>
                 </a:solidFill>
@@ -629,7 +592,7 @@
               <a:t>1</a:t>
             </a:r>
             <a:r>
-              <a:rPr lang="en-US" sz="4400" b="0" i="0" u="none" strike="noStrike" cap="none" spc="0" noProof="0" dirty="0">
+              <a:rPr lang="en-US" sz="4400" b="0" i="0" u="none" strike="noStrike" cap="none" spc="0">
                 <a:solidFill>
                   <a:srgbClr val="000000"/>
                 </a:solidFill>
@@ -639,7 +602,7 @@
               </a:rPr>
               <a:t>Department of Philosophy, Linguistics and Theory of Science</a:t>
             </a:r>
-            <a:endParaRPr lang="en-US" sz="4400" b="0" i="0" u="none" strike="noStrike" cap="none" spc="0" noProof="0" dirty="0">
+            <a:endParaRPr lang="en-US" sz="4400" b="0" i="0" u="none" strike="noStrike" cap="none" spc="0">
               <a:solidFill>
                 <a:srgbClr val="000000"/>
               </a:solidFill>
@@ -652,7 +615,7 @@
               <a:defRPr/>
             </a:pPr>
             <a:r>
-              <a:rPr lang="en-US" sz="4400" b="0" i="0" u="none" strike="noStrike" cap="none" spc="0" noProof="0" dirty="0">
+              <a:rPr lang="en-US" sz="4400" b="0" i="0" u="none" strike="noStrike" cap="none" spc="0">
                 <a:solidFill>
                   <a:srgbClr val="000000"/>
                 </a:solidFill>
@@ -663,7 +626,7 @@
               <a:t>  </a:t>
             </a:r>
             <a:r>
-              <a:rPr lang="en-US" sz="4400" b="0" i="0" u="none" strike="noStrike" cap="none" spc="0" baseline="30000" noProof="0" dirty="0">
+              <a:rPr lang="en-US" sz="4400" b="0" i="0" u="none" strike="noStrike" cap="none" spc="0" baseline="30000">
                 <a:solidFill>
                   <a:srgbClr val="000000"/>
                 </a:solidFill>
@@ -674,7 +637,7 @@
               <a:t>2</a:t>
             </a:r>
             <a:r>
-              <a:rPr lang="en-US" sz="4400" b="0" i="0" u="none" strike="noStrike" cap="none" spc="0" noProof="0" dirty="0">
+              <a:rPr lang="en-US" sz="4400" b="0" i="0" u="none" strike="noStrike" cap="none" spc="0">
                 <a:solidFill>
                   <a:srgbClr val="000000"/>
                 </a:solidFill>
@@ -684,7 +647,7 @@
               </a:rPr>
               <a:t>Centre for Linguistic Theory and Studies in Probability (CLASP)</a:t>
             </a:r>
-            <a:endParaRPr lang="en-US" sz="4400" b="0" i="0" u="none" strike="noStrike" cap="none" spc="0" noProof="0" dirty="0">
+            <a:endParaRPr lang="en-US" sz="4400" b="0" i="0" u="none" strike="noStrike" cap="none" spc="0">
               <a:solidFill>
                 <a:srgbClr val="000000"/>
               </a:solidFill>
@@ -700,12 +663,12 @@
               <a:defRPr/>
             </a:pPr>
             <a:r>
-              <a:rPr lang="en-US" sz="4400" strike="noStrike" noProof="0" dirty="0">
+              <a:rPr lang="en-US" sz="4400" strike="noStrike">
                 <a:latin typeface="Liberation Serif"/>
               </a:rPr>
               <a:t>University of Gothenburg, Sweden</a:t>
             </a:r>
-            <a:endParaRPr lang="en-US" sz="4400" noProof="0" dirty="0"/>
+            <a:endParaRPr lang="en-US" sz="4400"/>
           </a:p>
           <a:p>
             <a:pPr algn="ctr">
@@ -715,30 +678,30 @@
               <a:defRPr/>
             </a:pPr>
             <a:r>
-              <a:rPr lang="en-US" sz="4000" noProof="0" dirty="0" err="1">
+              <a:rPr lang="en-US" sz="4000">
                 <a:latin typeface="Liberation Mono"/>
               </a:rPr>
               <a:t>contact@dominik-kuenkele.de</a:t>
             </a:r>
             <a:r>
-              <a:rPr lang="en-US" sz="4000" noProof="0" dirty="0">
+              <a:rPr lang="en-US" sz="4000">
                 <a:latin typeface="Liberation Mono"/>
               </a:rPr>
-              <a:t>  </a:t>
-            </a:r>
-            <a:r>
-              <a:rPr lang="en-US" sz="4000" strike="noStrike" noProof="0" dirty="0" err="1">
+              <a:t> </a:t>
+            </a:r>
+            <a:r>
+              <a:rPr lang="en-US" sz="4000" strike="noStrike">
                 <a:latin typeface="Liberation Mono"/>
               </a:rPr>
               <a:t>simon.dobnik@gu.se</a:t>
             </a:r>
-            <a:endParaRPr lang="en-US" sz="4000" noProof="0" dirty="0"/>
+            <a:endParaRPr lang="en-US" sz="4000"/>
           </a:p>
         </p:txBody>
       </p:sp>
       <p:sp>
         <p:nvSpPr>
-          <p:cNvPr id="1657876060" name="Textfeld 1657876059"/>
+          <p:cNvPr id="1243184264" name="Textfeld 1657876059"/>
           <p:cNvSpPr txBox="1"/>
           <p:nvPr/>
         </p:nvSpPr>
@@ -764,7 +727,7 @@
               <a:defRPr/>
             </a:pPr>
             <a:r>
-              <a:rPr lang="en-US" sz="7200" b="1" i="0" u="none" strike="noStrike" cap="none" spc="0" noProof="0" dirty="0">
+              <a:rPr lang="en-US" sz="7200" b="1" i="0" u="none" strike="noStrike" cap="none" spc="0">
                 <a:solidFill>
                   <a:srgbClr val="000000"/>
                 </a:solidFill>
@@ -774,7 +737,7 @@
               </a:rPr>
               <a:t>Learning to Refer: How Scene Complexity Affects</a:t>
             </a:r>
-            <a:endParaRPr lang="en-US" sz="7200" b="1" strike="noStrike" noProof="0" dirty="0">
+            <a:endParaRPr lang="en-US" sz="7200" b="1" strike="noStrike">
               <a:latin typeface="Liberation Serif"/>
             </a:endParaRPr>
           </a:p>
@@ -783,7 +746,7 @@
               <a:defRPr/>
             </a:pPr>
             <a:r>
-              <a:rPr lang="en-US" sz="7200" b="1" i="0" u="none" strike="noStrike" cap="none" spc="0" noProof="0" dirty="0">
+              <a:rPr lang="en-US" sz="7200" b="1" i="0" u="none" strike="noStrike" cap="none" spc="0">
                 <a:solidFill>
                   <a:srgbClr val="000000"/>
                 </a:solidFill>
@@ -793,13 +756,13 @@
               </a:rPr>
               <a:t>Emergent Communication in Neural Agents</a:t>
             </a:r>
-            <a:endParaRPr lang="en-US" sz="7200" noProof="0" dirty="0"/>
+            <a:endParaRPr lang="en-US" sz="7200"/>
           </a:p>
         </p:txBody>
       </p:sp>
       <p:sp>
         <p:nvSpPr>
-          <p:cNvPr id="1849313519" name="Rechteck 1849313518"/>
+          <p:cNvPr id="1999618263" name="Rechteck 1849313518"/>
           <p:cNvSpPr/>
           <p:nvPr/>
         </p:nvSpPr>
@@ -826,13 +789,13 @@
             <a:pPr>
               <a:defRPr/>
             </a:pPr>
-            <a:endParaRPr lang="en-US" noProof="0"/>
+            <a:endParaRPr lang="en-US"/>
           </a:p>
         </p:txBody>
       </p:sp>
       <p:sp>
         <p:nvSpPr>
-          <p:cNvPr id="1122315060" name="Textfeld 1122315059"/>
+          <p:cNvPr id="1156436726" name="Textfeld 1122315059"/>
           <p:cNvSpPr txBox="1"/>
           <p:nvPr/>
         </p:nvSpPr>
@@ -862,24 +825,24 @@
               <a:defRPr/>
             </a:pPr>
             <a:r>
-              <a:rPr lang="en-US" sz="5400" b="1" strike="noStrike" cap="small" noProof="0" dirty="0">
+              <a:rPr lang="en-US" sz="5400" b="1" strike="noStrike" cap="small">
                 <a:latin typeface="Liberation Serif"/>
               </a:rPr>
               <a:t>Experiments</a:t>
             </a:r>
-            <a:endParaRPr lang="en-US" sz="5400" noProof="0" dirty="0"/>
+            <a:endParaRPr lang="en-US" sz="5400"/>
           </a:p>
         </p:txBody>
       </p:sp>
       <p:sp>
         <p:nvSpPr>
-          <p:cNvPr id="1148621843" name="Textfeld 1148621842"/>
+          <p:cNvPr id="718952871" name="Textfeld 1148621842"/>
           <p:cNvSpPr txBox="1"/>
           <p:nvPr/>
         </p:nvSpPr>
         <p:spPr bwMode="auto">
           <a:xfrm>
-            <a:off x="6413606" y="18880197"/>
+            <a:off x="6413605" y="18721446"/>
             <a:ext cx="4193159" cy="913313"/>
           </a:xfrm>
           <a:prstGeom prst="rect">
@@ -901,18 +864,18 @@
               <a:defRPr/>
             </a:pPr>
             <a:r>
-              <a:rPr lang="en-US" sz="5400" b="1" strike="noStrike" noProof="0" dirty="0">
+              <a:rPr lang="en-US" sz="5400" b="1" strike="noStrike">
                 <a:latin typeface="Liberation Serif"/>
               </a:rPr>
               <a:t>Dale-2</a:t>
             </a:r>
-            <a:endParaRPr lang="en-US" sz="5400" noProof="0" dirty="0"/>
+            <a:endParaRPr lang="en-US" sz="5400"/>
           </a:p>
         </p:txBody>
       </p:sp>
       <p:pic>
         <p:nvPicPr>
-          <p:cNvPr id="1554823868" name="Grafik 1554823867"/>
+          <p:cNvPr id="1609739764" name="Grafik 1554823867"/>
           <p:cNvPicPr/>
           <p:nvPr/>
         </p:nvPicPr>
@@ -939,14 +902,14 @@
       </p:pic>
       <p:sp>
         <p:nvSpPr>
-          <p:cNvPr id="1508962151" name="Textfeld 1508962150"/>
+          <p:cNvPr id="489691331" name="Textfeld 1508962150"/>
           <p:cNvSpPr txBox="1"/>
           <p:nvPr/>
         </p:nvSpPr>
         <p:spPr bwMode="auto">
           <a:xfrm>
             <a:off x="1671316" y="9778199"/>
-            <a:ext cx="8653782" cy="7292842"/>
+            <a:ext cx="8653782" cy="7292841"/>
           </a:xfrm>
           <a:prstGeom prst="rect">
             <a:avLst/>
@@ -967,7 +930,7 @@
               <a:defRPr/>
             </a:pPr>
             <a:r>
-              <a:rPr lang="en-US" sz="3600" b="0" i="1" u="none" strike="noStrike" cap="none" spc="0" noProof="0" dirty="0">
+              <a:rPr lang="en-US" sz="3600" b="0" i="1" u="none" strike="noStrike" cap="none" spc="0">
                 <a:solidFill>
                   <a:srgbClr val="000000"/>
                 </a:solidFill>
@@ -978,7 +941,7 @@
               <a:t>A picture </a:t>
             </a:r>
             <a:r>
-              <a:rPr lang="en-US" sz="3600" i="1" dirty="0">
+              <a:rPr lang="en-US" sz="3600" i="1">
                 <a:solidFill>
                   <a:srgbClr val="000000"/>
                 </a:solidFill>
@@ -989,7 +952,7 @@
               <a:t>is worth a</a:t>
             </a:r>
             <a:r>
-              <a:rPr lang="en-US" sz="3600" b="0" i="1" u="none" strike="noStrike" cap="none" spc="0" noProof="0" dirty="0">
+              <a:rPr lang="en-US" sz="3600" b="0" i="1" u="none" strike="noStrike" cap="none" spc="0">
                 <a:solidFill>
                   <a:srgbClr val="000000"/>
                 </a:solidFill>
@@ -999,12 +962,13 @@
               </a:rPr>
               <a:t> thousand words...</a:t>
             </a:r>
+            <a:endParaRPr/>
           </a:p>
           <a:p>
             <a:pPr>
               <a:defRPr/>
             </a:pPr>
-            <a:endParaRPr lang="en-US" sz="3600" b="0" i="1" u="none" strike="noStrike" cap="none" spc="0" noProof="0" dirty="0">
+            <a:endParaRPr lang="en-US" sz="3600" b="0" i="1" u="none" strike="noStrike" cap="none" spc="0">
               <a:solidFill>
                 <a:srgbClr val="000000"/>
               </a:solidFill>
@@ -1020,7 +984,7 @@
               <a:defRPr/>
             </a:pPr>
             <a:r>
-              <a:rPr lang="en-US" sz="3600" b="0" i="0" u="none" strike="noStrike" cap="none" spc="0" noProof="0" dirty="0">
+              <a:rPr lang="en-US" sz="3600" b="0" i="0" u="none" strike="noStrike" cap="none" spc="0">
                 <a:solidFill>
                   <a:srgbClr val="000000"/>
                 </a:solidFill>
@@ -1031,7 +995,7 @@
               <a:t>Study </a:t>
             </a:r>
             <a:r>
-              <a:rPr lang="en-US" sz="3600" b="1" i="0" u="none" strike="noStrike" cap="none" spc="0" noProof="0" dirty="0">
+              <a:rPr lang="en-US" sz="3600" b="1" i="0" u="none" strike="noStrike" cap="none" spc="0">
                 <a:solidFill>
                   <a:srgbClr val="000000"/>
                 </a:solidFill>
@@ -1042,7 +1006,7 @@
               <a:t>emergence of discrete linguistic symbols</a:t>
             </a:r>
             <a:r>
-              <a:rPr lang="en-US" sz="3600" b="0" i="0" u="none" strike="noStrike" cap="none" spc="0" noProof="0" dirty="0">
+              <a:rPr lang="en-US" sz="3600" b="0" i="0" u="none" strike="noStrike" cap="none" spc="0">
                 <a:solidFill>
                   <a:srgbClr val="000000"/>
                 </a:solidFill>
@@ -1053,7 +1017,7 @@
               <a:t> and </a:t>
             </a:r>
             <a:r>
-              <a:rPr lang="en-US" sz="3600" b="1" i="0" u="none" strike="noStrike" cap="none" spc="0" noProof="0" dirty="0">
+              <a:rPr lang="en-US" sz="3600" b="1" i="0" u="none" strike="noStrike" cap="none" spc="0">
                 <a:solidFill>
                   <a:srgbClr val="000000"/>
                 </a:solidFill>
@@ -1064,7 +1028,7 @@
               <a:t>languages </a:t>
             </a:r>
             <a:r>
-              <a:rPr lang="en-US" sz="3600" b="0" i="0" u="none" strike="noStrike" cap="none" spc="0" noProof="0" dirty="0">
+              <a:rPr lang="en-US" sz="3600" b="0" i="0" u="none" strike="noStrike" cap="none" spc="0">
                 <a:solidFill>
                   <a:srgbClr val="000000"/>
                 </a:solidFill>
@@ -1075,7 +1039,7 @@
               <a:t>from continuous sensory input in </a:t>
             </a:r>
             <a:r>
-              <a:rPr lang="en-US" sz="3600" b="1" i="0" u="none" strike="noStrike" cap="none" spc="0" noProof="0" dirty="0">
+              <a:rPr lang="en-US" sz="3600" b="1" i="0" u="none" strike="noStrike" cap="none" spc="0">
                 <a:solidFill>
                   <a:srgbClr val="000000"/>
                 </a:solidFill>
@@ -1086,11 +1050,11 @@
               <a:t>interactive</a:t>
             </a:r>
             <a:r>
-              <a:rPr lang="en-US" sz="1600" b="1" noProof="0" dirty="0"/>
+              <a:rPr lang="en-US" sz="1600" b="1"/>
               <a:t> </a:t>
             </a:r>
             <a:r>
-              <a:rPr lang="en-US" sz="3600" b="1" i="0" u="none" strike="noStrike" cap="none" spc="0" noProof="0" dirty="0">
+              <a:rPr lang="en-US" sz="3600" b="1" i="0" u="none" strike="noStrike" cap="none" spc="0">
                 <a:solidFill>
                   <a:srgbClr val="000000"/>
                 </a:solidFill>
@@ -1100,6 +1064,7 @@
               </a:rPr>
               <a:t>communication</a:t>
             </a:r>
+            <a:endParaRPr/>
           </a:p>
           <a:p>
             <a:pPr marL="526195" indent="-526195">
@@ -1108,7 +1073,7 @@
               <a:defRPr/>
             </a:pPr>
             <a:r>
-              <a:rPr lang="en-US" sz="3600" b="0" i="0" u="none" strike="noStrike" cap="none" spc="0" noProof="0" dirty="0">
+              <a:rPr lang="en-US" sz="3600" b="0" i="0" u="none" strike="noStrike" cap="none" spc="0">
                 <a:solidFill>
                   <a:srgbClr val="000000"/>
                 </a:solidFill>
@@ -1119,7 +1084,7 @@
               <a:t>Study </a:t>
             </a:r>
             <a:r>
-              <a:rPr lang="en-US" sz="3600" b="1" i="0" u="none" strike="noStrike" cap="none" spc="0" noProof="0" dirty="0">
+              <a:rPr lang="en-US" sz="3600" b="1" i="0" u="none" strike="noStrike" cap="none" spc="0">
                 <a:solidFill>
                   <a:srgbClr val="000000"/>
                 </a:solidFill>
@@ -1130,7 +1095,7 @@
               <a:t>constraints </a:t>
             </a:r>
             <a:r>
-              <a:rPr lang="en-US" sz="3600" b="0" i="0" u="none" strike="noStrike" cap="none" spc="0" noProof="0" dirty="0">
+              <a:rPr lang="en-US" sz="3600" b="0" i="0" u="none" strike="noStrike" cap="none" spc="0">
                 <a:solidFill>
                   <a:srgbClr val="000000"/>
                 </a:solidFill>
@@ -1140,6 +1105,7 @@
               </a:rPr>
               <a:t>on symbol grounding in interacting neural agents</a:t>
             </a:r>
+            <a:endParaRPr/>
           </a:p>
           <a:p>
             <a:pPr marL="526195" indent="-526195">
@@ -1148,7 +1114,7 @@
               <a:defRPr/>
             </a:pPr>
             <a:r>
-              <a:rPr lang="en-US" sz="3600" b="0" i="0" u="none" strike="noStrike" cap="none" spc="0" noProof="0" dirty="0">
+              <a:rPr lang="en-US" sz="3600" b="0" i="0" u="none" strike="noStrike" cap="none" spc="0">
                 <a:solidFill>
                   <a:srgbClr val="000000"/>
                 </a:solidFill>
@@ -1159,7 +1125,7 @@
               <a:t>Investigate the effects of </a:t>
             </a:r>
             <a:r>
-              <a:rPr lang="en-US" sz="3600" b="1" i="0" u="none" strike="noStrike" cap="none" spc="0" noProof="0" dirty="0">
+              <a:rPr lang="en-US" sz="3600" b="1" i="0" u="none" strike="noStrike" cap="none" spc="0">
                 <a:solidFill>
                   <a:srgbClr val="000000"/>
                 </a:solidFill>
@@ -1170,7 +1136,7 @@
               <a:t>structured </a:t>
             </a:r>
             <a:r>
-              <a:rPr lang="en-US" sz="3600" b="1" dirty="0">
+              <a:rPr lang="en-US" sz="3600" b="1">
                 <a:solidFill>
                   <a:srgbClr val="000000"/>
                 </a:solidFill>
@@ -1181,7 +1147,7 @@
               <a:t>biases</a:t>
             </a:r>
             <a:r>
-              <a:rPr lang="en-US" sz="3600" b="1" i="0" u="none" strike="noStrike" cap="none" spc="0" noProof="0" dirty="0">
+              <a:rPr lang="en-US" sz="3600" b="1" i="0" u="none" strike="noStrike" cap="none" spc="0">
                 <a:solidFill>
                   <a:srgbClr val="000000"/>
                 </a:solidFill>
@@ -1192,7 +1158,7 @@
               <a:t> </a:t>
             </a:r>
             <a:r>
-              <a:rPr lang="en-US" sz="3600" i="0" u="none" strike="noStrike" cap="none" spc="0" noProof="0" dirty="0">
+              <a:rPr lang="en-US" sz="3600" i="0" u="none" strike="noStrike" cap="none" spc="0">
                 <a:solidFill>
                   <a:srgbClr val="000000"/>
                 </a:solidFill>
@@ -1203,7 +1169,7 @@
               <a:t>of</a:t>
             </a:r>
             <a:r>
-              <a:rPr lang="en-US" sz="3600" b="1" i="0" u="none" strike="noStrike" cap="none" spc="0" noProof="0" dirty="0">
+              <a:rPr lang="en-US" sz="3600" b="1" i="0" u="none" strike="noStrike" cap="none" spc="0">
                 <a:solidFill>
                   <a:srgbClr val="000000"/>
                 </a:solidFill>
@@ -1214,7 +1180,7 @@
               <a:t> scene complexity</a:t>
             </a:r>
             <a:r>
-              <a:rPr lang="en-US" sz="3600" b="0" i="0" u="none" strike="noStrike" cap="none" spc="0" noProof="0" dirty="0">
+              <a:rPr lang="en-US" sz="3600" b="0" i="0" u="none" strike="noStrike" cap="none" spc="0">
                 <a:solidFill>
                   <a:srgbClr val="000000"/>
                 </a:solidFill>
@@ -1225,7 +1191,7 @@
               <a:t>, </a:t>
             </a:r>
             <a:r>
-              <a:rPr lang="en-US" sz="3600" b="1" i="0" u="none" strike="noStrike" cap="none" spc="0" noProof="0" dirty="0">
+              <a:rPr lang="en-US" sz="3600" b="1" i="0" u="none" strike="noStrike" cap="none" spc="0">
                 <a:solidFill>
                   <a:srgbClr val="000000"/>
                 </a:solidFill>
@@ -1236,7 +1202,7 @@
               <a:t>discriminating features </a:t>
             </a:r>
             <a:r>
-              <a:rPr lang="en-US" sz="3600" i="0" u="none" strike="noStrike" cap="none" spc="0" noProof="0" dirty="0">
+              <a:rPr lang="en-US" sz="3600" i="0" u="none" strike="noStrike" cap="none" spc="0">
                 <a:solidFill>
                   <a:srgbClr val="000000"/>
                 </a:solidFill>
@@ -1247,7 +1213,7 @@
               <a:t>present</a:t>
             </a:r>
             <a:r>
-              <a:rPr lang="en-US" sz="3600" b="0" i="0" u="none" strike="noStrike" cap="none" spc="0" noProof="0" dirty="0">
+              <a:rPr lang="en-US" sz="3600" b="0" i="0" u="none" strike="noStrike" cap="none" spc="0">
                 <a:solidFill>
                   <a:srgbClr val="000000"/>
                 </a:solidFill>
@@ -1258,11 +1224,11 @@
               <a:t>,</a:t>
             </a:r>
             <a:r>
-              <a:rPr lang="en-US" sz="1600" noProof="0" dirty="0"/>
+              <a:rPr lang="en-US" sz="1600"/>
               <a:t> </a:t>
             </a:r>
             <a:r>
-              <a:rPr lang="en-US" sz="3600" b="0" i="0" u="none" strike="noStrike" cap="none" spc="0" noProof="0" dirty="0">
+              <a:rPr lang="en-US" sz="3600" b="0" i="0" u="none" strike="noStrike" cap="none" spc="0">
                 <a:solidFill>
                   <a:srgbClr val="000000"/>
                 </a:solidFill>
@@ -1273,7 +1239,7 @@
               <a:t>and </a:t>
             </a:r>
             <a:r>
-              <a:rPr lang="en-US" sz="3600" b="1" i="0" u="none" strike="noStrike" cap="none" spc="0" noProof="0" dirty="0">
+              <a:rPr lang="en-US" sz="3600" b="1" i="0" u="none" strike="noStrike" cap="none" spc="0">
                 <a:solidFill>
                   <a:srgbClr val="000000"/>
                 </a:solidFill>
@@ -1284,7 +1250,7 @@
               <a:t>message space</a:t>
             </a:r>
             <a:r>
-              <a:rPr lang="en-US" sz="3600" b="0" i="0" u="none" strike="noStrike" cap="none" spc="0" noProof="0" dirty="0">
+              <a:rPr lang="en-US" sz="3600" b="0" i="0" u="none" strike="noStrike" cap="none" spc="0">
                 <a:solidFill>
                   <a:srgbClr val="000000"/>
                 </a:solidFill>
@@ -1294,12 +1260,13 @@
               </a:rPr>
               <a:t> on emergent languages</a:t>
             </a:r>
+            <a:endParaRPr/>
           </a:p>
         </p:txBody>
       </p:sp>
       <p:grpSp>
         <p:nvGrpSpPr>
-          <p:cNvPr id="21684335" name="Gruppieren 21684334"/>
+          <p:cNvPr id="1058722581" name="Gruppieren 21684334"/>
           <p:cNvGrpSpPr/>
           <p:nvPr/>
         </p:nvGrpSpPr>
@@ -1340,7 +1307,7 @@
               <a:pPr>
                 <a:defRPr/>
               </a:pPr>
-              <a:endParaRPr lang="en-US" noProof="0"/>
+              <a:endParaRPr lang="en-US"/>
             </a:p>
           </p:txBody>
         </p:sp>
@@ -1376,19 +1343,19 @@
                 <a:defRPr/>
               </a:pPr>
               <a:r>
-                <a:rPr lang="en-US" sz="5400" b="1" strike="noStrike" cap="small" noProof="0">
+                <a:rPr lang="en-US" sz="5400" b="1" strike="noStrike" cap="small">
                   <a:latin typeface="Liberation Serif"/>
                 </a:rPr>
                 <a:t>Setup</a:t>
               </a:r>
-              <a:endParaRPr lang="en-US" sz="5400" noProof="0"/>
+              <a:endParaRPr lang="en-US" sz="5400"/>
             </a:p>
           </p:txBody>
         </p:sp>
       </p:grpSp>
       <p:grpSp>
         <p:nvGrpSpPr>
-          <p:cNvPr id="184360477" name="Gruppieren 184360476"/>
+          <p:cNvPr id="567297029" name="Gruppieren 184360476"/>
           <p:cNvGrpSpPr/>
           <p:nvPr/>
         </p:nvGrpSpPr>
@@ -1429,7 +1396,7 @@
               <a:pPr>
                 <a:defRPr/>
               </a:pPr>
-              <a:endParaRPr lang="en-US" noProof="0"/>
+              <a:endParaRPr lang="en-US"/>
             </a:p>
           </p:txBody>
         </p:sp>
@@ -1465,19 +1432,19 @@
                 <a:defRPr/>
               </a:pPr>
               <a:r>
-                <a:rPr lang="en-US" sz="5400" b="1" strike="noStrike" cap="small" noProof="0" dirty="0">
+                <a:rPr lang="en-US" sz="5400" b="1" strike="noStrike" cap="small">
                   <a:latin typeface="Liberation Serif"/>
                 </a:rPr>
                 <a:t>Aims</a:t>
               </a:r>
-              <a:endParaRPr lang="en-US" sz="5400" noProof="0" dirty="0"/>
+              <a:endParaRPr lang="en-US" sz="5400"/>
             </a:p>
           </p:txBody>
         </p:sp>
       </p:grpSp>
       <p:grpSp>
         <p:nvGrpSpPr>
-          <p:cNvPr id="1597280520" name="Gruppieren 1597280519"/>
+          <p:cNvPr id="438173662" name="Gruppieren 1597280519"/>
           <p:cNvGrpSpPr/>
           <p:nvPr/>
         </p:nvGrpSpPr>
@@ -1518,7 +1485,7 @@
               <a:pPr>
                 <a:defRPr/>
               </a:pPr>
-              <a:endParaRPr lang="en-US" noProof="0"/>
+              <a:endParaRPr lang="en-US"/>
             </a:p>
           </p:txBody>
         </p:sp>
@@ -1554,19 +1521,19 @@
                 <a:defRPr/>
               </a:pPr>
               <a:r>
-                <a:rPr lang="en-US" sz="5400" b="1" cap="small" noProof="0">
+                <a:rPr lang="en-US" sz="5400" b="1" cap="small">
                   <a:latin typeface="Liberation Serif"/>
                 </a:rPr>
                 <a:t>Findings</a:t>
               </a:r>
-              <a:endParaRPr lang="en-US" sz="5400" noProof="0"/>
+              <a:endParaRPr lang="en-US" sz="5400"/>
             </a:p>
           </p:txBody>
         </p:sp>
       </p:grpSp>
       <p:pic>
         <p:nvPicPr>
-          <p:cNvPr id="1531159627" name="Grafik 1531159626"/>
+          <p:cNvPr id="996200285" name="Grafik 1531159626"/>
           <p:cNvPicPr>
             <a:picLocks noChangeAspect="1"/>
           </p:cNvPicPr>
@@ -1588,14 +1555,14 @@
       </p:pic>
       <p:sp>
         <p:nvSpPr>
-          <p:cNvPr id="410206753" name="Textfeld 410206752"/>
+          <p:cNvPr id="474356964" name="Textfeld 410206752"/>
           <p:cNvSpPr txBox="1"/>
           <p:nvPr/>
         </p:nvSpPr>
         <p:spPr bwMode="auto">
-          <a:xfrm>
-            <a:off x="20197884" y="9033731"/>
-            <a:ext cx="8551563" cy="8400836"/>
+          <a:xfrm flipH="0" flipV="0">
+            <a:off x="20104249" y="9058924"/>
+            <a:ext cx="8645916" cy="8351167"/>
           </a:xfrm>
           <a:prstGeom prst="rect">
             <a:avLst/>
@@ -1607,7 +1574,7 @@
           <a:effectLst/>
         </p:spPr>
         <p:txBody>
-          <a:bodyPr wrap="square" lIns="89992" tIns="44995" rIns="89992" bIns="44995" anchor="ctr">
+          <a:bodyPr wrap="square" lIns="89991" tIns="44994" rIns="89991" bIns="44994" anchor="ctr">
             <a:spAutoFit/>
           </a:bodyPr>
           <a:lstStyle/>
@@ -1618,7 +1585,7 @@
               <a:defRPr/>
             </a:pPr>
             <a:r>
-              <a:rPr lang="en-US" sz="3600" b="1" i="0" u="none" strike="noStrike" cap="none" spc="0" noProof="0" dirty="0">
+              <a:rPr lang="en-US" sz="3600" b="1" i="0" u="none" strike="noStrike" cap="none" spc="0">
                 <a:solidFill>
                   <a:srgbClr val="000000"/>
                 </a:solidFill>
@@ -1629,7 +1596,7 @@
               <a:t>Medium vocabularies</a:t>
             </a:r>
             <a:r>
-              <a:rPr lang="en-US" sz="3600" b="0" i="0" u="none" strike="noStrike" cap="none" spc="0" noProof="0" dirty="0">
+              <a:rPr lang="en-US" sz="3600" b="0" i="0" u="none" strike="noStrike" cap="none" spc="0">
                 <a:solidFill>
                   <a:srgbClr val="000000"/>
                 </a:solidFill>
@@ -1639,6 +1606,7 @@
               </a:rPr>
               <a:t> (|V| ∈ {10, 16}) and message lengths (n ∈ {2, 4}) perform best</a:t>
             </a:r>
+            <a:endParaRPr/>
           </a:p>
           <a:p>
             <a:pPr marL="526195" indent="-526195">
@@ -1647,7 +1615,7 @@
               <a:defRPr/>
             </a:pPr>
             <a:r>
-              <a:rPr lang="en-US" sz="3600" dirty="0">
+              <a:rPr lang="en-US" sz="3600">
                 <a:solidFill>
                   <a:srgbClr val="000000"/>
                 </a:solidFill>
@@ -1658,7 +1626,7 @@
               <a:t>Emergent vocabularies </a:t>
             </a:r>
             <a:r>
-              <a:rPr lang="en-US" sz="3600" b="1" dirty="0">
+              <a:rPr lang="en-US" sz="3600" b="1">
                 <a:solidFill>
                   <a:srgbClr val="000000"/>
                 </a:solidFill>
@@ -1669,7 +1637,7 @@
               <a:t>align with the structured contextual biases</a:t>
             </a:r>
             <a:r>
-              <a:rPr lang="en-US" sz="3600" dirty="0">
+              <a:rPr lang="en-US" sz="3600">
                 <a:solidFill>
                   <a:srgbClr val="000000"/>
                 </a:solidFill>
@@ -1679,7 +1647,7 @@
               </a:rPr>
               <a:t> introduced</a:t>
             </a:r>
-            <a:endParaRPr lang="en-US" sz="3600" b="0" i="0" u="none" strike="noStrike" cap="none" spc="0" noProof="0" dirty="0">
+            <a:endParaRPr lang="en-US" sz="3600" b="0" i="0" u="none" strike="noStrike" cap="none" spc="0">
               <a:solidFill>
                 <a:srgbClr val="000000"/>
               </a:solidFill>
@@ -1695,7 +1663,7 @@
               <a:defRPr/>
             </a:pPr>
             <a:r>
-              <a:rPr lang="en-US" sz="3600" b="0" i="0" u="none" strike="noStrike" cap="none" spc="0" noProof="0" dirty="0">
+              <a:rPr lang="en-US" sz="3600" b="0" i="0" u="none" strike="noStrike" cap="none" spc="0">
                 <a:solidFill>
                   <a:srgbClr val="000000"/>
                 </a:solidFill>
@@ -1706,7 +1674,7 @@
               <a:t>Scene complexity (</a:t>
             </a:r>
             <a:r>
-              <a:rPr lang="en-US" sz="3600" b="1" i="0" u="none" strike="noStrike" cap="none" spc="0" noProof="0" dirty="0">
+              <a:rPr lang="en-US" sz="3600" b="1" i="0" u="none" strike="noStrike" cap="none" spc="0">
                 <a:solidFill>
                   <a:srgbClr val="000000"/>
                 </a:solidFill>
@@ -1717,7 +1685,7 @@
               <a:t>number of distractors, number of features</a:t>
             </a:r>
             <a:r>
-              <a:rPr lang="en-US" sz="3600" b="0" i="0" u="none" strike="noStrike" cap="none" spc="0" noProof="0" dirty="0">
+              <a:rPr lang="en-US" sz="3600" b="0" i="0" u="none" strike="noStrike" cap="none" spc="0">
                 <a:solidFill>
                   <a:srgbClr val="000000"/>
                 </a:solidFill>
@@ -1728,7 +1696,7 @@
               <a:t>) </a:t>
             </a:r>
             <a:r>
-              <a:rPr lang="en-US" sz="3600" dirty="0">
+              <a:rPr lang="en-US" sz="3600">
                 <a:solidFill>
                   <a:srgbClr val="000000"/>
                 </a:solidFill>
@@ -1739,7 +1707,7 @@
               <a:t>strongly</a:t>
             </a:r>
             <a:r>
-              <a:rPr lang="en-US" sz="3600" b="0" i="0" u="none" strike="noStrike" cap="none" spc="0" noProof="0" dirty="0">
+              <a:rPr lang="en-US" sz="3600" b="0" i="0" u="none" strike="noStrike" cap="none" spc="0">
                 <a:solidFill>
                   <a:srgbClr val="000000"/>
                 </a:solidFill>
@@ -1749,7 +1717,7 @@
               <a:t> </a:t>
             </a:r>
             <a:r>
-              <a:rPr lang="en-US" sz="3600" b="0" i="0" u="none" strike="noStrike" cap="none" spc="0" noProof="0" dirty="0">
+              <a:rPr lang="en-US" sz="3600" b="0" i="0" u="none" strike="noStrike" cap="none" spc="0">
                 <a:solidFill>
                   <a:srgbClr val="000000"/>
                 </a:solidFill>
@@ -1759,7 +1727,7 @@
               </a:rPr>
               <a:t>impacts communication success</a:t>
             </a:r>
-            <a:endParaRPr lang="en-US" sz="1600" noProof="0" dirty="0"/>
+            <a:endParaRPr lang="en-US" sz="1600"/>
           </a:p>
           <a:p>
             <a:pPr marL="526195" indent="-526195">
@@ -1768,7 +1736,7 @@
               <a:defRPr/>
             </a:pPr>
             <a:r>
-              <a:rPr lang="en-US" sz="3600" b="1" i="0" u="none" strike="noStrike" cap="none" spc="0" noProof="0" dirty="0">
+              <a:rPr lang="en-US" sz="3600" b="1" i="0" u="none" strike="noStrike" cap="none" spc="0">
                 <a:solidFill>
                   <a:srgbClr val="000000"/>
                 </a:solidFill>
@@ -1779,7 +1747,7 @@
               <a:t>Shape</a:t>
             </a:r>
             <a:r>
-              <a:rPr lang="en-US" sz="3600" b="0" i="0" u="none" strike="noStrike" cap="none" spc="0" noProof="0" dirty="0">
+              <a:rPr lang="en-US" sz="3600" b="0" i="0" u="none" strike="noStrike" cap="none" spc="0">
                 <a:solidFill>
                   <a:srgbClr val="000000"/>
                 </a:solidFill>
@@ -1790,7 +1758,7 @@
               <a:t> attributes </a:t>
             </a:r>
             <a:r>
-              <a:rPr lang="en-US" sz="3600" b="1" i="0" u="none" strike="noStrike" cap="none" spc="0" noProof="0" dirty="0">
+              <a:rPr lang="en-US" sz="3600" b="1" i="0" u="none" strike="noStrike" cap="none" spc="0">
                 <a:solidFill>
                   <a:srgbClr val="000000"/>
                 </a:solidFill>
@@ -1801,7 +1769,7 @@
               <a:t>easiest </a:t>
             </a:r>
             <a:r>
-              <a:rPr lang="en-US" sz="3600" b="0" i="0" u="none" strike="noStrike" cap="none" spc="0" noProof="0" dirty="0">
+              <a:rPr lang="en-US" sz="3600" b="0" i="0" u="none" strike="noStrike" cap="none" spc="0">
                 <a:solidFill>
                   <a:srgbClr val="000000"/>
                 </a:solidFill>
@@ -1812,7 +1780,7 @@
               <a:t>to learn, </a:t>
             </a:r>
             <a:r>
-              <a:rPr lang="en-US" sz="3600" b="1" i="0" u="none" strike="noStrike" cap="none" spc="0" noProof="0" dirty="0">
+              <a:rPr lang="en-US" sz="3600" b="1" i="0" u="none" strike="noStrike" cap="none" spc="0">
                 <a:solidFill>
                   <a:srgbClr val="000000"/>
                 </a:solidFill>
@@ -1823,7 +1791,7 @@
               <a:t>size</a:t>
             </a:r>
             <a:r>
-              <a:rPr lang="en-US" sz="3600" b="1" i="0" u="none" strike="noStrike" cap="none" spc="0" noProof="0" dirty="0">
+              <a:rPr lang="en-US" sz="3600" b="1" i="0" u="none" strike="noStrike" cap="none" spc="0">
                 <a:solidFill>
                   <a:srgbClr val="000000"/>
                 </a:solidFill>
@@ -1833,7 +1801,7 @@
               <a:t> </a:t>
             </a:r>
             <a:r>
-              <a:rPr lang="en-US" sz="3600" b="0" i="0" u="none" strike="noStrike" cap="none" spc="0" noProof="0" dirty="0">
+              <a:rPr lang="en-US" sz="3600" b="0" i="0" u="none" strike="noStrike" cap="none" spc="0">
                 <a:solidFill>
                   <a:srgbClr val="000000"/>
                 </a:solidFill>
@@ -1844,7 +1812,7 @@
               <a:t>attributes </a:t>
             </a:r>
             <a:r>
-              <a:rPr lang="en-US" sz="3600" b="1" i="0" u="none" strike="noStrike" cap="none" spc="0" noProof="0" dirty="0">
+              <a:rPr lang="en-US" sz="3600" b="1" i="0" u="none" strike="noStrike" cap="none" spc="0">
                 <a:solidFill>
                   <a:srgbClr val="000000"/>
                 </a:solidFill>
@@ -1854,6 +1822,7 @@
               </a:rPr>
               <a:t>most challenging</a:t>
             </a:r>
+            <a:endParaRPr/>
           </a:p>
           <a:p>
             <a:pPr marL="526195" indent="-526195">
@@ -1862,7 +1831,7 @@
               <a:defRPr/>
             </a:pPr>
             <a:r>
-              <a:rPr lang="en-US" sz="3600" b="1" i="0" u="none" strike="noStrike" cap="none" spc="0" noProof="0" dirty="0">
+              <a:rPr lang="en-US" sz="3600" b="1" i="0" u="none" strike="noStrike" cap="none" spc="0">
                 <a:solidFill>
                   <a:srgbClr val="000000"/>
                 </a:solidFill>
@@ -1873,7 +1842,7 @@
               <a:t>Future:</a:t>
             </a:r>
             <a:r>
-              <a:rPr lang="en-US" sz="3600" b="0" i="0" u="none" strike="noStrike" cap="none" spc="0" noProof="0" dirty="0">
+              <a:rPr lang="en-US" sz="3600" b="0" i="0" u="none" strike="noStrike" cap="none" spc="0">
                 <a:solidFill>
                   <a:srgbClr val="000000"/>
                 </a:solidFill>
@@ -1883,7 +1852,7 @@
               </a:rPr>
               <a:t> Compare emergent vocabularies and languages with (different) natural languages</a:t>
             </a:r>
-            <a:endParaRPr lang="en-US" sz="3600" b="0" i="0" u="none" strike="noStrike" cap="none" spc="0" noProof="0" dirty="0">
+            <a:endParaRPr lang="en-US" sz="3600" b="0" i="0" u="none" strike="noStrike" cap="none" spc="0">
               <a:solidFill>
                 <a:srgbClr val="000000"/>
               </a:solidFill>
@@ -1895,7 +1864,7 @@
       </p:sp>
       <p:sp>
         <p:nvSpPr>
-          <p:cNvPr id="1953644601" name="Textfeld 1953644600"/>
+          <p:cNvPr id="1303953171" name="Textfeld 1953644600"/>
           <p:cNvSpPr txBox="1"/>
           <p:nvPr/>
         </p:nvSpPr>
@@ -1919,17 +1888,18 @@
               <a:defRPr/>
             </a:pPr>
             <a:r>
-              <a:rPr lang="en-US" sz="2800" noProof="0" dirty="0">
-                <a:latin typeface="Liberation Sans Narrow" panose="020B0606020202030204" pitchFamily="34" charset="0"/>
+              <a:rPr lang="en-US" sz="2800">
+                <a:latin typeface="Liberation Sans Narrow"/>
               </a:rPr>
               <a:t>16th International Conference on Computational Semantics (IWCS 2025)</a:t>
             </a:r>
+            <a:endParaRPr/>
           </a:p>
         </p:txBody>
       </p:sp>
       <p:pic>
         <p:nvPicPr>
-          <p:cNvPr id="207079131" name="Grafik 207079130"/>
+          <p:cNvPr id="1919053849" name="Grafik 207079130"/>
           <p:cNvPicPr>
             <a:picLocks noChangeAspect="1"/>
           </p:cNvPicPr>
@@ -1957,13 +1927,13 @@
       </p:pic>
       <p:sp>
         <p:nvSpPr>
-          <p:cNvPr id="1464513698" name="Textfeld 1464513697"/>
+          <p:cNvPr id="1973897032" name="Textfeld 1464513697"/>
           <p:cNvSpPr txBox="1"/>
           <p:nvPr/>
         </p:nvSpPr>
         <p:spPr bwMode="auto">
           <a:xfrm>
-            <a:off x="14587760" y="18880199"/>
+            <a:off x="14587759" y="18721449"/>
             <a:ext cx="4196399" cy="913311"/>
           </a:xfrm>
           <a:prstGeom prst="rect">
@@ -1985,24 +1955,24 @@
               <a:defRPr/>
             </a:pPr>
             <a:r>
-              <a:rPr lang="en-US" sz="5400" b="1" strike="noStrike" noProof="0" dirty="0">
+              <a:rPr lang="en-US" sz="5400" b="1" strike="noStrike">
                 <a:latin typeface="Liberation Serif"/>
               </a:rPr>
               <a:t>Dale-5</a:t>
             </a:r>
-            <a:endParaRPr lang="en-US" sz="5400" noProof="0" dirty="0"/>
+            <a:endParaRPr lang="en-US" sz="5400"/>
           </a:p>
         </p:txBody>
       </p:sp>
       <p:sp>
         <p:nvSpPr>
-          <p:cNvPr id="42616494" name="Textfeld 42616493"/>
+          <p:cNvPr id="1776280464" name="Textfeld 42616493"/>
           <p:cNvSpPr txBox="1"/>
           <p:nvPr/>
         </p:nvSpPr>
         <p:spPr bwMode="auto">
           <a:xfrm>
-            <a:off x="22574252" y="18884565"/>
+            <a:off x="22574251" y="18725814"/>
             <a:ext cx="4461381" cy="913311"/>
           </a:xfrm>
           <a:prstGeom prst="rect">
@@ -2024,18 +1994,18 @@
               <a:defRPr/>
             </a:pPr>
             <a:r>
-              <a:rPr lang="en-US" sz="5400" b="1" strike="noStrike" noProof="0" dirty="0">
+              <a:rPr lang="en-US" sz="5400" b="1" strike="noStrike">
                 <a:latin typeface="Liberation Serif"/>
               </a:rPr>
               <a:t>CLEVR Color</a:t>
             </a:r>
-            <a:endParaRPr lang="en-US" sz="5400" noProof="0" dirty="0"/>
+            <a:endParaRPr lang="en-US" sz="5400"/>
           </a:p>
         </p:txBody>
       </p:sp>
       <p:pic>
         <p:nvPicPr>
-          <p:cNvPr id="182970423" name="Grafik 182970422"/>
+          <p:cNvPr id="2007410629" name="Grafik 182970422"/>
           <p:cNvPicPr>
             <a:picLocks noChangeAspect="1"/>
           </p:cNvPicPr>
@@ -2057,7 +2027,7 @@
       </p:pic>
       <p:pic>
         <p:nvPicPr>
-          <p:cNvPr id="1399311798" name="Grafik 1399311797"/>
+          <p:cNvPr id="673837099" name="Grafik 1399311797"/>
           <p:cNvPicPr>
             <a:picLocks noChangeAspect="1"/>
           </p:cNvPicPr>
@@ -2079,7 +2049,7 @@
       </p:pic>
       <p:pic>
         <p:nvPicPr>
-          <p:cNvPr id="1109880375" name="Grafik 1109880374"/>
+          <p:cNvPr id="5950507" name="Grafik 1109880374"/>
           <p:cNvPicPr>
             <a:picLocks noChangeAspect="1"/>
           </p:cNvPicPr>
@@ -2101,99 +2071,68 @@
       </p:pic>
       <p:graphicFrame>
         <p:nvGraphicFramePr>
-          <p:cNvPr id="1863437106" name="Tabelle 1863437105"/>
+          <p:cNvPr id="591501384" name="Tabelle 1863437105"/>
           <p:cNvGraphicFramePr>
-            <a:graphicFrameLocks/>
+            <a:graphicFrameLocks xmlns:a="http://schemas.openxmlformats.org/drawingml/2006/main"/>
           </p:cNvGraphicFramePr>
-          <p:nvPr>
-            <p:extLst>
-              <p:ext uri="{D42A27DB-BD31-4B8C-83A1-F6EECF244321}">
-                <p14:modId xmlns:p14="http://schemas.microsoft.com/office/powerpoint/2010/main" val="1445686652"/>
-              </p:ext>
-            </p:extLst>
-          </p:nvPr>
+          <p:nvPr/>
         </p:nvGraphicFramePr>
         <p:xfrm>
-          <a:off x="1560304" y="26514471"/>
-          <a:ext cx="26923999" cy="6515099"/>
+          <a:off x="1560303" y="25720720"/>
+          <a:ext cx="26923998" cy="7807968"/>
         </p:xfrm>
         <a:graphic>
           <a:graphicData uri="http://schemas.openxmlformats.org/drawingml/2006/table">
             <a:tbl>
-              <a:tblPr>
+              <a:tblPr firstRow="0" firstCol="0" lastRow="0" lastCol="0" bandRow="0" bandCol="0">
                 <a:tableStyleId>{7E9639D4-E3E2-4D34-9284-5A2195B3D0D7}</a:tableStyleId>
               </a:tblPr>
               <a:tblGrid>
-                <a:gridCol w="2919324">
-                  <a:extLst>
-                    <a:ext uri="{9D8B030D-6E8A-4147-A177-3AD203B41FA5}">
-                      <a16:colId xmlns:a16="http://schemas.microsoft.com/office/drawing/2014/main" val="20000"/>
-                    </a:ext>
-                  </a:extLst>
-                </a:gridCol>
-                <a:gridCol w="8136904">
-                  <a:extLst>
-                    <a:ext uri="{9D8B030D-6E8A-4147-A177-3AD203B41FA5}">
-                      <a16:colId xmlns:a16="http://schemas.microsoft.com/office/drawing/2014/main" val="20001"/>
-                    </a:ext>
-                  </a:extLst>
-                </a:gridCol>
-                <a:gridCol w="8136904">
-                  <a:extLst>
-                    <a:ext uri="{9D8B030D-6E8A-4147-A177-3AD203B41FA5}">
-                      <a16:colId xmlns:a16="http://schemas.microsoft.com/office/drawing/2014/main" val="20002"/>
-                    </a:ext>
-                  </a:extLst>
-                </a:gridCol>
-                <a:gridCol w="7730867">
-                  <a:extLst>
-                    <a:ext uri="{9D8B030D-6E8A-4147-A177-3AD203B41FA5}">
-                      <a16:colId xmlns:a16="http://schemas.microsoft.com/office/drawing/2014/main" val="20003"/>
-                    </a:ext>
-                  </a:extLst>
-                </a:gridCol>
+                <a:gridCol w="2919324"/>
+                <a:gridCol w="8136904"/>
+                <a:gridCol w="8136904"/>
+                <a:gridCol w="7730867"/>
               </a:tblGrid>
               <a:tr h="1259119">
                 <a:tc>
                   <a:txBody>
                     <a:bodyPr/>
-                    <a:lstStyle/>
                     <a:p>
                       <a:pPr algn="r">
                         <a:defRPr/>
                       </a:pPr>
                       <a:r>
-                        <a:rPr lang="de-DE" sz="3600" b="1" dirty="0" err="1">
-                          <a:latin typeface="Liberation Sans Narrow" panose="020B0606020202030204" pitchFamily="34" charset="0"/>
+                        <a:rPr lang="de-DE" sz="3600" b="1">
+                          <a:latin typeface="Liberation Sans Narrow"/>
                         </a:rPr>
                         <a:t>Strict</a:t>
                       </a:r>
                       <a:r>
-                        <a:rPr lang="de-DE" sz="3600" b="1" dirty="0">
-                          <a:latin typeface="Liberation Sans Narrow" panose="020B0606020202030204" pitchFamily="34" charset="0"/>
+                        <a:rPr lang="de-DE" sz="3600" b="1">
+                          <a:latin typeface="Liberation Sans Narrow"/>
                         </a:rPr>
                         <a:t> </a:t>
                       </a:r>
                       <a:r>
-                        <a:rPr lang="de-DE" sz="3600" b="1" dirty="0" err="1">
-                          <a:latin typeface="Liberation Sans Narrow" panose="020B0606020202030204" pitchFamily="34" charset="0"/>
+                        <a:rPr lang="de-DE" sz="3600" b="1">
+                          <a:latin typeface="Liberation Sans Narrow"/>
                         </a:rPr>
                         <a:t>string</a:t>
                       </a:r>
                       <a:r>
-                        <a:rPr lang="de-DE" sz="3600" b="1" dirty="0">
-                          <a:latin typeface="Liberation Sans Narrow" panose="020B0606020202030204" pitchFamily="34" charset="0"/>
+                        <a:rPr lang="de-DE" sz="3600" b="1">
+                          <a:latin typeface="Liberation Sans Narrow"/>
                         </a:rPr>
                         <a:t> </a:t>
                       </a:r>
                       <a:r>
-                        <a:rPr lang="de-DE" sz="3600" b="1" dirty="0" err="1">
-                          <a:latin typeface="Liberation Sans Narrow" panose="020B0606020202030204" pitchFamily="34" charset="0"/>
+                        <a:rPr lang="de-DE" sz="3600" b="1">
+                          <a:latin typeface="Liberation Sans Narrow"/>
                         </a:rPr>
                         <a:t>accuracy</a:t>
                       </a:r>
-                      <a:endParaRPr sz="3600" b="1" dirty="0">
-                        <a:latin typeface="Liberation Sans Narrow" panose="020B0606020202030204" pitchFamily="34" charset="0"/>
+                      <a:endParaRPr sz="3600" b="1">
+                        <a:latin typeface="Liberation Sans Narrow"/>
                       </a:endParaRPr>
                     </a:p>
                   </a:txBody>
@@ -2207,41 +2146,28 @@
                     <a:lnT w="6349" algn="ctr">
                       <a:noFill/>
                     </a:lnT>
-                    <a:lnB w="57150" cap="flat" cmpd="sng" algn="ctr">
-                      <a:solidFill>
-                        <a:schemeClr val="tx1"/>
-                      </a:solidFill>
-                      <a:prstDash val="solid"/>
-                      <a:round/>
-                      <a:headEnd type="none" w="med" len="med"/>
-                      <a:tailEnd type="none" w="med" len="med"/>
+                    <a:lnB w="57150" algn="ctr">
+                      <a:solidFill>
+                        <a:schemeClr val="tx1"/>
+                      </a:solidFill>
                     </a:lnB>
-                    <a:lnTlToBr w="12700" cmpd="sng">
-                      <a:noFill/>
-                      <a:prstDash val="solid"/>
-                    </a:lnTlToBr>
-                    <a:lnBlToTr w="12700" cmpd="sng">
-                      <a:noFill/>
-                      <a:prstDash val="solid"/>
-                    </a:lnBlToTr>
                   </a:tcPr>
                 </a:tc>
                 <a:tc>
                   <a:txBody>
                     <a:bodyPr/>
-                    <a:lstStyle/>
                     <a:p>
                       <a:pPr algn="ctr">
                         <a:defRPr/>
                       </a:pPr>
                       <a:r>
-                        <a:rPr lang="de-DE" sz="3600" dirty="0">
-                          <a:latin typeface="Liberation Sans Narrow" panose="020B0606020202030204" pitchFamily="34" charset="0"/>
+                        <a:rPr lang="de-DE" sz="3600">
+                          <a:latin typeface="Liberation Sans Narrow"/>
                         </a:rPr>
                         <a:t>99%</a:t>
                       </a:r>
-                      <a:endParaRPr sz="3600" dirty="0">
-                        <a:latin typeface="Liberation Sans Narrow" panose="020B0606020202030204" pitchFamily="34" charset="0"/>
+                      <a:endParaRPr sz="3600">
+                        <a:latin typeface="Liberation Sans Narrow"/>
                       </a:endParaRPr>
                     </a:p>
                   </a:txBody>
@@ -2249,125 +2175,83 @@
                     <a:lnL w="6349" algn="ctr">
                       <a:noFill/>
                     </a:lnL>
-                    <a:lnR w="12700" cap="flat" cmpd="sng" algn="ctr">
-                      <a:solidFill>
-                        <a:schemeClr val="tx1"/>
-                      </a:solidFill>
-                      <a:prstDash val="solid"/>
-                      <a:round/>
-                      <a:headEnd type="none" w="med" len="med"/>
-                      <a:tailEnd type="none" w="med" len="med"/>
+                    <a:lnR w="12700" algn="ctr">
+                      <a:solidFill>
+                        <a:schemeClr val="tx1"/>
+                      </a:solidFill>
                     </a:lnR>
                     <a:lnT w="6349" algn="ctr">
                       <a:noFill/>
                     </a:lnT>
-                    <a:lnB w="57150" cap="flat" cmpd="sng" algn="ctr">
-                      <a:solidFill>
-                        <a:schemeClr val="tx1"/>
-                      </a:solidFill>
-                      <a:prstDash val="solid"/>
-                      <a:round/>
-                      <a:headEnd type="none" w="med" len="med"/>
-                      <a:tailEnd type="none" w="med" len="med"/>
+                    <a:lnB w="57150" algn="ctr">
+                      <a:solidFill>
+                        <a:schemeClr val="tx1"/>
+                      </a:solidFill>
                     </a:lnB>
-                    <a:lnTlToBr w="12700" cmpd="sng">
-                      <a:noFill/>
-                      <a:prstDash val="solid"/>
-                    </a:lnTlToBr>
-                    <a:lnBlToTr w="12700" cmpd="sng">
-                      <a:noFill/>
-                      <a:prstDash val="solid"/>
-                    </a:lnBlToTr>
                   </a:tcPr>
                 </a:tc>
                 <a:tc>
                   <a:txBody>
                     <a:bodyPr/>
-                    <a:lstStyle/>
                     <a:p>
                       <a:pPr algn="ctr">
                         <a:defRPr/>
                       </a:pPr>
                       <a:r>
-                        <a:rPr lang="de-DE" sz="3600" dirty="0">
-                          <a:latin typeface="Liberation Sans Narrow" panose="020B0606020202030204" pitchFamily="34" charset="0"/>
+                        <a:rPr lang="de-DE" sz="3600">
+                          <a:latin typeface="Liberation Sans Narrow"/>
                         </a:rPr>
                         <a:t>69%</a:t>
                       </a:r>
-                      <a:endParaRPr sz="3600" dirty="0">
-                        <a:latin typeface="Liberation Sans Narrow" panose="020B0606020202030204" pitchFamily="34" charset="0"/>
+                      <a:endParaRPr sz="3600">
+                        <a:latin typeface="Liberation Sans Narrow"/>
                       </a:endParaRPr>
                     </a:p>
                   </a:txBody>
                   <a:tcPr marL="90000" anchor="ctr">
-                    <a:lnL w="12700" cap="flat" cmpd="sng" algn="ctr">
-                      <a:solidFill>
-                        <a:schemeClr val="tx1"/>
-                      </a:solidFill>
-                      <a:prstDash val="solid"/>
-                      <a:round/>
-                      <a:headEnd type="none" w="med" len="med"/>
-                      <a:tailEnd type="none" w="med" len="med"/>
+                    <a:lnL w="12700" algn="ctr">
+                      <a:solidFill>
+                        <a:schemeClr val="tx1"/>
+                      </a:solidFill>
                     </a:lnL>
-                    <a:lnR w="12700" cap="flat" cmpd="sng" algn="ctr">
-                      <a:solidFill>
-                        <a:schemeClr val="tx1"/>
-                      </a:solidFill>
-                      <a:prstDash val="solid"/>
-                      <a:round/>
-                      <a:headEnd type="none" w="med" len="med"/>
-                      <a:tailEnd type="none" w="med" len="med"/>
+                    <a:lnR w="12700" algn="ctr">
+                      <a:solidFill>
+                        <a:schemeClr val="tx1"/>
+                      </a:solidFill>
                     </a:lnR>
                     <a:lnT w="6349" algn="ctr">
                       <a:noFill/>
                     </a:lnT>
-                    <a:lnB w="57150" cap="flat" cmpd="sng" algn="ctr">
-                      <a:solidFill>
-                        <a:schemeClr val="tx1"/>
-                      </a:solidFill>
-                      <a:prstDash val="solid"/>
-                      <a:round/>
-                      <a:headEnd type="none" w="med" len="med"/>
-                      <a:tailEnd type="none" w="med" len="med"/>
+                    <a:lnB w="57150" algn="ctr">
+                      <a:solidFill>
+                        <a:schemeClr val="tx1"/>
+                      </a:solidFill>
                     </a:lnB>
-                    <a:lnTlToBr w="12700" cmpd="sng">
-                      <a:noFill/>
-                      <a:prstDash val="solid"/>
-                    </a:lnTlToBr>
-                    <a:lnBlToTr w="12700" cmpd="sng">
-                      <a:noFill/>
-                      <a:prstDash val="solid"/>
-                    </a:lnBlToTr>
                   </a:tcPr>
                 </a:tc>
                 <a:tc>
                   <a:txBody>
                     <a:bodyPr/>
-                    <a:lstStyle/>
                     <a:p>
                       <a:pPr algn="ctr">
                         <a:defRPr/>
                       </a:pPr>
                       <a:r>
-                        <a:rPr lang="de-DE" sz="3600" dirty="0">
-                          <a:latin typeface="Liberation Sans Narrow" panose="020B0606020202030204" pitchFamily="34" charset="0"/>
+                        <a:rPr lang="de-DE" sz="3600">
+                          <a:latin typeface="Liberation Sans Narrow"/>
                         </a:rPr>
                         <a:t>93%</a:t>
                       </a:r>
-                      <a:endParaRPr sz="3600" dirty="0">
-                        <a:latin typeface="Liberation Sans Narrow" panose="020B0606020202030204" pitchFamily="34" charset="0"/>
+                      <a:endParaRPr sz="3600">
+                        <a:latin typeface="Liberation Sans Narrow"/>
                       </a:endParaRPr>
                     </a:p>
                   </a:txBody>
                   <a:tcPr marL="90000" anchor="ctr">
-                    <a:lnL w="12700" cap="flat" cmpd="sng" algn="ctr">
-                      <a:solidFill>
-                        <a:schemeClr val="tx1"/>
-                      </a:solidFill>
-                      <a:prstDash val="solid"/>
-                      <a:round/>
-                      <a:headEnd type="none" w="med" len="med"/>
-                      <a:tailEnd type="none" w="med" len="med"/>
+                    <a:lnL w="12700" algn="ctr">
+                      <a:solidFill>
+                        <a:schemeClr val="tx1"/>
+                      </a:solidFill>
                     </a:lnL>
                     <a:lnR w="6349" algn="ctr">
                       <a:noFill/>
@@ -2375,48 +2259,30 @@
                     <a:lnT w="6349" algn="ctr">
                       <a:noFill/>
                     </a:lnT>
-                    <a:lnB w="57150" cap="flat" cmpd="sng" algn="ctr">
-                      <a:solidFill>
-                        <a:schemeClr val="tx1"/>
-                      </a:solidFill>
-                      <a:prstDash val="solid"/>
-                      <a:round/>
-                      <a:headEnd type="none" w="med" len="med"/>
-                      <a:tailEnd type="none" w="med" len="med"/>
+                    <a:lnB w="57150" algn="ctr">
+                      <a:solidFill>
+                        <a:schemeClr val="tx1"/>
+                      </a:solidFill>
                     </a:lnB>
-                    <a:lnTlToBr w="12700" cmpd="sng">
-                      <a:noFill/>
-                      <a:prstDash val="solid"/>
-                    </a:lnTlToBr>
-                    <a:lnBlToTr w="12700" cmpd="sng">
-                      <a:noFill/>
-                      <a:prstDash val="solid"/>
-                    </a:lnBlToTr>
                   </a:tcPr>
                 </a:tc>
-                <a:extLst>
-                  <a:ext uri="{0D108BD9-81ED-4DB2-BD59-A6C34878D82A}">
-                    <a16:rowId xmlns:a16="http://schemas.microsoft.com/office/drawing/2014/main" val="10000"/>
-                  </a:ext>
-                </a:extLst>
               </a:tr>
               <a:tr h="1377373">
                 <a:tc>
                   <a:txBody>
                     <a:bodyPr/>
-                    <a:lstStyle/>
                     <a:p>
                       <a:pPr algn="r">
                         <a:defRPr/>
                       </a:pPr>
                       <a:r>
-                        <a:rPr lang="de-DE" sz="3600" b="1" dirty="0">
-                          <a:latin typeface="Liberation Sans Narrow" panose="020B0606020202030204" pitchFamily="34" charset="0"/>
+                        <a:rPr lang="de-DE" sz="3600" b="1">
+                          <a:latin typeface="Liberation Sans Narrow"/>
                         </a:rPr>
                         <a:t>F1 score</a:t>
                       </a:r>
-                      <a:endParaRPr sz="3600" b="1" dirty="0">
-                        <a:latin typeface="Liberation Sans Narrow" panose="020B0606020202030204" pitchFamily="34" charset="0"/>
+                      <a:endParaRPr sz="3600" b="1">
+                        <a:latin typeface="Liberation Sans Narrow"/>
                       </a:endParaRPr>
                     </a:p>
                   </a:txBody>
@@ -2427,50 +2293,33 @@
                     <a:lnR w="6349" algn="ctr">
                       <a:noFill/>
                     </a:lnR>
-                    <a:lnT w="57150" cap="flat" cmpd="sng" algn="ctr">
-                      <a:solidFill>
-                        <a:schemeClr val="tx1"/>
-                      </a:solidFill>
-                      <a:prstDash val="solid"/>
-                      <a:round/>
-                      <a:headEnd type="none" w="med" len="med"/>
-                      <a:tailEnd type="none" w="med" len="med"/>
+                    <a:lnT w="57150" algn="ctr">
+                      <a:solidFill>
+                        <a:schemeClr val="tx1"/>
+                      </a:solidFill>
                     </a:lnT>
-                    <a:lnB w="12700" cap="flat" cmpd="sng" algn="ctr">
-                      <a:solidFill>
-                        <a:schemeClr val="tx1"/>
-                      </a:solidFill>
-                      <a:prstDash val="solid"/>
-                      <a:round/>
-                      <a:headEnd type="none" w="med" len="med"/>
-                      <a:tailEnd type="none" w="med" len="med"/>
+                    <a:lnB w="12700" algn="ctr">
+                      <a:solidFill>
+                        <a:schemeClr val="tx1"/>
+                      </a:solidFill>
                     </a:lnB>
-                    <a:lnTlToBr w="12700" cmpd="sng">
-                      <a:noFill/>
-                      <a:prstDash val="solid"/>
-                    </a:lnTlToBr>
-                    <a:lnBlToTr w="12700" cmpd="sng">
-                      <a:noFill/>
-                      <a:prstDash val="solid"/>
-                    </a:lnBlToTr>
                   </a:tcPr>
                 </a:tc>
                 <a:tc>
                   <a:txBody>
                     <a:bodyPr/>
-                    <a:lstStyle/>
                     <a:p>
                       <a:pPr algn="ctr">
                         <a:defRPr/>
                       </a:pPr>
                       <a:r>
-                        <a:rPr lang="de-DE" sz="3600" dirty="0">
-                          <a:latin typeface="Liberation Sans Narrow" panose="020B0606020202030204" pitchFamily="34" charset="0"/>
+                        <a:rPr lang="de-DE" sz="3600">
+                          <a:latin typeface="Liberation Sans Narrow"/>
                         </a:rPr>
                         <a:t>98,57%</a:t>
                       </a:r>
-                      <a:endParaRPr sz="3600" dirty="0">
-                        <a:latin typeface="Liberation Sans Narrow" panose="020B0606020202030204" pitchFamily="34" charset="0"/>
+                      <a:endParaRPr sz="3600">
+                        <a:latin typeface="Liberation Sans Narrow"/>
                       </a:endParaRPr>
                     </a:p>
                   </a:txBody>
@@ -2478,215 +2327,144 @@
                     <a:lnL w="6349" algn="ctr">
                       <a:noFill/>
                     </a:lnL>
-                    <a:lnR w="12700" cap="flat" cmpd="sng" algn="ctr">
-                      <a:solidFill>
-                        <a:schemeClr val="tx1"/>
-                      </a:solidFill>
-                      <a:prstDash val="solid"/>
-                      <a:round/>
-                      <a:headEnd type="none" w="med" len="med"/>
-                      <a:tailEnd type="none" w="med" len="med"/>
+                    <a:lnR w="12700" algn="ctr">
+                      <a:solidFill>
+                        <a:schemeClr val="tx1"/>
+                      </a:solidFill>
                     </a:lnR>
-                    <a:lnT w="57150" cap="flat" cmpd="sng" algn="ctr">
-                      <a:solidFill>
-                        <a:schemeClr val="tx1"/>
-                      </a:solidFill>
-                      <a:prstDash val="solid"/>
-                      <a:round/>
-                      <a:headEnd type="none" w="med" len="med"/>
-                      <a:tailEnd type="none" w="med" len="med"/>
+                    <a:lnT w="57150" algn="ctr">
+                      <a:solidFill>
+                        <a:schemeClr val="tx1"/>
+                      </a:solidFill>
                     </a:lnT>
-                    <a:lnB w="12700" cap="flat" cmpd="sng" algn="ctr">
-                      <a:solidFill>
-                        <a:schemeClr val="tx1"/>
-                      </a:solidFill>
-                      <a:prstDash val="solid"/>
-                      <a:round/>
-                      <a:headEnd type="none" w="med" len="med"/>
-                      <a:tailEnd type="none" w="med" len="med"/>
+                    <a:lnB w="12700" algn="ctr">
+                      <a:solidFill>
+                        <a:schemeClr val="tx1"/>
+                      </a:solidFill>
                     </a:lnB>
-                    <a:lnTlToBr w="12700" cmpd="sng">
-                      <a:noFill/>
-                      <a:prstDash val="solid"/>
-                    </a:lnTlToBr>
-                    <a:lnBlToTr w="12700" cmpd="sng">
-                      <a:noFill/>
-                      <a:prstDash val="solid"/>
-                    </a:lnBlToTr>
                   </a:tcPr>
                 </a:tc>
                 <a:tc>
                   <a:txBody>
                     <a:bodyPr/>
-                    <a:lstStyle/>
                     <a:p>
                       <a:pPr algn="ctr">
                         <a:defRPr/>
                       </a:pPr>
                       <a:r>
-                        <a:rPr lang="de-DE" sz="3600" dirty="0">
-                          <a:latin typeface="Liberation Sans Narrow" panose="020B0606020202030204" pitchFamily="34" charset="0"/>
+                        <a:rPr lang="de-DE" sz="3600">
+                          <a:latin typeface="Liberation Sans Narrow"/>
                         </a:rPr>
                         <a:t>89,53%</a:t>
                       </a:r>
-                      <a:endParaRPr sz="3600" dirty="0">
-                        <a:latin typeface="Liberation Sans Narrow" panose="020B0606020202030204" pitchFamily="34" charset="0"/>
+                      <a:endParaRPr sz="3600">
+                        <a:latin typeface="Liberation Sans Narrow"/>
                       </a:endParaRPr>
                     </a:p>
                   </a:txBody>
                   <a:tcPr marL="90000" anchor="ctr">
-                    <a:lnL w="12700" cap="flat" cmpd="sng" algn="ctr">
-                      <a:solidFill>
-                        <a:schemeClr val="tx1"/>
-                      </a:solidFill>
-                      <a:prstDash val="solid"/>
-                      <a:round/>
-                      <a:headEnd type="none" w="med" len="med"/>
-                      <a:tailEnd type="none" w="med" len="med"/>
+                    <a:lnL w="12700" algn="ctr">
+                      <a:solidFill>
+                        <a:schemeClr val="tx1"/>
+                      </a:solidFill>
                     </a:lnL>
-                    <a:lnR w="12700" cap="flat" cmpd="sng" algn="ctr">
-                      <a:solidFill>
-                        <a:schemeClr val="tx1"/>
-                      </a:solidFill>
-                      <a:prstDash val="solid"/>
-                      <a:round/>
-                      <a:headEnd type="none" w="med" len="med"/>
-                      <a:tailEnd type="none" w="med" len="med"/>
+                    <a:lnR w="12700" algn="ctr">
+                      <a:solidFill>
+                        <a:schemeClr val="tx1"/>
+                      </a:solidFill>
                     </a:lnR>
-                    <a:lnT w="57150" cap="flat" cmpd="sng" algn="ctr">
-                      <a:solidFill>
-                        <a:schemeClr val="tx1"/>
-                      </a:solidFill>
-                      <a:prstDash val="solid"/>
-                      <a:round/>
-                      <a:headEnd type="none" w="med" len="med"/>
-                      <a:tailEnd type="none" w="med" len="med"/>
+                    <a:lnT w="57150" algn="ctr">
+                      <a:solidFill>
+                        <a:schemeClr val="tx1"/>
+                      </a:solidFill>
                     </a:lnT>
-                    <a:lnB w="12700" cap="flat" cmpd="sng" algn="ctr">
-                      <a:solidFill>
-                        <a:schemeClr val="tx1"/>
-                      </a:solidFill>
-                      <a:prstDash val="solid"/>
-                      <a:round/>
-                      <a:headEnd type="none" w="med" len="med"/>
-                      <a:tailEnd type="none" w="med" len="med"/>
+                    <a:lnB w="12700" algn="ctr">
+                      <a:solidFill>
+                        <a:schemeClr val="tx1"/>
+                      </a:solidFill>
                     </a:lnB>
-                    <a:lnTlToBr w="12700" cmpd="sng">
-                      <a:noFill/>
-                      <a:prstDash val="solid"/>
-                    </a:lnTlToBr>
-                    <a:lnBlToTr w="12700" cmpd="sng">
-                      <a:noFill/>
-                      <a:prstDash val="solid"/>
-                    </a:lnBlToTr>
                   </a:tcPr>
                 </a:tc>
                 <a:tc>
                   <a:txBody>
                     <a:bodyPr/>
-                    <a:lstStyle/>
                     <a:p>
                       <a:pPr algn="ctr">
                         <a:defRPr/>
                       </a:pPr>
                       <a:r>
-                        <a:rPr lang="de-DE" sz="3600" dirty="0">
-                          <a:latin typeface="Liberation Sans Narrow" panose="020B0606020202030204" pitchFamily="34" charset="0"/>
+                        <a:rPr lang="de-DE" sz="3600">
+                          <a:latin typeface="Liberation Sans Narrow"/>
                         </a:rPr>
                         <a:t>95,17%</a:t>
                       </a:r>
-                      <a:endParaRPr sz="3600" dirty="0">
-                        <a:latin typeface="Liberation Sans Narrow" panose="020B0606020202030204" pitchFamily="34" charset="0"/>
+                      <a:endParaRPr sz="3600">
+                        <a:latin typeface="Liberation Sans Narrow"/>
                       </a:endParaRPr>
                     </a:p>
                   </a:txBody>
                   <a:tcPr marL="90000" anchor="ctr">
-                    <a:lnL w="12700" cap="flat" cmpd="sng" algn="ctr">
-                      <a:solidFill>
-                        <a:schemeClr val="tx1"/>
-                      </a:solidFill>
-                      <a:prstDash val="solid"/>
-                      <a:round/>
-                      <a:headEnd type="none" w="med" len="med"/>
-                      <a:tailEnd type="none" w="med" len="med"/>
+                    <a:lnL w="12700" algn="ctr">
+                      <a:solidFill>
+                        <a:schemeClr val="tx1"/>
+                      </a:solidFill>
                     </a:lnL>
                     <a:lnR w="6349" algn="ctr">
                       <a:noFill/>
                     </a:lnR>
-                    <a:lnT w="57150" cap="flat" cmpd="sng" algn="ctr">
-                      <a:solidFill>
-                        <a:schemeClr val="tx1"/>
-                      </a:solidFill>
-                      <a:prstDash val="solid"/>
-                      <a:round/>
-                      <a:headEnd type="none" w="med" len="med"/>
-                      <a:tailEnd type="none" w="med" len="med"/>
+                    <a:lnT w="57150" algn="ctr">
+                      <a:solidFill>
+                        <a:schemeClr val="tx1"/>
+                      </a:solidFill>
                     </a:lnT>
-                    <a:lnB w="12700" cap="flat" cmpd="sng" algn="ctr">
-                      <a:solidFill>
-                        <a:schemeClr val="tx1"/>
-                      </a:solidFill>
-                      <a:prstDash val="solid"/>
-                      <a:round/>
-                      <a:headEnd type="none" w="med" len="med"/>
-                      <a:tailEnd type="none" w="med" len="med"/>
+                    <a:lnB w="12700" algn="ctr">
+                      <a:solidFill>
+                        <a:schemeClr val="tx1"/>
+                      </a:solidFill>
                     </a:lnB>
-                    <a:lnTlToBr w="12700" cmpd="sng">
-                      <a:noFill/>
-                      <a:prstDash val="solid"/>
-                    </a:lnTlToBr>
-                    <a:lnBlToTr w="12700" cmpd="sng">
-                      <a:noFill/>
-                      <a:prstDash val="solid"/>
-                    </a:lnBlToTr>
                   </a:tcPr>
                 </a:tc>
-                <a:extLst>
-                  <a:ext uri="{0D108BD9-81ED-4DB2-BD59-A6C34878D82A}">
-                    <a16:rowId xmlns:a16="http://schemas.microsoft.com/office/drawing/2014/main" val="10001"/>
-                  </a:ext>
-                </a:extLst>
               </a:tr>
               <a:tr h="1292869">
                 <a:tc>
                   <a:txBody>
                     <a:bodyPr/>
-                    <a:lstStyle/>
                     <a:p>
                       <a:pPr algn="r">
                         <a:defRPr/>
                       </a:pPr>
                       <a:r>
-                        <a:rPr lang="de-DE" sz="3600" b="1" dirty="0">
-                          <a:latin typeface="Liberation Sans Narrow" panose="020B0606020202030204" pitchFamily="34" charset="0"/>
+                        <a:rPr lang="de-DE" sz="3600" b="1">
+                          <a:latin typeface="Liberation Sans Narrow"/>
                         </a:rPr>
                         <a:t>Shape </a:t>
                       </a:r>
+                      <a:endParaRPr/>
                     </a:p>
                     <a:p>
                       <a:pPr algn="r">
                         <a:defRPr/>
                       </a:pPr>
                       <a:r>
-                        <a:rPr lang="de-DE" sz="3600" b="1" dirty="0" err="1">
-                          <a:latin typeface="Liberation Sans Narrow" panose="020B0606020202030204" pitchFamily="34" charset="0"/>
+                        <a:rPr lang="de-DE" sz="3600" b="1">
+                          <a:latin typeface="Liberation Sans Narrow"/>
                         </a:rPr>
                         <a:t>Prec</a:t>
                       </a:r>
                       <a:r>
-                        <a:rPr lang="de-DE" sz="3600" b="1" dirty="0">
-                          <a:latin typeface="Liberation Sans Narrow" panose="020B0606020202030204" pitchFamily="34" charset="0"/>
+                        <a:rPr lang="de-DE" sz="3600" b="1">
+                          <a:latin typeface="Liberation Sans Narrow"/>
                         </a:rPr>
                         <a:t> / </a:t>
                       </a:r>
                       <a:r>
-                        <a:rPr lang="de-DE" sz="3600" b="1" dirty="0" err="1">
-                          <a:latin typeface="Liberation Sans Narrow" panose="020B0606020202030204" pitchFamily="34" charset="0"/>
+                        <a:rPr lang="de-DE" sz="3600" b="1">
+                          <a:latin typeface="Liberation Sans Narrow"/>
                         </a:rPr>
                         <a:t>Rec</a:t>
                       </a:r>
-                      <a:endParaRPr sz="3600" b="1" dirty="0">
-                        <a:latin typeface="Liberation Sans Narrow" panose="020B0606020202030204" pitchFamily="34" charset="0"/>
+                      <a:endParaRPr sz="3600" b="1">
+                        <a:latin typeface="Liberation Sans Narrow"/>
                       </a:endParaRPr>
                     </a:p>
                   </a:txBody>
@@ -2697,50 +2475,33 @@
                     <a:lnR w="6349" algn="ctr">
                       <a:noFill/>
                     </a:lnR>
-                    <a:lnT w="12700" cap="flat" cmpd="sng" algn="ctr">
-                      <a:solidFill>
-                        <a:schemeClr val="tx1"/>
-                      </a:solidFill>
-                      <a:prstDash val="solid"/>
-                      <a:round/>
-                      <a:headEnd type="none" w="med" len="med"/>
-                      <a:tailEnd type="none" w="med" len="med"/>
+                    <a:lnT w="12700" algn="ctr">
+                      <a:solidFill>
+                        <a:schemeClr val="tx1"/>
+                      </a:solidFill>
                     </a:lnT>
-                    <a:lnB w="12700" cap="flat" cmpd="sng" algn="ctr">
-                      <a:solidFill>
-                        <a:schemeClr val="tx1"/>
-                      </a:solidFill>
-                      <a:prstDash val="solid"/>
-                      <a:round/>
-                      <a:headEnd type="none" w="med" len="med"/>
-                      <a:tailEnd type="none" w="med" len="med"/>
+                    <a:lnB w="12700" algn="ctr">
+                      <a:solidFill>
+                        <a:schemeClr val="tx1"/>
+                      </a:solidFill>
                     </a:lnB>
-                    <a:lnTlToBr w="12700" cmpd="sng">
-                      <a:noFill/>
-                      <a:prstDash val="solid"/>
-                    </a:lnTlToBr>
-                    <a:lnBlToTr w="12700" cmpd="sng">
-                      <a:noFill/>
-                      <a:prstDash val="solid"/>
-                    </a:lnBlToTr>
                   </a:tcPr>
                 </a:tc>
                 <a:tc>
                   <a:txBody>
                     <a:bodyPr/>
-                    <a:lstStyle/>
                     <a:p>
                       <a:pPr algn="ctr">
                         <a:defRPr/>
                       </a:pPr>
                       <a:r>
-                        <a:rPr lang="de-DE" sz="3600" dirty="0">
-                          <a:latin typeface="Liberation Sans Narrow" panose="020B0606020202030204" pitchFamily="34" charset="0"/>
+                        <a:rPr lang="de-DE" sz="3600">
+                          <a:latin typeface="Liberation Sans Narrow"/>
                         </a:rPr>
                         <a:t>99,75% / 99,74% </a:t>
                       </a:r>
-                      <a:endParaRPr sz="3600" dirty="0">
-                        <a:latin typeface="Liberation Sans Narrow" panose="020B0606020202030204" pitchFamily="34" charset="0"/>
+                      <a:endParaRPr sz="3600">
+                        <a:latin typeface="Liberation Sans Narrow"/>
                       </a:endParaRPr>
                     </a:p>
                   </a:txBody>
@@ -2748,215 +2509,144 @@
                     <a:lnL w="6349" algn="ctr">
                       <a:noFill/>
                     </a:lnL>
-                    <a:lnR w="12700" cap="flat" cmpd="sng" algn="ctr">
-                      <a:solidFill>
-                        <a:schemeClr val="tx1"/>
-                      </a:solidFill>
-                      <a:prstDash val="solid"/>
-                      <a:round/>
-                      <a:headEnd type="none" w="med" len="med"/>
-                      <a:tailEnd type="none" w="med" len="med"/>
+                    <a:lnR w="12700" algn="ctr">
+                      <a:solidFill>
+                        <a:schemeClr val="tx1"/>
+                      </a:solidFill>
                     </a:lnR>
-                    <a:lnT w="12700" cap="flat" cmpd="sng" algn="ctr">
-                      <a:solidFill>
-                        <a:schemeClr val="tx1"/>
-                      </a:solidFill>
-                      <a:prstDash val="solid"/>
-                      <a:round/>
-                      <a:headEnd type="none" w="med" len="med"/>
-                      <a:tailEnd type="none" w="med" len="med"/>
+                    <a:lnT w="12700" algn="ctr">
+                      <a:solidFill>
+                        <a:schemeClr val="tx1"/>
+                      </a:solidFill>
                     </a:lnT>
-                    <a:lnB w="12700" cap="flat" cmpd="sng" algn="ctr">
-                      <a:solidFill>
-                        <a:schemeClr val="tx1"/>
-                      </a:solidFill>
-                      <a:prstDash val="solid"/>
-                      <a:round/>
-                      <a:headEnd type="none" w="med" len="med"/>
-                      <a:tailEnd type="none" w="med" len="med"/>
+                    <a:lnB w="12700" algn="ctr">
+                      <a:solidFill>
+                        <a:schemeClr val="tx1"/>
+                      </a:solidFill>
                     </a:lnB>
-                    <a:lnTlToBr w="12700" cmpd="sng">
-                      <a:noFill/>
-                      <a:prstDash val="solid"/>
-                    </a:lnTlToBr>
-                    <a:lnBlToTr w="12700" cmpd="sng">
-                      <a:noFill/>
-                      <a:prstDash val="solid"/>
-                    </a:lnBlToTr>
                   </a:tcPr>
                 </a:tc>
                 <a:tc>
                   <a:txBody>
                     <a:bodyPr/>
-                    <a:lstStyle/>
                     <a:p>
                       <a:pPr algn="ctr">
                         <a:defRPr/>
                       </a:pPr>
                       <a:r>
-                        <a:rPr lang="de-DE" sz="3600" dirty="0">
-                          <a:latin typeface="Liberation Sans Narrow" panose="020B0606020202030204" pitchFamily="34" charset="0"/>
+                        <a:rPr lang="de-DE" sz="3600">
+                          <a:latin typeface="Liberation Sans Narrow"/>
                         </a:rPr>
                         <a:t>98,30% / 98,3%</a:t>
                       </a:r>
-                      <a:endParaRPr sz="3600" dirty="0">
-                        <a:latin typeface="Liberation Sans Narrow" panose="020B0606020202030204" pitchFamily="34" charset="0"/>
+                      <a:endParaRPr sz="3600">
+                        <a:latin typeface="Liberation Sans Narrow"/>
                       </a:endParaRPr>
                     </a:p>
                   </a:txBody>
                   <a:tcPr marL="90000" anchor="ctr">
-                    <a:lnL w="12700" cap="flat" cmpd="sng" algn="ctr">
-                      <a:solidFill>
-                        <a:schemeClr val="tx1"/>
-                      </a:solidFill>
-                      <a:prstDash val="solid"/>
-                      <a:round/>
-                      <a:headEnd type="none" w="med" len="med"/>
-                      <a:tailEnd type="none" w="med" len="med"/>
+                    <a:lnL w="12700" algn="ctr">
+                      <a:solidFill>
+                        <a:schemeClr val="tx1"/>
+                      </a:solidFill>
                     </a:lnL>
-                    <a:lnR w="12700" cap="flat" cmpd="sng" algn="ctr">
-                      <a:solidFill>
-                        <a:schemeClr val="tx1"/>
-                      </a:solidFill>
-                      <a:prstDash val="solid"/>
-                      <a:round/>
-                      <a:headEnd type="none" w="med" len="med"/>
-                      <a:tailEnd type="none" w="med" len="med"/>
+                    <a:lnR w="12700" algn="ctr">
+                      <a:solidFill>
+                        <a:schemeClr val="tx1"/>
+                      </a:solidFill>
                     </a:lnR>
-                    <a:lnT w="12700" cap="flat" cmpd="sng" algn="ctr">
-                      <a:solidFill>
-                        <a:schemeClr val="tx1"/>
-                      </a:solidFill>
-                      <a:prstDash val="solid"/>
-                      <a:round/>
-                      <a:headEnd type="none" w="med" len="med"/>
-                      <a:tailEnd type="none" w="med" len="med"/>
+                    <a:lnT w="12700" algn="ctr">
+                      <a:solidFill>
+                        <a:schemeClr val="tx1"/>
+                      </a:solidFill>
                     </a:lnT>
-                    <a:lnB w="12700" cap="flat" cmpd="sng" algn="ctr">
-                      <a:solidFill>
-                        <a:schemeClr val="tx1"/>
-                      </a:solidFill>
-                      <a:prstDash val="solid"/>
-                      <a:round/>
-                      <a:headEnd type="none" w="med" len="med"/>
-                      <a:tailEnd type="none" w="med" len="med"/>
+                    <a:lnB w="12700" algn="ctr">
+                      <a:solidFill>
+                        <a:schemeClr val="tx1"/>
+                      </a:solidFill>
                     </a:lnB>
-                    <a:lnTlToBr w="12700" cmpd="sng">
-                      <a:noFill/>
-                      <a:prstDash val="solid"/>
-                    </a:lnTlToBr>
-                    <a:lnBlToTr w="12700" cmpd="sng">
-                      <a:noFill/>
-                      <a:prstDash val="solid"/>
-                    </a:lnBlToTr>
                   </a:tcPr>
                 </a:tc>
                 <a:tc>
                   <a:txBody>
                     <a:bodyPr/>
-                    <a:lstStyle/>
                     <a:p>
                       <a:pPr algn="ctr">
                         <a:defRPr/>
                       </a:pPr>
                       <a:r>
-                        <a:rPr lang="de-DE" sz="3600" dirty="0">
-                          <a:latin typeface="Liberation Sans Narrow" panose="020B0606020202030204" pitchFamily="34" charset="0"/>
+                        <a:rPr lang="de-DE" sz="3600">
+                          <a:latin typeface="Liberation Sans Narrow"/>
                         </a:rPr>
                         <a:t>100% / 100%</a:t>
                       </a:r>
-                      <a:endParaRPr sz="3600" dirty="0">
-                        <a:latin typeface="Liberation Sans Narrow" panose="020B0606020202030204" pitchFamily="34" charset="0"/>
+                      <a:endParaRPr sz="3600">
+                        <a:latin typeface="Liberation Sans Narrow"/>
                       </a:endParaRPr>
                     </a:p>
                   </a:txBody>
                   <a:tcPr marL="90000" anchor="ctr">
-                    <a:lnL w="12700" cap="flat" cmpd="sng" algn="ctr">
-                      <a:solidFill>
-                        <a:schemeClr val="tx1"/>
-                      </a:solidFill>
-                      <a:prstDash val="solid"/>
-                      <a:round/>
-                      <a:headEnd type="none" w="med" len="med"/>
-                      <a:tailEnd type="none" w="med" len="med"/>
+                    <a:lnL w="12700" algn="ctr">
+                      <a:solidFill>
+                        <a:schemeClr val="tx1"/>
+                      </a:solidFill>
                     </a:lnL>
                     <a:lnR w="6349" algn="ctr">
                       <a:noFill/>
                     </a:lnR>
-                    <a:lnT w="12700" cap="flat" cmpd="sng" algn="ctr">
-                      <a:solidFill>
-                        <a:schemeClr val="tx1"/>
-                      </a:solidFill>
-                      <a:prstDash val="solid"/>
-                      <a:round/>
-                      <a:headEnd type="none" w="med" len="med"/>
-                      <a:tailEnd type="none" w="med" len="med"/>
+                    <a:lnT w="12700" algn="ctr">
+                      <a:solidFill>
+                        <a:schemeClr val="tx1"/>
+                      </a:solidFill>
                     </a:lnT>
-                    <a:lnB w="12700" cap="flat" cmpd="sng" algn="ctr">
-                      <a:solidFill>
-                        <a:schemeClr val="tx1"/>
-                      </a:solidFill>
-                      <a:prstDash val="solid"/>
-                      <a:round/>
-                      <a:headEnd type="none" w="med" len="med"/>
-                      <a:tailEnd type="none" w="med" len="med"/>
+                    <a:lnB w="12700" algn="ctr">
+                      <a:solidFill>
+                        <a:schemeClr val="tx1"/>
+                      </a:solidFill>
                     </a:lnB>
-                    <a:lnTlToBr w="12700" cmpd="sng">
-                      <a:noFill/>
-                      <a:prstDash val="solid"/>
-                    </a:lnTlToBr>
-                    <a:lnBlToTr w="12700" cmpd="sng">
-                      <a:noFill/>
-                      <a:prstDash val="solid"/>
-                    </a:lnBlToTr>
                   </a:tcPr>
                 </a:tc>
-                <a:extLst>
-                  <a:ext uri="{0D108BD9-81ED-4DB2-BD59-A6C34878D82A}">
-                    <a16:rowId xmlns:a16="http://schemas.microsoft.com/office/drawing/2014/main" val="10002"/>
-                  </a:ext>
-                </a:extLst>
               </a:tr>
               <a:tr h="1292869">
                 <a:tc>
                   <a:txBody>
                     <a:bodyPr/>
-                    <a:lstStyle/>
                     <a:p>
                       <a:pPr algn="r">
                         <a:defRPr/>
                       </a:pPr>
                       <a:r>
-                        <a:rPr lang="de-DE" sz="3600" b="1" dirty="0">
-                          <a:latin typeface="Liberation Sans Narrow" panose="020B0606020202030204" pitchFamily="34" charset="0"/>
+                        <a:rPr lang="de-DE" sz="3600" b="1">
+                          <a:latin typeface="Liberation Sans Narrow"/>
                         </a:rPr>
                         <a:t>Color</a:t>
                       </a:r>
+                      <a:endParaRPr/>
                     </a:p>
                     <a:p>
                       <a:pPr algn="r">
                         <a:defRPr/>
                       </a:pPr>
                       <a:r>
-                        <a:rPr lang="de-DE" sz="3600" b="1" dirty="0" err="1">
-                          <a:latin typeface="Liberation Sans Narrow" panose="020B0606020202030204" pitchFamily="34" charset="0"/>
+                        <a:rPr lang="de-DE" sz="3600" b="1">
+                          <a:latin typeface="Liberation Sans Narrow"/>
                         </a:rPr>
                         <a:t>Prec</a:t>
                       </a:r>
                       <a:r>
-                        <a:rPr lang="de-DE" sz="3600" b="1" dirty="0">
-                          <a:latin typeface="Liberation Sans Narrow" panose="020B0606020202030204" pitchFamily="34" charset="0"/>
+                        <a:rPr lang="de-DE" sz="3600" b="1">
+                          <a:latin typeface="Liberation Sans Narrow"/>
                         </a:rPr>
                         <a:t> / </a:t>
                       </a:r>
                       <a:r>
-                        <a:rPr lang="de-DE" sz="3600" b="1" dirty="0" err="1">
-                          <a:latin typeface="Liberation Sans Narrow" panose="020B0606020202030204" pitchFamily="34" charset="0"/>
+                        <a:rPr lang="de-DE" sz="3600" b="1">
+                          <a:latin typeface="Liberation Sans Narrow"/>
                         </a:rPr>
                         <a:t>Rec</a:t>
                       </a:r>
-                      <a:endParaRPr sz="3600" b="1" dirty="0">
-                        <a:latin typeface="Liberation Sans Narrow" panose="020B0606020202030204" pitchFamily="34" charset="0"/>
+                      <a:endParaRPr sz="3600" b="1">
+                        <a:latin typeface="Liberation Sans Narrow"/>
                       </a:endParaRPr>
                     </a:p>
                   </a:txBody>
@@ -2967,50 +2657,33 @@
                     <a:lnR w="6349" algn="ctr">
                       <a:noFill/>
                     </a:lnR>
-                    <a:lnT w="12700" cap="flat" cmpd="sng" algn="ctr">
-                      <a:solidFill>
-                        <a:schemeClr val="tx1"/>
-                      </a:solidFill>
-                      <a:prstDash val="solid"/>
-                      <a:round/>
-                      <a:headEnd type="none" w="med" len="med"/>
-                      <a:tailEnd type="none" w="med" len="med"/>
+                    <a:lnT w="12700" algn="ctr">
+                      <a:solidFill>
+                        <a:schemeClr val="tx1"/>
+                      </a:solidFill>
                     </a:lnT>
-                    <a:lnB w="12700" cap="flat" cmpd="sng" algn="ctr">
-                      <a:solidFill>
-                        <a:schemeClr val="tx1"/>
-                      </a:solidFill>
-                      <a:prstDash val="solid"/>
-                      <a:round/>
-                      <a:headEnd type="none" w="med" len="med"/>
-                      <a:tailEnd type="none" w="med" len="med"/>
+                    <a:lnB w="12700" algn="ctr">
+                      <a:solidFill>
+                        <a:schemeClr val="tx1"/>
+                      </a:solidFill>
                     </a:lnB>
-                    <a:lnTlToBr w="12700" cmpd="sng">
-                      <a:noFill/>
-                      <a:prstDash val="solid"/>
-                    </a:lnTlToBr>
-                    <a:lnBlToTr w="12700" cmpd="sng">
-                      <a:noFill/>
-                      <a:prstDash val="solid"/>
-                    </a:lnBlToTr>
                   </a:tcPr>
                 </a:tc>
                 <a:tc>
                   <a:txBody>
                     <a:bodyPr/>
-                    <a:lstStyle/>
                     <a:p>
                       <a:pPr algn="ctr">
                         <a:defRPr/>
                       </a:pPr>
                       <a:r>
-                        <a:rPr lang="de-DE" sz="3600" dirty="0">
-                          <a:latin typeface="Liberation Sans Narrow" panose="020B0606020202030204" pitchFamily="34" charset="0"/>
+                        <a:rPr lang="de-DE" sz="3600">
+                          <a:latin typeface="Liberation Sans Narrow"/>
                         </a:rPr>
                         <a:t>98,09% / 98,53%</a:t>
                       </a:r>
-                      <a:endParaRPr sz="3600" dirty="0">
-                        <a:latin typeface="Liberation Sans Narrow" panose="020B0606020202030204" pitchFamily="34" charset="0"/>
+                      <a:endParaRPr sz="3600">
+                        <a:latin typeface="Liberation Sans Narrow"/>
                       </a:endParaRPr>
                     </a:p>
                   </a:txBody>
@@ -3018,215 +2691,144 @@
                     <a:lnL w="6349" algn="ctr">
                       <a:noFill/>
                     </a:lnL>
-                    <a:lnR w="12700" cap="flat" cmpd="sng" algn="ctr">
-                      <a:solidFill>
-                        <a:schemeClr val="tx1"/>
-                      </a:solidFill>
-                      <a:prstDash val="solid"/>
-                      <a:round/>
-                      <a:headEnd type="none" w="med" len="med"/>
-                      <a:tailEnd type="none" w="med" len="med"/>
+                    <a:lnR w="12700" algn="ctr">
+                      <a:solidFill>
+                        <a:schemeClr val="tx1"/>
+                      </a:solidFill>
                     </a:lnR>
-                    <a:lnT w="12700" cap="flat" cmpd="sng" algn="ctr">
-                      <a:solidFill>
-                        <a:schemeClr val="tx1"/>
-                      </a:solidFill>
-                      <a:prstDash val="solid"/>
-                      <a:round/>
-                      <a:headEnd type="none" w="med" len="med"/>
-                      <a:tailEnd type="none" w="med" len="med"/>
+                    <a:lnT w="12700" algn="ctr">
+                      <a:solidFill>
+                        <a:schemeClr val="tx1"/>
+                      </a:solidFill>
                     </a:lnT>
-                    <a:lnB w="12700" cap="flat" cmpd="sng" algn="ctr">
-                      <a:solidFill>
-                        <a:schemeClr val="tx1"/>
-                      </a:solidFill>
-                      <a:prstDash val="solid"/>
-                      <a:round/>
-                      <a:headEnd type="none" w="med" len="med"/>
-                      <a:tailEnd type="none" w="med" len="med"/>
+                    <a:lnB w="12700" algn="ctr">
+                      <a:solidFill>
+                        <a:schemeClr val="tx1"/>
+                      </a:solidFill>
                     </a:lnB>
-                    <a:lnTlToBr w="12700" cmpd="sng">
-                      <a:noFill/>
-                      <a:prstDash val="solid"/>
-                    </a:lnTlToBr>
-                    <a:lnBlToTr w="12700" cmpd="sng">
-                      <a:noFill/>
-                      <a:prstDash val="solid"/>
-                    </a:lnBlToTr>
                   </a:tcPr>
                 </a:tc>
                 <a:tc>
                   <a:txBody>
                     <a:bodyPr/>
-                    <a:lstStyle/>
                     <a:p>
                       <a:pPr algn="ctr">
                         <a:defRPr/>
                       </a:pPr>
                       <a:r>
-                        <a:rPr lang="de-DE" sz="3600" dirty="0">
-                          <a:latin typeface="Liberation Sans Narrow" panose="020B0606020202030204" pitchFamily="34" charset="0"/>
+                        <a:rPr lang="de-DE" sz="3600">
+                          <a:latin typeface="Liberation Sans Narrow"/>
                         </a:rPr>
                         <a:t>92,44% / 92,95%</a:t>
                       </a:r>
-                      <a:endParaRPr sz="3600" dirty="0">
-                        <a:latin typeface="Liberation Sans Narrow" panose="020B0606020202030204" pitchFamily="34" charset="0"/>
+                      <a:endParaRPr sz="3600">
+                        <a:latin typeface="Liberation Sans Narrow"/>
                       </a:endParaRPr>
                     </a:p>
                   </a:txBody>
                   <a:tcPr marL="90000" anchor="ctr">
-                    <a:lnL w="12700" cap="flat" cmpd="sng" algn="ctr">
-                      <a:solidFill>
-                        <a:schemeClr val="tx1"/>
-                      </a:solidFill>
-                      <a:prstDash val="solid"/>
-                      <a:round/>
-                      <a:headEnd type="none" w="med" len="med"/>
-                      <a:tailEnd type="none" w="med" len="med"/>
+                    <a:lnL w="12700" algn="ctr">
+                      <a:solidFill>
+                        <a:schemeClr val="tx1"/>
+                      </a:solidFill>
                     </a:lnL>
-                    <a:lnR w="12700" cap="flat" cmpd="sng" algn="ctr">
-                      <a:solidFill>
-                        <a:schemeClr val="tx1"/>
-                      </a:solidFill>
-                      <a:prstDash val="solid"/>
-                      <a:round/>
-                      <a:headEnd type="none" w="med" len="med"/>
-                      <a:tailEnd type="none" w="med" len="med"/>
+                    <a:lnR w="12700" algn="ctr">
+                      <a:solidFill>
+                        <a:schemeClr val="tx1"/>
+                      </a:solidFill>
                     </a:lnR>
-                    <a:lnT w="12700" cap="flat" cmpd="sng" algn="ctr">
-                      <a:solidFill>
-                        <a:schemeClr val="tx1"/>
-                      </a:solidFill>
-                      <a:prstDash val="solid"/>
-                      <a:round/>
-                      <a:headEnd type="none" w="med" len="med"/>
-                      <a:tailEnd type="none" w="med" len="med"/>
+                    <a:lnT w="12700" algn="ctr">
+                      <a:solidFill>
+                        <a:schemeClr val="tx1"/>
+                      </a:solidFill>
                     </a:lnT>
-                    <a:lnB w="12700" cap="flat" cmpd="sng" algn="ctr">
-                      <a:solidFill>
-                        <a:schemeClr val="tx1"/>
-                      </a:solidFill>
-                      <a:prstDash val="solid"/>
-                      <a:round/>
-                      <a:headEnd type="none" w="med" len="med"/>
-                      <a:tailEnd type="none" w="med" len="med"/>
+                    <a:lnB w="12700" algn="ctr">
+                      <a:solidFill>
+                        <a:schemeClr val="tx1"/>
+                      </a:solidFill>
                     </a:lnB>
-                    <a:lnTlToBr w="12700" cmpd="sng">
-                      <a:noFill/>
-                      <a:prstDash val="solid"/>
-                    </a:lnTlToBr>
-                    <a:lnBlToTr w="12700" cmpd="sng">
-                      <a:noFill/>
-                      <a:prstDash val="solid"/>
-                    </a:lnBlToTr>
                   </a:tcPr>
                 </a:tc>
                 <a:tc>
                   <a:txBody>
                     <a:bodyPr/>
-                    <a:lstStyle/>
                     <a:p>
                       <a:pPr algn="ctr">
                         <a:defRPr/>
                       </a:pPr>
                       <a:r>
-                        <a:rPr lang="de-DE" sz="3600" dirty="0">
-                          <a:latin typeface="Liberation Sans Narrow" panose="020B0606020202030204" pitchFamily="34" charset="0"/>
+                        <a:rPr lang="de-DE" sz="3600">
+                          <a:latin typeface="Liberation Sans Narrow"/>
                         </a:rPr>
                         <a:t>92,76% / 92,76%</a:t>
                       </a:r>
-                      <a:endParaRPr sz="3600" dirty="0">
-                        <a:latin typeface="Liberation Sans Narrow" panose="020B0606020202030204" pitchFamily="34" charset="0"/>
+                      <a:endParaRPr sz="3600">
+                        <a:latin typeface="Liberation Sans Narrow"/>
                       </a:endParaRPr>
                     </a:p>
                   </a:txBody>
                   <a:tcPr marL="90000" anchor="ctr">
-                    <a:lnL w="12700" cap="flat" cmpd="sng" algn="ctr">
-                      <a:solidFill>
-                        <a:schemeClr val="tx1"/>
-                      </a:solidFill>
-                      <a:prstDash val="solid"/>
-                      <a:round/>
-                      <a:headEnd type="none" w="med" len="med"/>
-                      <a:tailEnd type="none" w="med" len="med"/>
+                    <a:lnL w="12700" algn="ctr">
+                      <a:solidFill>
+                        <a:schemeClr val="tx1"/>
+                      </a:solidFill>
                     </a:lnL>
                     <a:lnR w="6349" algn="ctr">
                       <a:noFill/>
                     </a:lnR>
-                    <a:lnT w="12700" cap="flat" cmpd="sng" algn="ctr">
-                      <a:solidFill>
-                        <a:schemeClr val="tx1"/>
-                      </a:solidFill>
-                      <a:prstDash val="solid"/>
-                      <a:round/>
-                      <a:headEnd type="none" w="med" len="med"/>
-                      <a:tailEnd type="none" w="med" len="med"/>
+                    <a:lnT w="12700" algn="ctr">
+                      <a:solidFill>
+                        <a:schemeClr val="tx1"/>
+                      </a:solidFill>
                     </a:lnT>
-                    <a:lnB w="12700" cap="flat" cmpd="sng" algn="ctr">
-                      <a:solidFill>
-                        <a:schemeClr val="tx1"/>
-                      </a:solidFill>
-                      <a:prstDash val="solid"/>
-                      <a:round/>
-                      <a:headEnd type="none" w="med" len="med"/>
-                      <a:tailEnd type="none" w="med" len="med"/>
+                    <a:lnB w="12700" algn="ctr">
+                      <a:solidFill>
+                        <a:schemeClr val="tx1"/>
+                      </a:solidFill>
                     </a:lnB>
-                    <a:lnTlToBr w="12700" cmpd="sng">
-                      <a:noFill/>
-                      <a:prstDash val="solid"/>
-                    </a:lnTlToBr>
-                    <a:lnBlToTr w="12700" cmpd="sng">
-                      <a:noFill/>
-                      <a:prstDash val="solid"/>
-                    </a:lnBlToTr>
                   </a:tcPr>
                 </a:tc>
-                <a:extLst>
-                  <a:ext uri="{0D108BD9-81ED-4DB2-BD59-A6C34878D82A}">
-                    <a16:rowId xmlns:a16="http://schemas.microsoft.com/office/drawing/2014/main" val="10003"/>
-                  </a:ext>
-                </a:extLst>
               </a:tr>
               <a:tr h="1292869">
                 <a:tc>
                   <a:txBody>
                     <a:bodyPr/>
-                    <a:lstStyle/>
                     <a:p>
                       <a:pPr algn="r">
                         <a:defRPr/>
                       </a:pPr>
                       <a:r>
-                        <a:rPr lang="de-DE" sz="3600" b="1" dirty="0">
-                          <a:latin typeface="Liberation Sans Narrow" panose="020B0606020202030204" pitchFamily="34" charset="0"/>
+                        <a:rPr lang="de-DE" sz="3600" b="1">
+                          <a:latin typeface="Liberation Sans Narrow"/>
                         </a:rPr>
                         <a:t>Size </a:t>
                       </a:r>
+                      <a:endParaRPr/>
                     </a:p>
                     <a:p>
                       <a:pPr algn="r">
                         <a:defRPr/>
                       </a:pPr>
                       <a:r>
-                        <a:rPr lang="de-DE" sz="3600" b="1" dirty="0" err="1">
-                          <a:latin typeface="Liberation Sans Narrow" panose="020B0606020202030204" pitchFamily="34" charset="0"/>
+                        <a:rPr lang="de-DE" sz="3600" b="1">
+                          <a:latin typeface="Liberation Sans Narrow"/>
                         </a:rPr>
                         <a:t>Prec</a:t>
                       </a:r>
                       <a:r>
-                        <a:rPr lang="de-DE" sz="3600" b="1" dirty="0">
-                          <a:latin typeface="Liberation Sans Narrow" panose="020B0606020202030204" pitchFamily="34" charset="0"/>
+                        <a:rPr lang="de-DE" sz="3600" b="1">
+                          <a:latin typeface="Liberation Sans Narrow"/>
                         </a:rPr>
                         <a:t> / </a:t>
                       </a:r>
                       <a:r>
-                        <a:rPr lang="de-DE" sz="3600" b="1" dirty="0" err="1">
-                          <a:latin typeface="Liberation Sans Narrow" panose="020B0606020202030204" pitchFamily="34" charset="0"/>
+                        <a:rPr lang="de-DE" sz="3600" b="1">
+                          <a:latin typeface="Liberation Sans Narrow"/>
                         </a:rPr>
                         <a:t>Rec</a:t>
                       </a:r>
-                      <a:endParaRPr sz="3600" b="1" dirty="0">
-                        <a:latin typeface="Liberation Sans Narrow" panose="020B0606020202030204" pitchFamily="34" charset="0"/>
+                      <a:endParaRPr sz="3600" b="1">
+                        <a:latin typeface="Liberation Sans Narrow"/>
                       </a:endParaRPr>
                     </a:p>
                   </a:txBody>
@@ -3237,44 +2839,31 @@
                     <a:lnR w="6349" algn="ctr">
                       <a:noFill/>
                     </a:lnR>
-                    <a:lnT w="12700" cap="flat" cmpd="sng" algn="ctr">
-                      <a:solidFill>
-                        <a:schemeClr val="tx1"/>
-                      </a:solidFill>
-                      <a:prstDash val="solid"/>
-                      <a:round/>
-                      <a:headEnd type="none" w="med" len="med"/>
-                      <a:tailEnd type="none" w="med" len="med"/>
+                    <a:lnT w="12700" algn="ctr">
+                      <a:solidFill>
+                        <a:schemeClr val="tx1"/>
+                      </a:solidFill>
                     </a:lnT>
                     <a:lnB w="6349" algn="ctr">
                       <a:noFill/>
                     </a:lnB>
-                    <a:lnTlToBr w="12700" cmpd="sng">
-                      <a:noFill/>
-                      <a:prstDash val="solid"/>
-                    </a:lnTlToBr>
-                    <a:lnBlToTr w="12700" cmpd="sng">
-                      <a:noFill/>
-                      <a:prstDash val="solid"/>
-                    </a:lnBlToTr>
                   </a:tcPr>
                 </a:tc>
                 <a:tc>
                   <a:txBody>
                     <a:bodyPr/>
-                    <a:lstStyle/>
                     <a:p>
                       <a:pPr algn="ctr">
                         <a:defRPr/>
                       </a:pPr>
                       <a:r>
-                        <a:rPr lang="de-DE" sz="3600" dirty="0">
-                          <a:latin typeface="Liberation Sans Narrow" panose="020B0606020202030204" pitchFamily="34" charset="0"/>
+                        <a:rPr lang="de-DE" sz="3600">
+                          <a:latin typeface="Liberation Sans Narrow"/>
                         </a:rPr>
                         <a:t>98,73% / 95,9%</a:t>
                       </a:r>
-                      <a:endParaRPr sz="3600" dirty="0">
-                        <a:latin typeface="Liberation Sans Narrow" panose="020B0606020202030204" pitchFamily="34" charset="0"/>
+                      <a:endParaRPr sz="3600">
+                        <a:latin typeface="Liberation Sans Narrow"/>
                       </a:endParaRPr>
                     </a:p>
                   </a:txBody>
@@ -3282,156 +2871,261 @@
                     <a:lnL w="6349" algn="ctr">
                       <a:noFill/>
                     </a:lnL>
-                    <a:lnR w="12700" cap="flat" cmpd="sng" algn="ctr">
-                      <a:solidFill>
-                        <a:schemeClr val="tx1"/>
-                      </a:solidFill>
-                      <a:prstDash val="solid"/>
-                      <a:round/>
-                      <a:headEnd type="none" w="med" len="med"/>
-                      <a:tailEnd type="none" w="med" len="med"/>
+                    <a:lnR w="12700" algn="ctr">
+                      <a:solidFill>
+                        <a:schemeClr val="tx1"/>
+                      </a:solidFill>
                     </a:lnR>
-                    <a:lnT w="12700" cap="flat" cmpd="sng" algn="ctr">
-                      <a:solidFill>
-                        <a:schemeClr val="tx1"/>
-                      </a:solidFill>
-                      <a:prstDash val="solid"/>
-                      <a:round/>
-                      <a:headEnd type="none" w="med" len="med"/>
-                      <a:tailEnd type="none" w="med" len="med"/>
+                    <a:lnT w="12700" algn="ctr">
+                      <a:solidFill>
+                        <a:schemeClr val="tx1"/>
+                      </a:solidFill>
                     </a:lnT>
                     <a:lnB w="6349" algn="ctr">
                       <a:noFill/>
                     </a:lnB>
-                    <a:lnTlToBr w="12700" cmpd="sng">
-                      <a:noFill/>
-                      <a:prstDash val="solid"/>
-                    </a:lnTlToBr>
-                    <a:lnBlToTr w="12700" cmpd="sng">
-                      <a:noFill/>
-                      <a:prstDash val="solid"/>
-                    </a:lnBlToTr>
                   </a:tcPr>
                 </a:tc>
                 <a:tc>
                   <a:txBody>
                     <a:bodyPr/>
-                    <a:lstStyle/>
                     <a:p>
                       <a:pPr algn="ctr">
                         <a:defRPr/>
                       </a:pPr>
                       <a:r>
-                        <a:rPr lang="de-DE" sz="3600" dirty="0">
-                          <a:latin typeface="Liberation Sans Narrow" panose="020B0606020202030204" pitchFamily="34" charset="0"/>
+                        <a:rPr lang="de-DE" sz="3600">
+                          <a:latin typeface="Liberation Sans Narrow"/>
                         </a:rPr>
                         <a:t>69,43% / 64,13%</a:t>
                       </a:r>
-                      <a:endParaRPr sz="3600" dirty="0">
-                        <a:latin typeface="Liberation Sans Narrow" panose="020B0606020202030204" pitchFamily="34" charset="0"/>
+                      <a:endParaRPr sz="3600">
+                        <a:latin typeface="Liberation Sans Narrow"/>
                       </a:endParaRPr>
                     </a:p>
                   </a:txBody>
                   <a:tcPr marL="90000" anchor="ctr">
-                    <a:lnL w="12700" cap="flat" cmpd="sng" algn="ctr">
-                      <a:solidFill>
-                        <a:schemeClr val="tx1"/>
-                      </a:solidFill>
-                      <a:prstDash val="solid"/>
-                      <a:round/>
-                      <a:headEnd type="none" w="med" len="med"/>
-                      <a:tailEnd type="none" w="med" len="med"/>
+                    <a:lnL w="12700" algn="ctr">
+                      <a:solidFill>
+                        <a:schemeClr val="tx1"/>
+                      </a:solidFill>
                     </a:lnL>
-                    <a:lnR w="12700" cap="flat" cmpd="sng" algn="ctr">
-                      <a:solidFill>
-                        <a:schemeClr val="tx1"/>
-                      </a:solidFill>
-                      <a:prstDash val="solid"/>
-                      <a:round/>
-                      <a:headEnd type="none" w="med" len="med"/>
-                      <a:tailEnd type="none" w="med" len="med"/>
+                    <a:lnR w="12700" algn="ctr">
+                      <a:solidFill>
+                        <a:schemeClr val="tx1"/>
+                      </a:solidFill>
                     </a:lnR>
-                    <a:lnT w="12700" cap="flat" cmpd="sng" algn="ctr">
-                      <a:solidFill>
-                        <a:schemeClr val="tx1"/>
-                      </a:solidFill>
-                      <a:prstDash val="solid"/>
-                      <a:round/>
-                      <a:headEnd type="none" w="med" len="med"/>
-                      <a:tailEnd type="none" w="med" len="med"/>
+                    <a:lnT w="12700" algn="ctr">
+                      <a:solidFill>
+                        <a:schemeClr val="tx1"/>
+                      </a:solidFill>
                     </a:lnT>
                     <a:lnB w="6349" algn="ctr">
                       <a:noFill/>
                     </a:lnB>
-                    <a:lnTlToBr w="12700" cmpd="sng">
-                      <a:noFill/>
-                      <a:prstDash val="solid"/>
-                    </a:lnTlToBr>
-                    <a:lnBlToTr w="12700" cmpd="sng">
-                      <a:noFill/>
-                      <a:prstDash val="solid"/>
-                    </a:lnBlToTr>
                   </a:tcPr>
                 </a:tc>
                 <a:tc>
                   <a:txBody>
                     <a:bodyPr/>
-                    <a:lstStyle/>
                     <a:p>
                       <a:pPr algn="ctr">
                         <a:defRPr/>
                       </a:pPr>
                       <a:r>
-                        <a:rPr lang="de-DE" sz="3600" dirty="0">
-                          <a:latin typeface="Liberation Sans Narrow" panose="020B0606020202030204" pitchFamily="34" charset="0"/>
+                        <a:rPr lang="de-DE" sz="3600">
+                          <a:latin typeface="Liberation Sans Narrow"/>
                         </a:rPr>
                         <a:t>N/A</a:t>
                       </a:r>
-                      <a:endParaRPr sz="3600" dirty="0">
-                        <a:latin typeface="Liberation Sans Narrow" panose="020B0606020202030204" pitchFamily="34" charset="0"/>
+                      <a:endParaRPr sz="3600">
+                        <a:latin typeface="Liberation Sans Narrow"/>
                       </a:endParaRPr>
                     </a:p>
                   </a:txBody>
                   <a:tcPr marL="90000" anchor="ctr">
-                    <a:lnL w="12700" cap="flat" cmpd="sng" algn="ctr">
-                      <a:solidFill>
-                        <a:schemeClr val="tx1"/>
-                      </a:solidFill>
-                      <a:prstDash val="solid"/>
-                      <a:round/>
-                      <a:headEnd type="none" w="med" len="med"/>
-                      <a:tailEnd type="none" w="med" len="med"/>
+                    <a:lnL w="12700" algn="ctr">
+                      <a:solidFill>
+                        <a:schemeClr val="tx1"/>
+                      </a:solidFill>
                     </a:lnL>
                     <a:lnR w="6349" algn="ctr">
                       <a:noFill/>
                     </a:lnR>
-                    <a:lnT w="12700" cap="flat" cmpd="sng" algn="ctr">
-                      <a:solidFill>
-                        <a:schemeClr val="tx1"/>
-                      </a:solidFill>
-                      <a:prstDash val="solid"/>
-                      <a:round/>
-                      <a:headEnd type="none" w="med" len="med"/>
-                      <a:tailEnd type="none" w="med" len="med"/>
+                    <a:lnT w="12700" algn="ctr">
+                      <a:solidFill>
+                        <a:schemeClr val="tx1"/>
+                      </a:solidFill>
                     </a:lnT>
                     <a:lnB w="6349" algn="ctr">
                       <a:noFill/>
                     </a:lnB>
-                    <a:lnTlToBr w="12700" cmpd="sng">
-                      <a:noFill/>
-                      <a:prstDash val="solid"/>
-                    </a:lnTlToBr>
-                    <a:lnBlToTr w="12700" cmpd="sng">
-                      <a:noFill/>
-                      <a:prstDash val="solid"/>
-                    </a:lnBlToTr>
                   </a:tcPr>
                 </a:tc>
-                <a:extLst>
-                  <a:ext uri="{0D108BD9-81ED-4DB2-BD59-A6C34878D82A}">
-                    <a16:rowId xmlns:a16="http://schemas.microsoft.com/office/drawing/2014/main" val="10004"/>
-                  </a:ext>
-                </a:extLst>
+              </a:tr>
+              <a:tr h="1292869">
+                <a:tc>
+                  <a:txBody>
+                    <a:bodyPr/>
+                    <a:p>
+                      <a:pPr algn="r">
+                        <a:defRPr/>
+                      </a:pPr>
+                      <a:r>
+                        <a:rPr lang="de-DE" sz="3600" b="1">
+                          <a:latin typeface="Liberation Sans Narrow"/>
+                        </a:rPr>
+                        <a:t>&lt;pad&gt;</a:t>
+                      </a:r>
+                      <a:endParaRPr lang="de-DE" sz="3600" b="1">
+                        <a:latin typeface="Liberation Sans Narrow"/>
+                      </a:endParaRPr>
+                    </a:p>
+                    <a:p>
+                      <a:pPr algn="r">
+                        <a:defRPr/>
+                      </a:pPr>
+                      <a:r>
+                        <a:rPr lang="de-DE" sz="3600" b="1">
+                          <a:latin typeface="Liberation Sans Narrow"/>
+                        </a:rPr>
+                        <a:t>Prec / Rec</a:t>
+                      </a:r>
+                      <a:endParaRPr lang="de-DE" sz="3600" b="1">
+                        <a:latin typeface="Liberation Sans Narrow"/>
+                      </a:endParaRPr>
+                    </a:p>
+                  </a:txBody>
+                  <a:tcPr marL="90000" marR="91440" marT="45720" marB="45720" anchor="ctr">
+                    <a:lnL w="6348" algn="ctr">
+                      <a:noFill/>
+                    </a:lnL>
+                    <a:lnR w="6348" algn="ctr">
+                      <a:noFill/>
+                    </a:lnR>
+                    <a:lnT w="12699" algn="ctr">
+                      <a:solidFill>
+                        <a:schemeClr val="tx1"/>
+                      </a:solidFill>
+                    </a:lnT>
+                    <a:lnB w="6348" algn="ctr">
+                      <a:noFill/>
+                    </a:lnB>
+                  </a:tcPr>
+                </a:tc>
+                <a:tc>
+                  <a:txBody>
+                    <a:bodyPr/>
+                    <a:p>
+                      <a:pPr algn="ctr">
+                        <a:defRPr/>
+                      </a:pPr>
+                      <a:r>
+                        <a:rPr lang="de-DE" sz="3600">
+                          <a:latin typeface="Liberation Sans Narrow"/>
+                        </a:rPr>
+                        <a:t>99,64% / 99,77%</a:t>
+                      </a:r>
+                      <a:endParaRPr lang="de-DE" sz="3600">
+                        <a:latin typeface="Liberation Sans Narrow"/>
+                      </a:endParaRPr>
+                    </a:p>
+                  </a:txBody>
+                  <a:tcPr marL="90000" marR="91440" marT="45720" marB="45720" anchor="ctr">
+                    <a:lnL w="6348" algn="ctr">
+                      <a:noFill/>
+                    </a:lnL>
+                    <a:lnR w="12699" algn="ctr">
+                      <a:solidFill>
+                        <a:schemeClr val="tx1"/>
+                      </a:solidFill>
+                    </a:lnR>
+                    <a:lnT w="12699" algn="ctr">
+                      <a:solidFill>
+                        <a:schemeClr val="tx1"/>
+                      </a:solidFill>
+                    </a:lnT>
+                    <a:lnB w="6348" algn="ctr">
+                      <a:noFill/>
+                    </a:lnB>
+                  </a:tcPr>
+                </a:tc>
+                <a:tc>
+                  <a:txBody>
+                    <a:bodyPr/>
+                    <a:p>
+                      <a:pPr algn="ctr">
+                        <a:defRPr/>
+                      </a:pPr>
+                      <a:r>
+                        <a:rPr lang="de-DE" sz="3600">
+                          <a:latin typeface="Liberation Sans Narrow"/>
+                        </a:rPr>
+                        <a:t>82,22% / 84,59%</a:t>
+                      </a:r>
+                      <a:endParaRPr lang="de-DE" sz="3600">
+                        <a:latin typeface="Liberation Sans Narrow"/>
+                      </a:endParaRPr>
+                    </a:p>
+                  </a:txBody>
+                  <a:tcPr marL="90000" marR="91440" marT="45720" marB="45720" anchor="ctr">
+                    <a:lnL w="12699" algn="ctr">
+                      <a:solidFill>
+                        <a:schemeClr val="tx1"/>
+                      </a:solidFill>
+                    </a:lnL>
+                    <a:lnR w="12699" algn="ctr">
+                      <a:solidFill>
+                        <a:schemeClr val="tx1"/>
+                      </a:solidFill>
+                    </a:lnR>
+                    <a:lnT w="12699" algn="ctr">
+                      <a:solidFill>
+                        <a:schemeClr val="tx1"/>
+                      </a:solidFill>
+                    </a:lnT>
+                    <a:lnB w="6348" algn="ctr">
+                      <a:noFill/>
+                    </a:lnB>
+                  </a:tcPr>
+                </a:tc>
+                <a:tc>
+                  <a:txBody>
+                    <a:bodyPr/>
+                    <a:p>
+                      <a:pPr algn="ctr">
+                        <a:defRPr/>
+                      </a:pPr>
+                      <a:r>
+                        <a:rPr lang="de-DE" sz="3600">
+                          <a:latin typeface="Liberation Sans Narrow"/>
+                        </a:rPr>
+                        <a:t>100% / 100%</a:t>
+                      </a:r>
+                      <a:endParaRPr lang="de-DE" sz="3600">
+                        <a:latin typeface="Liberation Sans Narrow"/>
+                      </a:endParaRPr>
+                    </a:p>
+                  </a:txBody>
+                  <a:tcPr marL="90000" marR="91440" marT="45720" marB="45720" anchor="ctr">
+                    <a:lnL w="12699" algn="ctr">
+                      <a:solidFill>
+                        <a:schemeClr val="tx1"/>
+                      </a:solidFill>
+                    </a:lnL>
+                    <a:lnR w="6348" algn="ctr">
+                      <a:noFill/>
+                    </a:lnR>
+                    <a:lnT w="12699" algn="ctr">
+                      <a:solidFill>
+                        <a:schemeClr val="tx1"/>
+                      </a:solidFill>
+                    </a:lnT>
+                    <a:lnB w="6348" algn="ctr">
+                      <a:noFill/>
+                    </a:lnB>
+                  </a:tcPr>
+                </a:tc>
               </a:tr>
             </a:tbl>
           </a:graphicData>
@@ -3439,7 +3133,7 @@
       </p:graphicFrame>
       <p:sp>
         <p:nvSpPr>
-          <p:cNvPr id="712748204" name="Textfeld 712748203"/>
+          <p:cNvPr id="1851545620" name="Textfeld 712748203"/>
           <p:cNvSpPr txBox="1"/>
           <p:nvPr/>
         </p:nvSpPr>
@@ -3469,24 +3163,24 @@
               <a:defRPr/>
             </a:pPr>
             <a:r>
-              <a:rPr lang="en-US" sz="5400" b="1" strike="noStrike" cap="small" noProof="0" dirty="0">
+              <a:rPr lang="en-US" sz="5400" b="1" strike="noStrike" cap="small">
                 <a:latin typeface="Liberation Serif"/>
               </a:rPr>
               <a:t>Sender and Receiver in Emergent Interaction</a:t>
             </a:r>
-            <a:endParaRPr lang="en-US" sz="5400" noProof="0" dirty="0"/>
+            <a:endParaRPr lang="en-US" sz="5400"/>
           </a:p>
         </p:txBody>
       </p:sp>
       <p:sp>
         <p:nvSpPr>
-          <p:cNvPr id="1306445905" name="Textfeld 1306445904"/>
+          <p:cNvPr id="1822829534" name="Textfeld 1306445904"/>
           <p:cNvSpPr txBox="1"/>
           <p:nvPr/>
         </p:nvSpPr>
         <p:spPr bwMode="auto">
           <a:xfrm>
-            <a:off x="1671316" y="25664613"/>
+            <a:off x="1671315" y="24870862"/>
             <a:ext cx="13177464" cy="921866"/>
           </a:xfrm>
           <a:prstGeom prst="rect">
@@ -3510,28 +3204,22 @@
               <a:defRPr/>
             </a:pPr>
             <a:r>
-              <a:rPr lang="en-US" sz="5400" b="1" strike="noStrike" cap="small" noProof="0" dirty="0">
+              <a:rPr lang="en-US" sz="5400" b="1" strike="noStrike" cap="small">
                 <a:latin typeface="Liberation Serif"/>
               </a:rPr>
               <a:t>Sender in Supervised Generation (GRE)</a:t>
             </a:r>
-            <a:endParaRPr lang="en-US" sz="5400" noProof="0" dirty="0"/>
+            <a:endParaRPr lang="en-US" sz="5400"/>
           </a:p>
         </p:txBody>
       </p:sp>
       <p:sp>
         <p:nvSpPr>
-          <p:cNvPr id="2" name="Textfeld 1">
-            <a:extLst>
-              <a:ext uri="{FF2B5EF4-FFF2-40B4-BE49-F238E27FC236}">
-                <a16:creationId xmlns:a16="http://schemas.microsoft.com/office/drawing/2014/main" id="{857742EE-FC12-C551-05B9-13415C0555FD}"/>
-              </a:ext>
-            </a:extLst>
-          </p:cNvPr>
+          <p:cNvPr id="1296765236" name="Textfeld 1"/>
           <p:cNvSpPr txBox="1"/>
           <p:nvPr/>
         </p:nvSpPr>
-        <p:spPr>
+        <p:spPr bwMode="auto">
           <a:xfrm>
             <a:off x="11025859" y="15732323"/>
             <a:ext cx="8395934" cy="1752864"/>
@@ -3564,52 +3252,46 @@
           </a:lstStyle>
           <a:p>
             <a:pPr marL="571500" indent="-571500">
-              <a:buFont typeface="Arial" panose="020B0604020202020204" pitchFamily="34" charset="0"/>
+              <a:buFont typeface="Arial"/>
               <a:buChar char="•"/>
+              <a:defRPr/>
             </a:pPr>
             <a:r>
-              <a:rPr lang="en-US" sz="3600" i="0" noProof="0" dirty="0"/>
+              <a:rPr lang="en-US" sz="3600" i="0"/>
               <a:t>Receiver </a:t>
             </a:r>
             <a:r>
-              <a:rPr lang="en-US" sz="3600" b="1" i="0" noProof="0" dirty="0"/>
+              <a:rPr lang="en-US" sz="3600" b="1" i="0"/>
               <a:t>attends to region </a:t>
             </a:r>
             <a:r>
-              <a:rPr lang="en-US" sz="3600" i="0" noProof="0" dirty="0"/>
+              <a:rPr lang="en-US" sz="3600" i="0"/>
               <a:t>in visual scene </a:t>
             </a:r>
             <a:r>
-              <a:rPr lang="en-US" sz="3600" b="1" i="0" noProof="0" dirty="0"/>
+              <a:rPr lang="en-US" sz="3600" b="1" i="0"/>
               <a:t>based on the sender‘s message</a:t>
             </a:r>
+            <a:endParaRPr/>
           </a:p>
         </p:txBody>
       </p:sp>
       <p:pic>
         <p:nvPicPr>
-          <p:cNvPr id="5" name="Grafik 4">
-            <a:extLst>
-              <a:ext uri="{FF2B5EF4-FFF2-40B4-BE49-F238E27FC236}">
-                <a16:creationId xmlns:a16="http://schemas.microsoft.com/office/drawing/2014/main" id="{4B2A79BE-22C2-1010-68C1-65BD5E869113}"/>
-              </a:ext>
-            </a:extLst>
-          </p:cNvPr>
+          <p:cNvPr id="562815345" name="Grafik 4"/>
           <p:cNvPicPr>
             <a:picLocks noChangeAspect="1"/>
           </p:cNvPicPr>
           <p:nvPr/>
         </p:nvPicPr>
-        <p:blipFill rotWithShape="1">
+        <p:blipFill>
           <a:blip r:embed="rId10"/>
-          <a:srcRect l="70084" t="9033" b="2255"/>
-          <a:stretch>
-            <a:fillRect/>
-          </a:stretch>
+          <a:srcRect l="70084" t="9033" r="0" b="2254"/>
+          <a:stretch/>
         </p:blipFill>
-        <p:spPr>
+        <p:spPr bwMode="auto">
           <a:xfrm>
-            <a:off x="20958791" y="19892162"/>
+            <a:off x="20958790" y="19772773"/>
             <a:ext cx="7692301" cy="4964516"/>
           </a:xfrm>
           <a:prstGeom prst="rect">
@@ -3619,13 +3301,7 @@
       </p:pic>
       <p:pic>
         <p:nvPicPr>
-          <p:cNvPr id="6" name="Grafik 5">
-            <a:extLst>
-              <a:ext uri="{FF2B5EF4-FFF2-40B4-BE49-F238E27FC236}">
-                <a16:creationId xmlns:a16="http://schemas.microsoft.com/office/drawing/2014/main" id="{ED4BA39F-3847-E17D-70EA-8AE51C3BE22A}"/>
-              </a:ext>
-            </a:extLst>
-          </p:cNvPr>
+          <p:cNvPr id="555468108" name="Grafik 5"/>
           <p:cNvPicPr>
             <a:picLocks noChangeAspect="1"/>
           </p:cNvPicPr>
@@ -3633,14 +3309,12 @@
         </p:nvPicPr>
         <p:blipFill>
           <a:blip r:embed="rId11"/>
-          <a:srcRect l="35375" t="9466" r="35359" b="2660"/>
-          <a:stretch>
-            <a:fillRect/>
-          </a:stretch>
+          <a:srcRect l="35375" t="9466" r="35359" b="2659"/>
+          <a:stretch/>
         </p:blipFill>
-        <p:spPr>
+        <p:spPr bwMode="auto">
           <a:xfrm>
-            <a:off x="4600113" y="19898878"/>
+            <a:off x="4600112" y="19740127"/>
             <a:ext cx="7692300" cy="5029808"/>
           </a:xfrm>
           <a:prstGeom prst="rect">
@@ -3650,13 +3324,7 @@
       </p:pic>
       <p:pic>
         <p:nvPicPr>
-          <p:cNvPr id="7" name="Grafik 6">
-            <a:extLst>
-              <a:ext uri="{FF2B5EF4-FFF2-40B4-BE49-F238E27FC236}">
-                <a16:creationId xmlns:a16="http://schemas.microsoft.com/office/drawing/2014/main" id="{4F587104-E8F4-4D8F-ECB5-A4D7566C9910}"/>
-              </a:ext>
-            </a:extLst>
-          </p:cNvPr>
+          <p:cNvPr id="851503486" name="Grafik 6"/>
           <p:cNvPicPr>
             <a:picLocks noChangeAspect="1"/>
           </p:cNvPicPr>
@@ -3664,14 +3332,12 @@
         </p:nvPicPr>
         <p:blipFill>
           <a:blip r:embed="rId12"/>
-          <a:srcRect l="70888" t="8364" b="2546"/>
-          <a:stretch>
-            <a:fillRect/>
-          </a:stretch>
+          <a:srcRect l="70888" t="8364" r="0" b="2546"/>
+          <a:stretch/>
         </p:blipFill>
-        <p:spPr>
+        <p:spPr bwMode="auto">
           <a:xfrm>
-            <a:off x="12985435" y="19901847"/>
+            <a:off x="12985434" y="19743096"/>
             <a:ext cx="7551977" cy="5029808"/>
           </a:xfrm>
           <a:prstGeom prst="rect">
@@ -3681,20 +3347,14 @@
       </p:pic>
       <p:sp>
         <p:nvSpPr>
-          <p:cNvPr id="3" name="TextBox 2">
-            <a:extLst>
-              <a:ext uri="{FF2B5EF4-FFF2-40B4-BE49-F238E27FC236}">
-                <a16:creationId xmlns:a16="http://schemas.microsoft.com/office/drawing/2014/main" id="{ECB82B72-54F0-54AD-7EEC-8C92576EF4DE}"/>
-              </a:ext>
-            </a:extLst>
-          </p:cNvPr>
+          <p:cNvPr id="518124053" name="TextBox 2"/>
           <p:cNvSpPr txBox="1"/>
           <p:nvPr/>
         </p:nvSpPr>
-        <p:spPr>
-          <a:xfrm>
-            <a:off x="14288090" y="41206799"/>
-            <a:ext cx="8992138" cy="954107"/>
+        <p:spPr bwMode="auto">
+          <a:xfrm flipH="0" flipV="0">
+            <a:off x="12985434" y="41206798"/>
+            <a:ext cx="10295512" cy="945239"/>
           </a:xfrm>
           <a:prstGeom prst="rect">
             <a:avLst/>
@@ -3707,18 +3367,22 @@
           </a:bodyPr>
           <a:lstStyle/>
           <a:p>
-            <a:r>
-              <a:rPr lang="en-SE" sz="2800" dirty="0">
-                <a:latin typeface="Liberation Sans Narrow" panose="020B0606020202030204" pitchFamily="34" charset="0"/>
+            <a:pPr>
+              <a:defRPr/>
+            </a:pPr>
+            <a:r>
+              <a:rPr sz="2800">
+                <a:latin typeface="Liberation Sans Narrow"/>
               </a:rPr>
               <a:t>Supported by the Swedish Research Council Project Grant (VR 2023-01552) </a:t>
             </a:r>
             <a:r>
-              <a:rPr lang="en-SE" sz="2800" b="1" dirty="0">
-                <a:latin typeface="Liberation Sans Narrow" panose="020B0606020202030204" pitchFamily="34" charset="0"/>
+              <a:rPr sz="2800" b="1">
+                <a:latin typeface="Liberation Sans Narrow"/>
               </a:rPr>
               <a:t>Beyond Pixels and Words</a:t>
             </a:r>
+            <a:endParaRPr/>
           </a:p>
         </p:txBody>
       </p:sp>
@@ -3727,11 +3391,19 @@
   <p:clrMapOvr>
     <a:masterClrMapping/>
   </p:clrMapOvr>
+  <mc:AlternateContent xmlns:mc="http://schemas.openxmlformats.org/markup-compatibility/2006">
+    <mc:Choice xmlns:p159="http://schemas.microsoft.com/office/powerpoint/2015/09/main" xmlns:p14="http://schemas.microsoft.com/office/powerpoint/2010/main" Requires="p159">
+      <p:transition p14:dur="2000" advClick="1"/>
+    </mc:Choice>
+    <mc:Fallback>
+      <p:transition advClick="1"/>
+    </mc:Fallback>
+  </mc:AlternateContent>
 </p:sld>
 </file>
 
 <file path=ppt/theme/theme1.xml><?xml version="1.0" encoding="utf-8"?>
-<a:theme xmlns:a="http://schemas.openxmlformats.org/drawingml/2006/main" name="Standard">
+<a:theme xmlns:a="http://schemas.openxmlformats.org/drawingml/2006/main" xmlns:r="http://schemas.openxmlformats.org/officeDocument/2006/relationships" xmlns:p="http://schemas.openxmlformats.org/presentationml/2006/main" name="Standard">
   <a:themeElements>
     <a:clrScheme name="Standard">
       <a:dk1>
@@ -3931,12 +3603,11 @@
     </a:fmtScheme>
   </a:themeElements>
   <a:objectDefaults/>
-  <a:extraClrSchemeLst/>
 </a:theme>
 </file>
 
 <file path=ppt/theme/theme2.xml><?xml version="1.0" encoding="utf-8"?>
-<a:theme xmlns:a="http://schemas.openxmlformats.org/drawingml/2006/main" name="User Theme: 2">
+<a:theme xmlns:a="http://schemas.openxmlformats.org/drawingml/2006/main" xmlns:r="http://schemas.openxmlformats.org/officeDocument/2006/relationships" xmlns:p="http://schemas.openxmlformats.org/presentationml/2006/main" name="User Theme: 2">
   <a:themeElements>
     <a:clrScheme name="User Theme: 2">
       <a:dk1>
@@ -4136,6 +3807,5 @@
     </a:fmtScheme>
   </a:themeElements>
   <a:objectDefaults/>
-  <a:extraClrSchemeLst/>
 </a:theme>
 </file>